--- a/presentation/Lifting-the-Veil-Temporal-Talk.pptx
+++ b/presentation/Lifting-the-Veil-Temporal-Talk.pptx
@@ -38,6 +38,7 @@
     <p:sldId id="286" r:id="rId38"/>
     <p:sldId id="287" r:id="rId39"/>
     <p:sldId id="288" r:id="rId40"/>
+    <p:sldId id="289" r:id="rId41"/>
   </p:sldIdLst>
   <p:sldSz cx="12191695" cy="6858000" type="screen4x3"/>
   <p:notesSz cx="6858000" cy="9144000"/>
@@ -744,7 +745,7 @@
           <a:lstStyle/>
           <a:p>
             <a:r>
-              <a:t>Let it sit as a 'yes it really does all of this' moment.</a:t>
+              <a:t>Folder-level version of the architecture diagram. Each package has exactly one job: web renders and polls, api translates HTTP to Temporal client calls, worker is the only place workflow and activity code lives.</a:t>
             </a:r>
           </a:p>
         </p:txBody>
@@ -814,7 +815,7 @@
           <a:lstStyle/>
           <a:p>
             <a:r>
-              <a:t>Submit the Happy path preset. This whole timeline is one query, getClaimState, polled every 2s.</a:t>
+              <a:t>Let it sit as a 'yes it really does all of this' moment.</a:t>
             </a:r>
           </a:p>
         </p:txBody>
@@ -884,7 +885,7 @@
           <a:lstStyle/>
           <a:p>
             <a:r>
-              <a:t>The required signal from the original prompt. The workflow is genuinely suspended.</a:t>
+              <a:t>Submit the Happy path preset. This whole timeline is one query, getClaimState, polled every 2s.</a:t>
             </a:r>
           </a:p>
         </p:txBody>
@@ -954,7 +955,7 @@
           <a:lstStyle/>
           <a:p>
             <a:r>
-              <a:t>Point at the Activity execution &amp; retries panel — that's Temporal's own attempt counter.</a:t>
+              <a:t>The required signal from the original prompt. The workflow is genuinely suspended.</a:t>
             </a:r>
           </a:p>
         </p:txBody>
@@ -1024,7 +1025,7 @@
           <a:lstStyle/>
           <a:p>
             <a:r>
-              <a:t>A permanent failure doesn't kill the workflow, it parks it waiting for a human decision.</a:t>
+              <a:t>Point at the Activity execution &amp; retries panel — that's Temporal's own attempt counter.</a:t>
             </a:r>
           </a:p>
         </p:txBody>
@@ -1094,7 +1095,7 @@
           <a:lstStyle/>
           <a:p>
             <a:r>
-              <a:t>THE moment of the talk. Let this one breathe; don't rush the narration.</a:t>
+              <a:t>A permanent failure doesn't kill the workflow, it parks it waiting for a human decision.</a:t>
             </a:r>
           </a:p>
         </p:txBody>
@@ -1164,7 +1165,7 @@
           <a:lstStyle/>
           <a:p>
             <a:r>
-              <a:t>If time is short, this is the cut candidate.</a:t>
+              <a:t>THE moment of the talk. Let this one breathe; don't rush the narration.</a:t>
             </a:r>
           </a:p>
         </p:txBody>
@@ -1234,7 +1235,7 @@
           <a:lstStyle/>
           <a:p>
             <a:r>
-              <a:t>Remind the room: everything the dashboard showed is also just visible in Temporal's own UI.</a:t>
+              <a:t>If time is short, this is the cut candidate.</a:t>
             </a:r>
           </a:p>
         </p:txBody>
@@ -1374,7 +1375,7 @@
           <a:lstStyle/>
           <a:p>
             <a:r>
-              <a:t>Ask the room how many already do 3+ of these with cron jobs and status columns.</a:t>
+              <a:t>Remind the room: everything the dashboard showed is also just visible in Temporal's own UI.</a:t>
             </a:r>
           </a:p>
         </p:txBody>
@@ -1444,7 +1445,7 @@
           <a:lstStyle/>
           <a:p>
             <a:r>
-              <a:t>This slide is the payoff — generalized version of 'the improved prompt.'</a:t>
+              <a:t>Ask the room how many already do 3+ of these with cron jobs and status columns.</a:t>
             </a:r>
           </a:p>
         </p:txBody>
@@ -1514,7 +1515,7 @@
           <a:lstStyle/>
           <a:p>
             <a:r>
-              <a:t>Invite people to paste their own use case into this template tonight.</a:t>
+              <a:t>This slide is the payoff — generalized version of 'the improved prompt.'</a:t>
             </a:r>
           </a:p>
         </p:txBody>
@@ -1584,7 +1585,7 @@
           <a:lstStyle/>
           <a:p>
             <a:r>
-              <a:t>One breath, then move to resources.</a:t>
+              <a:t>Invite people to paste their own use case into this template tonight.</a:t>
             </a:r>
           </a:p>
         </p:txBody>
@@ -1654,7 +1655,7 @@
           <a:lstStyle/>
           <a:p>
             <a:r>
-              <a:t>Fill in your actual repo URL before the talk.</a:t>
+              <a:t>One breath, then move to resources.</a:t>
             </a:r>
           </a:p>
         </p:txBody>
@@ -1680,6 +1681,76 @@
 </file>
 
 <file path=ppt/notesSlides/notesSlide25.xml><?xml version="1.0" encoding="utf-8"?>
+<p:notes xmlns:a="http://schemas.openxmlformats.org/drawingml/2006/main" xmlns:p="http://schemas.openxmlformats.org/presentationml/2006/main" xmlns:r="http://schemas.openxmlformats.org/officeDocument/2006/relationships">
+  <p:cSld>
+    <p:spTree>
+      <p:nvGrpSpPr>
+        <p:cNvPr id="1" name=""/>
+        <p:cNvGrpSpPr/>
+        <p:nvPr/>
+      </p:nvGrpSpPr>
+      <p:grpSpPr>
+        <a:xfrm>
+          <a:off x="0" y="0"/>
+          <a:ext cx="0" cy="0"/>
+          <a:chOff x="0" y="0"/>
+          <a:chExt cx="0" cy="0"/>
+        </a:xfrm>
+      </p:grpSpPr>
+      <p:sp>
+        <p:nvSpPr>
+          <p:cNvPr id="2" name="Slide Image Placeholder 1"/>
+          <p:cNvSpPr>
+            <a:spLocks noGrp="1"/>
+          </p:cNvSpPr>
+          <p:nvPr>
+            <p:ph type="sldImg" idx="2"/>
+          </p:nvPr>
+        </p:nvSpPr>
+        <p:spPr/>
+      </p:sp>
+      <p:sp>
+        <p:nvSpPr>
+          <p:cNvPr id="3" name="Notes Placeholder 2"/>
+          <p:cNvSpPr>
+            <a:spLocks noGrp="1"/>
+          </p:cNvSpPr>
+          <p:nvPr>
+            <p:ph type="body" idx="3" sz="quarter"/>
+          </p:nvPr>
+        </p:nvSpPr>
+        <p:spPr/>
+        <p:txBody>
+          <a:bodyPr/>
+          <a:lstStyle/>
+          <a:p>
+            <a:r>
+              <a:t>Fill in your actual repo URL before the talk.</a:t>
+            </a:r>
+          </a:p>
+        </p:txBody>
+      </p:sp>
+      <p:sp>
+        <p:nvSpPr>
+          <p:cNvPr id="4" name="Slide Number Placeholder 3"/>
+          <p:cNvSpPr>
+            <a:spLocks noGrp="1"/>
+          </p:cNvSpPr>
+          <p:nvPr>
+            <p:ph type="sldNum" idx="5" sz="quarter"/>
+          </p:nvPr>
+        </p:nvSpPr>
+        <p:spPr/>
+      </p:sp>
+    </p:spTree>
+  </p:cSld>
+  <p:clrMapOvr>
+    <a:masterClrMapping/>
+  </p:clrMapOvr>
+</p:notes>
+</file>
+
+<file path=ppt/notesSlides/notesSlide26.xml><?xml version="1.0" encoding="utf-8"?>
 <p:notes xmlns:a="http://schemas.openxmlformats.org/drawingml/2006/main" xmlns:p="http://schemas.openxmlformats.org/presentationml/2006/main" xmlns:r="http://schemas.openxmlformats.org/officeDocument/2006/relationships">
   <p:cSld>
     <p:spTree>
@@ -7833,7 +7904,7 @@
                 </a:solidFill>
                 <a:latin typeface="Segoe UI"/>
               </a:rPr>
-              <a:t>THE TEMPORAL BINGO CARD</a:t>
+              <a:t>ARCHITECTURE</a:t>
             </a:r>
           </a:p>
         </p:txBody>
@@ -7867,7 +7938,7 @@
                 </a:solidFill>
                 <a:latin typeface="Segoe UI"/>
               </a:rPr>
-              <a:t>What's actually demonstrated</a:t>
+              <a:t>Inside the three packages</a:t>
             </a:r>
           </a:p>
         </p:txBody>
@@ -7914,8 +7985,8 @@
         </p:nvSpPr>
         <p:spPr>
           <a:xfrm>
-            <a:off x="640080" y="1828800"/>
-            <a:ext cx="3444240" cy="1188720"/>
+            <a:off x="640080" y="1691640"/>
+            <a:ext cx="3444240" cy="3931920"/>
           </a:xfrm>
           <a:prstGeom prst="roundRect">
             <a:avLst>
@@ -7927,7 +7998,7 @@
           </a:solidFill>
           <a:ln w="12700">
             <a:solidFill>
-              <a:srgbClr val="232A41"/>
+              <a:srgbClr val="4C9FFE"/>
             </a:solidFill>
           </a:ln>
           <a:effectLst/>
@@ -7962,8 +8033,8 @@
         </p:nvSpPr>
         <p:spPr>
           <a:xfrm>
-            <a:off x="841248" y="1975104"/>
-            <a:ext cx="3041904" cy="914400"/>
+            <a:off x="804672" y="1801368"/>
+            <a:ext cx="3115056" cy="457200"/>
           </a:xfrm>
           <a:prstGeom prst="rect">
             <a:avLst/>
@@ -7979,41 +8050,78 @@
             <a:r>
               <a:rPr sz="1200" b="1" i="0">
                 <a:solidFill>
-                  <a:srgbClr val="34D399"/>
-                </a:solidFill>
-                <a:latin typeface="Segoe UI"/>
-              </a:rPr>
-              <a:t>RETRY POLICIES</a:t>
-            </a:r>
-          </a:p>
+                  <a:srgbClr val="4C9FFE"/>
+                </a:solidFill>
+                <a:latin typeface="Segoe UI"/>
+              </a:rPr>
+              <a:t>WEB — DASHBOARD</a:t>
+            </a:r>
+          </a:p>
+        </p:txBody>
+      </p:sp>
+      <p:sp>
+        <p:nvSpPr>
+          <p:cNvPr id="8" name="TextBox 7"/>
+          <p:cNvSpPr txBox="1"/>
+          <p:nvPr/>
+        </p:nvSpPr>
+        <p:spPr>
+          <a:xfrm>
+            <a:off x="841248" y="2258568"/>
+            <a:ext cx="3078480" cy="3200400"/>
+          </a:xfrm>
+          <a:prstGeom prst="rect">
+            <a:avLst/>
+          </a:prstGeom>
+          <a:noFill/>
+        </p:spPr>
+        <p:txBody>
+          <a:bodyPr wrap="square" anchor="t" lIns="0" rIns="0" tIns="0" bIns="0">
+            <a:spAutoFit/>
+          </a:bodyPr>
+          <a:lstStyle/>
           <a:p>
             <a:pPr>
-              <a:spcBef>
-                <a:spcPts val="600"/>
-              </a:spcBef>
+              <a:lnSpc>
+                <a:spcPct val="125000"/>
+              </a:lnSpc>
             </a:pPr>
             <a:r>
-              <a:rPr sz="1300" b="0" i="0">
-                <a:solidFill>
-                  <a:srgbClr val="9AA2C0"/>
-                </a:solidFill>
-                <a:latin typeface="Segoe UI"/>
-              </a:rPr>
-              <a:t>per-stage, configurable backoff</a:t>
-            </a:r>
-          </a:p>
-        </p:txBody>
-      </p:sp>
-      <p:sp>
-        <p:nvSpPr>
-          <p:cNvPr id="8" name="Rounded Rectangle 7"/>
+              <a:rPr sz="1100" b="0" i="0">
+                <a:solidFill>
+                  <a:srgbClr val="E6E9F5"/>
+                </a:solidFill>
+                <a:latin typeface="Consolas"/>
+              </a:rPr>
+              <a:t>src/
+├── pages/
+│   ├── DashboardPage.tsx
+│   └── ClaimDetailPage.tsx
+├── components/
+│   ├── StageTimeline.tsx
+│   ├── ActionPanel.tsx
+│   ├── SimulationPanel.tsx
+│   └── …10 more
+├── hooks/
+│   ├── usePolling.ts
+│   └── usePreferences.tsx
+└── lib/
+    ├── api.ts
+    └── storage.ts</a:t>
+            </a:r>
+          </a:p>
+        </p:txBody>
+      </p:sp>
+      <p:sp>
+        <p:nvSpPr>
+          <p:cNvPr id="9" name="Rounded Rectangle 8"/>
           <p:cNvSpPr/>
           <p:nvPr/>
         </p:nvSpPr>
         <p:spPr>
           <a:xfrm>
-            <a:off x="4358640" y="1828800"/>
-            <a:ext cx="3444240" cy="1188720"/>
+            <a:off x="4358640" y="1691640"/>
+            <a:ext cx="3444240" cy="3931920"/>
           </a:xfrm>
           <a:prstGeom prst="roundRect">
             <a:avLst>
@@ -8025,7 +8133,7 @@
           </a:solidFill>
           <a:ln w="12700">
             <a:solidFill>
-              <a:srgbClr val="232A41"/>
+              <a:srgbClr val="7C5CFF"/>
             </a:solidFill>
           </a:ln>
           <a:effectLst/>
@@ -8054,14 +8162,14 @@
       </p:sp>
       <p:sp>
         <p:nvSpPr>
-          <p:cNvPr id="9" name="TextBox 8"/>
+          <p:cNvPr id="10" name="TextBox 9"/>
           <p:cNvSpPr txBox="1"/>
           <p:nvPr/>
         </p:nvSpPr>
         <p:spPr>
           <a:xfrm>
-            <a:off x="4559808" y="1975104"/>
-            <a:ext cx="3041904" cy="914400"/>
+            <a:off x="4523232" y="1801368"/>
+            <a:ext cx="3115056" cy="457200"/>
           </a:xfrm>
           <a:prstGeom prst="rect">
             <a:avLst/>
@@ -8077,41 +8185,74 @@
             <a:r>
               <a:rPr sz="1200" b="1" i="0">
                 <a:solidFill>
-                  <a:srgbClr val="F87171"/>
-                </a:solidFill>
-                <a:latin typeface="Segoe UI"/>
-              </a:rPr>
-              <a:t>NON-RETRYABLE FAILURES</a:t>
-            </a:r>
-          </a:p>
+                  <a:srgbClr val="7C5CFF"/>
+                </a:solidFill>
+                <a:latin typeface="Segoe UI"/>
+              </a:rPr>
+              <a:t>API — REST FACADE</a:t>
+            </a:r>
+          </a:p>
+        </p:txBody>
+      </p:sp>
+      <p:sp>
+        <p:nvSpPr>
+          <p:cNvPr id="11" name="TextBox 10"/>
+          <p:cNvSpPr txBox="1"/>
+          <p:nvPr/>
+        </p:nvSpPr>
+        <p:spPr>
+          <a:xfrm>
+            <a:off x="4559808" y="2258568"/>
+            <a:ext cx="3078480" cy="3200400"/>
+          </a:xfrm>
+          <a:prstGeom prst="rect">
+            <a:avLst/>
+          </a:prstGeom>
+          <a:noFill/>
+        </p:spPr>
+        <p:txBody>
+          <a:bodyPr wrap="square" anchor="t" lIns="0" rIns="0" tIns="0" bIns="0">
+            <a:spAutoFit/>
+          </a:bodyPr>
+          <a:lstStyle/>
           <a:p>
             <a:pPr>
-              <a:spcBef>
-                <a:spcPts val="600"/>
-              </a:spcBef>
+              <a:lnSpc>
+                <a:spcPct val="125000"/>
+              </a:lnSpc>
             </a:pPr>
             <a:r>
-              <a:rPr sz="1300" b="0" i="0">
-                <a:solidFill>
-                  <a:srgbClr val="9AA2C0"/>
-                </a:solidFill>
-                <a:latin typeface="Segoe UI"/>
-              </a:rPr>
-              <a:t>permanent errors stop cleanly</a:t>
-            </a:r>
-          </a:p>
-        </p:txBody>
-      </p:sp>
-      <p:sp>
-        <p:nvSpPr>
-          <p:cNvPr id="10" name="Rounded Rectangle 9"/>
+              <a:rPr sz="1100" b="0" i="0">
+                <a:solidFill>
+                  <a:srgbClr val="E6E9F5"/>
+                </a:solidFill>
+                <a:latin typeface="Consolas"/>
+              </a:rPr>
+              <a:t>src/
+├── claims/
+│   ├── claims.controller.ts
+│   ├── claims.service.ts
+│   ├── temporal.mappers.ts
+│   └── dto.ts
+├── temporal/
+│   └── temporal.service.ts
+├── system/
+│   └── system.controller.ts
+└── main.ts</a:t>
+            </a:r>
+          </a:p>
+        </p:txBody>
+      </p:sp>
+      <p:sp>
+        <p:nvSpPr>
+          <p:cNvPr id="12" name="Rounded Rectangle 11"/>
           <p:cNvSpPr/>
           <p:nvPr/>
         </p:nvSpPr>
         <p:spPr>
           <a:xfrm>
-            <a:off x="8077200" y="1828800"/>
-            <a:ext cx="3444240" cy="1188720"/>
+            <a:off x="8077200" y="1691640"/>
+            <a:ext cx="3444240" cy="3931920"/>
           </a:xfrm>
           <a:prstGeom prst="roundRect">
             <a:avLst>
@@ -8123,7 +8264,7 @@
           </a:solidFill>
           <a:ln w="12700">
             <a:solidFill>
-              <a:srgbClr val="232A41"/>
+              <a:srgbClr val="34D399"/>
             </a:solidFill>
           </a:ln>
           <a:effectLst/>
@@ -8152,14 +8293,14 @@
       </p:sp>
       <p:sp>
         <p:nvSpPr>
-          <p:cNvPr id="11" name="TextBox 10"/>
+          <p:cNvPr id="13" name="TextBox 12"/>
           <p:cNvSpPr txBox="1"/>
           <p:nvPr/>
         </p:nvSpPr>
         <p:spPr>
           <a:xfrm>
-            <a:off x="8278368" y="1975104"/>
-            <a:ext cx="3041904" cy="914400"/>
+            <a:off x="8241792" y="1801368"/>
+            <a:ext cx="3115056" cy="457200"/>
           </a:xfrm>
           <a:prstGeom prst="rect">
             <a:avLst/>
@@ -8175,89 +8316,25 @@
             <a:r>
               <a:rPr sz="1200" b="1" i="0">
                 <a:solidFill>
-                  <a:srgbClr val="38BDF8"/>
-                </a:solidFill>
-                <a:latin typeface="Segoe UI"/>
-              </a:rPr>
-              <a:t>DURABLE TIMERS</a:t>
-            </a:r>
-          </a:p>
-          <a:p>
-            <a:pPr>
-              <a:spcBef>
-                <a:spcPts val="600"/>
-              </a:spcBef>
-            </a:pPr>
-            <a:r>
-              <a:rPr sz="1300" b="0" i="0">
-                <a:solidFill>
-                  <a:srgbClr val="9AA2C0"/>
-                </a:solidFill>
-                <a:latin typeface="Segoe UI"/>
-              </a:rPr>
-              <a:t>settlement hold + reminder loop</a:t>
-            </a:r>
-          </a:p>
-        </p:txBody>
-      </p:sp>
-      <p:sp>
-        <p:nvSpPr>
-          <p:cNvPr id="12" name="Rounded Rectangle 11"/>
-          <p:cNvSpPr/>
-          <p:nvPr/>
-        </p:nvSpPr>
-        <p:spPr>
-          <a:xfrm>
-            <a:off x="640080" y="3291840"/>
-            <a:ext cx="3444240" cy="1188720"/>
-          </a:xfrm>
-          <a:prstGeom prst="roundRect">
-            <a:avLst>
-              <a:gd name="adj" fmla="val 6000"/>
-            </a:avLst>
-          </a:prstGeom>
-          <a:solidFill>
-            <a:srgbClr val="141828"/>
-          </a:solidFill>
-          <a:ln w="12700">
-            <a:solidFill>
-              <a:srgbClr val="232A41"/>
-            </a:solidFill>
-          </a:ln>
-          <a:effectLst/>
-        </p:spPr>
-        <p:style>
-          <a:lnRef idx="1">
-            <a:schemeClr val="accent1"/>
-          </a:lnRef>
-          <a:fillRef idx="3">
-            <a:schemeClr val="accent1"/>
-          </a:fillRef>
-          <a:effectRef idx="2">
-            <a:schemeClr val="accent1"/>
-          </a:effectRef>
-          <a:fontRef idx="minor">
-            <a:schemeClr val="lt1"/>
-          </a:fontRef>
-        </p:style>
-        <p:txBody>
-          <a:bodyPr rtlCol="0" anchor="ctr"/>
-          <a:lstStyle/>
-          <a:p>
-            <a:pPr algn="ctr"/>
-          </a:p>
-        </p:txBody>
-      </p:sp>
-      <p:sp>
-        <p:nvSpPr>
-          <p:cNvPr id="13" name="TextBox 12"/>
+                  <a:srgbClr val="34D399"/>
+                </a:solidFill>
+                <a:latin typeface="Segoe UI"/>
+              </a:rPr>
+              <a:t>WORKER — WORKFLOWS &amp; ACTIVITIES</a:t>
+            </a:r>
+          </a:p>
+        </p:txBody>
+      </p:sp>
+      <p:sp>
+        <p:nvSpPr>
+          <p:cNvPr id="14" name="TextBox 13"/>
           <p:cNvSpPr txBox="1"/>
           <p:nvPr/>
         </p:nvSpPr>
         <p:spPr>
           <a:xfrm>
-            <a:off x="841248" y="3438144"/>
-            <a:ext cx="3041904" cy="914400"/>
+            <a:off x="8278368" y="2258568"/>
+            <a:ext cx="3078480" cy="3200400"/>
           </a:xfrm>
           <a:prstGeom prst="rect">
             <a:avLst/>
@@ -8270,79 +8347,32 @@
           </a:bodyPr>
           <a:lstStyle/>
           <a:p>
-            <a:r>
-              <a:rPr sz="1200" b="1" i="0">
-                <a:solidFill>
-                  <a:srgbClr val="7C5CFF"/>
-                </a:solidFill>
-                <a:latin typeface="Segoe UI"/>
-              </a:rPr>
-              <a:t>CHILD WORKFLOW</a:t>
-            </a:r>
-          </a:p>
-          <a:p>
             <a:pPr>
-              <a:spcBef>
-                <a:spcPts val="600"/>
-              </a:spcBef>
+              <a:lnSpc>
+                <a:spcPct val="125000"/>
+              </a:lnSpc>
             </a:pPr>
             <a:r>
-              <a:rPr sz="1300" b="0" i="0">
-                <a:solidFill>
-                  <a:srgbClr val="9AA2C0"/>
-                </a:solidFill>
-                <a:latin typeface="Segoe UI"/>
-              </a:rPr>
-              <a:t>fraud check, own history</a:t>
-            </a:r>
-          </a:p>
-        </p:txBody>
-      </p:sp>
-      <p:sp>
-        <p:nvSpPr>
-          <p:cNvPr id="14" name="Rounded Rectangle 13"/>
-          <p:cNvSpPr/>
-          <p:nvPr/>
-        </p:nvSpPr>
-        <p:spPr>
-          <a:xfrm>
-            <a:off x="4358640" y="3291840"/>
-            <a:ext cx="3444240" cy="1188720"/>
-          </a:xfrm>
-          <a:prstGeom prst="roundRect">
-            <a:avLst>
-              <a:gd name="adj" fmla="val 6000"/>
-            </a:avLst>
-          </a:prstGeom>
-          <a:solidFill>
-            <a:srgbClr val="141828"/>
-          </a:solidFill>
-          <a:ln w="12700">
-            <a:solidFill>
-              <a:srgbClr val="232A41"/>
-            </a:solidFill>
-          </a:ln>
-          <a:effectLst/>
-        </p:spPr>
-        <p:style>
-          <a:lnRef idx="1">
-            <a:schemeClr val="accent1"/>
-          </a:lnRef>
-          <a:fillRef idx="3">
-            <a:schemeClr val="accent1"/>
-          </a:fillRef>
-          <a:effectRef idx="2">
-            <a:schemeClr val="accent1"/>
-          </a:effectRef>
-          <a:fontRef idx="minor">
-            <a:schemeClr val="lt1"/>
-          </a:fontRef>
-        </p:style>
-        <p:txBody>
-          <a:bodyPr rtlCol="0" anchor="ctr"/>
-          <a:lstStyle/>
-          <a:p>
-            <a:pPr algn="ctr"/>
+              <a:rPr sz="1100" b="0" i="0">
+                <a:solidFill>
+                  <a:srgbClr val="E6E9F5"/>
+                </a:solidFill>
+                <a:latin typeface="Consolas"/>
+              </a:rPr>
+              <a:t>src/
+├── workflows/
+│   ├── claim.workflow.ts
+│   └── fraud-check.workflow.ts
+├── activities/
+│   ├── claim.activities.ts
+│   ├── fraud.activities.ts
+│   ├── payment.activities.ts
+│   └── simulation.ts
+├── temporal/
+│   └── temporal-worker.service.ts
+└── admin/
+    └── admin.controller.ts</a:t>
+            </a:r>
           </a:p>
         </p:txBody>
       </p:sp>
@@ -8354,8 +8384,8 @@
         </p:nvSpPr>
         <p:spPr>
           <a:xfrm>
-            <a:off x="4559808" y="3438144"/>
-            <a:ext cx="3041904" cy="914400"/>
+            <a:off x="640080" y="5824728"/>
+            <a:ext cx="10515600" cy="1097280"/>
           </a:xfrm>
           <a:prstGeom prst="rect">
             <a:avLst/>
@@ -8369,715 +8399,13 @@
           <a:lstStyle/>
           <a:p>
             <a:r>
-              <a:rPr sz="1200" b="1" i="0">
-                <a:solidFill>
-                  <a:srgbClr val="38BDF8"/>
-                </a:solidFill>
-                <a:latin typeface="Segoe UI"/>
-              </a:rPr>
-              <a:t>SIGNALS</a:t>
-            </a:r>
-          </a:p>
-          <a:p>
-            <a:pPr>
-              <a:spcBef>
-                <a:spcPts val="600"/>
-              </a:spcBef>
-            </a:pPr>
-            <a:r>
-              <a:rPr sz="1300" b="0" i="0">
+              <a:rPr sz="1400" b="0" i="0">
                 <a:solidFill>
                   <a:srgbClr val="9AA2C0"/>
                 </a:solidFill>
                 <a:latin typeface="Segoe UI"/>
               </a:rPr>
-              <a:t>approve / deny / info / recover</a:t>
-            </a:r>
-          </a:p>
-        </p:txBody>
-      </p:sp>
-      <p:sp>
-        <p:nvSpPr>
-          <p:cNvPr id="16" name="Rounded Rectangle 15"/>
-          <p:cNvSpPr/>
-          <p:nvPr/>
-        </p:nvSpPr>
-        <p:spPr>
-          <a:xfrm>
-            <a:off x="8077200" y="3291840"/>
-            <a:ext cx="3444240" cy="1188720"/>
-          </a:xfrm>
-          <a:prstGeom prst="roundRect">
-            <a:avLst>
-              <a:gd name="adj" fmla="val 6000"/>
-            </a:avLst>
-          </a:prstGeom>
-          <a:solidFill>
-            <a:srgbClr val="141828"/>
-          </a:solidFill>
-          <a:ln w="12700">
-            <a:solidFill>
-              <a:srgbClr val="232A41"/>
-            </a:solidFill>
-          </a:ln>
-          <a:effectLst/>
-        </p:spPr>
-        <p:style>
-          <a:lnRef idx="1">
-            <a:schemeClr val="accent1"/>
-          </a:lnRef>
-          <a:fillRef idx="3">
-            <a:schemeClr val="accent1"/>
-          </a:fillRef>
-          <a:effectRef idx="2">
-            <a:schemeClr val="accent1"/>
-          </a:effectRef>
-          <a:fontRef idx="minor">
-            <a:schemeClr val="lt1"/>
-          </a:fontRef>
-        </p:style>
-        <p:txBody>
-          <a:bodyPr rtlCol="0" anchor="ctr"/>
-          <a:lstStyle/>
-          <a:p>
-            <a:pPr algn="ctr"/>
-          </a:p>
-        </p:txBody>
-      </p:sp>
-      <p:sp>
-        <p:nvSpPr>
-          <p:cNvPr id="17" name="TextBox 16"/>
-          <p:cNvSpPr txBox="1"/>
-          <p:nvPr/>
-        </p:nvSpPr>
-        <p:spPr>
-          <a:xfrm>
-            <a:off x="8278368" y="3438144"/>
-            <a:ext cx="3041904" cy="914400"/>
-          </a:xfrm>
-          <a:prstGeom prst="rect">
-            <a:avLst/>
-          </a:prstGeom>
-          <a:noFill/>
-        </p:spPr>
-        <p:txBody>
-          <a:bodyPr wrap="square" anchor="t" lIns="0" rIns="0" tIns="0" bIns="0">
-            <a:spAutoFit/>
-          </a:bodyPr>
-          <a:lstStyle/>
-          <a:p>
-            <a:r>
-              <a:rPr sz="1200" b="1" i="0">
-                <a:solidFill>
-                  <a:srgbClr val="4C9FFE"/>
-                </a:solidFill>
-                <a:latin typeface="Segoe UI"/>
-              </a:rPr>
-              <a:t>QUERIES</a:t>
-            </a:r>
-          </a:p>
-          <a:p>
-            <a:pPr>
-              <a:spcBef>
-                <a:spcPts val="600"/>
-              </a:spcBef>
-            </a:pPr>
-            <a:r>
-              <a:rPr sz="1300" b="0" i="0">
-                <a:solidFill>
-                  <a:srgbClr val="9AA2C0"/>
-                </a:solidFill>
-                <a:latin typeface="Segoe UI"/>
-              </a:rPr>
-              <a:t>live state + progress %</a:t>
-            </a:r>
-          </a:p>
-        </p:txBody>
-      </p:sp>
-      <p:sp>
-        <p:nvSpPr>
-          <p:cNvPr id="18" name="Rounded Rectangle 17"/>
-          <p:cNvSpPr/>
-          <p:nvPr/>
-        </p:nvSpPr>
-        <p:spPr>
-          <a:xfrm>
-            <a:off x="640080" y="4754880"/>
-            <a:ext cx="3444240" cy="1188720"/>
-          </a:xfrm>
-          <a:prstGeom prst="roundRect">
-            <a:avLst>
-              <a:gd name="adj" fmla="val 6000"/>
-            </a:avLst>
-          </a:prstGeom>
-          <a:solidFill>
-            <a:srgbClr val="141828"/>
-          </a:solidFill>
-          <a:ln w="12700">
-            <a:solidFill>
-              <a:srgbClr val="232A41"/>
-            </a:solidFill>
-          </a:ln>
-          <a:effectLst/>
-        </p:spPr>
-        <p:style>
-          <a:lnRef idx="1">
-            <a:schemeClr val="accent1"/>
-          </a:lnRef>
-          <a:fillRef idx="3">
-            <a:schemeClr val="accent1"/>
-          </a:fillRef>
-          <a:effectRef idx="2">
-            <a:schemeClr val="accent1"/>
-          </a:effectRef>
-          <a:fontRef idx="minor">
-            <a:schemeClr val="lt1"/>
-          </a:fontRef>
-        </p:style>
-        <p:txBody>
-          <a:bodyPr rtlCol="0" anchor="ctr"/>
-          <a:lstStyle/>
-          <a:p>
-            <a:pPr algn="ctr"/>
-          </a:p>
-        </p:txBody>
-      </p:sp>
-      <p:sp>
-        <p:nvSpPr>
-          <p:cNvPr id="19" name="TextBox 18"/>
-          <p:cNvSpPr txBox="1"/>
-          <p:nvPr/>
-        </p:nvSpPr>
-        <p:spPr>
-          <a:xfrm>
-            <a:off x="841248" y="4901184"/>
-            <a:ext cx="3041904" cy="914400"/>
-          </a:xfrm>
-          <a:prstGeom prst="rect">
-            <a:avLst/>
-          </a:prstGeom>
-          <a:noFill/>
-        </p:spPr>
-        <p:txBody>
-          <a:bodyPr wrap="square" anchor="t" lIns="0" rIns="0" tIns="0" bIns="0">
-            <a:spAutoFit/>
-          </a:bodyPr>
-          <a:lstStyle/>
-          <a:p>
-            <a:r>
-              <a:rPr sz="1200" b="1" i="0">
-                <a:solidFill>
-                  <a:srgbClr val="4C9FFE"/>
-                </a:solidFill>
-                <a:latin typeface="Segoe UI"/>
-              </a:rPr>
-              <a:t>UPDATE + VALIDATOR</a:t>
-            </a:r>
-          </a:p>
-          <a:p>
-            <a:pPr>
-              <a:spcBef>
-                <a:spcPts val="600"/>
-              </a:spcBef>
-            </a:pPr>
-            <a:r>
-              <a:rPr sz="1300" b="0" i="0">
-                <a:solidFill>
-                  <a:srgbClr val="9AA2C0"/>
-                </a:solidFill>
-                <a:latin typeface="Segoe UI"/>
-              </a:rPr>
-              <a:t>adjuster notes, rejected inline</a:t>
-            </a:r>
-          </a:p>
-        </p:txBody>
-      </p:sp>
-      <p:sp>
-        <p:nvSpPr>
-          <p:cNvPr id="20" name="Rounded Rectangle 19"/>
-          <p:cNvSpPr/>
-          <p:nvPr/>
-        </p:nvSpPr>
-        <p:spPr>
-          <a:xfrm>
-            <a:off x="4358640" y="4754880"/>
-            <a:ext cx="3444240" cy="1188720"/>
-          </a:xfrm>
-          <a:prstGeom prst="roundRect">
-            <a:avLst>
-              <a:gd name="adj" fmla="val 6000"/>
-            </a:avLst>
-          </a:prstGeom>
-          <a:solidFill>
-            <a:srgbClr val="141828"/>
-          </a:solidFill>
-          <a:ln w="12700">
-            <a:solidFill>
-              <a:srgbClr val="232A41"/>
-            </a:solidFill>
-          </a:ln>
-          <a:effectLst/>
-        </p:spPr>
-        <p:style>
-          <a:lnRef idx="1">
-            <a:schemeClr val="accent1"/>
-          </a:lnRef>
-          <a:fillRef idx="3">
-            <a:schemeClr val="accent1"/>
-          </a:fillRef>
-          <a:effectRef idx="2">
-            <a:schemeClr val="accent1"/>
-          </a:effectRef>
-          <a:fontRef idx="minor">
-            <a:schemeClr val="lt1"/>
-          </a:fontRef>
-        </p:style>
-        <p:txBody>
-          <a:bodyPr rtlCol="0" anchor="ctr"/>
-          <a:lstStyle/>
-          <a:p>
-            <a:pPr algn="ctr"/>
-          </a:p>
-        </p:txBody>
-      </p:sp>
-      <p:sp>
-        <p:nvSpPr>
-          <p:cNvPr id="21" name="TextBox 20"/>
-          <p:cNvSpPr txBox="1"/>
-          <p:nvPr/>
-        </p:nvSpPr>
-        <p:spPr>
-          <a:xfrm>
-            <a:off x="4559808" y="4901184"/>
-            <a:ext cx="3041904" cy="914400"/>
-          </a:xfrm>
-          <a:prstGeom prst="rect">
-            <a:avLst/>
-          </a:prstGeom>
-          <a:noFill/>
-        </p:spPr>
-        <p:txBody>
-          <a:bodyPr wrap="square" anchor="t" lIns="0" rIns="0" tIns="0" bIns="0">
-            <a:spAutoFit/>
-          </a:bodyPr>
-          <a:lstStyle/>
-          <a:p>
-            <a:r>
-              <a:rPr sz="1200" b="1" i="0">
-                <a:solidFill>
-                  <a:srgbClr val="FBBF24"/>
-                </a:solidFill>
-                <a:latin typeface="Segoe UI"/>
-              </a:rPr>
-              <a:t>CANCELLATION</a:t>
-            </a:r>
-          </a:p>
-          <a:p>
-            <a:pPr>
-              <a:spcBef>
-                <a:spcPts val="600"/>
-              </a:spcBef>
-            </a:pPr>
-            <a:r>
-              <a:rPr sz="1300" b="0" i="0">
-                <a:solidFill>
-                  <a:srgbClr val="9AA2C0"/>
-                </a:solidFill>
-                <a:latin typeface="Segoe UI"/>
-              </a:rPr>
-              <a:t>saga-style compensation</a:t>
-            </a:r>
-          </a:p>
-        </p:txBody>
-      </p:sp>
-      <p:sp>
-        <p:nvSpPr>
-          <p:cNvPr id="22" name="Rounded Rectangle 21"/>
-          <p:cNvSpPr/>
-          <p:nvPr/>
-        </p:nvSpPr>
-        <p:spPr>
-          <a:xfrm>
-            <a:off x="8077200" y="4754880"/>
-            <a:ext cx="3444240" cy="1188720"/>
-          </a:xfrm>
-          <a:prstGeom prst="roundRect">
-            <a:avLst>
-              <a:gd name="adj" fmla="val 6000"/>
-            </a:avLst>
-          </a:prstGeom>
-          <a:solidFill>
-            <a:srgbClr val="141828"/>
-          </a:solidFill>
-          <a:ln w="12700">
-            <a:solidFill>
-              <a:srgbClr val="232A41"/>
-            </a:solidFill>
-          </a:ln>
-          <a:effectLst/>
-        </p:spPr>
-        <p:style>
-          <a:lnRef idx="1">
-            <a:schemeClr val="accent1"/>
-          </a:lnRef>
-          <a:fillRef idx="3">
-            <a:schemeClr val="accent1"/>
-          </a:fillRef>
-          <a:effectRef idx="2">
-            <a:schemeClr val="accent1"/>
-          </a:effectRef>
-          <a:fontRef idx="minor">
-            <a:schemeClr val="lt1"/>
-          </a:fontRef>
-        </p:style>
-        <p:txBody>
-          <a:bodyPr rtlCol="0" anchor="ctr"/>
-          <a:lstStyle/>
-          <a:p>
-            <a:pPr algn="ctr"/>
-          </a:p>
-        </p:txBody>
-      </p:sp>
-      <p:sp>
-        <p:nvSpPr>
-          <p:cNvPr id="23" name="TextBox 22"/>
-          <p:cNvSpPr txBox="1"/>
-          <p:nvPr/>
-        </p:nvSpPr>
-        <p:spPr>
-          <a:xfrm>
-            <a:off x="8278368" y="4901184"/>
-            <a:ext cx="3041904" cy="914400"/>
-          </a:xfrm>
-          <a:prstGeom prst="rect">
-            <a:avLst/>
-          </a:prstGeom>
-          <a:noFill/>
-        </p:spPr>
-        <p:txBody>
-          <a:bodyPr wrap="square" anchor="t" lIns="0" rIns="0" tIns="0" bIns="0">
-            <a:spAutoFit/>
-          </a:bodyPr>
-          <a:lstStyle/>
-          <a:p>
-            <a:r>
-              <a:rPr sz="1200" b="1" i="0">
-                <a:solidFill>
-                  <a:srgbClr val="4C9FFE"/>
-                </a:solidFill>
-                <a:latin typeface="Segoe UI"/>
-              </a:rPr>
-              <a:t>SEARCH ATTRIBUTES</a:t>
-            </a:r>
-          </a:p>
-          <a:p>
-            <a:pPr>
-              <a:spcBef>
-                <a:spcPts val="600"/>
-              </a:spcBef>
-            </a:pPr>
-            <a:r>
-              <a:rPr sz="1300" b="0" i="0">
-                <a:solidFill>
-                  <a:srgbClr val="9AA2C0"/>
-                </a:solidFill>
-                <a:latin typeface="Segoe UI"/>
-              </a:rPr>
-              <a:t>find claims by status/type/score</a:t>
-            </a:r>
-          </a:p>
-        </p:txBody>
-      </p:sp>
-      <p:sp>
-        <p:nvSpPr>
-          <p:cNvPr id="24" name="Rounded Rectangle 23"/>
-          <p:cNvSpPr/>
-          <p:nvPr/>
-        </p:nvSpPr>
-        <p:spPr>
-          <a:xfrm>
-            <a:off x="640080" y="6217920"/>
-            <a:ext cx="3444240" cy="1188720"/>
-          </a:xfrm>
-          <a:prstGeom prst="roundRect">
-            <a:avLst>
-              <a:gd name="adj" fmla="val 6000"/>
-            </a:avLst>
-          </a:prstGeom>
-          <a:solidFill>
-            <a:srgbClr val="141828"/>
-          </a:solidFill>
-          <a:ln w="12700">
-            <a:solidFill>
-              <a:srgbClr val="232A41"/>
-            </a:solidFill>
-          </a:ln>
-          <a:effectLst/>
-        </p:spPr>
-        <p:style>
-          <a:lnRef idx="1">
-            <a:schemeClr val="accent1"/>
-          </a:lnRef>
-          <a:fillRef idx="3">
-            <a:schemeClr val="accent1"/>
-          </a:fillRef>
-          <a:effectRef idx="2">
-            <a:schemeClr val="accent1"/>
-          </a:effectRef>
-          <a:fontRef idx="minor">
-            <a:schemeClr val="lt1"/>
-          </a:fontRef>
-        </p:style>
-        <p:txBody>
-          <a:bodyPr rtlCol="0" anchor="ctr"/>
-          <a:lstStyle/>
-          <a:p>
-            <a:pPr algn="ctr"/>
-          </a:p>
-        </p:txBody>
-      </p:sp>
-      <p:sp>
-        <p:nvSpPr>
-          <p:cNvPr id="25" name="TextBox 24"/>
-          <p:cNvSpPr txBox="1"/>
-          <p:nvPr/>
-        </p:nvSpPr>
-        <p:spPr>
-          <a:xfrm>
-            <a:off x="841248" y="6364224"/>
-            <a:ext cx="3041904" cy="914400"/>
-          </a:xfrm>
-          <a:prstGeom prst="rect">
-            <a:avLst/>
-          </a:prstGeom>
-          <a:noFill/>
-        </p:spPr>
-        <p:txBody>
-          <a:bodyPr wrap="square" anchor="t" lIns="0" rIns="0" tIns="0" bIns="0">
-            <a:spAutoFit/>
-          </a:bodyPr>
-          <a:lstStyle/>
-          <a:p>
-            <a:r>
-              <a:rPr sz="1200" b="1" i="0">
-                <a:solidFill>
-                  <a:srgbClr val="34D399"/>
-                </a:solidFill>
-                <a:latin typeface="Segoe UI"/>
-              </a:rPr>
-              <a:t>WORKER-RESTART DURABILITY</a:t>
-            </a:r>
-          </a:p>
-          <a:p>
-            <a:pPr>
-              <a:spcBef>
-                <a:spcPts val="600"/>
-              </a:spcBef>
-            </a:pPr>
-            <a:r>
-              <a:rPr sz="1300" b="0" i="0">
-                <a:solidFill>
-                  <a:srgbClr val="9AA2C0"/>
-                </a:solidFill>
-                <a:latin typeface="Segoe UI"/>
-              </a:rPr>
-              <a:t>kill it mid-claim, resume</a:t>
-            </a:r>
-          </a:p>
-        </p:txBody>
-      </p:sp>
-      <p:sp>
-        <p:nvSpPr>
-          <p:cNvPr id="26" name="Rounded Rectangle 25"/>
-          <p:cNvSpPr/>
-          <p:nvPr/>
-        </p:nvSpPr>
-        <p:spPr>
-          <a:xfrm>
-            <a:off x="4358640" y="6217920"/>
-            <a:ext cx="3444240" cy="1188720"/>
-          </a:xfrm>
-          <a:prstGeom prst="roundRect">
-            <a:avLst>
-              <a:gd name="adj" fmla="val 6000"/>
-            </a:avLst>
-          </a:prstGeom>
-          <a:solidFill>
-            <a:srgbClr val="141828"/>
-          </a:solidFill>
-          <a:ln w="12700">
-            <a:solidFill>
-              <a:srgbClr val="232A41"/>
-            </a:solidFill>
-          </a:ln>
-          <a:effectLst/>
-        </p:spPr>
-        <p:style>
-          <a:lnRef idx="1">
-            <a:schemeClr val="accent1"/>
-          </a:lnRef>
-          <a:fillRef idx="3">
-            <a:schemeClr val="accent1"/>
-          </a:fillRef>
-          <a:effectRef idx="2">
-            <a:schemeClr val="accent1"/>
-          </a:effectRef>
-          <a:fontRef idx="minor">
-            <a:schemeClr val="lt1"/>
-          </a:fontRef>
-        </p:style>
-        <p:txBody>
-          <a:bodyPr rtlCol="0" anchor="ctr"/>
-          <a:lstStyle/>
-          <a:p>
-            <a:pPr algn="ctr"/>
-          </a:p>
-        </p:txBody>
-      </p:sp>
-      <p:sp>
-        <p:nvSpPr>
-          <p:cNvPr id="27" name="TextBox 26"/>
-          <p:cNvSpPr txBox="1"/>
-          <p:nvPr/>
-        </p:nvSpPr>
-        <p:spPr>
-          <a:xfrm>
-            <a:off x="4559808" y="6364224"/>
-            <a:ext cx="3041904" cy="914400"/>
-          </a:xfrm>
-          <a:prstGeom prst="rect">
-            <a:avLst/>
-          </a:prstGeom>
-          <a:noFill/>
-        </p:spPr>
-        <p:txBody>
-          <a:bodyPr wrap="square" anchor="t" lIns="0" rIns="0" tIns="0" bIns="0">
-            <a:spAutoFit/>
-          </a:bodyPr>
-          <a:lstStyle/>
-          <a:p>
-            <a:r>
-              <a:rPr sz="1200" b="1" i="0">
-                <a:solidFill>
-                  <a:srgbClr val="4C9FFE"/>
-                </a:solidFill>
-                <a:latin typeface="Segoe UI"/>
-              </a:rPr>
-              <a:t>HEARTBEATS</a:t>
-            </a:r>
-          </a:p>
-          <a:p>
-            <a:pPr>
-              <a:spcBef>
-                <a:spcPts val="600"/>
-              </a:spcBef>
-            </a:pPr>
-            <a:r>
-              <a:rPr sz="1300" b="0" i="0">
-                <a:solidFill>
-                  <a:srgbClr val="9AA2C0"/>
-                </a:solidFill>
-                <a:latin typeface="Segoe UI"/>
-              </a:rPr>
-              <a:t>cancellable long-running activity</a:t>
-            </a:r>
-          </a:p>
-        </p:txBody>
-      </p:sp>
-      <p:sp>
-        <p:nvSpPr>
-          <p:cNvPr id="28" name="Rounded Rectangle 27"/>
-          <p:cNvSpPr/>
-          <p:nvPr/>
-        </p:nvSpPr>
-        <p:spPr>
-          <a:xfrm>
-            <a:off x="8077200" y="6217920"/>
-            <a:ext cx="3444240" cy="1188720"/>
-          </a:xfrm>
-          <a:prstGeom prst="roundRect">
-            <a:avLst>
-              <a:gd name="adj" fmla="val 6000"/>
-            </a:avLst>
-          </a:prstGeom>
-          <a:solidFill>
-            <a:srgbClr val="141828"/>
-          </a:solidFill>
-          <a:ln w="12700">
-            <a:solidFill>
-              <a:srgbClr val="232A41"/>
-            </a:solidFill>
-          </a:ln>
-          <a:effectLst/>
-        </p:spPr>
-        <p:style>
-          <a:lnRef idx="1">
-            <a:schemeClr val="accent1"/>
-          </a:lnRef>
-          <a:fillRef idx="3">
-            <a:schemeClr val="accent1"/>
-          </a:fillRef>
-          <a:effectRef idx="2">
-            <a:schemeClr val="accent1"/>
-          </a:effectRef>
-          <a:fontRef idx="minor">
-            <a:schemeClr val="lt1"/>
-          </a:fontRef>
-        </p:style>
-        <p:txBody>
-          <a:bodyPr rtlCol="0" anchor="ctr"/>
-          <a:lstStyle/>
-          <a:p>
-            <a:pPr algn="ctr"/>
-          </a:p>
-        </p:txBody>
-      </p:sp>
-      <p:sp>
-        <p:nvSpPr>
-          <p:cNvPr id="29" name="TextBox 28"/>
-          <p:cNvSpPr txBox="1"/>
-          <p:nvPr/>
-        </p:nvSpPr>
-        <p:spPr>
-          <a:xfrm>
-            <a:off x="8278368" y="6364224"/>
-            <a:ext cx="3041904" cy="914400"/>
-          </a:xfrm>
-          <a:prstGeom prst="rect">
-            <a:avLst/>
-          </a:prstGeom>
-          <a:noFill/>
-        </p:spPr>
-        <p:txBody>
-          <a:bodyPr wrap="square" anchor="t" lIns="0" rIns="0" tIns="0" bIns="0">
-            <a:spAutoFit/>
-          </a:bodyPr>
-          <a:lstStyle/>
-          <a:p>
-            <a:r>
-              <a:rPr sz="1200" b="1" i="0">
-                <a:solidFill>
-                  <a:srgbClr val="F87171"/>
-                </a:solidFill>
-                <a:latin typeface="Segoe UI"/>
-              </a:rPr>
-              <a:t>NO DATABASE</a:t>
-            </a:r>
-          </a:p>
-          <a:p>
-            <a:pPr>
-              <a:spcBef>
-                <a:spcPts val="600"/>
-              </a:spcBef>
-            </a:pPr>
-            <a:r>
-              <a:rPr sz="1300" b="0" i="0">
-                <a:solidFill>
-                  <a:srgbClr val="9AA2C0"/>
-                </a:solidFill>
-                <a:latin typeface="Segoe UI"/>
-              </a:rPr>
-              <a:t>Temporal is the only state store</a:t>
+              <a:t>packages/web, packages/api, packages/worker — plus packages/shared for the request/response types, stage definitions and progress math every package imports, none of them redefine.</a:t>
             </a:r>
           </a:p>
         </p:txBody>
@@ -9152,8 +8480,8 @@
         </p:nvSpPr>
         <p:spPr>
           <a:xfrm>
-            <a:off x="822960" y="2194560"/>
-            <a:ext cx="3657600" cy="1463040"/>
+            <a:off x="640080" y="502920"/>
+            <a:ext cx="10515600" cy="365760"/>
           </a:xfrm>
           <a:prstGeom prst="rect">
             <a:avLst/>
@@ -9166,14 +8494,19 @@
           </a:bodyPr>
           <a:lstStyle/>
           <a:p>
-            <a:r>
-              <a:rPr sz="7200" b="1" i="0">
-                <a:solidFill>
-                  <a:srgbClr val="7C5CFF"/>
-                </a:solidFill>
-                <a:latin typeface="Consolas"/>
-              </a:rPr>
-              <a:t>03</a:t>
+            <a:pPr>
+              <a:defRPr>
+                <a:latin typeface="Segoe UI"/>
+              </a:defRPr>
+            </a:pPr>
+            <a:r>
+              <a:rPr sz="1300" b="1" i="0">
+                <a:solidFill>
+                  <a:srgbClr val="4C9FFE"/>
+                </a:solidFill>
+                <a:latin typeface="Segoe UI"/>
+              </a:rPr>
+              <a:t>THE TEMPORAL BINGO CARD</a:t>
             </a:r>
           </a:p>
         </p:txBody>
@@ -9186,8 +8519,8 @@
         </p:nvSpPr>
         <p:spPr>
           <a:xfrm>
-            <a:off x="822960" y="3383280"/>
-            <a:ext cx="8686800" cy="1005840"/>
+            <a:off x="640080" y="822960"/>
+            <a:ext cx="10881360" cy="1188720"/>
           </a:xfrm>
           <a:prstGeom prst="rect">
             <a:avLst/>
@@ -9201,13 +8534,13 @@
           <a:lstStyle/>
           <a:p>
             <a:r>
-              <a:rPr sz="4000" b="1" i="0">
+              <a:rPr sz="3000" b="1" i="0">
                 <a:solidFill>
                   <a:srgbClr val="E6E9F5"/>
                 </a:solidFill>
                 <a:latin typeface="Segoe UI"/>
               </a:rPr>
-              <a:t>Let's See It Run</a:t>
+              <a:t>What's actually demonstrated</a:t>
             </a:r>
           </a:p>
         </p:txBody>
@@ -9220,8 +8553,8 @@
         </p:nvSpPr>
         <p:spPr>
           <a:xfrm>
-            <a:off x="822960" y="4206240"/>
-            <a:ext cx="6858000" cy="914400"/>
+            <a:off x="640080" y="6446520"/>
+            <a:ext cx="5486400" cy="320040"/>
           </a:xfrm>
           <a:prstGeom prst="rect">
             <a:avLst/>
@@ -9235,13 +8568,1189 @@
           <a:lstStyle/>
           <a:p>
             <a:r>
-              <a:rPr sz="1700" b="0" i="0">
+              <a:rPr sz="1000" b="0" i="0">
                 <a:solidFill>
                   <a:srgbClr val="9AA2C0"/>
                 </a:solidFill>
                 <a:latin typeface="Segoe UI"/>
               </a:rPr>
-              <a:t>Six short cuts. Real failures. Real recovery. No cuts hiding a crash.</a:t>
+              <a:t>◈ Temporal · Lifting the Veil</a:t>
+            </a:r>
+          </a:p>
+        </p:txBody>
+      </p:sp>
+      <p:sp>
+        <p:nvSpPr>
+          <p:cNvPr id="6" name="Rounded Rectangle 5"/>
+          <p:cNvSpPr/>
+          <p:nvPr/>
+        </p:nvSpPr>
+        <p:spPr>
+          <a:xfrm>
+            <a:off x="640080" y="1828800"/>
+            <a:ext cx="3444240" cy="1188720"/>
+          </a:xfrm>
+          <a:prstGeom prst="roundRect">
+            <a:avLst>
+              <a:gd name="adj" fmla="val 6000"/>
+            </a:avLst>
+          </a:prstGeom>
+          <a:solidFill>
+            <a:srgbClr val="141828"/>
+          </a:solidFill>
+          <a:ln w="12700">
+            <a:solidFill>
+              <a:srgbClr val="232A41"/>
+            </a:solidFill>
+          </a:ln>
+          <a:effectLst/>
+        </p:spPr>
+        <p:style>
+          <a:lnRef idx="1">
+            <a:schemeClr val="accent1"/>
+          </a:lnRef>
+          <a:fillRef idx="3">
+            <a:schemeClr val="accent1"/>
+          </a:fillRef>
+          <a:effectRef idx="2">
+            <a:schemeClr val="accent1"/>
+          </a:effectRef>
+          <a:fontRef idx="minor">
+            <a:schemeClr val="lt1"/>
+          </a:fontRef>
+        </p:style>
+        <p:txBody>
+          <a:bodyPr rtlCol="0" anchor="ctr"/>
+          <a:lstStyle/>
+          <a:p>
+            <a:pPr algn="ctr"/>
+          </a:p>
+        </p:txBody>
+      </p:sp>
+      <p:sp>
+        <p:nvSpPr>
+          <p:cNvPr id="7" name="TextBox 6"/>
+          <p:cNvSpPr txBox="1"/>
+          <p:nvPr/>
+        </p:nvSpPr>
+        <p:spPr>
+          <a:xfrm>
+            <a:off x="841248" y="1975104"/>
+            <a:ext cx="3041904" cy="914400"/>
+          </a:xfrm>
+          <a:prstGeom prst="rect">
+            <a:avLst/>
+          </a:prstGeom>
+          <a:noFill/>
+        </p:spPr>
+        <p:txBody>
+          <a:bodyPr wrap="square" anchor="t" lIns="0" rIns="0" tIns="0" bIns="0">
+            <a:spAutoFit/>
+          </a:bodyPr>
+          <a:lstStyle/>
+          <a:p>
+            <a:r>
+              <a:rPr sz="1200" b="1" i="0">
+                <a:solidFill>
+                  <a:srgbClr val="34D399"/>
+                </a:solidFill>
+                <a:latin typeface="Segoe UI"/>
+              </a:rPr>
+              <a:t>RETRY POLICIES</a:t>
+            </a:r>
+          </a:p>
+          <a:p>
+            <a:pPr>
+              <a:spcBef>
+                <a:spcPts val="600"/>
+              </a:spcBef>
+            </a:pPr>
+            <a:r>
+              <a:rPr sz="1300" b="0" i="0">
+                <a:solidFill>
+                  <a:srgbClr val="9AA2C0"/>
+                </a:solidFill>
+                <a:latin typeface="Segoe UI"/>
+              </a:rPr>
+              <a:t>per-stage, configurable backoff</a:t>
+            </a:r>
+          </a:p>
+        </p:txBody>
+      </p:sp>
+      <p:sp>
+        <p:nvSpPr>
+          <p:cNvPr id="8" name="Rounded Rectangle 7"/>
+          <p:cNvSpPr/>
+          <p:nvPr/>
+        </p:nvSpPr>
+        <p:spPr>
+          <a:xfrm>
+            <a:off x="4358640" y="1828800"/>
+            <a:ext cx="3444240" cy="1188720"/>
+          </a:xfrm>
+          <a:prstGeom prst="roundRect">
+            <a:avLst>
+              <a:gd name="adj" fmla="val 6000"/>
+            </a:avLst>
+          </a:prstGeom>
+          <a:solidFill>
+            <a:srgbClr val="141828"/>
+          </a:solidFill>
+          <a:ln w="12700">
+            <a:solidFill>
+              <a:srgbClr val="232A41"/>
+            </a:solidFill>
+          </a:ln>
+          <a:effectLst/>
+        </p:spPr>
+        <p:style>
+          <a:lnRef idx="1">
+            <a:schemeClr val="accent1"/>
+          </a:lnRef>
+          <a:fillRef idx="3">
+            <a:schemeClr val="accent1"/>
+          </a:fillRef>
+          <a:effectRef idx="2">
+            <a:schemeClr val="accent1"/>
+          </a:effectRef>
+          <a:fontRef idx="minor">
+            <a:schemeClr val="lt1"/>
+          </a:fontRef>
+        </p:style>
+        <p:txBody>
+          <a:bodyPr rtlCol="0" anchor="ctr"/>
+          <a:lstStyle/>
+          <a:p>
+            <a:pPr algn="ctr"/>
+          </a:p>
+        </p:txBody>
+      </p:sp>
+      <p:sp>
+        <p:nvSpPr>
+          <p:cNvPr id="9" name="TextBox 8"/>
+          <p:cNvSpPr txBox="1"/>
+          <p:nvPr/>
+        </p:nvSpPr>
+        <p:spPr>
+          <a:xfrm>
+            <a:off x="4559808" y="1975104"/>
+            <a:ext cx="3041904" cy="914400"/>
+          </a:xfrm>
+          <a:prstGeom prst="rect">
+            <a:avLst/>
+          </a:prstGeom>
+          <a:noFill/>
+        </p:spPr>
+        <p:txBody>
+          <a:bodyPr wrap="square" anchor="t" lIns="0" rIns="0" tIns="0" bIns="0">
+            <a:spAutoFit/>
+          </a:bodyPr>
+          <a:lstStyle/>
+          <a:p>
+            <a:r>
+              <a:rPr sz="1200" b="1" i="0">
+                <a:solidFill>
+                  <a:srgbClr val="F87171"/>
+                </a:solidFill>
+                <a:latin typeface="Segoe UI"/>
+              </a:rPr>
+              <a:t>NON-RETRYABLE FAILURES</a:t>
+            </a:r>
+          </a:p>
+          <a:p>
+            <a:pPr>
+              <a:spcBef>
+                <a:spcPts val="600"/>
+              </a:spcBef>
+            </a:pPr>
+            <a:r>
+              <a:rPr sz="1300" b="0" i="0">
+                <a:solidFill>
+                  <a:srgbClr val="9AA2C0"/>
+                </a:solidFill>
+                <a:latin typeface="Segoe UI"/>
+              </a:rPr>
+              <a:t>permanent errors stop cleanly</a:t>
+            </a:r>
+          </a:p>
+        </p:txBody>
+      </p:sp>
+      <p:sp>
+        <p:nvSpPr>
+          <p:cNvPr id="10" name="Rounded Rectangle 9"/>
+          <p:cNvSpPr/>
+          <p:nvPr/>
+        </p:nvSpPr>
+        <p:spPr>
+          <a:xfrm>
+            <a:off x="8077200" y="1828800"/>
+            <a:ext cx="3444240" cy="1188720"/>
+          </a:xfrm>
+          <a:prstGeom prst="roundRect">
+            <a:avLst>
+              <a:gd name="adj" fmla="val 6000"/>
+            </a:avLst>
+          </a:prstGeom>
+          <a:solidFill>
+            <a:srgbClr val="141828"/>
+          </a:solidFill>
+          <a:ln w="12700">
+            <a:solidFill>
+              <a:srgbClr val="232A41"/>
+            </a:solidFill>
+          </a:ln>
+          <a:effectLst/>
+        </p:spPr>
+        <p:style>
+          <a:lnRef idx="1">
+            <a:schemeClr val="accent1"/>
+          </a:lnRef>
+          <a:fillRef idx="3">
+            <a:schemeClr val="accent1"/>
+          </a:fillRef>
+          <a:effectRef idx="2">
+            <a:schemeClr val="accent1"/>
+          </a:effectRef>
+          <a:fontRef idx="minor">
+            <a:schemeClr val="lt1"/>
+          </a:fontRef>
+        </p:style>
+        <p:txBody>
+          <a:bodyPr rtlCol="0" anchor="ctr"/>
+          <a:lstStyle/>
+          <a:p>
+            <a:pPr algn="ctr"/>
+          </a:p>
+        </p:txBody>
+      </p:sp>
+      <p:sp>
+        <p:nvSpPr>
+          <p:cNvPr id="11" name="TextBox 10"/>
+          <p:cNvSpPr txBox="1"/>
+          <p:nvPr/>
+        </p:nvSpPr>
+        <p:spPr>
+          <a:xfrm>
+            <a:off x="8278368" y="1975104"/>
+            <a:ext cx="3041904" cy="914400"/>
+          </a:xfrm>
+          <a:prstGeom prst="rect">
+            <a:avLst/>
+          </a:prstGeom>
+          <a:noFill/>
+        </p:spPr>
+        <p:txBody>
+          <a:bodyPr wrap="square" anchor="t" lIns="0" rIns="0" tIns="0" bIns="0">
+            <a:spAutoFit/>
+          </a:bodyPr>
+          <a:lstStyle/>
+          <a:p>
+            <a:r>
+              <a:rPr sz="1200" b="1" i="0">
+                <a:solidFill>
+                  <a:srgbClr val="38BDF8"/>
+                </a:solidFill>
+                <a:latin typeface="Segoe UI"/>
+              </a:rPr>
+              <a:t>DURABLE TIMERS</a:t>
+            </a:r>
+          </a:p>
+          <a:p>
+            <a:pPr>
+              <a:spcBef>
+                <a:spcPts val="600"/>
+              </a:spcBef>
+            </a:pPr>
+            <a:r>
+              <a:rPr sz="1300" b="0" i="0">
+                <a:solidFill>
+                  <a:srgbClr val="9AA2C0"/>
+                </a:solidFill>
+                <a:latin typeface="Segoe UI"/>
+              </a:rPr>
+              <a:t>settlement hold + reminder loop</a:t>
+            </a:r>
+          </a:p>
+        </p:txBody>
+      </p:sp>
+      <p:sp>
+        <p:nvSpPr>
+          <p:cNvPr id="12" name="Rounded Rectangle 11"/>
+          <p:cNvSpPr/>
+          <p:nvPr/>
+        </p:nvSpPr>
+        <p:spPr>
+          <a:xfrm>
+            <a:off x="640080" y="3291840"/>
+            <a:ext cx="3444240" cy="1188720"/>
+          </a:xfrm>
+          <a:prstGeom prst="roundRect">
+            <a:avLst>
+              <a:gd name="adj" fmla="val 6000"/>
+            </a:avLst>
+          </a:prstGeom>
+          <a:solidFill>
+            <a:srgbClr val="141828"/>
+          </a:solidFill>
+          <a:ln w="12700">
+            <a:solidFill>
+              <a:srgbClr val="232A41"/>
+            </a:solidFill>
+          </a:ln>
+          <a:effectLst/>
+        </p:spPr>
+        <p:style>
+          <a:lnRef idx="1">
+            <a:schemeClr val="accent1"/>
+          </a:lnRef>
+          <a:fillRef idx="3">
+            <a:schemeClr val="accent1"/>
+          </a:fillRef>
+          <a:effectRef idx="2">
+            <a:schemeClr val="accent1"/>
+          </a:effectRef>
+          <a:fontRef idx="minor">
+            <a:schemeClr val="lt1"/>
+          </a:fontRef>
+        </p:style>
+        <p:txBody>
+          <a:bodyPr rtlCol="0" anchor="ctr"/>
+          <a:lstStyle/>
+          <a:p>
+            <a:pPr algn="ctr"/>
+          </a:p>
+        </p:txBody>
+      </p:sp>
+      <p:sp>
+        <p:nvSpPr>
+          <p:cNvPr id="13" name="TextBox 12"/>
+          <p:cNvSpPr txBox="1"/>
+          <p:nvPr/>
+        </p:nvSpPr>
+        <p:spPr>
+          <a:xfrm>
+            <a:off x="841248" y="3438144"/>
+            <a:ext cx="3041904" cy="914400"/>
+          </a:xfrm>
+          <a:prstGeom prst="rect">
+            <a:avLst/>
+          </a:prstGeom>
+          <a:noFill/>
+        </p:spPr>
+        <p:txBody>
+          <a:bodyPr wrap="square" anchor="t" lIns="0" rIns="0" tIns="0" bIns="0">
+            <a:spAutoFit/>
+          </a:bodyPr>
+          <a:lstStyle/>
+          <a:p>
+            <a:r>
+              <a:rPr sz="1200" b="1" i="0">
+                <a:solidFill>
+                  <a:srgbClr val="7C5CFF"/>
+                </a:solidFill>
+                <a:latin typeface="Segoe UI"/>
+              </a:rPr>
+              <a:t>CHILD WORKFLOW</a:t>
+            </a:r>
+          </a:p>
+          <a:p>
+            <a:pPr>
+              <a:spcBef>
+                <a:spcPts val="600"/>
+              </a:spcBef>
+            </a:pPr>
+            <a:r>
+              <a:rPr sz="1300" b="0" i="0">
+                <a:solidFill>
+                  <a:srgbClr val="9AA2C0"/>
+                </a:solidFill>
+                <a:latin typeface="Segoe UI"/>
+              </a:rPr>
+              <a:t>fraud check, own history</a:t>
+            </a:r>
+          </a:p>
+        </p:txBody>
+      </p:sp>
+      <p:sp>
+        <p:nvSpPr>
+          <p:cNvPr id="14" name="Rounded Rectangle 13"/>
+          <p:cNvSpPr/>
+          <p:nvPr/>
+        </p:nvSpPr>
+        <p:spPr>
+          <a:xfrm>
+            <a:off x="4358640" y="3291840"/>
+            <a:ext cx="3444240" cy="1188720"/>
+          </a:xfrm>
+          <a:prstGeom prst="roundRect">
+            <a:avLst>
+              <a:gd name="adj" fmla="val 6000"/>
+            </a:avLst>
+          </a:prstGeom>
+          <a:solidFill>
+            <a:srgbClr val="141828"/>
+          </a:solidFill>
+          <a:ln w="12700">
+            <a:solidFill>
+              <a:srgbClr val="232A41"/>
+            </a:solidFill>
+          </a:ln>
+          <a:effectLst/>
+        </p:spPr>
+        <p:style>
+          <a:lnRef idx="1">
+            <a:schemeClr val="accent1"/>
+          </a:lnRef>
+          <a:fillRef idx="3">
+            <a:schemeClr val="accent1"/>
+          </a:fillRef>
+          <a:effectRef idx="2">
+            <a:schemeClr val="accent1"/>
+          </a:effectRef>
+          <a:fontRef idx="minor">
+            <a:schemeClr val="lt1"/>
+          </a:fontRef>
+        </p:style>
+        <p:txBody>
+          <a:bodyPr rtlCol="0" anchor="ctr"/>
+          <a:lstStyle/>
+          <a:p>
+            <a:pPr algn="ctr"/>
+          </a:p>
+        </p:txBody>
+      </p:sp>
+      <p:sp>
+        <p:nvSpPr>
+          <p:cNvPr id="15" name="TextBox 14"/>
+          <p:cNvSpPr txBox="1"/>
+          <p:nvPr/>
+        </p:nvSpPr>
+        <p:spPr>
+          <a:xfrm>
+            <a:off x="4559808" y="3438144"/>
+            <a:ext cx="3041904" cy="914400"/>
+          </a:xfrm>
+          <a:prstGeom prst="rect">
+            <a:avLst/>
+          </a:prstGeom>
+          <a:noFill/>
+        </p:spPr>
+        <p:txBody>
+          <a:bodyPr wrap="square" anchor="t" lIns="0" rIns="0" tIns="0" bIns="0">
+            <a:spAutoFit/>
+          </a:bodyPr>
+          <a:lstStyle/>
+          <a:p>
+            <a:r>
+              <a:rPr sz="1200" b="1" i="0">
+                <a:solidFill>
+                  <a:srgbClr val="38BDF8"/>
+                </a:solidFill>
+                <a:latin typeface="Segoe UI"/>
+              </a:rPr>
+              <a:t>SIGNALS</a:t>
+            </a:r>
+          </a:p>
+          <a:p>
+            <a:pPr>
+              <a:spcBef>
+                <a:spcPts val="600"/>
+              </a:spcBef>
+            </a:pPr>
+            <a:r>
+              <a:rPr sz="1300" b="0" i="0">
+                <a:solidFill>
+                  <a:srgbClr val="9AA2C0"/>
+                </a:solidFill>
+                <a:latin typeface="Segoe UI"/>
+              </a:rPr>
+              <a:t>approve / deny / info / recover</a:t>
+            </a:r>
+          </a:p>
+        </p:txBody>
+      </p:sp>
+      <p:sp>
+        <p:nvSpPr>
+          <p:cNvPr id="16" name="Rounded Rectangle 15"/>
+          <p:cNvSpPr/>
+          <p:nvPr/>
+        </p:nvSpPr>
+        <p:spPr>
+          <a:xfrm>
+            <a:off x="8077200" y="3291840"/>
+            <a:ext cx="3444240" cy="1188720"/>
+          </a:xfrm>
+          <a:prstGeom prst="roundRect">
+            <a:avLst>
+              <a:gd name="adj" fmla="val 6000"/>
+            </a:avLst>
+          </a:prstGeom>
+          <a:solidFill>
+            <a:srgbClr val="141828"/>
+          </a:solidFill>
+          <a:ln w="12700">
+            <a:solidFill>
+              <a:srgbClr val="232A41"/>
+            </a:solidFill>
+          </a:ln>
+          <a:effectLst/>
+        </p:spPr>
+        <p:style>
+          <a:lnRef idx="1">
+            <a:schemeClr val="accent1"/>
+          </a:lnRef>
+          <a:fillRef idx="3">
+            <a:schemeClr val="accent1"/>
+          </a:fillRef>
+          <a:effectRef idx="2">
+            <a:schemeClr val="accent1"/>
+          </a:effectRef>
+          <a:fontRef idx="minor">
+            <a:schemeClr val="lt1"/>
+          </a:fontRef>
+        </p:style>
+        <p:txBody>
+          <a:bodyPr rtlCol="0" anchor="ctr"/>
+          <a:lstStyle/>
+          <a:p>
+            <a:pPr algn="ctr"/>
+          </a:p>
+        </p:txBody>
+      </p:sp>
+      <p:sp>
+        <p:nvSpPr>
+          <p:cNvPr id="17" name="TextBox 16"/>
+          <p:cNvSpPr txBox="1"/>
+          <p:nvPr/>
+        </p:nvSpPr>
+        <p:spPr>
+          <a:xfrm>
+            <a:off x="8278368" y="3438144"/>
+            <a:ext cx="3041904" cy="914400"/>
+          </a:xfrm>
+          <a:prstGeom prst="rect">
+            <a:avLst/>
+          </a:prstGeom>
+          <a:noFill/>
+        </p:spPr>
+        <p:txBody>
+          <a:bodyPr wrap="square" anchor="t" lIns="0" rIns="0" tIns="0" bIns="0">
+            <a:spAutoFit/>
+          </a:bodyPr>
+          <a:lstStyle/>
+          <a:p>
+            <a:r>
+              <a:rPr sz="1200" b="1" i="0">
+                <a:solidFill>
+                  <a:srgbClr val="4C9FFE"/>
+                </a:solidFill>
+                <a:latin typeface="Segoe UI"/>
+              </a:rPr>
+              <a:t>QUERIES</a:t>
+            </a:r>
+          </a:p>
+          <a:p>
+            <a:pPr>
+              <a:spcBef>
+                <a:spcPts val="600"/>
+              </a:spcBef>
+            </a:pPr>
+            <a:r>
+              <a:rPr sz="1300" b="0" i="0">
+                <a:solidFill>
+                  <a:srgbClr val="9AA2C0"/>
+                </a:solidFill>
+                <a:latin typeface="Segoe UI"/>
+              </a:rPr>
+              <a:t>live state + progress %</a:t>
+            </a:r>
+          </a:p>
+        </p:txBody>
+      </p:sp>
+      <p:sp>
+        <p:nvSpPr>
+          <p:cNvPr id="18" name="Rounded Rectangle 17"/>
+          <p:cNvSpPr/>
+          <p:nvPr/>
+        </p:nvSpPr>
+        <p:spPr>
+          <a:xfrm>
+            <a:off x="640080" y="4754880"/>
+            <a:ext cx="3444240" cy="1188720"/>
+          </a:xfrm>
+          <a:prstGeom prst="roundRect">
+            <a:avLst>
+              <a:gd name="adj" fmla="val 6000"/>
+            </a:avLst>
+          </a:prstGeom>
+          <a:solidFill>
+            <a:srgbClr val="141828"/>
+          </a:solidFill>
+          <a:ln w="12700">
+            <a:solidFill>
+              <a:srgbClr val="232A41"/>
+            </a:solidFill>
+          </a:ln>
+          <a:effectLst/>
+        </p:spPr>
+        <p:style>
+          <a:lnRef idx="1">
+            <a:schemeClr val="accent1"/>
+          </a:lnRef>
+          <a:fillRef idx="3">
+            <a:schemeClr val="accent1"/>
+          </a:fillRef>
+          <a:effectRef idx="2">
+            <a:schemeClr val="accent1"/>
+          </a:effectRef>
+          <a:fontRef idx="minor">
+            <a:schemeClr val="lt1"/>
+          </a:fontRef>
+        </p:style>
+        <p:txBody>
+          <a:bodyPr rtlCol="0" anchor="ctr"/>
+          <a:lstStyle/>
+          <a:p>
+            <a:pPr algn="ctr"/>
+          </a:p>
+        </p:txBody>
+      </p:sp>
+      <p:sp>
+        <p:nvSpPr>
+          <p:cNvPr id="19" name="TextBox 18"/>
+          <p:cNvSpPr txBox="1"/>
+          <p:nvPr/>
+        </p:nvSpPr>
+        <p:spPr>
+          <a:xfrm>
+            <a:off x="841248" y="4901184"/>
+            <a:ext cx="3041904" cy="914400"/>
+          </a:xfrm>
+          <a:prstGeom prst="rect">
+            <a:avLst/>
+          </a:prstGeom>
+          <a:noFill/>
+        </p:spPr>
+        <p:txBody>
+          <a:bodyPr wrap="square" anchor="t" lIns="0" rIns="0" tIns="0" bIns="0">
+            <a:spAutoFit/>
+          </a:bodyPr>
+          <a:lstStyle/>
+          <a:p>
+            <a:r>
+              <a:rPr sz="1200" b="1" i="0">
+                <a:solidFill>
+                  <a:srgbClr val="4C9FFE"/>
+                </a:solidFill>
+                <a:latin typeface="Segoe UI"/>
+              </a:rPr>
+              <a:t>UPDATE + VALIDATOR</a:t>
+            </a:r>
+          </a:p>
+          <a:p>
+            <a:pPr>
+              <a:spcBef>
+                <a:spcPts val="600"/>
+              </a:spcBef>
+            </a:pPr>
+            <a:r>
+              <a:rPr sz="1300" b="0" i="0">
+                <a:solidFill>
+                  <a:srgbClr val="9AA2C0"/>
+                </a:solidFill>
+                <a:latin typeface="Segoe UI"/>
+              </a:rPr>
+              <a:t>adjuster notes, rejected inline</a:t>
+            </a:r>
+          </a:p>
+        </p:txBody>
+      </p:sp>
+      <p:sp>
+        <p:nvSpPr>
+          <p:cNvPr id="20" name="Rounded Rectangle 19"/>
+          <p:cNvSpPr/>
+          <p:nvPr/>
+        </p:nvSpPr>
+        <p:spPr>
+          <a:xfrm>
+            <a:off x="4358640" y="4754880"/>
+            <a:ext cx="3444240" cy="1188720"/>
+          </a:xfrm>
+          <a:prstGeom prst="roundRect">
+            <a:avLst>
+              <a:gd name="adj" fmla="val 6000"/>
+            </a:avLst>
+          </a:prstGeom>
+          <a:solidFill>
+            <a:srgbClr val="141828"/>
+          </a:solidFill>
+          <a:ln w="12700">
+            <a:solidFill>
+              <a:srgbClr val="232A41"/>
+            </a:solidFill>
+          </a:ln>
+          <a:effectLst/>
+        </p:spPr>
+        <p:style>
+          <a:lnRef idx="1">
+            <a:schemeClr val="accent1"/>
+          </a:lnRef>
+          <a:fillRef idx="3">
+            <a:schemeClr val="accent1"/>
+          </a:fillRef>
+          <a:effectRef idx="2">
+            <a:schemeClr val="accent1"/>
+          </a:effectRef>
+          <a:fontRef idx="minor">
+            <a:schemeClr val="lt1"/>
+          </a:fontRef>
+        </p:style>
+        <p:txBody>
+          <a:bodyPr rtlCol="0" anchor="ctr"/>
+          <a:lstStyle/>
+          <a:p>
+            <a:pPr algn="ctr"/>
+          </a:p>
+        </p:txBody>
+      </p:sp>
+      <p:sp>
+        <p:nvSpPr>
+          <p:cNvPr id="21" name="TextBox 20"/>
+          <p:cNvSpPr txBox="1"/>
+          <p:nvPr/>
+        </p:nvSpPr>
+        <p:spPr>
+          <a:xfrm>
+            <a:off x="4559808" y="4901184"/>
+            <a:ext cx="3041904" cy="914400"/>
+          </a:xfrm>
+          <a:prstGeom prst="rect">
+            <a:avLst/>
+          </a:prstGeom>
+          <a:noFill/>
+        </p:spPr>
+        <p:txBody>
+          <a:bodyPr wrap="square" anchor="t" lIns="0" rIns="0" tIns="0" bIns="0">
+            <a:spAutoFit/>
+          </a:bodyPr>
+          <a:lstStyle/>
+          <a:p>
+            <a:r>
+              <a:rPr sz="1200" b="1" i="0">
+                <a:solidFill>
+                  <a:srgbClr val="FBBF24"/>
+                </a:solidFill>
+                <a:latin typeface="Segoe UI"/>
+              </a:rPr>
+              <a:t>CANCELLATION</a:t>
+            </a:r>
+          </a:p>
+          <a:p>
+            <a:pPr>
+              <a:spcBef>
+                <a:spcPts val="600"/>
+              </a:spcBef>
+            </a:pPr>
+            <a:r>
+              <a:rPr sz="1300" b="0" i="0">
+                <a:solidFill>
+                  <a:srgbClr val="9AA2C0"/>
+                </a:solidFill>
+                <a:latin typeface="Segoe UI"/>
+              </a:rPr>
+              <a:t>saga-style compensation</a:t>
+            </a:r>
+          </a:p>
+        </p:txBody>
+      </p:sp>
+      <p:sp>
+        <p:nvSpPr>
+          <p:cNvPr id="22" name="Rounded Rectangle 21"/>
+          <p:cNvSpPr/>
+          <p:nvPr/>
+        </p:nvSpPr>
+        <p:spPr>
+          <a:xfrm>
+            <a:off x="8077200" y="4754880"/>
+            <a:ext cx="3444240" cy="1188720"/>
+          </a:xfrm>
+          <a:prstGeom prst="roundRect">
+            <a:avLst>
+              <a:gd name="adj" fmla="val 6000"/>
+            </a:avLst>
+          </a:prstGeom>
+          <a:solidFill>
+            <a:srgbClr val="141828"/>
+          </a:solidFill>
+          <a:ln w="12700">
+            <a:solidFill>
+              <a:srgbClr val="232A41"/>
+            </a:solidFill>
+          </a:ln>
+          <a:effectLst/>
+        </p:spPr>
+        <p:style>
+          <a:lnRef idx="1">
+            <a:schemeClr val="accent1"/>
+          </a:lnRef>
+          <a:fillRef idx="3">
+            <a:schemeClr val="accent1"/>
+          </a:fillRef>
+          <a:effectRef idx="2">
+            <a:schemeClr val="accent1"/>
+          </a:effectRef>
+          <a:fontRef idx="minor">
+            <a:schemeClr val="lt1"/>
+          </a:fontRef>
+        </p:style>
+        <p:txBody>
+          <a:bodyPr rtlCol="0" anchor="ctr"/>
+          <a:lstStyle/>
+          <a:p>
+            <a:pPr algn="ctr"/>
+          </a:p>
+        </p:txBody>
+      </p:sp>
+      <p:sp>
+        <p:nvSpPr>
+          <p:cNvPr id="23" name="TextBox 22"/>
+          <p:cNvSpPr txBox="1"/>
+          <p:nvPr/>
+        </p:nvSpPr>
+        <p:spPr>
+          <a:xfrm>
+            <a:off x="8278368" y="4901184"/>
+            <a:ext cx="3041904" cy="914400"/>
+          </a:xfrm>
+          <a:prstGeom prst="rect">
+            <a:avLst/>
+          </a:prstGeom>
+          <a:noFill/>
+        </p:spPr>
+        <p:txBody>
+          <a:bodyPr wrap="square" anchor="t" lIns="0" rIns="0" tIns="0" bIns="0">
+            <a:spAutoFit/>
+          </a:bodyPr>
+          <a:lstStyle/>
+          <a:p>
+            <a:r>
+              <a:rPr sz="1200" b="1" i="0">
+                <a:solidFill>
+                  <a:srgbClr val="4C9FFE"/>
+                </a:solidFill>
+                <a:latin typeface="Segoe UI"/>
+              </a:rPr>
+              <a:t>SEARCH ATTRIBUTES</a:t>
+            </a:r>
+          </a:p>
+          <a:p>
+            <a:pPr>
+              <a:spcBef>
+                <a:spcPts val="600"/>
+              </a:spcBef>
+            </a:pPr>
+            <a:r>
+              <a:rPr sz="1300" b="0" i="0">
+                <a:solidFill>
+                  <a:srgbClr val="9AA2C0"/>
+                </a:solidFill>
+                <a:latin typeface="Segoe UI"/>
+              </a:rPr>
+              <a:t>find claims by status/type/score</a:t>
+            </a:r>
+          </a:p>
+        </p:txBody>
+      </p:sp>
+      <p:sp>
+        <p:nvSpPr>
+          <p:cNvPr id="24" name="Rounded Rectangle 23"/>
+          <p:cNvSpPr/>
+          <p:nvPr/>
+        </p:nvSpPr>
+        <p:spPr>
+          <a:xfrm>
+            <a:off x="640080" y="6217920"/>
+            <a:ext cx="3444240" cy="1188720"/>
+          </a:xfrm>
+          <a:prstGeom prst="roundRect">
+            <a:avLst>
+              <a:gd name="adj" fmla="val 6000"/>
+            </a:avLst>
+          </a:prstGeom>
+          <a:solidFill>
+            <a:srgbClr val="141828"/>
+          </a:solidFill>
+          <a:ln w="12700">
+            <a:solidFill>
+              <a:srgbClr val="232A41"/>
+            </a:solidFill>
+          </a:ln>
+          <a:effectLst/>
+        </p:spPr>
+        <p:style>
+          <a:lnRef idx="1">
+            <a:schemeClr val="accent1"/>
+          </a:lnRef>
+          <a:fillRef idx="3">
+            <a:schemeClr val="accent1"/>
+          </a:fillRef>
+          <a:effectRef idx="2">
+            <a:schemeClr val="accent1"/>
+          </a:effectRef>
+          <a:fontRef idx="minor">
+            <a:schemeClr val="lt1"/>
+          </a:fontRef>
+        </p:style>
+        <p:txBody>
+          <a:bodyPr rtlCol="0" anchor="ctr"/>
+          <a:lstStyle/>
+          <a:p>
+            <a:pPr algn="ctr"/>
+          </a:p>
+        </p:txBody>
+      </p:sp>
+      <p:sp>
+        <p:nvSpPr>
+          <p:cNvPr id="25" name="TextBox 24"/>
+          <p:cNvSpPr txBox="1"/>
+          <p:nvPr/>
+        </p:nvSpPr>
+        <p:spPr>
+          <a:xfrm>
+            <a:off x="841248" y="6364224"/>
+            <a:ext cx="3041904" cy="914400"/>
+          </a:xfrm>
+          <a:prstGeom prst="rect">
+            <a:avLst/>
+          </a:prstGeom>
+          <a:noFill/>
+        </p:spPr>
+        <p:txBody>
+          <a:bodyPr wrap="square" anchor="t" lIns="0" rIns="0" tIns="0" bIns="0">
+            <a:spAutoFit/>
+          </a:bodyPr>
+          <a:lstStyle/>
+          <a:p>
+            <a:r>
+              <a:rPr sz="1200" b="1" i="0">
+                <a:solidFill>
+                  <a:srgbClr val="34D399"/>
+                </a:solidFill>
+                <a:latin typeface="Segoe UI"/>
+              </a:rPr>
+              <a:t>WORKER-RESTART DURABILITY</a:t>
+            </a:r>
+          </a:p>
+          <a:p>
+            <a:pPr>
+              <a:spcBef>
+                <a:spcPts val="600"/>
+              </a:spcBef>
+            </a:pPr>
+            <a:r>
+              <a:rPr sz="1300" b="0" i="0">
+                <a:solidFill>
+                  <a:srgbClr val="9AA2C0"/>
+                </a:solidFill>
+                <a:latin typeface="Segoe UI"/>
+              </a:rPr>
+              <a:t>kill it mid-claim, resume</a:t>
+            </a:r>
+          </a:p>
+        </p:txBody>
+      </p:sp>
+      <p:sp>
+        <p:nvSpPr>
+          <p:cNvPr id="26" name="Rounded Rectangle 25"/>
+          <p:cNvSpPr/>
+          <p:nvPr/>
+        </p:nvSpPr>
+        <p:spPr>
+          <a:xfrm>
+            <a:off x="4358640" y="6217920"/>
+            <a:ext cx="3444240" cy="1188720"/>
+          </a:xfrm>
+          <a:prstGeom prst="roundRect">
+            <a:avLst>
+              <a:gd name="adj" fmla="val 6000"/>
+            </a:avLst>
+          </a:prstGeom>
+          <a:solidFill>
+            <a:srgbClr val="141828"/>
+          </a:solidFill>
+          <a:ln w="12700">
+            <a:solidFill>
+              <a:srgbClr val="232A41"/>
+            </a:solidFill>
+          </a:ln>
+          <a:effectLst/>
+        </p:spPr>
+        <p:style>
+          <a:lnRef idx="1">
+            <a:schemeClr val="accent1"/>
+          </a:lnRef>
+          <a:fillRef idx="3">
+            <a:schemeClr val="accent1"/>
+          </a:fillRef>
+          <a:effectRef idx="2">
+            <a:schemeClr val="accent1"/>
+          </a:effectRef>
+          <a:fontRef idx="minor">
+            <a:schemeClr val="lt1"/>
+          </a:fontRef>
+        </p:style>
+        <p:txBody>
+          <a:bodyPr rtlCol="0" anchor="ctr"/>
+          <a:lstStyle/>
+          <a:p>
+            <a:pPr algn="ctr"/>
+          </a:p>
+        </p:txBody>
+      </p:sp>
+      <p:sp>
+        <p:nvSpPr>
+          <p:cNvPr id="27" name="TextBox 26"/>
+          <p:cNvSpPr txBox="1"/>
+          <p:nvPr/>
+        </p:nvSpPr>
+        <p:spPr>
+          <a:xfrm>
+            <a:off x="4559808" y="6364224"/>
+            <a:ext cx="3041904" cy="914400"/>
+          </a:xfrm>
+          <a:prstGeom prst="rect">
+            <a:avLst/>
+          </a:prstGeom>
+          <a:noFill/>
+        </p:spPr>
+        <p:txBody>
+          <a:bodyPr wrap="square" anchor="t" lIns="0" rIns="0" tIns="0" bIns="0">
+            <a:spAutoFit/>
+          </a:bodyPr>
+          <a:lstStyle/>
+          <a:p>
+            <a:r>
+              <a:rPr sz="1200" b="1" i="0">
+                <a:solidFill>
+                  <a:srgbClr val="4C9FFE"/>
+                </a:solidFill>
+                <a:latin typeface="Segoe UI"/>
+              </a:rPr>
+              <a:t>HEARTBEATS</a:t>
+            </a:r>
+          </a:p>
+          <a:p>
+            <a:pPr>
+              <a:spcBef>
+                <a:spcPts val="600"/>
+              </a:spcBef>
+            </a:pPr>
+            <a:r>
+              <a:rPr sz="1300" b="0" i="0">
+                <a:solidFill>
+                  <a:srgbClr val="9AA2C0"/>
+                </a:solidFill>
+                <a:latin typeface="Segoe UI"/>
+              </a:rPr>
+              <a:t>cancellable long-running activity</a:t>
+            </a:r>
+          </a:p>
+        </p:txBody>
+      </p:sp>
+      <p:sp>
+        <p:nvSpPr>
+          <p:cNvPr id="28" name="Rounded Rectangle 27"/>
+          <p:cNvSpPr/>
+          <p:nvPr/>
+        </p:nvSpPr>
+        <p:spPr>
+          <a:xfrm>
+            <a:off x="8077200" y="6217920"/>
+            <a:ext cx="3444240" cy="1188720"/>
+          </a:xfrm>
+          <a:prstGeom prst="roundRect">
+            <a:avLst>
+              <a:gd name="adj" fmla="val 6000"/>
+            </a:avLst>
+          </a:prstGeom>
+          <a:solidFill>
+            <a:srgbClr val="141828"/>
+          </a:solidFill>
+          <a:ln w="12700">
+            <a:solidFill>
+              <a:srgbClr val="232A41"/>
+            </a:solidFill>
+          </a:ln>
+          <a:effectLst/>
+        </p:spPr>
+        <p:style>
+          <a:lnRef idx="1">
+            <a:schemeClr val="accent1"/>
+          </a:lnRef>
+          <a:fillRef idx="3">
+            <a:schemeClr val="accent1"/>
+          </a:fillRef>
+          <a:effectRef idx="2">
+            <a:schemeClr val="accent1"/>
+          </a:effectRef>
+          <a:fontRef idx="minor">
+            <a:schemeClr val="lt1"/>
+          </a:fontRef>
+        </p:style>
+        <p:txBody>
+          <a:bodyPr rtlCol="0" anchor="ctr"/>
+          <a:lstStyle/>
+          <a:p>
+            <a:pPr algn="ctr"/>
+          </a:p>
+        </p:txBody>
+      </p:sp>
+      <p:sp>
+        <p:nvSpPr>
+          <p:cNvPr id="29" name="TextBox 28"/>
+          <p:cNvSpPr txBox="1"/>
+          <p:nvPr/>
+        </p:nvSpPr>
+        <p:spPr>
+          <a:xfrm>
+            <a:off x="8278368" y="6364224"/>
+            <a:ext cx="3041904" cy="914400"/>
+          </a:xfrm>
+          <a:prstGeom prst="rect">
+            <a:avLst/>
+          </a:prstGeom>
+          <a:noFill/>
+        </p:spPr>
+        <p:txBody>
+          <a:bodyPr wrap="square" anchor="t" lIns="0" rIns="0" tIns="0" bIns="0">
+            <a:spAutoFit/>
+          </a:bodyPr>
+          <a:lstStyle/>
+          <a:p>
+            <a:r>
+              <a:rPr sz="1200" b="1" i="0">
+                <a:solidFill>
+                  <a:srgbClr val="F87171"/>
+                </a:solidFill>
+                <a:latin typeface="Segoe UI"/>
+              </a:rPr>
+              <a:t>NO DATABASE</a:t>
+            </a:r>
+          </a:p>
+          <a:p>
+            <a:pPr>
+              <a:spcBef>
+                <a:spcPts val="600"/>
+              </a:spcBef>
+            </a:pPr>
+            <a:r>
+              <a:rPr sz="1300" b="0" i="0">
+                <a:solidFill>
+                  <a:srgbClr val="9AA2C0"/>
+                </a:solidFill>
+                <a:latin typeface="Segoe UI"/>
+              </a:rPr>
+              <a:t>Temporal is the only state store</a:t>
             </a:r>
           </a:p>
         </p:txBody>
@@ -9316,8 +9825,8 @@
         </p:nvSpPr>
         <p:spPr>
           <a:xfrm>
-            <a:off x="640080" y="457200"/>
-            <a:ext cx="2011680" cy="457200"/>
+            <a:off x="822960" y="2194560"/>
+            <a:ext cx="3657600" cy="1463040"/>
           </a:xfrm>
           <a:prstGeom prst="rect">
             <a:avLst/>
@@ -9331,13 +9840,13 @@
           <a:lstStyle/>
           <a:p>
             <a:r>
-              <a:rPr sz="1300" b="1" i="0">
+              <a:rPr sz="7200" b="1" i="0">
                 <a:solidFill>
                   <a:srgbClr val="7C5CFF"/>
                 </a:solidFill>
-                <a:latin typeface="Segoe UI"/>
-              </a:rPr>
-              <a:t>DEMO 1 / 6</a:t>
+                <a:latin typeface="Consolas"/>
+              </a:rPr>
+              <a:t>03</a:t>
             </a:r>
           </a:p>
         </p:txBody>
@@ -9350,8 +9859,8 @@
         </p:nvSpPr>
         <p:spPr>
           <a:xfrm>
-            <a:off x="2743200" y="411480"/>
-            <a:ext cx="8778240" cy="640080"/>
+            <a:off x="822960" y="3383280"/>
+            <a:ext cx="8686800" cy="1005840"/>
           </a:xfrm>
           <a:prstGeom prst="rect">
             <a:avLst/>
@@ -9365,119 +9874,27 @@
           <a:lstStyle/>
           <a:p>
             <a:r>
-              <a:rPr sz="2800" b="1" i="0">
+              <a:rPr sz="4000" b="1" i="0">
                 <a:solidFill>
                   <a:srgbClr val="E6E9F5"/>
                 </a:solidFill>
                 <a:latin typeface="Segoe UI"/>
               </a:rPr>
-              <a:t>Submit a claim, watch it run</a:t>
-            </a:r>
-          </a:p>
-        </p:txBody>
-      </p:sp>
-      <p:sp>
-        <p:nvSpPr>
-          <p:cNvPr id="5" name="Rounded Rectangle 4"/>
-          <p:cNvSpPr/>
-          <p:nvPr/>
-        </p:nvSpPr>
-        <p:spPr>
-          <a:xfrm>
-            <a:off x="640080" y="1188720"/>
-            <a:ext cx="10881360" cy="4206240"/>
-          </a:xfrm>
-          <a:prstGeom prst="roundRect">
-            <a:avLst>
-              <a:gd name="adj" fmla="val 6000"/>
-            </a:avLst>
-          </a:prstGeom>
-          <a:solidFill>
-            <a:srgbClr val="05060C"/>
-          </a:solidFill>
-          <a:ln w="12700">
-            <a:solidFill>
-              <a:srgbClr val="7C5CFF"/>
-            </a:solidFill>
-          </a:ln>
-          <a:effectLst/>
-        </p:spPr>
-        <p:style>
-          <a:lnRef idx="1">
-            <a:schemeClr val="accent1"/>
-          </a:lnRef>
-          <a:fillRef idx="3">
-            <a:schemeClr val="accent1"/>
-          </a:fillRef>
-          <a:effectRef idx="2">
-            <a:schemeClr val="accent1"/>
-          </a:effectRef>
-          <a:fontRef idx="minor">
-            <a:schemeClr val="lt1"/>
-          </a:fontRef>
-        </p:style>
-        <p:txBody>
-          <a:bodyPr rtlCol="0" anchor="ctr"/>
-          <a:lstStyle/>
-          <a:p>
-            <a:pPr algn="ctr"/>
-          </a:p>
-        </p:txBody>
-      </p:sp>
-      <p:sp>
-        <p:nvSpPr>
-          <p:cNvPr id="6" name="Isosceles Triangle 5"/>
-          <p:cNvSpPr/>
-          <p:nvPr/>
-        </p:nvSpPr>
-        <p:spPr>
-          <a:xfrm rot="5400000">
-            <a:off x="5669280" y="2743200"/>
-            <a:ext cx="822960" cy="822960"/>
-          </a:xfrm>
-          <a:prstGeom prst="triangle">
-            <a:avLst/>
-          </a:prstGeom>
-          <a:solidFill>
-            <a:srgbClr val="7C5CFF"/>
-          </a:solidFill>
-          <a:ln>
-            <a:noFill/>
-          </a:ln>
-          <a:effectLst/>
-        </p:spPr>
-        <p:style>
-          <a:lnRef idx="1">
-            <a:schemeClr val="accent1"/>
-          </a:lnRef>
-          <a:fillRef idx="3">
-            <a:schemeClr val="accent1"/>
-          </a:fillRef>
-          <a:effectRef idx="2">
-            <a:schemeClr val="accent1"/>
-          </a:effectRef>
-          <a:fontRef idx="minor">
-            <a:schemeClr val="lt1"/>
-          </a:fontRef>
-        </p:style>
-        <p:txBody>
-          <a:bodyPr rtlCol="0" anchor="ctr"/>
-          <a:lstStyle/>
-          <a:p>
-            <a:pPr algn="ctr"/>
-          </a:p>
-        </p:txBody>
-      </p:sp>
-      <p:sp>
-        <p:nvSpPr>
-          <p:cNvPr id="7" name="TextBox 6"/>
+              <a:t>Let's See It Run</a:t>
+            </a:r>
+          </a:p>
+        </p:txBody>
+      </p:sp>
+      <p:sp>
+        <p:nvSpPr>
+          <p:cNvPr id="5" name="TextBox 4"/>
           <p:cNvSpPr txBox="1"/>
           <p:nvPr/>
         </p:nvSpPr>
         <p:spPr>
           <a:xfrm>
-            <a:off x="3383280" y="3703320"/>
-            <a:ext cx="5394960" cy="457200"/>
+            <a:off x="822960" y="4206240"/>
+            <a:ext cx="6858000" cy="914400"/>
           </a:xfrm>
           <a:prstGeom prst="rect">
             <a:avLst/>
@@ -9490,121 +9907,14 @@
           </a:bodyPr>
           <a:lstStyle/>
           <a:p>
-            <a:pPr algn="ctr"/>
-            <a:r>
-              <a:rPr sz="2000" b="0" i="0">
+            <a:r>
+              <a:rPr sz="1700" b="0" i="0">
                 <a:solidFill>
                   <a:srgbClr val="9AA2C0"/>
                 </a:solidFill>
                 <a:latin typeface="Segoe UI"/>
               </a:rPr>
-              <a:t>submit-and-progress.mp4</a:t>
-            </a:r>
-          </a:p>
-        </p:txBody>
-      </p:sp>
-      <p:sp>
-        <p:nvSpPr>
-          <p:cNvPr id="8" name="TextBox 7"/>
-          <p:cNvSpPr txBox="1"/>
-          <p:nvPr/>
-        </p:nvSpPr>
-        <p:spPr>
-          <a:xfrm>
-            <a:off x="3383280" y="4114800"/>
-            <a:ext cx="5394960" cy="365760"/>
-          </a:xfrm>
-          <a:prstGeom prst="rect">
-            <a:avLst/>
-          </a:prstGeom>
-          <a:noFill/>
-        </p:spPr>
-        <p:txBody>
-          <a:bodyPr wrap="square" anchor="t" lIns="0" rIns="0" tIns="0" bIns="0">
-            <a:spAutoFit/>
-          </a:bodyPr>
-          <a:lstStyle/>
-          <a:p>
-            <a:pPr algn="ctr"/>
-            <a:r>
-              <a:rPr sz="1200" b="0" i="0">
-                <a:solidFill>
-                  <a:srgbClr val="6F7794"/>
-                </a:solidFill>
-                <a:latin typeface="Consolas"/>
-              </a:rPr>
-              <a:t>presentation/recordings/01-submit-and-progress.mp4</a:t>
-            </a:r>
-          </a:p>
-        </p:txBody>
-      </p:sp>
-      <p:sp>
-        <p:nvSpPr>
-          <p:cNvPr id="9" name="TextBox 8"/>
-          <p:cNvSpPr txBox="1"/>
-          <p:nvPr/>
-        </p:nvSpPr>
-        <p:spPr>
-          <a:xfrm>
-            <a:off x="640080" y="5623560"/>
-            <a:ext cx="10881360" cy="914400"/>
-          </a:xfrm>
-          <a:prstGeom prst="rect">
-            <a:avLst/>
-          </a:prstGeom>
-          <a:noFill/>
-        </p:spPr>
-        <p:txBody>
-          <a:bodyPr wrap="square" anchor="t" lIns="0" rIns="0" tIns="0" bIns="0">
-            <a:spAutoFit/>
-          </a:bodyPr>
-          <a:lstStyle/>
-          <a:p>
-            <a:pPr>
-              <a:spcAft>
-                <a:spcPts val="400"/>
-              </a:spcAft>
-            </a:pPr>
-            <a:r>
-              <a:rPr sz="1300" b="0" i="0">
-                <a:solidFill>
-                  <a:srgbClr val="9AA2C0"/>
-                </a:solidFill>
-                <a:latin typeface="Segoe UI"/>
-              </a:rPr>
-              <a:t>▸ Dashboard → Submit claim → live redirect</a:t>
-            </a:r>
-          </a:p>
-          <a:p>
-            <a:pPr>
-              <a:spcAft>
-                <a:spcPts val="400"/>
-              </a:spcAft>
-            </a:pPr>
-            <a:r>
-              <a:rPr sz="1300" b="0" i="0">
-                <a:solidFill>
-                  <a:srgbClr val="9AA2C0"/>
-                </a:solidFill>
-                <a:latin typeface="Segoe UI"/>
-              </a:rPr>
-              <a:t>▸ Stage timeline updates via polling, no refresh</a:t>
-            </a:r>
-          </a:p>
-          <a:p>
-            <a:pPr>
-              <a:spcAft>
-                <a:spcPts val="400"/>
-              </a:spcAft>
-            </a:pPr>
-            <a:r>
-              <a:rPr sz="1300" b="0" i="0">
-                <a:solidFill>
-                  <a:srgbClr val="9AA2C0"/>
-                </a:solidFill>
-                <a:latin typeface="Segoe UI"/>
-              </a:rPr>
-              <a:t>▸ Progress % computed from stage weights, not hardcoded</a:t>
+              <a:t>Six short cuts. Real failures. Real recovery. No cuts hiding a crash.</a:t>
             </a:r>
           </a:p>
         </p:txBody>
@@ -9696,11 +10006,11 @@
             <a:r>
               <a:rPr sz="1300" b="1" i="0">
                 <a:solidFill>
-                  <a:srgbClr val="38BDF8"/>
-                </a:solidFill>
-                <a:latin typeface="Segoe UI"/>
-              </a:rPr>
-              <a:t>DEMO 2 / 6</a:t>
+                  <a:srgbClr val="7C5CFF"/>
+                </a:solidFill>
+                <a:latin typeface="Segoe UI"/>
+              </a:rPr>
+              <a:t>DEMO 1 / 6</a:t>
             </a:r>
           </a:p>
         </p:txBody>
@@ -9734,7 +10044,7 @@
                 </a:solidFill>
                 <a:latin typeface="Segoe UI"/>
               </a:rPr>
-              <a:t>The workflow waits — forever — for you</a:t>
+              <a:t>Submit a claim, watch it run</a:t>
             </a:r>
           </a:p>
         </p:txBody>
@@ -9861,7 +10171,7 @@
                 </a:solidFill>
                 <a:latin typeface="Segoe UI"/>
               </a:rPr>
-              <a:t>human-review-signals.mp4</a:t>
+              <a:t>submit-and-progress.mp4</a:t>
             </a:r>
           </a:p>
         </p:txBody>
@@ -9896,7 +10206,7 @@
                 </a:solidFill>
                 <a:latin typeface="Consolas"/>
               </a:rPr>
-              <a:t>presentation/recordings/02-human-review-signals.mp4</a:t>
+              <a:t>presentation/recordings/01-submit-and-progress.mp4</a:t>
             </a:r>
           </a:p>
         </p:txBody>
@@ -9935,7 +10245,7 @@
                 </a:solidFill>
                 <a:latin typeface="Segoe UI"/>
               </a:rPr>
-              <a:t>▸ Claim parks at “Human adjuster review”</a:t>
+              <a:t>▸ Dashboard → Submit claim → live redirect</a:t>
             </a:r>
           </a:p>
           <a:p>
@@ -9951,7 +10261,7 @@
                 </a:solidFill>
                 <a:latin typeface="Segoe UI"/>
               </a:rPr>
-              <a:t>▸ Request more info → provide info → back to review</a:t>
+              <a:t>▸ Stage timeline updates via polling, no refresh</a:t>
             </a:r>
           </a:p>
           <a:p>
@@ -9967,7 +10277,7 @@
                 </a:solidFill>
                 <a:latin typeface="Segoe UI"/>
               </a:rPr>
-              <a:t>▸ Approve → durable settlement timer → paid</a:t>
+              <a:t>▸ Progress % computed from stage weights, not hardcoded</a:t>
             </a:r>
           </a:p>
         </p:txBody>
@@ -10059,11 +10369,11 @@
             <a:r>
               <a:rPr sz="1300" b="1" i="0">
                 <a:solidFill>
-                  <a:srgbClr val="FBBF24"/>
-                </a:solidFill>
-                <a:latin typeface="Segoe UI"/>
-              </a:rPr>
-              <a:t>DEMO 3 / 6</a:t>
+                  <a:srgbClr val="38BDF8"/>
+                </a:solidFill>
+                <a:latin typeface="Segoe UI"/>
+              </a:rPr>
+              <a:t>DEMO 2 / 6</a:t>
             </a:r>
           </a:p>
         </p:txBody>
@@ -10097,7 +10407,7 @@
                 </a:solidFill>
                 <a:latin typeface="Segoe UI"/>
               </a:rPr>
-              <a:t>Break it a little — watch it heal itself</a:t>
+              <a:t>The workflow waits — forever — for you</a:t>
             </a:r>
           </a:p>
         </p:txBody>
@@ -10224,7 +10534,7 @@
                 </a:solidFill>
                 <a:latin typeface="Segoe UI"/>
               </a:rPr>
-              <a:t>transient-retry.mp4</a:t>
+              <a:t>human-review-signals.mp4</a:t>
             </a:r>
           </a:p>
         </p:txBody>
@@ -10259,7 +10569,7 @@
                 </a:solidFill>
                 <a:latin typeface="Consolas"/>
               </a:rPr>
-              <a:t>presentation/recordings/03-transient-retry.mp4</a:t>
+              <a:t>presentation/recordings/02-human-review-signals.mp4</a:t>
             </a:r>
           </a:p>
         </p:txBody>
@@ -10298,7 +10608,7 @@
                 </a:solidFill>
                 <a:latin typeface="Segoe UI"/>
               </a:rPr>
-              <a:t>▸ Arm “transient failure” on damage assessment</a:t>
+              <a:t>▸ Claim parks at “Human adjuster review”</a:t>
             </a:r>
           </a:p>
           <a:p>
@@ -10314,7 +10624,7 @@
                 </a:solidFill>
                 <a:latin typeface="Segoe UI"/>
               </a:rPr>
-              <a:t>▸ Activity panel shows attempt 1, 2, 3 — live</a:t>
+              <a:t>▸ Request more info → provide info → back to review</a:t>
             </a:r>
           </a:p>
           <a:p>
@@ -10330,7 +10640,7 @@
                 </a:solidFill>
                 <a:latin typeface="Segoe UI"/>
               </a:rPr>
-              <a:t>▸ Same code path, zero extra retry logic written</a:t>
+              <a:t>▸ Approve → durable settlement timer → paid</a:t>
             </a:r>
           </a:p>
         </p:txBody>
@@ -10422,11 +10732,11 @@
             <a:r>
               <a:rPr sz="1300" b="1" i="0">
                 <a:solidFill>
-                  <a:srgbClr val="F87171"/>
-                </a:solidFill>
-                <a:latin typeface="Segoe UI"/>
-              </a:rPr>
-              <a:t>DEMO 4 / 6</a:t>
+                  <a:srgbClr val="FBBF24"/>
+                </a:solidFill>
+                <a:latin typeface="Segoe UI"/>
+              </a:rPr>
+              <a:t>DEMO 3 / 6</a:t>
             </a:r>
           </a:p>
         </p:txBody>
@@ -10460,7 +10770,7 @@
                 </a:solidFill>
                 <a:latin typeface="Segoe UI"/>
               </a:rPr>
-              <a:t>Break it for real — recover it from the UI</a:t>
+              <a:t>Break it a little — watch it heal itself</a:t>
             </a:r>
           </a:p>
         </p:txBody>
@@ -10587,7 +10897,7 @@
                 </a:solidFill>
                 <a:latin typeface="Segoe UI"/>
               </a:rPr>
-              <a:t>permanent-failure-recovery.mp4</a:t>
+              <a:t>transient-retry.mp4</a:t>
             </a:r>
           </a:p>
         </p:txBody>
@@ -10622,7 +10932,7 @@
                 </a:solidFill>
                 <a:latin typeface="Consolas"/>
               </a:rPr>
-              <a:t>presentation/recordings/04-permanent-failure-recovery.mp4</a:t>
+              <a:t>presentation/recordings/03-transient-retry.mp4</a:t>
             </a:r>
           </a:p>
         </p:txBody>
@@ -10661,7 +10971,7 @@
                 </a:solidFill>
                 <a:latin typeface="Segoe UI"/>
               </a:rPr>
-              <a:t>▸ “Break payment (permanent)” → non-retryable ApplicationFailure</a:t>
+              <a:t>▸ Arm “transient failure” on damage assessment</a:t>
             </a:r>
           </a:p>
           <a:p>
@@ -10677,7 +10987,7 @@
                 </a:solidFill>
                 <a:latin typeface="Segoe UI"/>
               </a:rPr>
-              <a:t>▸ Claim parks in “blocked on failure” — not crashed, not lost</a:t>
+              <a:t>▸ Activity panel shows attempt 1, 2, 3 — live</a:t>
             </a:r>
           </a:p>
           <a:p>
@@ -10693,7 +11003,7 @@
                 </a:solidFill>
                 <a:latin typeface="Segoe UI"/>
               </a:rPr>
-              <a:t>▸ Operator clicks Retry → clears fault → claim completes</a:t>
+              <a:t>▸ Same code path, zero extra retry logic written</a:t>
             </a:r>
           </a:p>
         </p:txBody>
@@ -10972,11 +11282,11 @@
             <a:r>
               <a:rPr sz="1300" b="1" i="0">
                 <a:solidFill>
-                  <a:srgbClr val="34D399"/>
-                </a:solidFill>
-                <a:latin typeface="Segoe UI"/>
-              </a:rPr>
-              <a:t>DEMO 5 / 6</a:t>
+                  <a:srgbClr val="F87171"/>
+                </a:solidFill>
+                <a:latin typeface="Segoe UI"/>
+              </a:rPr>
+              <a:t>DEMO 4 / 6</a:t>
             </a:r>
           </a:p>
         </p:txBody>
@@ -11010,7 +11320,7 @@
                 </a:solidFill>
                 <a:latin typeface="Segoe UI"/>
               </a:rPr>
-              <a:t>Kill the worker. Mid-claim. On purpose.</a:t>
+              <a:t>Break it for real — recover it from the UI</a:t>
             </a:r>
           </a:p>
         </p:txBody>
@@ -11137,7 +11447,7 @@
                 </a:solidFill>
                 <a:latin typeface="Segoe UI"/>
               </a:rPr>
-              <a:t>worker-restart-durability.mp4</a:t>
+              <a:t>permanent-failure-recovery.mp4</a:t>
             </a:r>
           </a:p>
         </p:txBody>
@@ -11172,7 +11482,7 @@
                 </a:solidFill>
                 <a:latin typeface="Consolas"/>
               </a:rPr>
-              <a:t>presentation/recordings/05-worker-restart-durability.mp4</a:t>
+              <a:t>presentation/recordings/04-permanent-failure-recovery.mp4</a:t>
             </a:r>
           </a:p>
         </p:txBody>
@@ -11211,7 +11521,7 @@
                 </a:solidFill>
                 <a:latin typeface="Segoe UI"/>
               </a:rPr>
-              <a:t>▸ “Kill &amp; restart worker” while a claim is blocked</a:t>
+              <a:t>▸ “Break payment (permanent)” → non-retryable ApplicationFailure</a:t>
             </a:r>
           </a:p>
           <a:p>
@@ -11227,7 +11537,7 @@
                 </a:solidFill>
                 <a:latin typeface="Segoe UI"/>
               </a:rPr>
-              <a:t>▸ worker-…-gen1 dies, worker-…-gen2 comes up</a:t>
+              <a:t>▸ Claim parks in “blocked on failure” — not crashed, not lost</a:t>
             </a:r>
           </a:p>
           <a:p>
@@ -11243,7 +11553,7 @@
                 </a:solidFill>
                 <a:latin typeface="Segoe UI"/>
               </a:rPr>
-              <a:t>▸ Claim resumes exactly where it was — timers included</a:t>
+              <a:t>▸ Operator clicks Retry → clears fault → claim completes</a:t>
             </a:r>
           </a:p>
         </p:txBody>
@@ -11335,11 +11645,11 @@
             <a:r>
               <a:rPr sz="1300" b="1" i="0">
                 <a:solidFill>
-                  <a:srgbClr val="9AA2C0"/>
-                </a:solidFill>
-                <a:latin typeface="Segoe UI"/>
-              </a:rPr>
-              <a:t>DEMO 6 / 6</a:t>
+                  <a:srgbClr val="34D399"/>
+                </a:solidFill>
+                <a:latin typeface="Segoe UI"/>
+              </a:rPr>
+              <a:t>DEMO 5 / 6</a:t>
             </a:r>
           </a:p>
         </p:txBody>
@@ -11373,7 +11683,7 @@
                 </a:solidFill>
                 <a:latin typeface="Segoe UI"/>
               </a:rPr>
-              <a:t>Cancel mid-flight — compensations run</a:t>
+              <a:t>Kill the worker. Mid-claim. On purpose.</a:t>
             </a:r>
           </a:p>
         </p:txBody>
@@ -11500,7 +11810,7 @@
                 </a:solidFill>
                 <a:latin typeface="Segoe UI"/>
               </a:rPr>
-              <a:t>cancellation-saga.mp4</a:t>
+              <a:t>worker-restart-durability.mp4</a:t>
             </a:r>
           </a:p>
         </p:txBody>
@@ -11535,7 +11845,7 @@
                 </a:solidFill>
                 <a:latin typeface="Consolas"/>
               </a:rPr>
-              <a:t>presentation/recordings/06-cancellation-saga.mp4</a:t>
+              <a:t>presentation/recordings/05-worker-restart-durability.mp4</a:t>
             </a:r>
           </a:p>
         </p:txBody>
@@ -11574,7 +11884,7 @@
                 </a:solidFill>
                 <a:latin typeface="Segoe UI"/>
               </a:rPr>
-              <a:t>▸ Cancel a running claim from the dashboard</a:t>
+              <a:t>▸ “Kill &amp; restart worker” while a claim is blocked</a:t>
             </a:r>
           </a:p>
           <a:p>
@@ -11590,7 +11900,7 @@
                 </a:solidFill>
                 <a:latin typeface="Segoe UI"/>
               </a:rPr>
-              <a:t>▸ Reserve released, payment reversed, claimant notified</a:t>
+              <a:t>▸ worker-…-gen1 dies, worker-…-gen2 comes up</a:t>
             </a:r>
           </a:p>
           <a:p>
@@ -11606,7 +11916,7 @@
                 </a:solidFill>
                 <a:latin typeface="Segoe UI"/>
               </a:rPr>
-              <a:t>▸ Workflow closes CANCELED — cleanly, not abruptly</a:t>
+              <a:t>▸ Claim resumes exactly where it was — timers included</a:t>
             </a:r>
           </a:p>
         </p:txBody>
@@ -11698,11 +12008,11 @@
             <a:r>
               <a:rPr sz="1300" b="1" i="0">
                 <a:solidFill>
-                  <a:srgbClr val="7C5CFF"/>
-                </a:solidFill>
-                <a:latin typeface="Segoe UI"/>
-              </a:rPr>
-              <a:t>BONUS</a:t>
+                  <a:srgbClr val="9AA2C0"/>
+                </a:solidFill>
+                <a:latin typeface="Segoe UI"/>
+              </a:rPr>
+              <a:t>DEMO 6 / 6</a:t>
             </a:r>
           </a:p>
         </p:txBody>
@@ -11736,7 +12046,7 @@
                 </a:solidFill>
                 <a:latin typeface="Segoe UI"/>
               </a:rPr>
-              <a:t>The same story, from Temporal's Web UI</a:t>
+              <a:t>Cancel mid-flight — compensations run</a:t>
             </a:r>
           </a:p>
         </p:txBody>
@@ -11863,7 +12173,7 @@
                 </a:solidFill>
                 <a:latin typeface="Segoe UI"/>
               </a:rPr>
-              <a:t>temporal-web-ui-tour.mp4</a:t>
+              <a:t>cancellation-saga.mp4</a:t>
             </a:r>
           </a:p>
         </p:txBody>
@@ -11898,7 +12208,7 @@
                 </a:solidFill>
                 <a:latin typeface="Consolas"/>
               </a:rPr>
-              <a:t>presentation/recordings/07-temporal-web-ui-tour.mp4</a:t>
+              <a:t>presentation/recordings/06-cancellation-saga.mp4</a:t>
             </a:r>
           </a:p>
         </p:txBody>
@@ -11937,7 +12247,7 @@
                 </a:solidFill>
                 <a:latin typeface="Segoe UI"/>
               </a:rPr>
-              <a:t>▸ Event history: every retry, timer, signal, child workflow</a:t>
+              <a:t>▸ Cancel a running claim from the dashboard</a:t>
             </a:r>
           </a:p>
           <a:p>
@@ -11953,7 +12263,7 @@
                 </a:solidFill>
                 <a:latin typeface="Segoe UI"/>
               </a:rPr>
-              <a:t>▸ Search: ClaimStatus = “awaiting-review” AND FraudScore &gt;= 75</a:t>
+              <a:t>▸ Reserve released, payment reversed, claimant notified</a:t>
             </a:r>
           </a:p>
           <a:p>
@@ -11969,7 +12279,7 @@
                 </a:solidFill>
                 <a:latin typeface="Segoe UI"/>
               </a:rPr>
-              <a:t>▸ Run getClaimState as a raw query, no UI involved</a:t>
+              <a:t>▸ Workflow closes CANCELED — cleanly, not abruptly</a:t>
             </a:r>
           </a:p>
         </p:txBody>
@@ -12044,8 +12354,8 @@
         </p:nvSpPr>
         <p:spPr>
           <a:xfrm>
-            <a:off x="822960" y="2194560"/>
-            <a:ext cx="3657600" cy="1463040"/>
+            <a:off x="640080" y="457200"/>
+            <a:ext cx="2011680" cy="457200"/>
           </a:xfrm>
           <a:prstGeom prst="rect">
             <a:avLst/>
@@ -12059,13 +12369,13 @@
           <a:lstStyle/>
           <a:p>
             <a:r>
-              <a:rPr sz="7200" b="1" i="0">
+              <a:rPr sz="1300" b="1" i="0">
                 <a:solidFill>
                   <a:srgbClr val="7C5CFF"/>
                 </a:solidFill>
-                <a:latin typeface="Consolas"/>
-              </a:rPr>
-              <a:t>04</a:t>
+                <a:latin typeface="Segoe UI"/>
+              </a:rPr>
+              <a:t>BONUS</a:t>
             </a:r>
           </a:p>
         </p:txBody>
@@ -12078,8 +12388,8 @@
         </p:nvSpPr>
         <p:spPr>
           <a:xfrm>
-            <a:off x="822960" y="3383280"/>
-            <a:ext cx="8686800" cy="1005840"/>
+            <a:off x="2743200" y="411480"/>
+            <a:ext cx="8778240" cy="640080"/>
           </a:xfrm>
           <a:prstGeom prst="rect">
             <a:avLst/>
@@ -12093,27 +12403,119 @@
           <a:lstStyle/>
           <a:p>
             <a:r>
-              <a:rPr sz="4000" b="1" i="0">
+              <a:rPr sz="2800" b="1" i="0">
                 <a:solidFill>
                   <a:srgbClr val="E6E9F5"/>
                 </a:solidFill>
                 <a:latin typeface="Segoe UI"/>
               </a:rPr>
-              <a:t>Matching Your Use Case</a:t>
-            </a:r>
-          </a:p>
-        </p:txBody>
-      </p:sp>
-      <p:sp>
-        <p:nvSpPr>
-          <p:cNvPr id="5" name="TextBox 4"/>
+              <a:t>The same story, from Temporal's Web UI</a:t>
+            </a:r>
+          </a:p>
+        </p:txBody>
+      </p:sp>
+      <p:sp>
+        <p:nvSpPr>
+          <p:cNvPr id="5" name="Rounded Rectangle 4"/>
+          <p:cNvSpPr/>
+          <p:nvPr/>
+        </p:nvSpPr>
+        <p:spPr>
+          <a:xfrm>
+            <a:off x="640080" y="1188720"/>
+            <a:ext cx="10881360" cy="4206240"/>
+          </a:xfrm>
+          <a:prstGeom prst="roundRect">
+            <a:avLst>
+              <a:gd name="adj" fmla="val 6000"/>
+            </a:avLst>
+          </a:prstGeom>
+          <a:solidFill>
+            <a:srgbClr val="05060C"/>
+          </a:solidFill>
+          <a:ln w="12700">
+            <a:solidFill>
+              <a:srgbClr val="7C5CFF"/>
+            </a:solidFill>
+          </a:ln>
+          <a:effectLst/>
+        </p:spPr>
+        <p:style>
+          <a:lnRef idx="1">
+            <a:schemeClr val="accent1"/>
+          </a:lnRef>
+          <a:fillRef idx="3">
+            <a:schemeClr val="accent1"/>
+          </a:fillRef>
+          <a:effectRef idx="2">
+            <a:schemeClr val="accent1"/>
+          </a:effectRef>
+          <a:fontRef idx="minor">
+            <a:schemeClr val="lt1"/>
+          </a:fontRef>
+        </p:style>
+        <p:txBody>
+          <a:bodyPr rtlCol="0" anchor="ctr"/>
+          <a:lstStyle/>
+          <a:p>
+            <a:pPr algn="ctr"/>
+          </a:p>
+        </p:txBody>
+      </p:sp>
+      <p:sp>
+        <p:nvSpPr>
+          <p:cNvPr id="6" name="Isosceles Triangle 5"/>
+          <p:cNvSpPr/>
+          <p:nvPr/>
+        </p:nvSpPr>
+        <p:spPr>
+          <a:xfrm rot="5400000">
+            <a:off x="5669280" y="2743200"/>
+            <a:ext cx="822960" cy="822960"/>
+          </a:xfrm>
+          <a:prstGeom prst="triangle">
+            <a:avLst/>
+          </a:prstGeom>
+          <a:solidFill>
+            <a:srgbClr val="7C5CFF"/>
+          </a:solidFill>
+          <a:ln>
+            <a:noFill/>
+          </a:ln>
+          <a:effectLst/>
+        </p:spPr>
+        <p:style>
+          <a:lnRef idx="1">
+            <a:schemeClr val="accent1"/>
+          </a:lnRef>
+          <a:fillRef idx="3">
+            <a:schemeClr val="accent1"/>
+          </a:fillRef>
+          <a:effectRef idx="2">
+            <a:schemeClr val="accent1"/>
+          </a:effectRef>
+          <a:fontRef idx="minor">
+            <a:schemeClr val="lt1"/>
+          </a:fontRef>
+        </p:style>
+        <p:txBody>
+          <a:bodyPr rtlCol="0" anchor="ctr"/>
+          <a:lstStyle/>
+          <a:p>
+            <a:pPr algn="ctr"/>
+          </a:p>
+        </p:txBody>
+      </p:sp>
+      <p:sp>
+        <p:nvSpPr>
+          <p:cNvPr id="7" name="TextBox 6"/>
           <p:cNvSpPr txBox="1"/>
           <p:nvPr/>
         </p:nvSpPr>
         <p:spPr>
           <a:xfrm>
-            <a:off x="822960" y="4206240"/>
-            <a:ext cx="6858000" cy="914400"/>
+            <a:off x="3383280" y="3703320"/>
+            <a:ext cx="5394960" cy="457200"/>
           </a:xfrm>
           <a:prstGeom prst="rect">
             <a:avLst/>
@@ -12126,14 +12528,121 @@
           </a:bodyPr>
           <a:lstStyle/>
           <a:p>
-            <a:r>
-              <a:rPr sz="1700" b="0" i="0">
+            <a:pPr algn="ctr"/>
+            <a:r>
+              <a:rPr sz="2000" b="0" i="0">
                 <a:solidFill>
                   <a:srgbClr val="9AA2C0"/>
                 </a:solidFill>
                 <a:latin typeface="Segoe UI"/>
               </a:rPr>
-              <a:t>Turning what we just saw into a checklist you can use on Monday.</a:t>
+              <a:t>temporal-web-ui-tour.mp4</a:t>
+            </a:r>
+          </a:p>
+        </p:txBody>
+      </p:sp>
+      <p:sp>
+        <p:nvSpPr>
+          <p:cNvPr id="8" name="TextBox 7"/>
+          <p:cNvSpPr txBox="1"/>
+          <p:nvPr/>
+        </p:nvSpPr>
+        <p:spPr>
+          <a:xfrm>
+            <a:off x="3383280" y="4114800"/>
+            <a:ext cx="5394960" cy="365760"/>
+          </a:xfrm>
+          <a:prstGeom prst="rect">
+            <a:avLst/>
+          </a:prstGeom>
+          <a:noFill/>
+        </p:spPr>
+        <p:txBody>
+          <a:bodyPr wrap="square" anchor="t" lIns="0" rIns="0" tIns="0" bIns="0">
+            <a:spAutoFit/>
+          </a:bodyPr>
+          <a:lstStyle/>
+          <a:p>
+            <a:pPr algn="ctr"/>
+            <a:r>
+              <a:rPr sz="1200" b="0" i="0">
+                <a:solidFill>
+                  <a:srgbClr val="6F7794"/>
+                </a:solidFill>
+                <a:latin typeface="Consolas"/>
+              </a:rPr>
+              <a:t>presentation/recordings/07-temporal-web-ui-tour.mp4</a:t>
+            </a:r>
+          </a:p>
+        </p:txBody>
+      </p:sp>
+      <p:sp>
+        <p:nvSpPr>
+          <p:cNvPr id="9" name="TextBox 8"/>
+          <p:cNvSpPr txBox="1"/>
+          <p:nvPr/>
+        </p:nvSpPr>
+        <p:spPr>
+          <a:xfrm>
+            <a:off x="640080" y="5623560"/>
+            <a:ext cx="10881360" cy="914400"/>
+          </a:xfrm>
+          <a:prstGeom prst="rect">
+            <a:avLst/>
+          </a:prstGeom>
+          <a:noFill/>
+        </p:spPr>
+        <p:txBody>
+          <a:bodyPr wrap="square" anchor="t" lIns="0" rIns="0" tIns="0" bIns="0">
+            <a:spAutoFit/>
+          </a:bodyPr>
+          <a:lstStyle/>
+          <a:p>
+            <a:pPr>
+              <a:spcAft>
+                <a:spcPts val="400"/>
+              </a:spcAft>
+            </a:pPr>
+            <a:r>
+              <a:rPr sz="1300" b="0" i="0">
+                <a:solidFill>
+                  <a:srgbClr val="9AA2C0"/>
+                </a:solidFill>
+                <a:latin typeface="Segoe UI"/>
+              </a:rPr>
+              <a:t>▸ Event history: every retry, timer, signal, child workflow</a:t>
+            </a:r>
+          </a:p>
+          <a:p>
+            <a:pPr>
+              <a:spcAft>
+                <a:spcPts val="400"/>
+              </a:spcAft>
+            </a:pPr>
+            <a:r>
+              <a:rPr sz="1300" b="0" i="0">
+                <a:solidFill>
+                  <a:srgbClr val="9AA2C0"/>
+                </a:solidFill>
+                <a:latin typeface="Segoe UI"/>
+              </a:rPr>
+              <a:t>▸ Search: ClaimStatus = “awaiting-review” AND FraudScore &gt;= 75</a:t>
+            </a:r>
+          </a:p>
+          <a:p>
+            <a:pPr>
+              <a:spcAft>
+                <a:spcPts val="400"/>
+              </a:spcAft>
+            </a:pPr>
+            <a:r>
+              <a:rPr sz="1300" b="0" i="0">
+                <a:solidFill>
+                  <a:srgbClr val="9AA2C0"/>
+                </a:solidFill>
+                <a:latin typeface="Segoe UI"/>
+              </a:rPr>
+              <a:t>▸ Run getClaimState as a raw query, no UI involved</a:t>
             </a:r>
           </a:p>
         </p:txBody>
@@ -12208,8 +12717,8 @@
         </p:nvSpPr>
         <p:spPr>
           <a:xfrm>
-            <a:off x="640080" y="502920"/>
-            <a:ext cx="10515600" cy="365760"/>
+            <a:off x="822960" y="2194560"/>
+            <a:ext cx="3657600" cy="1463040"/>
           </a:xfrm>
           <a:prstGeom prst="rect">
             <a:avLst/>
@@ -12222,19 +12731,14 @@
           </a:bodyPr>
           <a:lstStyle/>
           <a:p>
-            <a:pPr>
-              <a:defRPr>
-                <a:latin typeface="Segoe UI"/>
-              </a:defRPr>
-            </a:pPr>
-            <a:r>
-              <a:rPr sz="1300" b="1" i="0">
-                <a:solidFill>
-                  <a:srgbClr val="4C9FFE"/>
-                </a:solidFill>
-                <a:latin typeface="Segoe UI"/>
-              </a:rPr>
-              <a:t>PATTERN MATCH</a:t>
+            <a:r>
+              <a:rPr sz="7200" b="1" i="0">
+                <a:solidFill>
+                  <a:srgbClr val="7C5CFF"/>
+                </a:solidFill>
+                <a:latin typeface="Consolas"/>
+              </a:rPr>
+              <a:t>04</a:t>
             </a:r>
           </a:p>
         </p:txBody>
@@ -12247,8 +12751,8 @@
         </p:nvSpPr>
         <p:spPr>
           <a:xfrm>
-            <a:off x="640080" y="822960"/>
-            <a:ext cx="10881360" cy="1188720"/>
+            <a:off x="822960" y="3383280"/>
+            <a:ext cx="8686800" cy="1005840"/>
           </a:xfrm>
           <a:prstGeom prst="rect">
             <a:avLst/>
@@ -12262,13 +12766,13 @@
           <a:lstStyle/>
           <a:p>
             <a:r>
-              <a:rPr sz="3000" b="1" i="0">
+              <a:rPr sz="4000" b="1" i="0">
                 <a:solidFill>
                   <a:srgbClr val="E6E9F5"/>
                 </a:solidFill>
                 <a:latin typeface="Segoe UI"/>
               </a:rPr>
-              <a:t>Signals you have a good Temporal use case</a:t>
+              <a:t>Matching Your Use Case</a:t>
             </a:r>
           </a:p>
         </p:txBody>
@@ -12281,8 +12785,8 @@
         </p:nvSpPr>
         <p:spPr>
           <a:xfrm>
-            <a:off x="640080" y="6446520"/>
-            <a:ext cx="5486400" cy="320040"/>
+            <a:off x="822960" y="4206240"/>
+            <a:ext cx="6858000" cy="914400"/>
           </a:xfrm>
           <a:prstGeom prst="rect">
             <a:avLst/>
@@ -12296,186 +12800,13 @@
           <a:lstStyle/>
           <a:p>
             <a:r>
-              <a:rPr sz="1000" b="0" i="0">
+              <a:rPr sz="1700" b="0" i="0">
                 <a:solidFill>
                   <a:srgbClr val="9AA2C0"/>
                 </a:solidFill>
                 <a:latin typeface="Segoe UI"/>
               </a:rPr>
-              <a:t>◈ Temporal · Lifting the Veil</a:t>
-            </a:r>
-          </a:p>
-        </p:txBody>
-      </p:sp>
-      <p:sp>
-        <p:nvSpPr>
-          <p:cNvPr id="6" name="TextBox 5"/>
-          <p:cNvSpPr txBox="1"/>
-          <p:nvPr/>
-        </p:nvSpPr>
-        <p:spPr>
-          <a:xfrm>
-            <a:off x="640080" y="1828800"/>
-            <a:ext cx="10515600" cy="4114800"/>
-          </a:xfrm>
-          <a:prstGeom prst="rect">
-            <a:avLst/>
-          </a:prstGeom>
-          <a:noFill/>
-        </p:spPr>
-        <p:txBody>
-          <a:bodyPr wrap="square" anchor="t" lIns="0" rIns="0" tIns="0" bIns="0">
-            <a:spAutoFit/>
-          </a:bodyPr>
-          <a:lstStyle/>
-          <a:p>
-            <a:pPr>
-              <a:spcAft>
-                <a:spcPts val="1000"/>
-              </a:spcAft>
-            </a:pPr>
-            <a:r>
-              <a:rPr sz="1700" b="1" i="0">
-                <a:solidFill>
-                  <a:srgbClr val="34D399"/>
-                </a:solidFill>
-                <a:latin typeface="Segoe UI"/>
-              </a:rPr>
-              <a:t>✓  </a:t>
-            </a:r>
-            <a:r>
-              <a:rPr sz="1700" b="0" i="0">
-                <a:solidFill>
-                  <a:srgbClr val="E6E9F5"/>
-                </a:solidFill>
-                <a:latin typeface="Segoe UI"/>
-              </a:rPr>
-              <a:t>A process that spans minutes, days, or months — not one request/response</a:t>
-            </a:r>
-          </a:p>
-          <a:p>
-            <a:pPr>
-              <a:spcAft>
-                <a:spcPts val="1000"/>
-              </a:spcAft>
-            </a:pPr>
-            <a:r>
-              <a:rPr sz="1700" b="1" i="0">
-                <a:solidFill>
-                  <a:srgbClr val="34D399"/>
-                </a:solidFill>
-                <a:latin typeface="Segoe UI"/>
-              </a:rPr>
-              <a:t>✓  </a:t>
-            </a:r>
-            <a:r>
-              <a:rPr sz="1700" b="0" i="0">
-                <a:solidFill>
-                  <a:srgbClr val="E6E9F5"/>
-                </a:solidFill>
-                <a:latin typeface="Segoe UI"/>
-              </a:rPr>
-              <a:t>A human has to approve, deny, or provide info at some unknown point</a:t>
-            </a:r>
-          </a:p>
-          <a:p>
-            <a:pPr>
-              <a:spcAft>
-                <a:spcPts val="1000"/>
-              </a:spcAft>
-            </a:pPr>
-            <a:r>
-              <a:rPr sz="1700" b="1" i="0">
-                <a:solidFill>
-                  <a:srgbClr val="34D399"/>
-                </a:solidFill>
-                <a:latin typeface="Segoe UI"/>
-              </a:rPr>
-              <a:t>✓  </a:t>
-            </a:r>
-            <a:r>
-              <a:rPr sz="1700" b="0" i="0">
-                <a:solidFill>
-                  <a:srgbClr val="E6E9F5"/>
-                </a:solidFill>
-                <a:latin typeface="Segoe UI"/>
-              </a:rPr>
-              <a:t>Steps call flaky external systems that need retries with backoff</a:t>
-            </a:r>
-          </a:p>
-          <a:p>
-            <a:pPr>
-              <a:spcAft>
-                <a:spcPts val="1000"/>
-              </a:spcAft>
-            </a:pPr>
-            <a:r>
-              <a:rPr sz="1700" b="1" i="0">
-                <a:solidFill>
-                  <a:srgbClr val="34D399"/>
-                </a:solidFill>
-                <a:latin typeface="Segoe UI"/>
-              </a:rPr>
-              <a:t>✓  </a:t>
-            </a:r>
-            <a:r>
-              <a:rPr sz="1700" b="0" i="0">
-                <a:solidFill>
-                  <a:srgbClr val="E6E9F5"/>
-                </a:solidFill>
-                <a:latin typeface="Segoe UI"/>
-              </a:rPr>
-              <a:t>A crash mid-process must not lose or double-run anything</a:t>
-            </a:r>
-          </a:p>
-          <a:p>
-            <a:pPr>
-              <a:spcAft>
-                <a:spcPts val="1000"/>
-              </a:spcAft>
-            </a:pPr>
-            <a:r>
-              <a:rPr sz="1700" b="1" i="0">
-                <a:solidFill>
-                  <a:srgbClr val="34D399"/>
-                </a:solidFill>
-                <a:latin typeface="Segoe UI"/>
-              </a:rPr>
-              <a:t>✓  </a:t>
-            </a:r>
-            <a:r>
-              <a:rPr sz="1700" b="0" i="0">
-                <a:solidFill>
-                  <a:srgbClr val="E6E9F5"/>
-                </a:solidFill>
-                <a:latin typeface="Segoe UI"/>
-              </a:rPr>
-              <a:t>You need an audit trail of exactly what happened, in order</a:t>
-            </a:r>
-          </a:p>
-          <a:p>
-            <a:pPr>
-              <a:spcAft>
-                <a:spcPts val="1000"/>
-              </a:spcAft>
-            </a:pPr>
-            <a:r>
-              <a:rPr sz="1700" b="1" i="0">
-                <a:solidFill>
-                  <a:srgbClr val="34D399"/>
-                </a:solidFill>
-                <a:latin typeface="Segoe UI"/>
-              </a:rPr>
-              <a:t>✓  </a:t>
-            </a:r>
-            <a:r>
-              <a:rPr sz="1700" b="0" i="0">
-                <a:solidFill>
-                  <a:srgbClr val="E6E9F5"/>
-                </a:solidFill>
-                <a:latin typeface="Segoe UI"/>
-              </a:rPr>
-              <a:t>Multiple steps must be undone together if a later one fails (saga)</a:t>
+              <a:t>Turning what we just saw into a checklist you can use on Monday.</a:t>
             </a:r>
           </a:p>
         </p:txBody>
@@ -12576,7 +12907,7 @@
                 </a:solidFill>
                 <a:latin typeface="Segoe UI"/>
               </a:rPr>
-              <a:t>THE REUSABLE TRICK</a:t>
+              <a:t>PATTERN MATCH</a:t>
             </a:r>
           </a:p>
         </p:txBody>
@@ -12610,7 +12941,7 @@
                 </a:solidFill>
                 <a:latin typeface="Segoe UI"/>
               </a:rPr>
-              <a:t>Before you prompt: name the durability questions</a:t>
+              <a:t>Signals you have a good Temporal use case</a:t>
             </a:r>
           </a:p>
         </p:txBody>
@@ -12651,62 +12982,14 @@
       </p:sp>
       <p:sp>
         <p:nvSpPr>
-          <p:cNvPr id="6" name="Rounded Rectangle 5"/>
-          <p:cNvSpPr/>
+          <p:cNvPr id="6" name="TextBox 5"/>
+          <p:cNvSpPr txBox="1"/>
           <p:nvPr/>
         </p:nvSpPr>
         <p:spPr>
           <a:xfrm>
             <a:off x="640080" y="1828800"/>
-            <a:ext cx="5303520" cy="1828800"/>
-          </a:xfrm>
-          <a:prstGeom prst="roundRect">
-            <a:avLst>
-              <a:gd name="adj" fmla="val 6000"/>
-            </a:avLst>
-          </a:prstGeom>
-          <a:solidFill>
-            <a:srgbClr val="141828"/>
-          </a:solidFill>
-          <a:ln w="12700">
-            <a:solidFill>
-              <a:srgbClr val="232A41"/>
-            </a:solidFill>
-          </a:ln>
-          <a:effectLst/>
-        </p:spPr>
-        <p:style>
-          <a:lnRef idx="1">
-            <a:schemeClr val="accent1"/>
-          </a:lnRef>
-          <a:fillRef idx="3">
-            <a:schemeClr val="accent1"/>
-          </a:fillRef>
-          <a:effectRef idx="2">
-            <a:schemeClr val="accent1"/>
-          </a:effectRef>
-          <a:fontRef idx="minor">
-            <a:schemeClr val="lt1"/>
-          </a:fontRef>
-        </p:style>
-        <p:txBody>
-          <a:bodyPr rtlCol="0" anchor="ctr"/>
-          <a:lstStyle/>
-          <a:p>
-            <a:pPr algn="ctr"/>
-          </a:p>
-        </p:txBody>
-      </p:sp>
-      <p:sp>
-        <p:nvSpPr>
-          <p:cNvPr id="7" name="TextBox 6"/>
-          <p:cNvSpPr txBox="1"/>
-          <p:nvPr/>
-        </p:nvSpPr>
-        <p:spPr>
-          <a:xfrm>
-            <a:off x="841248" y="1975104"/>
-            <a:ext cx="4901184" cy="1554480"/>
+            <a:ext cx="10515600" cy="4114800"/>
           </a:xfrm>
           <a:prstGeom prst="rect">
             <a:avLst/>
@@ -12719,324 +13002,153 @@
           </a:bodyPr>
           <a:lstStyle/>
           <a:p>
-            <a:r>
-              <a:rPr sz="1200" b="1" i="0">
-                <a:solidFill>
-                  <a:srgbClr val="4C9FFE"/>
-                </a:solidFill>
-                <a:latin typeface="Segoe UI"/>
-              </a:rPr>
-              <a:t>ASK ABOUT FAILURE</a:t>
-            </a:r>
-          </a:p>
-          <a:p>
             <a:pPr>
-              <a:spcBef>
-                <a:spcPts val="600"/>
-              </a:spcBef>
+              <a:spcAft>
+                <a:spcPts val="1000"/>
+              </a:spcAft>
             </a:pPr>
             <a:r>
-              <a:rPr sz="1300" b="0" i="0">
-                <a:solidFill>
-                  <a:srgbClr val="9AA2C0"/>
-                </a:solidFill>
-                <a:latin typeface="Segoe UI"/>
-              </a:rPr>
-              <a:t>What activities can fail transiently? What's permanent? What must be non-retryable?</a:t>
-            </a:r>
-          </a:p>
-        </p:txBody>
-      </p:sp>
-      <p:sp>
-        <p:nvSpPr>
-          <p:cNvPr id="8" name="Rounded Rectangle 7"/>
-          <p:cNvSpPr/>
-          <p:nvPr/>
-        </p:nvSpPr>
-        <p:spPr>
-          <a:xfrm>
-            <a:off x="6217920" y="1828800"/>
-            <a:ext cx="5303520" cy="1828800"/>
-          </a:xfrm>
-          <a:prstGeom prst="roundRect">
-            <a:avLst>
-              <a:gd name="adj" fmla="val 6000"/>
-            </a:avLst>
-          </a:prstGeom>
-          <a:solidFill>
-            <a:srgbClr val="141828"/>
-          </a:solidFill>
-          <a:ln w="12700">
-            <a:solidFill>
-              <a:srgbClr val="232A41"/>
-            </a:solidFill>
-          </a:ln>
-          <a:effectLst/>
-        </p:spPr>
-        <p:style>
-          <a:lnRef idx="1">
-            <a:schemeClr val="accent1"/>
-          </a:lnRef>
-          <a:fillRef idx="3">
-            <a:schemeClr val="accent1"/>
-          </a:fillRef>
-          <a:effectRef idx="2">
-            <a:schemeClr val="accent1"/>
-          </a:effectRef>
-          <a:fontRef idx="minor">
-            <a:schemeClr val="lt1"/>
-          </a:fontRef>
-        </p:style>
-        <p:txBody>
-          <a:bodyPr rtlCol="0" anchor="ctr"/>
-          <a:lstStyle/>
-          <a:p>
-            <a:pPr algn="ctr"/>
-          </a:p>
-        </p:txBody>
-      </p:sp>
-      <p:sp>
-        <p:nvSpPr>
-          <p:cNvPr id="9" name="TextBox 8"/>
-          <p:cNvSpPr txBox="1"/>
-          <p:nvPr/>
-        </p:nvSpPr>
-        <p:spPr>
-          <a:xfrm>
-            <a:off x="6419088" y="1975104"/>
-            <a:ext cx="4901184" cy="1554480"/>
-          </a:xfrm>
-          <a:prstGeom prst="rect">
-            <a:avLst/>
-          </a:prstGeom>
-          <a:noFill/>
-        </p:spPr>
-        <p:txBody>
-          <a:bodyPr wrap="square" anchor="t" lIns="0" rIns="0" tIns="0" bIns="0">
-            <a:spAutoFit/>
-          </a:bodyPr>
-          <a:lstStyle/>
-          <a:p>
-            <a:r>
-              <a:rPr sz="1200" b="1" i="0">
-                <a:solidFill>
-                  <a:srgbClr val="4C9FFE"/>
-                </a:solidFill>
-                <a:latin typeface="Segoe UI"/>
-              </a:rPr>
-              <a:t>ASK ABOUT WAITING</a:t>
+              <a:rPr sz="1700" b="1" i="0">
+                <a:solidFill>
+                  <a:srgbClr val="34D399"/>
+                </a:solidFill>
+                <a:latin typeface="Segoe UI"/>
+              </a:rPr>
+              <a:t>✓  </a:t>
+            </a:r>
+            <a:r>
+              <a:rPr sz="1700" b="0" i="0">
+                <a:solidFill>
+                  <a:srgbClr val="E6E9F5"/>
+                </a:solidFill>
+                <a:latin typeface="Segoe UI"/>
+              </a:rPr>
+              <a:t>A process that spans minutes, days, or months — not one request/response</a:t>
             </a:r>
           </a:p>
           <a:p>
             <a:pPr>
-              <a:spcBef>
-                <a:spcPts val="600"/>
-              </a:spcBef>
+              <a:spcAft>
+                <a:spcPts val="1000"/>
+              </a:spcAft>
             </a:pPr>
             <a:r>
-              <a:rPr sz="1300" b="0" i="0">
-                <a:solidFill>
-                  <a:srgbClr val="9AA2C0"/>
-                </a:solidFill>
-                <a:latin typeface="Segoe UI"/>
-              </a:rPr>
-              <a:t>What waits on a human? For how long? What happens if nobody answers?</a:t>
-            </a:r>
-          </a:p>
-        </p:txBody>
-      </p:sp>
-      <p:sp>
-        <p:nvSpPr>
-          <p:cNvPr id="10" name="Rounded Rectangle 9"/>
-          <p:cNvSpPr/>
-          <p:nvPr/>
-        </p:nvSpPr>
-        <p:spPr>
-          <a:xfrm>
-            <a:off x="640080" y="3931920"/>
-            <a:ext cx="5303520" cy="1828800"/>
-          </a:xfrm>
-          <a:prstGeom prst="roundRect">
-            <a:avLst>
-              <a:gd name="adj" fmla="val 6000"/>
-            </a:avLst>
-          </a:prstGeom>
-          <a:solidFill>
-            <a:srgbClr val="141828"/>
-          </a:solidFill>
-          <a:ln w="12700">
-            <a:solidFill>
-              <a:srgbClr val="232A41"/>
-            </a:solidFill>
-          </a:ln>
-          <a:effectLst/>
-        </p:spPr>
-        <p:style>
-          <a:lnRef idx="1">
-            <a:schemeClr val="accent1"/>
-          </a:lnRef>
-          <a:fillRef idx="3">
-            <a:schemeClr val="accent1"/>
-          </a:fillRef>
-          <a:effectRef idx="2">
-            <a:schemeClr val="accent1"/>
-          </a:effectRef>
-          <a:fontRef idx="minor">
-            <a:schemeClr val="lt1"/>
-          </a:fontRef>
-        </p:style>
-        <p:txBody>
-          <a:bodyPr rtlCol="0" anchor="ctr"/>
-          <a:lstStyle/>
-          <a:p>
-            <a:pPr algn="ctr"/>
-          </a:p>
-        </p:txBody>
-      </p:sp>
-      <p:sp>
-        <p:nvSpPr>
-          <p:cNvPr id="11" name="TextBox 10"/>
-          <p:cNvSpPr txBox="1"/>
-          <p:nvPr/>
-        </p:nvSpPr>
-        <p:spPr>
-          <a:xfrm>
-            <a:off x="841248" y="4078224"/>
-            <a:ext cx="4901184" cy="1554480"/>
-          </a:xfrm>
-          <a:prstGeom prst="rect">
-            <a:avLst/>
-          </a:prstGeom>
-          <a:noFill/>
-        </p:spPr>
-        <p:txBody>
-          <a:bodyPr wrap="square" anchor="t" lIns="0" rIns="0" tIns="0" bIns="0">
-            <a:spAutoFit/>
-          </a:bodyPr>
-          <a:lstStyle/>
-          <a:p>
-            <a:r>
-              <a:rPr sz="1200" b="1" i="0">
-                <a:solidFill>
-                  <a:srgbClr val="4C9FFE"/>
-                </a:solidFill>
-                <a:latin typeface="Segoe UI"/>
-              </a:rPr>
-              <a:t>ASK ABOUT STATE</a:t>
+              <a:rPr sz="1700" b="1" i="0">
+                <a:solidFill>
+                  <a:srgbClr val="34D399"/>
+                </a:solidFill>
+                <a:latin typeface="Segoe UI"/>
+              </a:rPr>
+              <a:t>✓  </a:t>
+            </a:r>
+            <a:r>
+              <a:rPr sz="1700" b="0" i="0">
+                <a:solidFill>
+                  <a:srgbClr val="E6E9F5"/>
+                </a:solidFill>
+                <a:latin typeface="Segoe UI"/>
+              </a:rPr>
+              <a:t>A human has to approve, deny, or provide info at some unknown point</a:t>
             </a:r>
           </a:p>
           <a:p>
             <a:pPr>
-              <a:spcBef>
-                <a:spcPts val="600"/>
-              </a:spcBef>
+              <a:spcAft>
+                <a:spcPts val="1000"/>
+              </a:spcAft>
             </a:pPr>
             <a:r>
-              <a:rPr sz="1300" b="0" i="0">
-                <a:solidFill>
-                  <a:srgbClr val="9AA2C0"/>
-                </a:solidFill>
-                <a:latin typeface="Segoe UI"/>
-              </a:rPr>
-              <a:t>What must survive a crash? Who is the source of truth?</a:t>
-            </a:r>
-          </a:p>
-        </p:txBody>
-      </p:sp>
-      <p:sp>
-        <p:nvSpPr>
-          <p:cNvPr id="12" name="Rounded Rectangle 11"/>
-          <p:cNvSpPr/>
-          <p:nvPr/>
-        </p:nvSpPr>
-        <p:spPr>
-          <a:xfrm>
-            <a:off x="6217920" y="3931920"/>
-            <a:ext cx="5303520" cy="1828800"/>
-          </a:xfrm>
-          <a:prstGeom prst="roundRect">
-            <a:avLst>
-              <a:gd name="adj" fmla="val 6000"/>
-            </a:avLst>
-          </a:prstGeom>
-          <a:solidFill>
-            <a:srgbClr val="141828"/>
-          </a:solidFill>
-          <a:ln w="12700">
-            <a:solidFill>
-              <a:srgbClr val="232A41"/>
-            </a:solidFill>
-          </a:ln>
-          <a:effectLst/>
-        </p:spPr>
-        <p:style>
-          <a:lnRef idx="1">
-            <a:schemeClr val="accent1"/>
-          </a:lnRef>
-          <a:fillRef idx="3">
-            <a:schemeClr val="accent1"/>
-          </a:fillRef>
-          <a:effectRef idx="2">
-            <a:schemeClr val="accent1"/>
-          </a:effectRef>
-          <a:fontRef idx="minor">
-            <a:schemeClr val="lt1"/>
-          </a:fontRef>
-        </p:style>
-        <p:txBody>
-          <a:bodyPr rtlCol="0" anchor="ctr"/>
-          <a:lstStyle/>
-          <a:p>
-            <a:pPr algn="ctr"/>
-          </a:p>
-        </p:txBody>
-      </p:sp>
-      <p:sp>
-        <p:nvSpPr>
-          <p:cNvPr id="13" name="TextBox 12"/>
-          <p:cNvSpPr txBox="1"/>
-          <p:nvPr/>
-        </p:nvSpPr>
-        <p:spPr>
-          <a:xfrm>
-            <a:off x="6419088" y="4078224"/>
-            <a:ext cx="4901184" cy="1554480"/>
-          </a:xfrm>
-          <a:prstGeom prst="rect">
-            <a:avLst/>
-          </a:prstGeom>
-          <a:noFill/>
-        </p:spPr>
-        <p:txBody>
-          <a:bodyPr wrap="square" anchor="t" lIns="0" rIns="0" tIns="0" bIns="0">
-            <a:spAutoFit/>
-          </a:bodyPr>
-          <a:lstStyle/>
-          <a:p>
-            <a:r>
-              <a:rPr sz="1200" b="1" i="0">
-                <a:solidFill>
-                  <a:srgbClr val="4C9FFE"/>
-                </a:solidFill>
-                <a:latin typeface="Segoe UI"/>
-              </a:rPr>
-              <a:t>ASK ABOUT BOUNDARIES</a:t>
+              <a:rPr sz="1700" b="1" i="0">
+                <a:solidFill>
+                  <a:srgbClr val="34D399"/>
+                </a:solidFill>
+                <a:latin typeface="Segoe UI"/>
+              </a:rPr>
+              <a:t>✓  </a:t>
+            </a:r>
+            <a:r>
+              <a:rPr sz="1700" b="0" i="0">
+                <a:solidFill>
+                  <a:srgbClr val="E6E9F5"/>
+                </a:solidFill>
+                <a:latin typeface="Segoe UI"/>
+              </a:rPr>
+              <a:t>Steps call flaky external systems that need retries with backoff</a:t>
             </a:r>
           </a:p>
           <a:p>
             <a:pPr>
-              <a:spcBef>
-                <a:spcPts val="600"/>
-              </a:spcBef>
+              <a:spcAft>
+                <a:spcPts val="1000"/>
+              </a:spcAft>
             </a:pPr>
             <a:r>
-              <a:rPr sz="1300" b="0" i="0">
-                <a:solidFill>
-                  <a:srgbClr val="9AA2C0"/>
-                </a:solidFill>
-                <a:latin typeface="Segoe UI"/>
-              </a:rPr>
-              <a:t>Where does UI end and API begin? Where does API end and worker begin?</a:t>
+              <a:rPr sz="1700" b="1" i="0">
+                <a:solidFill>
+                  <a:srgbClr val="34D399"/>
+                </a:solidFill>
+                <a:latin typeface="Segoe UI"/>
+              </a:rPr>
+              <a:t>✓  </a:t>
+            </a:r>
+            <a:r>
+              <a:rPr sz="1700" b="0" i="0">
+                <a:solidFill>
+                  <a:srgbClr val="E6E9F5"/>
+                </a:solidFill>
+                <a:latin typeface="Segoe UI"/>
+              </a:rPr>
+              <a:t>A crash mid-process must not lose or double-run anything</a:t>
+            </a:r>
+          </a:p>
+          <a:p>
+            <a:pPr>
+              <a:spcAft>
+                <a:spcPts val="1000"/>
+              </a:spcAft>
+            </a:pPr>
+            <a:r>
+              <a:rPr sz="1700" b="1" i="0">
+                <a:solidFill>
+                  <a:srgbClr val="34D399"/>
+                </a:solidFill>
+                <a:latin typeface="Segoe UI"/>
+              </a:rPr>
+              <a:t>✓  </a:t>
+            </a:r>
+            <a:r>
+              <a:rPr sz="1700" b="0" i="0">
+                <a:solidFill>
+                  <a:srgbClr val="E6E9F5"/>
+                </a:solidFill>
+                <a:latin typeface="Segoe UI"/>
+              </a:rPr>
+              <a:t>You need an audit trail of exactly what happened, in order</a:t>
+            </a:r>
+          </a:p>
+          <a:p>
+            <a:pPr>
+              <a:spcAft>
+                <a:spcPts val="1000"/>
+              </a:spcAft>
+            </a:pPr>
+            <a:r>
+              <a:rPr sz="1700" b="1" i="0">
+                <a:solidFill>
+                  <a:srgbClr val="34D399"/>
+                </a:solidFill>
+                <a:latin typeface="Segoe UI"/>
+              </a:rPr>
+              <a:t>✓  </a:t>
+            </a:r>
+            <a:r>
+              <a:rPr sz="1700" b="0" i="0">
+                <a:solidFill>
+                  <a:srgbClr val="E6E9F5"/>
+                </a:solidFill>
+                <a:latin typeface="Segoe UI"/>
+              </a:rPr>
+              <a:t>Multiple steps must be undone together if a later one fails (saga)</a:t>
             </a:r>
           </a:p>
         </p:txBody>
@@ -13137,7 +13249,7 @@
                 </a:solidFill>
                 <a:latin typeface="Segoe UI"/>
               </a:rPr>
-              <a:t>HOMEWORK</a:t>
+              <a:t>THE REUSABLE TRICK</a:t>
             </a:r>
           </a:p>
         </p:txBody>
@@ -13171,7 +13283,7 @@
                 </a:solidFill>
                 <a:latin typeface="Segoe UI"/>
               </a:rPr>
-              <a:t>Try this yourself, this week</a:t>
+              <a:t>Before you prompt: name the durability questions</a:t>
             </a:r>
           </a:p>
         </p:txBody>
@@ -13219,7 +13331,7 @@
         <p:spPr>
           <a:xfrm>
             <a:off x="640080" y="1828800"/>
-            <a:ext cx="10881360" cy="2377440"/>
+            <a:ext cx="5303520" cy="1828800"/>
           </a:xfrm>
           <a:prstGeom prst="roundRect">
             <a:avLst>
@@ -13227,7 +13339,7 @@
             </a:avLst>
           </a:prstGeom>
           <a:solidFill>
-            <a:srgbClr val="0D1020"/>
+            <a:srgbClr val="141828"/>
           </a:solidFill>
           <a:ln w="12700">
             <a:solidFill>
@@ -13260,20 +13372,72 @@
       </p:sp>
       <p:sp>
         <p:nvSpPr>
-          <p:cNvPr id="7" name="Rounded Rectangle 6"/>
+          <p:cNvPr id="7" name="TextBox 6"/>
+          <p:cNvSpPr txBox="1"/>
+          <p:nvPr/>
+        </p:nvSpPr>
+        <p:spPr>
+          <a:xfrm>
+            <a:off x="841248" y="1975104"/>
+            <a:ext cx="4901184" cy="1554480"/>
+          </a:xfrm>
+          <a:prstGeom prst="rect">
+            <a:avLst/>
+          </a:prstGeom>
+          <a:noFill/>
+        </p:spPr>
+        <p:txBody>
+          <a:bodyPr wrap="square" anchor="t" lIns="0" rIns="0" tIns="0" bIns="0">
+            <a:spAutoFit/>
+          </a:bodyPr>
+          <a:lstStyle/>
+          <a:p>
+            <a:r>
+              <a:rPr sz="1200" b="1" i="0">
+                <a:solidFill>
+                  <a:srgbClr val="4C9FFE"/>
+                </a:solidFill>
+                <a:latin typeface="Segoe UI"/>
+              </a:rPr>
+              <a:t>ASK ABOUT FAILURE</a:t>
+            </a:r>
+          </a:p>
+          <a:p>
+            <a:pPr>
+              <a:spcBef>
+                <a:spcPts val="600"/>
+              </a:spcBef>
+            </a:pPr>
+            <a:r>
+              <a:rPr sz="1300" b="0" i="0">
+                <a:solidFill>
+                  <a:srgbClr val="9AA2C0"/>
+                </a:solidFill>
+                <a:latin typeface="Segoe UI"/>
+              </a:rPr>
+              <a:t>What activities can fail transiently? What's permanent? What must be non-retryable?</a:t>
+            </a:r>
+          </a:p>
+        </p:txBody>
+      </p:sp>
+      <p:sp>
+        <p:nvSpPr>
+          <p:cNvPr id="8" name="Rounded Rectangle 7"/>
           <p:cNvSpPr/>
           <p:nvPr/>
         </p:nvSpPr>
         <p:spPr>
           <a:xfrm>
-            <a:off x="640080" y="1828800"/>
-            <a:ext cx="10881360" cy="365760"/>
+            <a:off x="6217920" y="1828800"/>
+            <a:ext cx="5303520" cy="1828800"/>
           </a:xfrm>
           <a:prstGeom prst="roundRect">
-            <a:avLst/>
+            <a:avLst>
+              <a:gd name="adj" fmla="val 6000"/>
+            </a:avLst>
           </a:prstGeom>
           <a:solidFill>
-            <a:srgbClr val="151934"/>
+            <a:srgbClr val="141828"/>
           </a:solidFill>
           <a:ln w="12700">
             <a:solidFill>
@@ -13306,14 +13470,14 @@
       </p:sp>
       <p:sp>
         <p:nvSpPr>
-          <p:cNvPr id="8" name="TextBox 7"/>
+          <p:cNvPr id="9" name="TextBox 8"/>
           <p:cNvSpPr txBox="1"/>
           <p:nvPr/>
         </p:nvSpPr>
         <p:spPr>
           <a:xfrm>
-            <a:off x="822960" y="1883664"/>
-            <a:ext cx="10515600" cy="274320"/>
+            <a:off x="6419088" y="1975104"/>
+            <a:ext cx="4901184" cy="1554480"/>
           </a:xfrm>
           <a:prstGeom prst="rect">
             <a:avLst/>
@@ -13327,27 +13491,91 @@
           <a:lstStyle/>
           <a:p>
             <a:r>
-              <a:rPr sz="1100" b="0" i="0">
+              <a:rPr sz="1200" b="1" i="0">
+                <a:solidFill>
+                  <a:srgbClr val="4C9FFE"/>
+                </a:solidFill>
+                <a:latin typeface="Segoe UI"/>
+              </a:rPr>
+              <a:t>ASK ABOUT WAITING</a:t>
+            </a:r>
+          </a:p>
+          <a:p>
+            <a:pPr>
+              <a:spcBef>
+                <a:spcPts val="600"/>
+              </a:spcBef>
+            </a:pPr>
+            <a:r>
+              <a:rPr sz="1300" b="0" i="0">
                 <a:solidFill>
                   <a:srgbClr val="9AA2C0"/>
                 </a:solidFill>
-                <a:latin typeface="Consolas"/>
-              </a:rPr>
-              <a:t>●  ●  ●    prompt-template.txt</a:t>
-            </a:r>
-          </a:p>
-        </p:txBody>
-      </p:sp>
-      <p:sp>
-        <p:nvSpPr>
-          <p:cNvPr id="9" name="TextBox 8"/>
+                <a:latin typeface="Segoe UI"/>
+              </a:rPr>
+              <a:t>What waits on a human? For how long? What happens if nobody answers?</a:t>
+            </a:r>
+          </a:p>
+        </p:txBody>
+      </p:sp>
+      <p:sp>
+        <p:nvSpPr>
+          <p:cNvPr id="10" name="Rounded Rectangle 9"/>
+          <p:cNvSpPr/>
+          <p:nvPr/>
+        </p:nvSpPr>
+        <p:spPr>
+          <a:xfrm>
+            <a:off x="640080" y="3931920"/>
+            <a:ext cx="5303520" cy="1828800"/>
+          </a:xfrm>
+          <a:prstGeom prst="roundRect">
+            <a:avLst>
+              <a:gd name="adj" fmla="val 6000"/>
+            </a:avLst>
+          </a:prstGeom>
+          <a:solidFill>
+            <a:srgbClr val="141828"/>
+          </a:solidFill>
+          <a:ln w="12700">
+            <a:solidFill>
+              <a:srgbClr val="232A41"/>
+            </a:solidFill>
+          </a:ln>
+          <a:effectLst/>
+        </p:spPr>
+        <p:style>
+          <a:lnRef idx="1">
+            <a:schemeClr val="accent1"/>
+          </a:lnRef>
+          <a:fillRef idx="3">
+            <a:schemeClr val="accent1"/>
+          </a:fillRef>
+          <a:effectRef idx="2">
+            <a:schemeClr val="accent1"/>
+          </a:effectRef>
+          <a:fontRef idx="minor">
+            <a:schemeClr val="lt1"/>
+          </a:fontRef>
+        </p:style>
+        <p:txBody>
+          <a:bodyPr rtlCol="0" anchor="ctr"/>
+          <a:lstStyle/>
+          <a:p>
+            <a:pPr algn="ctr"/>
+          </a:p>
+        </p:txBody>
+      </p:sp>
+      <p:sp>
+        <p:nvSpPr>
+          <p:cNvPr id="11" name="TextBox 10"/>
           <p:cNvSpPr txBox="1"/>
           <p:nvPr/>
         </p:nvSpPr>
         <p:spPr>
           <a:xfrm>
-            <a:off x="868680" y="2331720"/>
-            <a:ext cx="10424160" cy="1691640"/>
+            <a:off x="841248" y="4078224"/>
+            <a:ext cx="4901184" cy="1554480"/>
           </a:xfrm>
           <a:prstGeom prst="rect">
             <a:avLst/>
@@ -13360,19 +13588,128 @@
           </a:bodyPr>
           <a:lstStyle/>
           <a:p>
+            <a:r>
+              <a:rPr sz="1200" b="1" i="0">
+                <a:solidFill>
+                  <a:srgbClr val="4C9FFE"/>
+                </a:solidFill>
+                <a:latin typeface="Segoe UI"/>
+              </a:rPr>
+              <a:t>ASK ABOUT STATE</a:t>
+            </a:r>
+          </a:p>
+          <a:p>
             <a:pPr>
-              <a:lnSpc>
-                <a:spcPct val="130000"/>
-              </a:lnSpc>
+              <a:spcBef>
+                <a:spcPts val="600"/>
+              </a:spcBef>
             </a:pPr>
             <a:r>
-              <a:rPr sz="1400" b="0" i="0">
-                <a:solidFill>
-                  <a:srgbClr val="D6DCF5"/>
-                </a:solidFill>
-                <a:latin typeface="Consolas"/>
-              </a:rPr>
-              <a:t>&gt; Here's my rough idea: [describe your process in 2-3 sentences]. Turn this into a spec for a coding agent building it on Temporal. Explicitly call out: which steps need retries and what kind of failures they should tolerate, where a human needs to approve/reject/provide input and how long we should wait, what a crash mid-process must not lose, and how the UI/API/worker boundaries should be drawn. Then build it.</a:t>
+              <a:rPr sz="1300" b="0" i="0">
+                <a:solidFill>
+                  <a:srgbClr val="9AA2C0"/>
+                </a:solidFill>
+                <a:latin typeface="Segoe UI"/>
+              </a:rPr>
+              <a:t>What must survive a crash? Who is the source of truth?</a:t>
+            </a:r>
+          </a:p>
+        </p:txBody>
+      </p:sp>
+      <p:sp>
+        <p:nvSpPr>
+          <p:cNvPr id="12" name="Rounded Rectangle 11"/>
+          <p:cNvSpPr/>
+          <p:nvPr/>
+        </p:nvSpPr>
+        <p:spPr>
+          <a:xfrm>
+            <a:off x="6217920" y="3931920"/>
+            <a:ext cx="5303520" cy="1828800"/>
+          </a:xfrm>
+          <a:prstGeom prst="roundRect">
+            <a:avLst>
+              <a:gd name="adj" fmla="val 6000"/>
+            </a:avLst>
+          </a:prstGeom>
+          <a:solidFill>
+            <a:srgbClr val="141828"/>
+          </a:solidFill>
+          <a:ln w="12700">
+            <a:solidFill>
+              <a:srgbClr val="232A41"/>
+            </a:solidFill>
+          </a:ln>
+          <a:effectLst/>
+        </p:spPr>
+        <p:style>
+          <a:lnRef idx="1">
+            <a:schemeClr val="accent1"/>
+          </a:lnRef>
+          <a:fillRef idx="3">
+            <a:schemeClr val="accent1"/>
+          </a:fillRef>
+          <a:effectRef idx="2">
+            <a:schemeClr val="accent1"/>
+          </a:effectRef>
+          <a:fontRef idx="minor">
+            <a:schemeClr val="lt1"/>
+          </a:fontRef>
+        </p:style>
+        <p:txBody>
+          <a:bodyPr rtlCol="0" anchor="ctr"/>
+          <a:lstStyle/>
+          <a:p>
+            <a:pPr algn="ctr"/>
+          </a:p>
+        </p:txBody>
+      </p:sp>
+      <p:sp>
+        <p:nvSpPr>
+          <p:cNvPr id="13" name="TextBox 12"/>
+          <p:cNvSpPr txBox="1"/>
+          <p:nvPr/>
+        </p:nvSpPr>
+        <p:spPr>
+          <a:xfrm>
+            <a:off x="6419088" y="4078224"/>
+            <a:ext cx="4901184" cy="1554480"/>
+          </a:xfrm>
+          <a:prstGeom prst="rect">
+            <a:avLst/>
+          </a:prstGeom>
+          <a:noFill/>
+        </p:spPr>
+        <p:txBody>
+          <a:bodyPr wrap="square" anchor="t" lIns="0" rIns="0" tIns="0" bIns="0">
+            <a:spAutoFit/>
+          </a:bodyPr>
+          <a:lstStyle/>
+          <a:p>
+            <a:r>
+              <a:rPr sz="1200" b="1" i="0">
+                <a:solidFill>
+                  <a:srgbClr val="4C9FFE"/>
+                </a:solidFill>
+                <a:latin typeface="Segoe UI"/>
+              </a:rPr>
+              <a:t>ASK ABOUT BOUNDARIES</a:t>
+            </a:r>
+          </a:p>
+          <a:p>
+            <a:pPr>
+              <a:spcBef>
+                <a:spcPts val="600"/>
+              </a:spcBef>
+            </a:pPr>
+            <a:r>
+              <a:rPr sz="1300" b="0" i="0">
+                <a:solidFill>
+                  <a:srgbClr val="9AA2C0"/>
+                </a:solidFill>
+                <a:latin typeface="Segoe UI"/>
+              </a:rPr>
+              <a:t>Where does UI end and API begin? Where does API end and worker begin?</a:t>
             </a:r>
           </a:p>
         </p:txBody>
@@ -13447,7 +13784,7 @@
         </p:nvSpPr>
         <p:spPr>
           <a:xfrm>
-            <a:off x="640080" y="1691640"/>
+            <a:off x="640080" y="502920"/>
             <a:ext cx="10515600" cy="365760"/>
           </a:xfrm>
           <a:prstGeom prst="rect">
@@ -13473,7 +13810,7 @@
                 </a:solidFill>
                 <a:latin typeface="Segoe UI"/>
               </a:rPr>
-              <a:t>RECAP</a:t>
+              <a:t>HOMEWORK</a:t>
             </a:r>
           </a:p>
         </p:txBody>
@@ -13486,8 +13823,8 @@
         </p:nvSpPr>
         <p:spPr>
           <a:xfrm>
-            <a:off x="822960" y="2103120"/>
-            <a:ext cx="9875520" cy="2926080"/>
+            <a:off x="640080" y="822960"/>
+            <a:ext cx="10881360" cy="1188720"/>
           </a:xfrm>
           <a:prstGeom prst="rect">
             <a:avLst/>
@@ -13501,32 +13838,13 @@
           <a:lstStyle/>
           <a:p>
             <a:r>
-              <a:rPr sz="3200" b="1" i="0">
+              <a:rPr sz="3000" b="1" i="0">
                 <a:solidFill>
                   <a:srgbClr val="E6E9F5"/>
                 </a:solidFill>
                 <a:latin typeface="Segoe UI"/>
               </a:rPr>
-              <a:t>The veil isn't Temporal.
-</a:t>
-            </a:r>
-            <a:r>
-              <a:rPr sz="3200" b="1" i="0">
-                <a:solidFill>
-                  <a:srgbClr val="E6E9F5"/>
-                </a:solidFill>
-                <a:latin typeface="Segoe UI"/>
-              </a:rPr>
-              <a:t>It's </a:t>
-            </a:r>
-            <a:r>
-              <a:rPr sz="3200" b="1" i="0">
-                <a:solidFill>
-                  <a:srgbClr val="4C9FFE"/>
-                </a:solidFill>
-                <a:latin typeface="Segoe UI"/>
-              </a:rPr>
-              <a:t>under-specified requirements.</a:t>
+              <a:t>Try this yourself, this week</a:t>
             </a:r>
           </a:p>
         </p:txBody>
@@ -13539,8 +13857,8 @@
         </p:nvSpPr>
         <p:spPr>
           <a:xfrm>
-            <a:off x="822960" y="5257800"/>
-            <a:ext cx="8961120" cy="731520"/>
+            <a:off x="640080" y="6446520"/>
+            <a:ext cx="5486400" cy="320040"/>
           </a:xfrm>
           <a:prstGeom prst="rect">
             <a:avLst/>
@@ -13554,13 +13872,180 @@
           <a:lstStyle/>
           <a:p>
             <a:r>
-              <a:rPr sz="1500" b="0" i="0">
+              <a:rPr sz="1000" b="0" i="0">
                 <a:solidFill>
                   <a:srgbClr val="9AA2C0"/>
                 </a:solidFill>
                 <a:latin typeface="Segoe UI"/>
               </a:rPr>
-              <a:t>Name the failures, the waits, and the source of truth — Temporal does the rest.</a:t>
+              <a:t>◈ Temporal · Lifting the Veil</a:t>
+            </a:r>
+          </a:p>
+        </p:txBody>
+      </p:sp>
+      <p:sp>
+        <p:nvSpPr>
+          <p:cNvPr id="6" name="Rounded Rectangle 5"/>
+          <p:cNvSpPr/>
+          <p:nvPr/>
+        </p:nvSpPr>
+        <p:spPr>
+          <a:xfrm>
+            <a:off x="640080" y="1828800"/>
+            <a:ext cx="10881360" cy="2377440"/>
+          </a:xfrm>
+          <a:prstGeom prst="roundRect">
+            <a:avLst>
+              <a:gd name="adj" fmla="val 6000"/>
+            </a:avLst>
+          </a:prstGeom>
+          <a:solidFill>
+            <a:srgbClr val="0D1020"/>
+          </a:solidFill>
+          <a:ln w="12700">
+            <a:solidFill>
+              <a:srgbClr val="232A41"/>
+            </a:solidFill>
+          </a:ln>
+          <a:effectLst/>
+        </p:spPr>
+        <p:style>
+          <a:lnRef idx="1">
+            <a:schemeClr val="accent1"/>
+          </a:lnRef>
+          <a:fillRef idx="3">
+            <a:schemeClr val="accent1"/>
+          </a:fillRef>
+          <a:effectRef idx="2">
+            <a:schemeClr val="accent1"/>
+          </a:effectRef>
+          <a:fontRef idx="minor">
+            <a:schemeClr val="lt1"/>
+          </a:fontRef>
+        </p:style>
+        <p:txBody>
+          <a:bodyPr rtlCol="0" anchor="ctr"/>
+          <a:lstStyle/>
+          <a:p>
+            <a:pPr algn="ctr"/>
+          </a:p>
+        </p:txBody>
+      </p:sp>
+      <p:sp>
+        <p:nvSpPr>
+          <p:cNvPr id="7" name="Rounded Rectangle 6"/>
+          <p:cNvSpPr/>
+          <p:nvPr/>
+        </p:nvSpPr>
+        <p:spPr>
+          <a:xfrm>
+            <a:off x="640080" y="1828800"/>
+            <a:ext cx="10881360" cy="365760"/>
+          </a:xfrm>
+          <a:prstGeom prst="roundRect">
+            <a:avLst/>
+          </a:prstGeom>
+          <a:solidFill>
+            <a:srgbClr val="151934"/>
+          </a:solidFill>
+          <a:ln w="12700">
+            <a:solidFill>
+              <a:srgbClr val="232A41"/>
+            </a:solidFill>
+          </a:ln>
+          <a:effectLst/>
+        </p:spPr>
+        <p:style>
+          <a:lnRef idx="1">
+            <a:schemeClr val="accent1"/>
+          </a:lnRef>
+          <a:fillRef idx="3">
+            <a:schemeClr val="accent1"/>
+          </a:fillRef>
+          <a:effectRef idx="2">
+            <a:schemeClr val="accent1"/>
+          </a:effectRef>
+          <a:fontRef idx="minor">
+            <a:schemeClr val="lt1"/>
+          </a:fontRef>
+        </p:style>
+        <p:txBody>
+          <a:bodyPr rtlCol="0" anchor="ctr"/>
+          <a:lstStyle/>
+          <a:p>
+            <a:pPr algn="ctr"/>
+          </a:p>
+        </p:txBody>
+      </p:sp>
+      <p:sp>
+        <p:nvSpPr>
+          <p:cNvPr id="8" name="TextBox 7"/>
+          <p:cNvSpPr txBox="1"/>
+          <p:nvPr/>
+        </p:nvSpPr>
+        <p:spPr>
+          <a:xfrm>
+            <a:off x="822960" y="1883664"/>
+            <a:ext cx="10515600" cy="274320"/>
+          </a:xfrm>
+          <a:prstGeom prst="rect">
+            <a:avLst/>
+          </a:prstGeom>
+          <a:noFill/>
+        </p:spPr>
+        <p:txBody>
+          <a:bodyPr wrap="square" anchor="t" lIns="0" rIns="0" tIns="0" bIns="0">
+            <a:spAutoFit/>
+          </a:bodyPr>
+          <a:lstStyle/>
+          <a:p>
+            <a:r>
+              <a:rPr sz="1100" b="0" i="0">
+                <a:solidFill>
+                  <a:srgbClr val="9AA2C0"/>
+                </a:solidFill>
+                <a:latin typeface="Consolas"/>
+              </a:rPr>
+              <a:t>●  ●  ●    prompt-template.txt</a:t>
+            </a:r>
+          </a:p>
+        </p:txBody>
+      </p:sp>
+      <p:sp>
+        <p:nvSpPr>
+          <p:cNvPr id="9" name="TextBox 8"/>
+          <p:cNvSpPr txBox="1"/>
+          <p:nvPr/>
+        </p:nvSpPr>
+        <p:spPr>
+          <a:xfrm>
+            <a:off x="868680" y="2331720"/>
+            <a:ext cx="10424160" cy="1691640"/>
+          </a:xfrm>
+          <a:prstGeom prst="rect">
+            <a:avLst/>
+          </a:prstGeom>
+          <a:noFill/>
+        </p:spPr>
+        <p:txBody>
+          <a:bodyPr wrap="square" anchor="t" lIns="0" rIns="0" tIns="0" bIns="0">
+            <a:spAutoFit/>
+          </a:bodyPr>
+          <a:lstStyle/>
+          <a:p>
+            <a:pPr>
+              <a:lnSpc>
+                <a:spcPct val="130000"/>
+              </a:lnSpc>
+            </a:pPr>
+            <a:r>
+              <a:rPr sz="1400" b="0" i="0">
+                <a:solidFill>
+                  <a:srgbClr val="D6DCF5"/>
+                </a:solidFill>
+                <a:latin typeface="Consolas"/>
+              </a:rPr>
+              <a:t>&gt; Here's my rough idea: [describe your process in 2-3 sentences]. Turn this into a spec for a coding agent building it on Temporal. Explicitly call out: which steps need retries and what kind of failures they should tolerate, where a human needs to approve/reject/provide input and how long we should wait, what a crash mid-process must not lose, and how the UI/API/worker boundaries should be drawn. Then build it.</a:t>
             </a:r>
           </a:p>
         </p:txBody>
@@ -13635,7 +14120,7 @@
         </p:nvSpPr>
         <p:spPr>
           <a:xfrm>
-            <a:off x="640080" y="502920"/>
+            <a:off x="640080" y="1691640"/>
             <a:ext cx="10515600" cy="365760"/>
           </a:xfrm>
           <a:prstGeom prst="rect">
@@ -13661,7 +14146,7 @@
                 </a:solidFill>
                 <a:latin typeface="Segoe UI"/>
               </a:rPr>
-              <a:t>GO BUILD SOMETHING</a:t>
+              <a:t>RECAP</a:t>
             </a:r>
           </a:p>
         </p:txBody>
@@ -13674,8 +14159,8 @@
         </p:nvSpPr>
         <p:spPr>
           <a:xfrm>
-            <a:off x="640080" y="822960"/>
-            <a:ext cx="10881360" cy="1188720"/>
+            <a:off x="822960" y="2103120"/>
+            <a:ext cx="9875520" cy="2926080"/>
           </a:xfrm>
           <a:prstGeom prst="rect">
             <a:avLst/>
@@ -13689,13 +14174,32 @@
           <a:lstStyle/>
           <a:p>
             <a:r>
-              <a:rPr sz="3000" b="1" i="0">
+              <a:rPr sz="3200" b="1" i="0">
                 <a:solidFill>
                   <a:srgbClr val="E6E9F5"/>
                 </a:solidFill>
                 <a:latin typeface="Segoe UI"/>
               </a:rPr>
-              <a:t>Resources</a:t>
+              <a:t>The veil isn't Temporal.
+</a:t>
+            </a:r>
+            <a:r>
+              <a:rPr sz="3200" b="1" i="0">
+                <a:solidFill>
+                  <a:srgbClr val="E6E9F5"/>
+                </a:solidFill>
+                <a:latin typeface="Segoe UI"/>
+              </a:rPr>
+              <a:t>It's </a:t>
+            </a:r>
+            <a:r>
+              <a:rPr sz="3200" b="1" i="0">
+                <a:solidFill>
+                  <a:srgbClr val="4C9FFE"/>
+                </a:solidFill>
+                <a:latin typeface="Segoe UI"/>
+              </a:rPr>
+              <a:t>under-specified requirements.</a:t>
             </a:r>
           </a:p>
         </p:txBody>
@@ -13708,8 +14212,8 @@
         </p:nvSpPr>
         <p:spPr>
           <a:xfrm>
-            <a:off x="640080" y="6446520"/>
-            <a:ext cx="5486400" cy="320040"/>
+            <a:off x="822960" y="5257800"/>
+            <a:ext cx="8961120" cy="731520"/>
           </a:xfrm>
           <a:prstGeom prst="rect">
             <a:avLst/>
@@ -13723,405 +14227,13 @@
           <a:lstStyle/>
           <a:p>
             <a:r>
-              <a:rPr sz="1000" b="0" i="0">
+              <a:rPr sz="1500" b="0" i="0">
                 <a:solidFill>
                   <a:srgbClr val="9AA2C0"/>
                 </a:solidFill>
                 <a:latin typeface="Segoe UI"/>
               </a:rPr>
-              <a:t>◈ Temporal · Lifting the Veil</a:t>
-            </a:r>
-          </a:p>
-        </p:txBody>
-      </p:sp>
-      <p:sp>
-        <p:nvSpPr>
-          <p:cNvPr id="6" name="Rounded Rectangle 5"/>
-          <p:cNvSpPr/>
-          <p:nvPr/>
-        </p:nvSpPr>
-        <p:spPr>
-          <a:xfrm>
-            <a:off x="640080" y="1828800"/>
-            <a:ext cx="5303520" cy="1463040"/>
-          </a:xfrm>
-          <a:prstGeom prst="roundRect">
-            <a:avLst>
-              <a:gd name="adj" fmla="val 6000"/>
-            </a:avLst>
-          </a:prstGeom>
-          <a:solidFill>
-            <a:srgbClr val="141828"/>
-          </a:solidFill>
-          <a:ln w="12700">
-            <a:solidFill>
-              <a:srgbClr val="232A41"/>
-            </a:solidFill>
-          </a:ln>
-          <a:effectLst/>
-        </p:spPr>
-        <p:style>
-          <a:lnRef idx="1">
-            <a:schemeClr val="accent1"/>
-          </a:lnRef>
-          <a:fillRef idx="3">
-            <a:schemeClr val="accent1"/>
-          </a:fillRef>
-          <a:effectRef idx="2">
-            <a:schemeClr val="accent1"/>
-          </a:effectRef>
-          <a:fontRef idx="minor">
-            <a:schemeClr val="lt1"/>
-          </a:fontRef>
-        </p:style>
-        <p:txBody>
-          <a:bodyPr rtlCol="0" anchor="ctr"/>
-          <a:lstStyle/>
-          <a:p>
-            <a:pPr algn="ctr"/>
-          </a:p>
-        </p:txBody>
-      </p:sp>
-      <p:sp>
-        <p:nvSpPr>
-          <p:cNvPr id="7" name="TextBox 6"/>
-          <p:cNvSpPr txBox="1"/>
-          <p:nvPr/>
-        </p:nvSpPr>
-        <p:spPr>
-          <a:xfrm>
-            <a:off x="841248" y="1975104"/>
-            <a:ext cx="4901184" cy="1188720"/>
-          </a:xfrm>
-          <a:prstGeom prst="rect">
-            <a:avLst/>
-          </a:prstGeom>
-          <a:noFill/>
-        </p:spPr>
-        <p:txBody>
-          <a:bodyPr wrap="square" anchor="t" lIns="0" rIns="0" tIns="0" bIns="0">
-            <a:spAutoFit/>
-          </a:bodyPr>
-          <a:lstStyle/>
-          <a:p>
-            <a:r>
-              <a:rPr sz="1200" b="1" i="0">
-                <a:solidFill>
-                  <a:srgbClr val="4C9FFE"/>
-                </a:solidFill>
-                <a:latin typeface="Segoe UI"/>
-              </a:rPr>
-              <a:t>THIS DEMO</a:t>
-            </a:r>
-          </a:p>
-          <a:p>
-            <a:pPr>
-              <a:spcBef>
-                <a:spcPts val="600"/>
-              </a:spcBef>
-            </a:pPr>
-            <a:r>
-              <a:rPr sz="1300" b="0" i="0">
-                <a:solidFill>
-                  <a:srgbClr val="9AA2C0"/>
-                </a:solidFill>
-                <a:latin typeface="Segoe UI"/>
-              </a:rPr>
-              <a:t>Full source, README, tests — github.com/&lt;you&gt;/temporal-claims-demo</a:t>
-            </a:r>
-          </a:p>
-        </p:txBody>
-      </p:sp>
-      <p:sp>
-        <p:nvSpPr>
-          <p:cNvPr id="8" name="Rounded Rectangle 7"/>
-          <p:cNvSpPr/>
-          <p:nvPr/>
-        </p:nvSpPr>
-        <p:spPr>
-          <a:xfrm>
-            <a:off x="6217920" y="1828800"/>
-            <a:ext cx="5303520" cy="1463040"/>
-          </a:xfrm>
-          <a:prstGeom prst="roundRect">
-            <a:avLst>
-              <a:gd name="adj" fmla="val 6000"/>
-            </a:avLst>
-          </a:prstGeom>
-          <a:solidFill>
-            <a:srgbClr val="141828"/>
-          </a:solidFill>
-          <a:ln w="12700">
-            <a:solidFill>
-              <a:srgbClr val="232A41"/>
-            </a:solidFill>
-          </a:ln>
-          <a:effectLst/>
-        </p:spPr>
-        <p:style>
-          <a:lnRef idx="1">
-            <a:schemeClr val="accent1"/>
-          </a:lnRef>
-          <a:fillRef idx="3">
-            <a:schemeClr val="accent1"/>
-          </a:fillRef>
-          <a:effectRef idx="2">
-            <a:schemeClr val="accent1"/>
-          </a:effectRef>
-          <a:fontRef idx="minor">
-            <a:schemeClr val="lt1"/>
-          </a:fontRef>
-        </p:style>
-        <p:txBody>
-          <a:bodyPr rtlCol="0" anchor="ctr"/>
-          <a:lstStyle/>
-          <a:p>
-            <a:pPr algn="ctr"/>
-          </a:p>
-        </p:txBody>
-      </p:sp>
-      <p:sp>
-        <p:nvSpPr>
-          <p:cNvPr id="9" name="TextBox 8"/>
-          <p:cNvSpPr txBox="1"/>
-          <p:nvPr/>
-        </p:nvSpPr>
-        <p:spPr>
-          <a:xfrm>
-            <a:off x="6419088" y="1975104"/>
-            <a:ext cx="4901184" cy="1188720"/>
-          </a:xfrm>
-          <a:prstGeom prst="rect">
-            <a:avLst/>
-          </a:prstGeom>
-          <a:noFill/>
-        </p:spPr>
-        <p:txBody>
-          <a:bodyPr wrap="square" anchor="t" lIns="0" rIns="0" tIns="0" bIns="0">
-            <a:spAutoFit/>
-          </a:bodyPr>
-          <a:lstStyle/>
-          <a:p>
-            <a:r>
-              <a:rPr sz="1200" b="1" i="0">
-                <a:solidFill>
-                  <a:srgbClr val="4C9FFE"/>
-                </a:solidFill>
-                <a:latin typeface="Segoe UI"/>
-              </a:rPr>
-              <a:t>TEMPORAL DOCS</a:t>
-            </a:r>
-          </a:p>
-          <a:p>
-            <a:pPr>
-              <a:spcBef>
-                <a:spcPts val="600"/>
-              </a:spcBef>
-            </a:pPr>
-            <a:r>
-              <a:rPr sz="1300" b="0" i="0">
-                <a:solidFill>
-                  <a:srgbClr val="9AA2C0"/>
-                </a:solidFill>
-                <a:latin typeface="Segoe UI"/>
-              </a:rPr>
-              <a:t>docs.temporal.io · TypeScript SDK samples</a:t>
-            </a:r>
-          </a:p>
-        </p:txBody>
-      </p:sp>
-      <p:sp>
-        <p:nvSpPr>
-          <p:cNvPr id="10" name="Rounded Rectangle 9"/>
-          <p:cNvSpPr/>
-          <p:nvPr/>
-        </p:nvSpPr>
-        <p:spPr>
-          <a:xfrm>
-            <a:off x="640080" y="3566160"/>
-            <a:ext cx="5303520" cy="1463040"/>
-          </a:xfrm>
-          <a:prstGeom prst="roundRect">
-            <a:avLst>
-              <a:gd name="adj" fmla="val 6000"/>
-            </a:avLst>
-          </a:prstGeom>
-          <a:solidFill>
-            <a:srgbClr val="141828"/>
-          </a:solidFill>
-          <a:ln w="12700">
-            <a:solidFill>
-              <a:srgbClr val="232A41"/>
-            </a:solidFill>
-          </a:ln>
-          <a:effectLst/>
-        </p:spPr>
-        <p:style>
-          <a:lnRef idx="1">
-            <a:schemeClr val="accent1"/>
-          </a:lnRef>
-          <a:fillRef idx="3">
-            <a:schemeClr val="accent1"/>
-          </a:fillRef>
-          <a:effectRef idx="2">
-            <a:schemeClr val="accent1"/>
-          </a:effectRef>
-          <a:fontRef idx="minor">
-            <a:schemeClr val="lt1"/>
-          </a:fontRef>
-        </p:style>
-        <p:txBody>
-          <a:bodyPr rtlCol="0" anchor="ctr"/>
-          <a:lstStyle/>
-          <a:p>
-            <a:pPr algn="ctr"/>
-          </a:p>
-        </p:txBody>
-      </p:sp>
-      <p:sp>
-        <p:nvSpPr>
-          <p:cNvPr id="11" name="TextBox 10"/>
-          <p:cNvSpPr txBox="1"/>
-          <p:nvPr/>
-        </p:nvSpPr>
-        <p:spPr>
-          <a:xfrm>
-            <a:off x="841248" y="3712464"/>
-            <a:ext cx="4901184" cy="1188720"/>
-          </a:xfrm>
-          <a:prstGeom prst="rect">
-            <a:avLst/>
-          </a:prstGeom>
-          <a:noFill/>
-        </p:spPr>
-        <p:txBody>
-          <a:bodyPr wrap="square" anchor="t" lIns="0" rIns="0" tIns="0" bIns="0">
-            <a:spAutoFit/>
-          </a:bodyPr>
-          <a:lstStyle/>
-          <a:p>
-            <a:r>
-              <a:rPr sz="1200" b="1" i="0">
-                <a:solidFill>
-                  <a:srgbClr val="4C9FFE"/>
-                </a:solidFill>
-                <a:latin typeface="Segoe UI"/>
-              </a:rPr>
-              <a:t>COMMUNITY</a:t>
-            </a:r>
-          </a:p>
-          <a:p>
-            <a:pPr>
-              <a:spcBef>
-                <a:spcPts val="600"/>
-              </a:spcBef>
-            </a:pPr>
-            <a:r>
-              <a:rPr sz="1300" b="0" i="0">
-                <a:solidFill>
-                  <a:srgbClr val="9AA2C0"/>
-                </a:solidFill>
-                <a:latin typeface="Segoe UI"/>
-              </a:rPr>
-              <a:t>Temporal Slack · community forum · local meetups</a:t>
-            </a:r>
-          </a:p>
-        </p:txBody>
-      </p:sp>
-      <p:sp>
-        <p:nvSpPr>
-          <p:cNvPr id="12" name="Rounded Rectangle 11"/>
-          <p:cNvSpPr/>
-          <p:nvPr/>
-        </p:nvSpPr>
-        <p:spPr>
-          <a:xfrm>
-            <a:off x="6217920" y="3566160"/>
-            <a:ext cx="5303520" cy="1463040"/>
-          </a:xfrm>
-          <a:prstGeom prst="roundRect">
-            <a:avLst>
-              <a:gd name="adj" fmla="val 6000"/>
-            </a:avLst>
-          </a:prstGeom>
-          <a:solidFill>
-            <a:srgbClr val="141828"/>
-          </a:solidFill>
-          <a:ln w="12700">
-            <a:solidFill>
-              <a:srgbClr val="232A41"/>
-            </a:solidFill>
-          </a:ln>
-          <a:effectLst/>
-        </p:spPr>
-        <p:style>
-          <a:lnRef idx="1">
-            <a:schemeClr val="accent1"/>
-          </a:lnRef>
-          <a:fillRef idx="3">
-            <a:schemeClr val="accent1"/>
-          </a:fillRef>
-          <a:effectRef idx="2">
-            <a:schemeClr val="accent1"/>
-          </a:effectRef>
-          <a:fontRef idx="minor">
-            <a:schemeClr val="lt1"/>
-          </a:fontRef>
-        </p:style>
-        <p:txBody>
-          <a:bodyPr rtlCol="0" anchor="ctr"/>
-          <a:lstStyle/>
-          <a:p>
-            <a:pPr algn="ctr"/>
-          </a:p>
-        </p:txBody>
-      </p:sp>
-      <p:sp>
-        <p:nvSpPr>
-          <p:cNvPr id="13" name="TextBox 12"/>
-          <p:cNvSpPr txBox="1"/>
-          <p:nvPr/>
-        </p:nvSpPr>
-        <p:spPr>
-          <a:xfrm>
-            <a:off x="6419088" y="3712464"/>
-            <a:ext cx="4901184" cy="1188720"/>
-          </a:xfrm>
-          <a:prstGeom prst="rect">
-            <a:avLst/>
-          </a:prstGeom>
-          <a:noFill/>
-        </p:spPr>
-        <p:txBody>
-          <a:bodyPr wrap="square" anchor="t" lIns="0" rIns="0" tIns="0" bIns="0">
-            <a:spAutoFit/>
-          </a:bodyPr>
-          <a:lstStyle/>
-          <a:p>
-            <a:r>
-              <a:rPr sz="1200" b="1" i="0">
-                <a:solidFill>
-                  <a:srgbClr val="4C9FFE"/>
-                </a:solidFill>
-                <a:latin typeface="Segoe UI"/>
-              </a:rPr>
-              <a:t>THE PROMPT TEMPLATE</a:t>
-            </a:r>
-          </a:p>
-          <a:p>
-            <a:pPr>
-              <a:spcBef>
-                <a:spcPts val="600"/>
-              </a:spcBef>
-            </a:pPr>
-            <a:r>
-              <a:rPr sz="1300" b="0" i="0">
-                <a:solidFill>
-                  <a:srgbClr val="9AA2C0"/>
-                </a:solidFill>
-                <a:latin typeface="Segoe UI"/>
-              </a:rPr>
-              <a:t>Previous slide — steal it, adapt it, use it on your own use case</a:t>
+              <a:t>Name the failures, the waits, and the source of truth — Temporal does the rest.</a:t>
             </a:r>
           </a:p>
         </p:txBody>
@@ -14196,7 +14308,7 @@
         </p:nvSpPr>
         <p:spPr>
           <a:xfrm>
-            <a:off x="640080" y="2103120"/>
+            <a:off x="640080" y="502920"/>
             <a:ext cx="10515600" cy="365760"/>
           </a:xfrm>
           <a:prstGeom prst="rect">
@@ -14222,7 +14334,7 @@
                 </a:solidFill>
                 <a:latin typeface="Segoe UI"/>
               </a:rPr>
-              <a:t>TEMPORAL · ENGINEERING TALK</a:t>
+              <a:t>GO BUILD SOMETHING</a:t>
             </a:r>
           </a:p>
         </p:txBody>
@@ -14235,8 +14347,8 @@
         </p:nvSpPr>
         <p:spPr>
           <a:xfrm>
-            <a:off x="640080" y="2468880"/>
-            <a:ext cx="9144000" cy="1463040"/>
+            <a:off x="640080" y="822960"/>
+            <a:ext cx="10881360" cy="1188720"/>
           </a:xfrm>
           <a:prstGeom prst="rect">
             <a:avLst/>
@@ -14250,13 +14362,13 @@
           <a:lstStyle/>
           <a:p>
             <a:r>
-              <a:rPr sz="5400" b="1" i="0">
+              <a:rPr sz="3000" b="1" i="0">
                 <a:solidFill>
                   <a:srgbClr val="E6E9F5"/>
                 </a:solidFill>
                 <a:latin typeface="Segoe UI"/>
               </a:rPr>
-              <a:t>Thank you.</a:t>
+              <a:t>Resources</a:t>
             </a:r>
           </a:p>
         </p:txBody>
@@ -14269,8 +14381,8 @@
         </p:nvSpPr>
         <p:spPr>
           <a:xfrm>
-            <a:off x="640080" y="3931920"/>
-            <a:ext cx="7772400" cy="1097280"/>
+            <a:off x="640080" y="6446520"/>
+            <a:ext cx="5486400" cy="320040"/>
           </a:xfrm>
           <a:prstGeom prst="rect">
             <a:avLst/>
@@ -14284,36 +14396,40 @@
           <a:lstStyle/>
           <a:p>
             <a:r>
-              <a:rPr sz="2000" b="0" i="0">
+              <a:rPr sz="1000" b="0" i="0">
                 <a:solidFill>
                   <a:srgbClr val="9AA2C0"/>
                 </a:solidFill>
                 <a:latin typeface="Segoe UI"/>
               </a:rPr>
-              <a:t>Questions, war stories, and “would this work for my use case” conversations welcome.</a:t>
-            </a:r>
-          </a:p>
-        </p:txBody>
-      </p:sp>
-      <p:sp>
-        <p:nvSpPr>
-          <p:cNvPr id="6" name="Rectangle 5"/>
+              <a:t>◈ Temporal · Lifting the Veil</a:t>
+            </a:r>
+          </a:p>
+        </p:txBody>
+      </p:sp>
+      <p:sp>
+        <p:nvSpPr>
+          <p:cNvPr id="6" name="Rounded Rectangle 5"/>
           <p:cNvSpPr/>
           <p:nvPr/>
         </p:nvSpPr>
         <p:spPr>
           <a:xfrm>
-            <a:off x="640080" y="5212080"/>
-            <a:ext cx="10881360" cy="12700"/>
-          </a:xfrm>
-          <a:prstGeom prst="rect">
-            <a:avLst/>
+            <a:off x="640080" y="1828800"/>
+            <a:ext cx="5303520" cy="1463040"/>
+          </a:xfrm>
+          <a:prstGeom prst="roundRect">
+            <a:avLst>
+              <a:gd name="adj" fmla="val 6000"/>
+            </a:avLst>
           </a:prstGeom>
           <a:solidFill>
-            <a:srgbClr val="232A41"/>
+            <a:srgbClr val="141828"/>
           </a:solidFill>
-          <a:ln>
-            <a:noFill/>
+          <a:ln w="12700">
+            <a:solidFill>
+              <a:srgbClr val="232A41"/>
+            </a:solidFill>
           </a:ln>
           <a:effectLst/>
         </p:spPr>
@@ -14336,6 +14452,350 @@
           <a:lstStyle/>
           <a:p>
             <a:pPr algn="ctr"/>
+          </a:p>
+        </p:txBody>
+      </p:sp>
+      <p:sp>
+        <p:nvSpPr>
+          <p:cNvPr id="7" name="TextBox 6"/>
+          <p:cNvSpPr txBox="1"/>
+          <p:nvPr/>
+        </p:nvSpPr>
+        <p:spPr>
+          <a:xfrm>
+            <a:off x="841248" y="1975104"/>
+            <a:ext cx="4901184" cy="1188720"/>
+          </a:xfrm>
+          <a:prstGeom prst="rect">
+            <a:avLst/>
+          </a:prstGeom>
+          <a:noFill/>
+        </p:spPr>
+        <p:txBody>
+          <a:bodyPr wrap="square" anchor="t" lIns="0" rIns="0" tIns="0" bIns="0">
+            <a:spAutoFit/>
+          </a:bodyPr>
+          <a:lstStyle/>
+          <a:p>
+            <a:r>
+              <a:rPr sz="1200" b="1" i="0">
+                <a:solidFill>
+                  <a:srgbClr val="4C9FFE"/>
+                </a:solidFill>
+                <a:latin typeface="Segoe UI"/>
+              </a:rPr>
+              <a:t>THIS DEMO</a:t>
+            </a:r>
+          </a:p>
+          <a:p>
+            <a:pPr>
+              <a:spcBef>
+                <a:spcPts val="600"/>
+              </a:spcBef>
+            </a:pPr>
+            <a:r>
+              <a:rPr sz="1300" b="0" i="0">
+                <a:solidFill>
+                  <a:srgbClr val="9AA2C0"/>
+                </a:solidFill>
+                <a:latin typeface="Segoe UI"/>
+              </a:rPr>
+              <a:t>Full source, README, tests — github.com/&lt;you&gt;/temporal-claims-demo</a:t>
+            </a:r>
+          </a:p>
+        </p:txBody>
+      </p:sp>
+      <p:sp>
+        <p:nvSpPr>
+          <p:cNvPr id="8" name="Rounded Rectangle 7"/>
+          <p:cNvSpPr/>
+          <p:nvPr/>
+        </p:nvSpPr>
+        <p:spPr>
+          <a:xfrm>
+            <a:off x="6217920" y="1828800"/>
+            <a:ext cx="5303520" cy="1463040"/>
+          </a:xfrm>
+          <a:prstGeom prst="roundRect">
+            <a:avLst>
+              <a:gd name="adj" fmla="val 6000"/>
+            </a:avLst>
+          </a:prstGeom>
+          <a:solidFill>
+            <a:srgbClr val="141828"/>
+          </a:solidFill>
+          <a:ln w="12700">
+            <a:solidFill>
+              <a:srgbClr val="232A41"/>
+            </a:solidFill>
+          </a:ln>
+          <a:effectLst/>
+        </p:spPr>
+        <p:style>
+          <a:lnRef idx="1">
+            <a:schemeClr val="accent1"/>
+          </a:lnRef>
+          <a:fillRef idx="3">
+            <a:schemeClr val="accent1"/>
+          </a:fillRef>
+          <a:effectRef idx="2">
+            <a:schemeClr val="accent1"/>
+          </a:effectRef>
+          <a:fontRef idx="minor">
+            <a:schemeClr val="lt1"/>
+          </a:fontRef>
+        </p:style>
+        <p:txBody>
+          <a:bodyPr rtlCol="0" anchor="ctr"/>
+          <a:lstStyle/>
+          <a:p>
+            <a:pPr algn="ctr"/>
+          </a:p>
+        </p:txBody>
+      </p:sp>
+      <p:sp>
+        <p:nvSpPr>
+          <p:cNvPr id="9" name="TextBox 8"/>
+          <p:cNvSpPr txBox="1"/>
+          <p:nvPr/>
+        </p:nvSpPr>
+        <p:spPr>
+          <a:xfrm>
+            <a:off x="6419088" y="1975104"/>
+            <a:ext cx="4901184" cy="1188720"/>
+          </a:xfrm>
+          <a:prstGeom prst="rect">
+            <a:avLst/>
+          </a:prstGeom>
+          <a:noFill/>
+        </p:spPr>
+        <p:txBody>
+          <a:bodyPr wrap="square" anchor="t" lIns="0" rIns="0" tIns="0" bIns="0">
+            <a:spAutoFit/>
+          </a:bodyPr>
+          <a:lstStyle/>
+          <a:p>
+            <a:r>
+              <a:rPr sz="1200" b="1" i="0">
+                <a:solidFill>
+                  <a:srgbClr val="4C9FFE"/>
+                </a:solidFill>
+                <a:latin typeface="Segoe UI"/>
+              </a:rPr>
+              <a:t>TEMPORAL DOCS</a:t>
+            </a:r>
+          </a:p>
+          <a:p>
+            <a:pPr>
+              <a:spcBef>
+                <a:spcPts val="600"/>
+              </a:spcBef>
+            </a:pPr>
+            <a:r>
+              <a:rPr sz="1300" b="0" i="0">
+                <a:solidFill>
+                  <a:srgbClr val="9AA2C0"/>
+                </a:solidFill>
+                <a:latin typeface="Segoe UI"/>
+              </a:rPr>
+              <a:t>docs.temporal.io · TypeScript SDK samples</a:t>
+            </a:r>
+          </a:p>
+        </p:txBody>
+      </p:sp>
+      <p:sp>
+        <p:nvSpPr>
+          <p:cNvPr id="10" name="Rounded Rectangle 9"/>
+          <p:cNvSpPr/>
+          <p:nvPr/>
+        </p:nvSpPr>
+        <p:spPr>
+          <a:xfrm>
+            <a:off x="640080" y="3566160"/>
+            <a:ext cx="5303520" cy="1463040"/>
+          </a:xfrm>
+          <a:prstGeom prst="roundRect">
+            <a:avLst>
+              <a:gd name="adj" fmla="val 6000"/>
+            </a:avLst>
+          </a:prstGeom>
+          <a:solidFill>
+            <a:srgbClr val="141828"/>
+          </a:solidFill>
+          <a:ln w="12700">
+            <a:solidFill>
+              <a:srgbClr val="232A41"/>
+            </a:solidFill>
+          </a:ln>
+          <a:effectLst/>
+        </p:spPr>
+        <p:style>
+          <a:lnRef idx="1">
+            <a:schemeClr val="accent1"/>
+          </a:lnRef>
+          <a:fillRef idx="3">
+            <a:schemeClr val="accent1"/>
+          </a:fillRef>
+          <a:effectRef idx="2">
+            <a:schemeClr val="accent1"/>
+          </a:effectRef>
+          <a:fontRef idx="minor">
+            <a:schemeClr val="lt1"/>
+          </a:fontRef>
+        </p:style>
+        <p:txBody>
+          <a:bodyPr rtlCol="0" anchor="ctr"/>
+          <a:lstStyle/>
+          <a:p>
+            <a:pPr algn="ctr"/>
+          </a:p>
+        </p:txBody>
+      </p:sp>
+      <p:sp>
+        <p:nvSpPr>
+          <p:cNvPr id="11" name="TextBox 10"/>
+          <p:cNvSpPr txBox="1"/>
+          <p:nvPr/>
+        </p:nvSpPr>
+        <p:spPr>
+          <a:xfrm>
+            <a:off x="841248" y="3712464"/>
+            <a:ext cx="4901184" cy="1188720"/>
+          </a:xfrm>
+          <a:prstGeom prst="rect">
+            <a:avLst/>
+          </a:prstGeom>
+          <a:noFill/>
+        </p:spPr>
+        <p:txBody>
+          <a:bodyPr wrap="square" anchor="t" lIns="0" rIns="0" tIns="0" bIns="0">
+            <a:spAutoFit/>
+          </a:bodyPr>
+          <a:lstStyle/>
+          <a:p>
+            <a:r>
+              <a:rPr sz="1200" b="1" i="0">
+                <a:solidFill>
+                  <a:srgbClr val="4C9FFE"/>
+                </a:solidFill>
+                <a:latin typeface="Segoe UI"/>
+              </a:rPr>
+              <a:t>COMMUNITY</a:t>
+            </a:r>
+          </a:p>
+          <a:p>
+            <a:pPr>
+              <a:spcBef>
+                <a:spcPts val="600"/>
+              </a:spcBef>
+            </a:pPr>
+            <a:r>
+              <a:rPr sz="1300" b="0" i="0">
+                <a:solidFill>
+                  <a:srgbClr val="9AA2C0"/>
+                </a:solidFill>
+                <a:latin typeface="Segoe UI"/>
+              </a:rPr>
+              <a:t>Temporal Slack · community forum · local meetups</a:t>
+            </a:r>
+          </a:p>
+        </p:txBody>
+      </p:sp>
+      <p:sp>
+        <p:nvSpPr>
+          <p:cNvPr id="12" name="Rounded Rectangle 11"/>
+          <p:cNvSpPr/>
+          <p:nvPr/>
+        </p:nvSpPr>
+        <p:spPr>
+          <a:xfrm>
+            <a:off x="6217920" y="3566160"/>
+            <a:ext cx="5303520" cy="1463040"/>
+          </a:xfrm>
+          <a:prstGeom prst="roundRect">
+            <a:avLst>
+              <a:gd name="adj" fmla="val 6000"/>
+            </a:avLst>
+          </a:prstGeom>
+          <a:solidFill>
+            <a:srgbClr val="141828"/>
+          </a:solidFill>
+          <a:ln w="12700">
+            <a:solidFill>
+              <a:srgbClr val="232A41"/>
+            </a:solidFill>
+          </a:ln>
+          <a:effectLst/>
+        </p:spPr>
+        <p:style>
+          <a:lnRef idx="1">
+            <a:schemeClr val="accent1"/>
+          </a:lnRef>
+          <a:fillRef idx="3">
+            <a:schemeClr val="accent1"/>
+          </a:fillRef>
+          <a:effectRef idx="2">
+            <a:schemeClr val="accent1"/>
+          </a:effectRef>
+          <a:fontRef idx="minor">
+            <a:schemeClr val="lt1"/>
+          </a:fontRef>
+        </p:style>
+        <p:txBody>
+          <a:bodyPr rtlCol="0" anchor="ctr"/>
+          <a:lstStyle/>
+          <a:p>
+            <a:pPr algn="ctr"/>
+          </a:p>
+        </p:txBody>
+      </p:sp>
+      <p:sp>
+        <p:nvSpPr>
+          <p:cNvPr id="13" name="TextBox 12"/>
+          <p:cNvSpPr txBox="1"/>
+          <p:nvPr/>
+        </p:nvSpPr>
+        <p:spPr>
+          <a:xfrm>
+            <a:off x="6419088" y="3712464"/>
+            <a:ext cx="4901184" cy="1188720"/>
+          </a:xfrm>
+          <a:prstGeom prst="rect">
+            <a:avLst/>
+          </a:prstGeom>
+          <a:noFill/>
+        </p:spPr>
+        <p:txBody>
+          <a:bodyPr wrap="square" anchor="t" lIns="0" rIns="0" tIns="0" bIns="0">
+            <a:spAutoFit/>
+          </a:bodyPr>
+          <a:lstStyle/>
+          <a:p>
+            <a:r>
+              <a:rPr sz="1200" b="1" i="0">
+                <a:solidFill>
+                  <a:srgbClr val="4C9FFE"/>
+                </a:solidFill>
+                <a:latin typeface="Segoe UI"/>
+              </a:rPr>
+              <a:t>THE PROMPT TEMPLATE</a:t>
+            </a:r>
+          </a:p>
+          <a:p>
+            <a:pPr>
+              <a:spcBef>
+                <a:spcPts val="600"/>
+              </a:spcBef>
+            </a:pPr>
+            <a:r>
+              <a:rPr sz="1300" b="0" i="0">
+                <a:solidFill>
+                  <a:srgbClr val="9AA2C0"/>
+                </a:solidFill>
+                <a:latin typeface="Segoe UI"/>
+              </a:rPr>
+              <a:t>Previous slide — steal it, adapt it, use it on your own use case</a:t>
+            </a:r>
           </a:p>
         </p:txBody>
       </p:sp>
@@ -14906,8 +15366,8 @@
         </p:nvSpPr>
         <p:spPr>
           <a:xfrm>
-            <a:off x="822960" y="2194560"/>
-            <a:ext cx="3657600" cy="1463040"/>
+            <a:off x="640080" y="2103120"/>
+            <a:ext cx="10515600" cy="365760"/>
           </a:xfrm>
           <a:prstGeom prst="rect">
             <a:avLst/>
@@ -14920,14 +15380,19 @@
           </a:bodyPr>
           <a:lstStyle/>
           <a:p>
-            <a:r>
-              <a:rPr sz="7200" b="1" i="0">
-                <a:solidFill>
-                  <a:srgbClr val="7C5CFF"/>
-                </a:solidFill>
-                <a:latin typeface="Consolas"/>
-              </a:rPr>
-              <a:t>+</a:t>
+            <a:pPr>
+              <a:defRPr>
+                <a:latin typeface="Segoe UI"/>
+              </a:defRPr>
+            </a:pPr>
+            <a:r>
+              <a:rPr sz="1300" b="1" i="0">
+                <a:solidFill>
+                  <a:srgbClr val="4C9FFE"/>
+                </a:solidFill>
+                <a:latin typeface="Segoe UI"/>
+              </a:rPr>
+              <a:t>TEMPORAL · ENGINEERING TALK</a:t>
             </a:r>
           </a:p>
         </p:txBody>
@@ -14940,8 +15405,8 @@
         </p:nvSpPr>
         <p:spPr>
           <a:xfrm>
-            <a:off x="822960" y="3383280"/>
-            <a:ext cx="8686800" cy="1005840"/>
+            <a:off x="640080" y="2468880"/>
+            <a:ext cx="9144000" cy="1463040"/>
           </a:xfrm>
           <a:prstGeom prst="rect">
             <a:avLst/>
@@ -14955,13 +15420,13 @@
           <a:lstStyle/>
           <a:p>
             <a:r>
-              <a:rPr sz="4000" b="1" i="0">
+              <a:rPr sz="5400" b="1" i="0">
                 <a:solidFill>
                   <a:srgbClr val="E6E9F5"/>
                 </a:solidFill>
                 <a:latin typeface="Segoe UI"/>
               </a:rPr>
-              <a:t>Backup Slides</a:t>
+              <a:t>Thank you.</a:t>
             </a:r>
           </a:p>
         </p:txBody>
@@ -14974,8 +15439,8 @@
         </p:nvSpPr>
         <p:spPr>
           <a:xfrm>
-            <a:off x="822960" y="4206240"/>
-            <a:ext cx="6858000" cy="914400"/>
+            <a:off x="640080" y="3931920"/>
+            <a:ext cx="7772400" cy="1097280"/>
           </a:xfrm>
           <a:prstGeom prst="rect">
             <a:avLst/>
@@ -14989,14 +15454,58 @@
           <a:lstStyle/>
           <a:p>
             <a:r>
-              <a:rPr sz="1700" b="0" i="0">
+              <a:rPr sz="2000" b="0" i="0">
                 <a:solidFill>
                   <a:srgbClr val="9AA2C0"/>
                 </a:solidFill>
                 <a:latin typeface="Segoe UI"/>
               </a:rPr>
-              <a:t>Full prompt text and a code map, for anyone who wants the receipts.</a:t>
-            </a:r>
+              <a:t>Questions, war stories, and “would this work for my use case” conversations welcome.</a:t>
+            </a:r>
+          </a:p>
+        </p:txBody>
+      </p:sp>
+      <p:sp>
+        <p:nvSpPr>
+          <p:cNvPr id="6" name="Rectangle 5"/>
+          <p:cNvSpPr/>
+          <p:nvPr/>
+        </p:nvSpPr>
+        <p:spPr>
+          <a:xfrm>
+            <a:off x="640080" y="5212080"/>
+            <a:ext cx="10881360" cy="12700"/>
+          </a:xfrm>
+          <a:prstGeom prst="rect">
+            <a:avLst/>
+          </a:prstGeom>
+          <a:solidFill>
+            <a:srgbClr val="232A41"/>
+          </a:solidFill>
+          <a:ln>
+            <a:noFill/>
+          </a:ln>
+          <a:effectLst/>
+        </p:spPr>
+        <p:style>
+          <a:lnRef idx="1">
+            <a:schemeClr val="accent1"/>
+          </a:lnRef>
+          <a:fillRef idx="3">
+            <a:schemeClr val="accent1"/>
+          </a:fillRef>
+          <a:effectRef idx="2">
+            <a:schemeClr val="accent1"/>
+          </a:effectRef>
+          <a:fontRef idx="minor">
+            <a:schemeClr val="lt1"/>
+          </a:fontRef>
+        </p:style>
+        <p:txBody>
+          <a:bodyPr rtlCol="0" anchor="ctr"/>
+          <a:lstStyle/>
+          <a:p>
+            <a:pPr algn="ctr"/>
           </a:p>
         </p:txBody>
       </p:sp>
@@ -15070,8 +15579,8 @@
         </p:nvSpPr>
         <p:spPr>
           <a:xfrm>
-            <a:off x="640080" y="502920"/>
-            <a:ext cx="10515600" cy="365760"/>
+            <a:off x="822960" y="2194560"/>
+            <a:ext cx="3657600" cy="1463040"/>
           </a:xfrm>
           <a:prstGeom prst="rect">
             <a:avLst/>
@@ -15084,19 +15593,14 @@
           </a:bodyPr>
           <a:lstStyle/>
           <a:p>
-            <a:pPr>
-              <a:defRPr>
-                <a:latin typeface="Segoe UI"/>
-              </a:defRPr>
-            </a:pPr>
-            <a:r>
-              <a:rPr sz="1300" b="1" i="0">
-                <a:solidFill>
-                  <a:srgbClr val="4C9FFE"/>
-                </a:solidFill>
-                <a:latin typeface="Segoe UI"/>
-              </a:rPr>
-              <a:t>APPENDIX A</a:t>
+            <a:r>
+              <a:rPr sz="7200" b="1" i="0">
+                <a:solidFill>
+                  <a:srgbClr val="7C5CFF"/>
+                </a:solidFill>
+                <a:latin typeface="Consolas"/>
+              </a:rPr>
+              <a:t>+</a:t>
             </a:r>
           </a:p>
         </p:txBody>
@@ -15109,8 +15613,8 @@
         </p:nvSpPr>
         <p:spPr>
           <a:xfrm>
-            <a:off x="640080" y="822960"/>
-            <a:ext cx="10881360" cy="1188720"/>
+            <a:off x="822960" y="3383280"/>
+            <a:ext cx="8686800" cy="1005840"/>
           </a:xfrm>
           <a:prstGeom prst="rect">
             <a:avLst/>
@@ -15124,13 +15628,13 @@
           <a:lstStyle/>
           <a:p>
             <a:r>
-              <a:rPr sz="3000" b="1" i="0">
+              <a:rPr sz="4000" b="1" i="0">
                 <a:solidFill>
                   <a:srgbClr val="E6E9F5"/>
                 </a:solidFill>
                 <a:latin typeface="Segoe UI"/>
               </a:rPr>
-              <a:t>The improved prompt, in full</a:t>
+              <a:t>Backup Slides</a:t>
             </a:r>
           </a:p>
         </p:txBody>
@@ -15143,8 +15647,8 @@
         </p:nvSpPr>
         <p:spPr>
           <a:xfrm>
-            <a:off x="640080" y="6446520"/>
-            <a:ext cx="5486400" cy="320040"/>
+            <a:off x="822960" y="4206240"/>
+            <a:ext cx="6858000" cy="914400"/>
           </a:xfrm>
           <a:prstGeom prst="rect">
             <a:avLst/>
@@ -15158,180 +15662,13 @@
           <a:lstStyle/>
           <a:p>
             <a:r>
-              <a:rPr sz="1000" b="0" i="0">
+              <a:rPr sz="1700" b="0" i="0">
                 <a:solidFill>
                   <a:srgbClr val="9AA2C0"/>
                 </a:solidFill>
                 <a:latin typeface="Segoe UI"/>
               </a:rPr>
-              <a:t>◈ Temporal · Lifting the Veil</a:t>
-            </a:r>
-          </a:p>
-        </p:txBody>
-      </p:sp>
-      <p:sp>
-        <p:nvSpPr>
-          <p:cNvPr id="6" name="Rounded Rectangle 5"/>
-          <p:cNvSpPr/>
-          <p:nvPr/>
-        </p:nvSpPr>
-        <p:spPr>
-          <a:xfrm>
-            <a:off x="640080" y="1828800"/>
-            <a:ext cx="10881360" cy="2377440"/>
-          </a:xfrm>
-          <a:prstGeom prst="roundRect">
-            <a:avLst>
-              <a:gd name="adj" fmla="val 6000"/>
-            </a:avLst>
-          </a:prstGeom>
-          <a:solidFill>
-            <a:srgbClr val="0D1020"/>
-          </a:solidFill>
-          <a:ln w="12700">
-            <a:solidFill>
-              <a:srgbClr val="232A41"/>
-            </a:solidFill>
-          </a:ln>
-          <a:effectLst/>
-        </p:spPr>
-        <p:style>
-          <a:lnRef idx="1">
-            <a:schemeClr val="accent1"/>
-          </a:lnRef>
-          <a:fillRef idx="3">
-            <a:schemeClr val="accent1"/>
-          </a:fillRef>
-          <a:effectRef idx="2">
-            <a:schemeClr val="accent1"/>
-          </a:effectRef>
-          <a:fontRef idx="minor">
-            <a:schemeClr val="lt1"/>
-          </a:fontRef>
-        </p:style>
-        <p:txBody>
-          <a:bodyPr rtlCol="0" anchor="ctr"/>
-          <a:lstStyle/>
-          <a:p>
-            <a:pPr algn="ctr"/>
-          </a:p>
-        </p:txBody>
-      </p:sp>
-      <p:sp>
-        <p:nvSpPr>
-          <p:cNvPr id="7" name="Rounded Rectangle 6"/>
-          <p:cNvSpPr/>
-          <p:nvPr/>
-        </p:nvSpPr>
-        <p:spPr>
-          <a:xfrm>
-            <a:off x="640080" y="1828800"/>
-            <a:ext cx="10881360" cy="365760"/>
-          </a:xfrm>
-          <a:prstGeom prst="roundRect">
-            <a:avLst/>
-          </a:prstGeom>
-          <a:solidFill>
-            <a:srgbClr val="151934"/>
-          </a:solidFill>
-          <a:ln w="12700">
-            <a:solidFill>
-              <a:srgbClr val="232A41"/>
-            </a:solidFill>
-          </a:ln>
-          <a:effectLst/>
-        </p:spPr>
-        <p:style>
-          <a:lnRef idx="1">
-            <a:schemeClr val="accent1"/>
-          </a:lnRef>
-          <a:fillRef idx="3">
-            <a:schemeClr val="accent1"/>
-          </a:fillRef>
-          <a:effectRef idx="2">
-            <a:schemeClr val="accent1"/>
-          </a:effectRef>
-          <a:fontRef idx="minor">
-            <a:schemeClr val="lt1"/>
-          </a:fontRef>
-        </p:style>
-        <p:txBody>
-          <a:bodyPr rtlCol="0" anchor="ctr"/>
-          <a:lstStyle/>
-          <a:p>
-            <a:pPr algn="ctr"/>
-          </a:p>
-        </p:txBody>
-      </p:sp>
-      <p:sp>
-        <p:nvSpPr>
-          <p:cNvPr id="8" name="TextBox 7"/>
-          <p:cNvSpPr txBox="1"/>
-          <p:nvPr/>
-        </p:nvSpPr>
-        <p:spPr>
-          <a:xfrm>
-            <a:off x="822960" y="1883664"/>
-            <a:ext cx="10515600" cy="274320"/>
-          </a:xfrm>
-          <a:prstGeom prst="rect">
-            <a:avLst/>
-          </a:prstGeom>
-          <a:noFill/>
-        </p:spPr>
-        <p:txBody>
-          <a:bodyPr wrap="square" anchor="t" lIns="0" rIns="0" tIns="0" bIns="0">
-            <a:spAutoFit/>
-          </a:bodyPr>
-          <a:lstStyle/>
-          <a:p>
-            <a:r>
-              <a:rPr sz="1100" b="0" i="0">
-                <a:solidFill>
-                  <a:srgbClr val="9AA2C0"/>
-                </a:solidFill>
-                <a:latin typeface="Consolas"/>
-              </a:rPr>
-              <a:t>●  ●  ●    chat — refined spec (1/2)</a:t>
-            </a:r>
-          </a:p>
-        </p:txBody>
-      </p:sp>
-      <p:sp>
-        <p:nvSpPr>
-          <p:cNvPr id="9" name="TextBox 8"/>
-          <p:cNvSpPr txBox="1"/>
-          <p:nvPr/>
-        </p:nvSpPr>
-        <p:spPr>
-          <a:xfrm>
-            <a:off x="868680" y="2331720"/>
-            <a:ext cx="10424160" cy="1691640"/>
-          </a:xfrm>
-          <a:prstGeom prst="rect">
-            <a:avLst/>
-          </a:prstGeom>
-          <a:noFill/>
-        </p:spPr>
-        <p:txBody>
-          <a:bodyPr wrap="square" anchor="t" lIns="0" rIns="0" tIns="0" bIns="0">
-            <a:spAutoFit/>
-          </a:bodyPr>
-          <a:lstStyle/>
-          <a:p>
-            <a:pPr>
-              <a:lnSpc>
-                <a:spcPct val="130000"/>
-              </a:lnSpc>
-            </a:pPr>
-            <a:r>
-              <a:rPr sz="1300" b="0" i="0">
-                <a:solidFill>
-                  <a:srgbClr val="D6DCF5"/>
-                </a:solidFill>
-                <a:latin typeface="Consolas"/>
-              </a:rPr>
-              <a:t>I want to explore Temporal's capabilities by building a complete demonstration application for an insurance claim process. Create a working monorepo using: Temporal TypeScript SDK, a local Temporal development server, NestJS for the backend/API and Temporal worker, React with TypeScript for the UI, Docker Compose where useful. Do not use a database. Temporal must be the source of truth for workflow state and progress. Browser localStorage may be used to preserve UI preferences and recently viewed workflow IDs across refreshes, but it must not be treated as the authoritative workflow state.</a:t>
+              <a:t>Full prompt text and a code map, for anyone who wants the receipts.</a:t>
             </a:r>
           </a:p>
         </p:txBody>
@@ -15432,7 +15769,7 @@
                 </a:solidFill>
                 <a:latin typeface="Segoe UI"/>
               </a:rPr>
-              <a:t>APPENDIX A (CONTINUED)</a:t>
+              <a:t>APPENDIX A</a:t>
             </a:r>
           </a:p>
         </p:txBody>
@@ -15466,7 +15803,7 @@
                 </a:solidFill>
                 <a:latin typeface="Segoe UI"/>
               </a:rPr>
-              <a:t>The improved prompt — capability list</a:t>
+              <a:t>The improved prompt, in full</a:t>
             </a:r>
           </a:p>
         </p:txBody>
@@ -15628,7 +15965,7 @@
                 </a:solidFill>
                 <a:latin typeface="Consolas"/>
               </a:rPr>
-              <a:t>●  ●  ●    chat — refined spec (2/2)</a:t>
+              <a:t>●  ●  ●    chat — refined spec (1/2)</a:t>
             </a:r>
           </a:p>
         </p:txBody>
@@ -15667,7 +16004,7 @@
                 </a:solidFill>
                 <a:latin typeface="Consolas"/>
               </a:rPr>
-              <a:t>Activities with configurable retry policies · at least one timer or durable sleep · at least one child workflow · at least one UI-driven signal where the workflow pauses for human input · workflow queries that expose current state and progress · cancellation handling · activity and workflow failure handling · a way to retry or recover from a simulated failure · meaningful workflow IDs and search attributes · workflow history remaining valid across worker restarts. The human-review step should wait indefinitely for an adjuster to approve, deny, or request more information.</a:t>
+              <a:t>I want to explore Temporal's capabilities by building a complete demonstration application for an insurance claim process. Create a working monorepo using: Temporal TypeScript SDK, a local Temporal development server, NestJS for the backend/API and Temporal worker, React with TypeScript for the UI, Docker Compose where useful. Do not use a database. Temporal must be the source of truth for workflow state and progress. Browser localStorage may be used to preserve UI preferences and recently viewed workflow IDs across refreshes, but it must not be treated as the authoritative workflow state.</a:t>
             </a:r>
           </a:p>
         </p:txBody>
@@ -15681,6 +16018,342 @@
 </file>
 
 <file path=ppt/slides/slide33.xml><?xml version="1.0" encoding="utf-8"?>
+<p:sld xmlns:a="http://schemas.openxmlformats.org/drawingml/2006/main" xmlns:p="http://schemas.openxmlformats.org/presentationml/2006/main" xmlns:r="http://schemas.openxmlformats.org/officeDocument/2006/relationships">
+  <p:cSld>
+    <p:spTree>
+      <p:nvGrpSpPr>
+        <p:cNvPr id="1" name=""/>
+        <p:cNvGrpSpPr/>
+        <p:nvPr/>
+      </p:nvGrpSpPr>
+      <p:grpSpPr/>
+      <p:sp>
+        <p:nvSpPr>
+          <p:cNvPr id="2" name="Rectangle 1"/>
+          <p:cNvSpPr/>
+          <p:nvPr/>
+        </p:nvSpPr>
+        <p:spPr>
+          <a:xfrm>
+            <a:off x="0" y="0"/>
+            <a:ext cx="12191695" cy="6858000"/>
+          </a:xfrm>
+          <a:prstGeom prst="rect">
+            <a:avLst/>
+          </a:prstGeom>
+          <a:solidFill>
+            <a:srgbClr val="0A0C16"/>
+          </a:solidFill>
+          <a:ln>
+            <a:noFill/>
+          </a:ln>
+          <a:effectLst/>
+        </p:spPr>
+        <p:style>
+          <a:lnRef idx="1">
+            <a:schemeClr val="accent1"/>
+          </a:lnRef>
+          <a:fillRef idx="3">
+            <a:schemeClr val="accent1"/>
+          </a:fillRef>
+          <a:effectRef idx="2">
+            <a:schemeClr val="accent1"/>
+          </a:effectRef>
+          <a:fontRef idx="minor">
+            <a:schemeClr val="lt1"/>
+          </a:fontRef>
+        </p:style>
+        <p:txBody>
+          <a:bodyPr rtlCol="0" anchor="ctr"/>
+          <a:lstStyle/>
+          <a:p>
+            <a:pPr algn="ctr"/>
+          </a:p>
+        </p:txBody>
+      </p:sp>
+      <p:sp>
+        <p:nvSpPr>
+          <p:cNvPr id="3" name="TextBox 2"/>
+          <p:cNvSpPr txBox="1"/>
+          <p:nvPr/>
+        </p:nvSpPr>
+        <p:spPr>
+          <a:xfrm>
+            <a:off x="640080" y="502920"/>
+            <a:ext cx="10515600" cy="365760"/>
+          </a:xfrm>
+          <a:prstGeom prst="rect">
+            <a:avLst/>
+          </a:prstGeom>
+          <a:noFill/>
+        </p:spPr>
+        <p:txBody>
+          <a:bodyPr wrap="square" anchor="t" lIns="0" rIns="0" tIns="0" bIns="0">
+            <a:spAutoFit/>
+          </a:bodyPr>
+          <a:lstStyle/>
+          <a:p>
+            <a:pPr>
+              <a:defRPr>
+                <a:latin typeface="Segoe UI"/>
+              </a:defRPr>
+            </a:pPr>
+            <a:r>
+              <a:rPr sz="1300" b="1" i="0">
+                <a:solidFill>
+                  <a:srgbClr val="4C9FFE"/>
+                </a:solidFill>
+                <a:latin typeface="Segoe UI"/>
+              </a:rPr>
+              <a:t>APPENDIX A (CONTINUED)</a:t>
+            </a:r>
+          </a:p>
+        </p:txBody>
+      </p:sp>
+      <p:sp>
+        <p:nvSpPr>
+          <p:cNvPr id="4" name="TextBox 3"/>
+          <p:cNvSpPr txBox="1"/>
+          <p:nvPr/>
+        </p:nvSpPr>
+        <p:spPr>
+          <a:xfrm>
+            <a:off x="640080" y="822960"/>
+            <a:ext cx="10881360" cy="1188720"/>
+          </a:xfrm>
+          <a:prstGeom prst="rect">
+            <a:avLst/>
+          </a:prstGeom>
+          <a:noFill/>
+        </p:spPr>
+        <p:txBody>
+          <a:bodyPr wrap="square" anchor="t" lIns="0" rIns="0" tIns="0" bIns="0">
+            <a:spAutoFit/>
+          </a:bodyPr>
+          <a:lstStyle/>
+          <a:p>
+            <a:r>
+              <a:rPr sz="3000" b="1" i="0">
+                <a:solidFill>
+                  <a:srgbClr val="E6E9F5"/>
+                </a:solidFill>
+                <a:latin typeface="Segoe UI"/>
+              </a:rPr>
+              <a:t>The improved prompt — capability list</a:t>
+            </a:r>
+          </a:p>
+        </p:txBody>
+      </p:sp>
+      <p:sp>
+        <p:nvSpPr>
+          <p:cNvPr id="5" name="TextBox 4"/>
+          <p:cNvSpPr txBox="1"/>
+          <p:nvPr/>
+        </p:nvSpPr>
+        <p:spPr>
+          <a:xfrm>
+            <a:off x="640080" y="6446520"/>
+            <a:ext cx="5486400" cy="320040"/>
+          </a:xfrm>
+          <a:prstGeom prst="rect">
+            <a:avLst/>
+          </a:prstGeom>
+          <a:noFill/>
+        </p:spPr>
+        <p:txBody>
+          <a:bodyPr wrap="square" anchor="t" lIns="0" rIns="0" tIns="0" bIns="0">
+            <a:spAutoFit/>
+          </a:bodyPr>
+          <a:lstStyle/>
+          <a:p>
+            <a:r>
+              <a:rPr sz="1000" b="0" i="0">
+                <a:solidFill>
+                  <a:srgbClr val="9AA2C0"/>
+                </a:solidFill>
+                <a:latin typeface="Segoe UI"/>
+              </a:rPr>
+              <a:t>◈ Temporal · Lifting the Veil</a:t>
+            </a:r>
+          </a:p>
+        </p:txBody>
+      </p:sp>
+      <p:sp>
+        <p:nvSpPr>
+          <p:cNvPr id="6" name="Rounded Rectangle 5"/>
+          <p:cNvSpPr/>
+          <p:nvPr/>
+        </p:nvSpPr>
+        <p:spPr>
+          <a:xfrm>
+            <a:off x="640080" y="1828800"/>
+            <a:ext cx="10881360" cy="2377440"/>
+          </a:xfrm>
+          <a:prstGeom prst="roundRect">
+            <a:avLst>
+              <a:gd name="adj" fmla="val 6000"/>
+            </a:avLst>
+          </a:prstGeom>
+          <a:solidFill>
+            <a:srgbClr val="0D1020"/>
+          </a:solidFill>
+          <a:ln w="12700">
+            <a:solidFill>
+              <a:srgbClr val="232A41"/>
+            </a:solidFill>
+          </a:ln>
+          <a:effectLst/>
+        </p:spPr>
+        <p:style>
+          <a:lnRef idx="1">
+            <a:schemeClr val="accent1"/>
+          </a:lnRef>
+          <a:fillRef idx="3">
+            <a:schemeClr val="accent1"/>
+          </a:fillRef>
+          <a:effectRef idx="2">
+            <a:schemeClr val="accent1"/>
+          </a:effectRef>
+          <a:fontRef idx="minor">
+            <a:schemeClr val="lt1"/>
+          </a:fontRef>
+        </p:style>
+        <p:txBody>
+          <a:bodyPr rtlCol="0" anchor="ctr"/>
+          <a:lstStyle/>
+          <a:p>
+            <a:pPr algn="ctr"/>
+          </a:p>
+        </p:txBody>
+      </p:sp>
+      <p:sp>
+        <p:nvSpPr>
+          <p:cNvPr id="7" name="Rounded Rectangle 6"/>
+          <p:cNvSpPr/>
+          <p:nvPr/>
+        </p:nvSpPr>
+        <p:spPr>
+          <a:xfrm>
+            <a:off x="640080" y="1828800"/>
+            <a:ext cx="10881360" cy="365760"/>
+          </a:xfrm>
+          <a:prstGeom prst="roundRect">
+            <a:avLst/>
+          </a:prstGeom>
+          <a:solidFill>
+            <a:srgbClr val="151934"/>
+          </a:solidFill>
+          <a:ln w="12700">
+            <a:solidFill>
+              <a:srgbClr val="232A41"/>
+            </a:solidFill>
+          </a:ln>
+          <a:effectLst/>
+        </p:spPr>
+        <p:style>
+          <a:lnRef idx="1">
+            <a:schemeClr val="accent1"/>
+          </a:lnRef>
+          <a:fillRef idx="3">
+            <a:schemeClr val="accent1"/>
+          </a:fillRef>
+          <a:effectRef idx="2">
+            <a:schemeClr val="accent1"/>
+          </a:effectRef>
+          <a:fontRef idx="minor">
+            <a:schemeClr val="lt1"/>
+          </a:fontRef>
+        </p:style>
+        <p:txBody>
+          <a:bodyPr rtlCol="0" anchor="ctr"/>
+          <a:lstStyle/>
+          <a:p>
+            <a:pPr algn="ctr"/>
+          </a:p>
+        </p:txBody>
+      </p:sp>
+      <p:sp>
+        <p:nvSpPr>
+          <p:cNvPr id="8" name="TextBox 7"/>
+          <p:cNvSpPr txBox="1"/>
+          <p:nvPr/>
+        </p:nvSpPr>
+        <p:spPr>
+          <a:xfrm>
+            <a:off x="822960" y="1883664"/>
+            <a:ext cx="10515600" cy="274320"/>
+          </a:xfrm>
+          <a:prstGeom prst="rect">
+            <a:avLst/>
+          </a:prstGeom>
+          <a:noFill/>
+        </p:spPr>
+        <p:txBody>
+          <a:bodyPr wrap="square" anchor="t" lIns="0" rIns="0" tIns="0" bIns="0">
+            <a:spAutoFit/>
+          </a:bodyPr>
+          <a:lstStyle/>
+          <a:p>
+            <a:r>
+              <a:rPr sz="1100" b="0" i="0">
+                <a:solidFill>
+                  <a:srgbClr val="9AA2C0"/>
+                </a:solidFill>
+                <a:latin typeface="Consolas"/>
+              </a:rPr>
+              <a:t>●  ●  ●    chat — refined spec (2/2)</a:t>
+            </a:r>
+          </a:p>
+        </p:txBody>
+      </p:sp>
+      <p:sp>
+        <p:nvSpPr>
+          <p:cNvPr id="9" name="TextBox 8"/>
+          <p:cNvSpPr txBox="1"/>
+          <p:nvPr/>
+        </p:nvSpPr>
+        <p:spPr>
+          <a:xfrm>
+            <a:off x="868680" y="2331720"/>
+            <a:ext cx="10424160" cy="1691640"/>
+          </a:xfrm>
+          <a:prstGeom prst="rect">
+            <a:avLst/>
+          </a:prstGeom>
+          <a:noFill/>
+        </p:spPr>
+        <p:txBody>
+          <a:bodyPr wrap="square" anchor="t" lIns="0" rIns="0" tIns="0" bIns="0">
+            <a:spAutoFit/>
+          </a:bodyPr>
+          <a:lstStyle/>
+          <a:p>
+            <a:pPr>
+              <a:lnSpc>
+                <a:spcPct val="130000"/>
+              </a:lnSpc>
+            </a:pPr>
+            <a:r>
+              <a:rPr sz="1300" b="0" i="0">
+                <a:solidFill>
+                  <a:srgbClr val="D6DCF5"/>
+                </a:solidFill>
+                <a:latin typeface="Consolas"/>
+              </a:rPr>
+              <a:t>Activities with configurable retry policies · at least one timer or durable sleep · at least one child workflow · at least one UI-driven signal where the workflow pauses for human input · workflow queries that expose current state and progress · cancellation handling · activity and workflow failure handling · a way to retry or recover from a simulated failure · meaningful workflow IDs and search attributes · workflow history remaining valid across worker restarts. The human-review step should wait indefinitely for an adjuster to approve, deny, or request more information.</a:t>
+            </a:r>
+          </a:p>
+        </p:txBody>
+      </p:sp>
+    </p:spTree>
+  </p:cSld>
+  <p:clrMapOvr>
+    <a:masterClrMapping/>
+  </p:clrMapOvr>
+</p:sld>
+</file>
+
+<file path=ppt/slides/slide34.xml><?xml version="1.0" encoding="utf-8"?>
 <p:sld xmlns:a="http://schemas.openxmlformats.org/drawingml/2006/main" xmlns:p="http://schemas.openxmlformats.org/presentationml/2006/main" xmlns:r="http://schemas.openxmlformats.org/officeDocument/2006/relationships">
   <p:cSld>
     <p:spTree>

--- a/presentation/Lifting-the-Veil-Temporal-Talk.pptx
+++ b/presentation/Lifting-the-Veil-Temporal-Talk.pptx
@@ -2285,7 +2285,7 @@
           <a:lstStyle/>
           <a:p>
             <a:r>
-              <a:t>Slow down here. Everything after is proof.</a:t>
+              <a:t>Slow down here. The refined prompt made this specific demo cleaner, but the takeaway isn't 'write a perfect spec or don't bother.' Even the rough first draft would have gotten a working workflow with retries and durability for free.</a:t>
             </a:r>
           </a:p>
         </p:txBody>
@@ -5756,7 +5756,7 @@
                 </a:solidFill>
                 <a:latin typeface="Segoe UI"/>
               </a:rPr>
-              <a:t>THE THESIS OF THIS WHOLE TALK</a:t>
+              <a:t>THE POINT OF THIS WHOLE TALK</a:t>
             </a:r>
           </a:p>
         </p:txBody>
@@ -5790,7 +5790,7 @@
                 </a:solidFill>
                 <a:latin typeface="Segoe UI"/>
               </a:rPr>
-              <a:t>Temporal doesn't reward clever prompts.
+              <a:t>Don't be overwhelmed.
 </a:t>
             </a:r>
             <a:r>
@@ -5800,7 +5800,7 @@
                 </a:solidFill>
                 <a:latin typeface="Segoe UI"/>
               </a:rPr>
-              <a:t>It rewards being </a:t>
+              <a:t>You don't need to spell everything out </a:t>
             </a:r>
             <a:r>
               <a:rPr sz="3200" b="1" i="0">
@@ -5809,7 +5809,7 @@
                 </a:solidFill>
                 <a:latin typeface="Segoe UI"/>
               </a:rPr>
-              <a:t>explicit about failure.</a:t>
+              <a:t>to see what Temporal can do for you.</a:t>
             </a:r>
           </a:p>
         </p:txBody>
@@ -5843,7 +5843,7 @@
                 </a:solidFill>
                 <a:latin typeface="Segoe UI"/>
               </a:rPr>
-              <a:t>Name the retries. Name the waits. Name what must survive a crash. The rest is implementation detail.</a:t>
+              <a:t>A sharper prompt makes for a sharper demo — but retries, signals, queries and durability are primitives Temporal gives you either way.</a:t>
             </a:r>
           </a:p>
         </p:txBody>

--- a/presentation/Lifting-the-Veil-Temporal-Talk.pptx
+++ b/presentation/Lifting-the-Veil-Temporal-Talk.pptx
@@ -39,6 +39,7 @@
     <p:sldId id="287" r:id="rId39"/>
     <p:sldId id="288" r:id="rId40"/>
     <p:sldId id="289" r:id="rId41"/>
+    <p:sldId id="290" r:id="rId42"/>
   </p:sldIdLst>
   <p:sldSz cx="12191695" cy="6858000" type="screen4x3"/>
   <p:notesSz cx="6858000" cy="9144000"/>
@@ -745,7 +746,7 @@
           <a:lstStyle/>
           <a:p>
             <a:r>
-              <a:t>Folder-level version of the architecture diagram. Each package has exactly one job: web renders and polls, api translates HTTP to Temporal client calls, worker is the only place workflow and activity code lives.</a:t>
+              <a:t>Folder-level version of the architecture diagram. Each package has exactly one job: web renders and polls, api translates HTTP to Temporal client calls, worker is the only place workflow and activity code lives. Activities are one function per file, grouped by domain.</a:t>
             </a:r>
           </a:p>
         </p:txBody>
@@ -815,7 +816,7 @@
           <a:lstStyle/>
           <a:p>
             <a:r>
-              <a:t>Let it sit as a 'yes it really does all of this' moment.</a:t>
+              <a:t>This is the real Timeline tab from this app's Temporal Web UI, not a mockup. The code is intentionally stripped down to four sequential activity calls — the real claim.workflow.ts adds retries, a child workflow, timers and signals, and all of that shows up on this same timeline with zero extra instrumentation code.</a:t>
             </a:r>
           </a:p>
         </p:txBody>
@@ -885,7 +886,7 @@
           <a:lstStyle/>
           <a:p>
             <a:r>
-              <a:t>Submit the Happy path preset. This whole timeline is one query, getClaimState, polled every 2s.</a:t>
+              <a:t>Let it sit as a 'yes it really does all of this' moment.</a:t>
             </a:r>
           </a:p>
         </p:txBody>
@@ -955,7 +956,7 @@
           <a:lstStyle/>
           <a:p>
             <a:r>
-              <a:t>The required signal from the original prompt. The workflow is genuinely suspended.</a:t>
+              <a:t>Submit the Happy path preset. This whole timeline is one query, getClaimState, polled every 2s.</a:t>
             </a:r>
           </a:p>
         </p:txBody>
@@ -1025,7 +1026,7 @@
           <a:lstStyle/>
           <a:p>
             <a:r>
-              <a:t>Point at the Activity execution &amp; retries panel — that's Temporal's own attempt counter.</a:t>
+              <a:t>The required signal from the original prompt. The workflow is genuinely suspended.</a:t>
             </a:r>
           </a:p>
         </p:txBody>
@@ -1095,7 +1096,7 @@
           <a:lstStyle/>
           <a:p>
             <a:r>
-              <a:t>A permanent failure doesn't kill the workflow, it parks it waiting for a human decision.</a:t>
+              <a:t>Point at the Activity execution &amp; retries panel — that's Temporal's own attempt counter.</a:t>
             </a:r>
           </a:p>
         </p:txBody>
@@ -1165,7 +1166,7 @@
           <a:lstStyle/>
           <a:p>
             <a:r>
-              <a:t>THE moment of the talk. Let this one breathe; don't rush the narration.</a:t>
+              <a:t>A permanent failure doesn't kill the workflow, it parks it waiting for a human decision.</a:t>
             </a:r>
           </a:p>
         </p:txBody>
@@ -1235,7 +1236,7 @@
           <a:lstStyle/>
           <a:p>
             <a:r>
-              <a:t>If time is short, this is the cut candidate.</a:t>
+              <a:t>THE moment of the talk. Let this one breathe; don't rush the narration.</a:t>
             </a:r>
           </a:p>
         </p:txBody>
@@ -1375,7 +1376,7 @@
           <a:lstStyle/>
           <a:p>
             <a:r>
-              <a:t>Remind the room: everything the dashboard showed is also just visible in Temporal's own UI.</a:t>
+              <a:t>If time is short, this is the cut candidate.</a:t>
             </a:r>
           </a:p>
         </p:txBody>
@@ -1445,7 +1446,7 @@
           <a:lstStyle/>
           <a:p>
             <a:r>
-              <a:t>Ask the room how many already do 3+ of these with cron jobs and status columns.</a:t>
+              <a:t>Remind the room: everything the dashboard showed is also just visible in Temporal's own UI.</a:t>
             </a:r>
           </a:p>
         </p:txBody>
@@ -1515,7 +1516,7 @@
           <a:lstStyle/>
           <a:p>
             <a:r>
-              <a:t>This slide is the payoff — generalized version of 'the improved prompt.'</a:t>
+              <a:t>Ask the room how many already do 3+ of these with cron jobs and status columns.</a:t>
             </a:r>
           </a:p>
         </p:txBody>
@@ -1585,7 +1586,7 @@
           <a:lstStyle/>
           <a:p>
             <a:r>
-              <a:t>Invite people to paste their own use case into this template tonight.</a:t>
+              <a:t>This slide is the payoff — generalized version of 'the improved prompt.'</a:t>
             </a:r>
           </a:p>
         </p:txBody>
@@ -1655,7 +1656,7 @@
           <a:lstStyle/>
           <a:p>
             <a:r>
-              <a:t>One breath, then move to resources.</a:t>
+              <a:t>Invite people to paste their own use case into this template tonight.</a:t>
             </a:r>
           </a:p>
         </p:txBody>
@@ -1725,7 +1726,7 @@
           <a:lstStyle/>
           <a:p>
             <a:r>
-              <a:t>Fill in your actual repo URL before the talk.</a:t>
+              <a:t>One breath, then move to resources.</a:t>
             </a:r>
           </a:p>
         </p:txBody>
@@ -1751,6 +1752,76 @@
 </file>
 
 <file path=ppt/notesSlides/notesSlide26.xml><?xml version="1.0" encoding="utf-8"?>
+<p:notes xmlns:a="http://schemas.openxmlformats.org/drawingml/2006/main" xmlns:p="http://schemas.openxmlformats.org/presentationml/2006/main" xmlns:r="http://schemas.openxmlformats.org/officeDocument/2006/relationships">
+  <p:cSld>
+    <p:spTree>
+      <p:nvGrpSpPr>
+        <p:cNvPr id="1" name=""/>
+        <p:cNvGrpSpPr/>
+        <p:nvPr/>
+      </p:nvGrpSpPr>
+      <p:grpSpPr>
+        <a:xfrm>
+          <a:off x="0" y="0"/>
+          <a:ext cx="0" cy="0"/>
+          <a:chOff x="0" y="0"/>
+          <a:chExt cx="0" cy="0"/>
+        </a:xfrm>
+      </p:grpSpPr>
+      <p:sp>
+        <p:nvSpPr>
+          <p:cNvPr id="2" name="Slide Image Placeholder 1"/>
+          <p:cNvSpPr>
+            <a:spLocks noGrp="1"/>
+          </p:cNvSpPr>
+          <p:nvPr>
+            <p:ph type="sldImg" idx="2"/>
+          </p:nvPr>
+        </p:nvSpPr>
+        <p:spPr/>
+      </p:sp>
+      <p:sp>
+        <p:nvSpPr>
+          <p:cNvPr id="3" name="Notes Placeholder 2"/>
+          <p:cNvSpPr>
+            <a:spLocks noGrp="1"/>
+          </p:cNvSpPr>
+          <p:nvPr>
+            <p:ph type="body" idx="3" sz="quarter"/>
+          </p:nvPr>
+        </p:nvSpPr>
+        <p:spPr/>
+        <p:txBody>
+          <a:bodyPr/>
+          <a:lstStyle/>
+          <a:p>
+            <a:r>
+              <a:t>Fill in your actual repo URL before the talk.</a:t>
+            </a:r>
+          </a:p>
+        </p:txBody>
+      </p:sp>
+      <p:sp>
+        <p:nvSpPr>
+          <p:cNvPr id="4" name="Slide Number Placeholder 3"/>
+          <p:cNvSpPr>
+            <a:spLocks noGrp="1"/>
+          </p:cNvSpPr>
+          <p:nvPr>
+            <p:ph type="sldNum" idx="5" sz="quarter"/>
+          </p:nvPr>
+        </p:nvSpPr>
+        <p:spPr/>
+      </p:sp>
+    </p:spTree>
+  </p:cSld>
+  <p:clrMapOvr>
+    <a:masterClrMapping/>
+  </p:clrMapOvr>
+</p:notes>
+</file>
+
+<file path=ppt/notesSlides/notesSlide27.xml><?xml version="1.0" encoding="utf-8"?>
 <p:notes xmlns:a="http://schemas.openxmlformats.org/drawingml/2006/main" xmlns:p="http://schemas.openxmlformats.org/presentationml/2006/main" xmlns:r="http://schemas.openxmlformats.org/officeDocument/2006/relationships">
   <p:cSld>
     <p:spTree>
@@ -5554,7 +5625,7 @@
                 </a:solidFill>
                 <a:latin typeface="Segoe UI"/>
               </a:rPr>
-              <a:t>~25 min</a:t>
+              <a:t>1</a:t>
             </a:r>
           </a:p>
           <a:p>
@@ -5565,7 +5636,7 @@
                 </a:solidFill>
                 <a:latin typeface="Segoe UI"/>
               </a:rPr>
-              <a:t>talk length</a:t>
+              <a:t>prompt → full app</a:t>
             </a:r>
           </a:p>
         </p:txBody>
@@ -5579,51 +5650,6 @@
         <p:spPr>
           <a:xfrm>
             <a:off x="3017520" y="5349240"/>
-            <a:ext cx="2377440" cy="640080"/>
-          </a:xfrm>
-          <a:prstGeom prst="rect">
-            <a:avLst/>
-          </a:prstGeom>
-          <a:noFill/>
-        </p:spPr>
-        <p:txBody>
-          <a:bodyPr wrap="square" anchor="t" lIns="0" rIns="0" tIns="0" bIns="0">
-            <a:spAutoFit/>
-          </a:bodyPr>
-          <a:lstStyle/>
-          <a:p>
-            <a:r>
-              <a:rPr sz="1600" b="1" i="0">
-                <a:solidFill>
-                  <a:srgbClr val="E6E9F5"/>
-                </a:solidFill>
-                <a:latin typeface="Segoe UI"/>
-              </a:rPr>
-              <a:t>1</a:t>
-            </a:r>
-          </a:p>
-          <a:p>
-            <a:r>
-              <a:rPr sz="1100" b="0" i="0">
-                <a:solidFill>
-                  <a:srgbClr val="9AA2C0"/>
-                </a:solidFill>
-                <a:latin typeface="Segoe UI"/>
-              </a:rPr>
-              <a:t>prompt → full app</a:t>
-            </a:r>
-          </a:p>
-        </p:txBody>
-      </p:sp>
-      <p:sp>
-        <p:nvSpPr>
-          <p:cNvPr id="10" name="TextBox 9"/>
-          <p:cNvSpPr txBox="1"/>
-          <p:nvPr/>
-        </p:nvSpPr>
-        <p:spPr>
-          <a:xfrm>
-            <a:off x="5394960" y="5349240"/>
             <a:ext cx="2377440" cy="640080"/>
           </a:xfrm>
           <a:prstGeom prst="rect">
@@ -8364,9 +8390,13 @@
 │   ├── claim.workflow.ts
 │   └── fraud-check.workflow.ts
 ├── activities/
-│   ├── claim.activities.ts
-│   ├── fraud.activities.ts
-│   ├── payment.activities.ts
+│   ├── claim/
+│   │   ├── validate-claim.ts
+│   │   ├── process-payment.ts
+│   │   └── …8 more
+│   ├── fraud/
+│   │   ├── check-watchlists.ts
+│   │   └── score-fraud-risk.ts
 │   └── simulation.ts
 ├── temporal/
 │   └── temporal-worker.service.ts
@@ -8506,7 +8536,7 @@
                 </a:solidFill>
                 <a:latin typeface="Segoe UI"/>
               </a:rPr>
-              <a:t>THE TEMPORAL BINGO CARD</a:t>
+              <a:t>CODE → OBSERVABILITY, FOR FREE</a:t>
             </a:r>
           </a:p>
         </p:txBody>
@@ -8540,7 +8570,7 @@
                 </a:solidFill>
                 <a:latin typeface="Segoe UI"/>
               </a:rPr>
-              <a:t>What's actually demonstrated</a:t>
+              <a:t>Four activity calls. One real execution timeline.</a:t>
             </a:r>
           </a:p>
         </p:txBody>
@@ -8587,8 +8617,8 @@
         </p:nvSpPr>
         <p:spPr>
           <a:xfrm>
-            <a:off x="640080" y="1828800"/>
-            <a:ext cx="3444240" cy="1188720"/>
+            <a:off x="640080" y="1737360"/>
+            <a:ext cx="5303520" cy="3566160"/>
           </a:xfrm>
           <a:prstGeom prst="roundRect">
             <a:avLst>
@@ -8596,7 +8626,7 @@
             </a:avLst>
           </a:prstGeom>
           <a:solidFill>
-            <a:srgbClr val="141828"/>
+            <a:srgbClr val="0D1020"/>
           </a:solidFill>
           <a:ln w="12700">
             <a:solidFill>
@@ -8629,72 +8659,20 @@
       </p:sp>
       <p:sp>
         <p:nvSpPr>
-          <p:cNvPr id="7" name="TextBox 6"/>
-          <p:cNvSpPr txBox="1"/>
-          <p:nvPr/>
-        </p:nvSpPr>
-        <p:spPr>
-          <a:xfrm>
-            <a:off x="841248" y="1975104"/>
-            <a:ext cx="3041904" cy="914400"/>
-          </a:xfrm>
-          <a:prstGeom prst="rect">
-            <a:avLst/>
-          </a:prstGeom>
-          <a:noFill/>
-        </p:spPr>
-        <p:txBody>
-          <a:bodyPr wrap="square" anchor="t" lIns="0" rIns="0" tIns="0" bIns="0">
-            <a:spAutoFit/>
-          </a:bodyPr>
-          <a:lstStyle/>
-          <a:p>
-            <a:r>
-              <a:rPr sz="1200" b="1" i="0">
-                <a:solidFill>
-                  <a:srgbClr val="34D399"/>
-                </a:solidFill>
-                <a:latin typeface="Segoe UI"/>
-              </a:rPr>
-              <a:t>RETRY POLICIES</a:t>
-            </a:r>
-          </a:p>
-          <a:p>
-            <a:pPr>
-              <a:spcBef>
-                <a:spcPts val="600"/>
-              </a:spcBef>
-            </a:pPr>
-            <a:r>
-              <a:rPr sz="1300" b="0" i="0">
-                <a:solidFill>
-                  <a:srgbClr val="9AA2C0"/>
-                </a:solidFill>
-                <a:latin typeface="Segoe UI"/>
-              </a:rPr>
-              <a:t>per-stage, configurable backoff</a:t>
-            </a:r>
-          </a:p>
-        </p:txBody>
-      </p:sp>
-      <p:sp>
-        <p:nvSpPr>
-          <p:cNvPr id="8" name="Rounded Rectangle 7"/>
+          <p:cNvPr id="7" name="Rounded Rectangle 6"/>
           <p:cNvSpPr/>
           <p:nvPr/>
         </p:nvSpPr>
         <p:spPr>
           <a:xfrm>
-            <a:off x="4358640" y="1828800"/>
-            <a:ext cx="3444240" cy="1188720"/>
+            <a:off x="640080" y="1737360"/>
+            <a:ext cx="5303520" cy="365760"/>
           </a:xfrm>
           <a:prstGeom prst="roundRect">
-            <a:avLst>
-              <a:gd name="adj" fmla="val 6000"/>
-            </a:avLst>
+            <a:avLst/>
           </a:prstGeom>
           <a:solidFill>
-            <a:srgbClr val="141828"/>
+            <a:srgbClr val="151934"/>
           </a:solidFill>
           <a:ln w="12700">
             <a:solidFill>
@@ -8727,14 +8705,14 @@
       </p:sp>
       <p:sp>
         <p:nvSpPr>
-          <p:cNvPr id="9" name="TextBox 8"/>
+          <p:cNvPr id="8" name="TextBox 7"/>
           <p:cNvSpPr txBox="1"/>
           <p:nvPr/>
         </p:nvSpPr>
         <p:spPr>
           <a:xfrm>
-            <a:off x="4559808" y="1975104"/>
-            <a:ext cx="3041904" cy="914400"/>
+            <a:off x="777240" y="1792224"/>
+            <a:ext cx="5029200" cy="274320"/>
           </a:xfrm>
           <a:prstGeom prst="rect">
             <a:avLst/>
@@ -8748,29 +8726,58 @@
           <a:lstStyle/>
           <a:p>
             <a:r>
-              <a:rPr sz="1200" b="1" i="0">
-                <a:solidFill>
-                  <a:srgbClr val="F87171"/>
-                </a:solidFill>
-                <a:latin typeface="Segoe UI"/>
-              </a:rPr>
-              <a:t>NON-RETRYABLE FAILURES</a:t>
-            </a:r>
-          </a:p>
+              <a:rPr sz="1000" b="0" i="0">
+                <a:solidFill>
+                  <a:srgbClr val="9AA2C0"/>
+                </a:solidFill>
+                <a:latin typeface="Consolas"/>
+              </a:rPr>
+              <a:t>●  ●  ●    claim.workflow.ts — simplified</a:t>
+            </a:r>
+          </a:p>
+        </p:txBody>
+      </p:sp>
+      <p:sp>
+        <p:nvSpPr>
+          <p:cNvPr id="9" name="TextBox 8"/>
+          <p:cNvSpPr txBox="1"/>
+          <p:nvPr/>
+        </p:nvSpPr>
+        <p:spPr>
+          <a:xfrm>
+            <a:off x="822960" y="2240280"/>
+            <a:ext cx="4937760" cy="2880360"/>
+          </a:xfrm>
+          <a:prstGeom prst="rect">
+            <a:avLst/>
+          </a:prstGeom>
+          <a:noFill/>
+        </p:spPr>
+        <p:txBody>
+          <a:bodyPr wrap="square" anchor="t" lIns="0" rIns="0" tIns="0" bIns="0">
+            <a:spAutoFit/>
+          </a:bodyPr>
+          <a:lstStyle/>
           <a:p>
             <a:pPr>
-              <a:spcBef>
-                <a:spcPts val="600"/>
-              </a:spcBef>
+              <a:lnSpc>
+                <a:spcPct val="130000"/>
+              </a:lnSpc>
             </a:pPr>
             <a:r>
               <a:rPr sz="1300" b="0" i="0">
                 <a:solidFill>
-                  <a:srgbClr val="9AA2C0"/>
-                </a:solidFill>
-                <a:latin typeface="Segoe UI"/>
-              </a:rPr>
-              <a:t>permanent errors stop cleanly</a:t>
+                  <a:srgbClr val="D6DCF5"/>
+                </a:solidFill>
+                <a:latin typeface="Consolas"/>
+              </a:rPr>
+              <a:t>export async function claimWorkflow(input: ClaimInput) {
+  const validation = await validateClaim(input);
+  const coverage   = await verifyCoverage(input);
+  const damage     = await assessDamage(input);
+  const payment    = await processPayment(input);
+  return { validation, coverage, damage, payment };
+}</a:t>
             </a:r>
           </a:p>
         </p:txBody>
@@ -8783,8 +8790,8 @@
         </p:nvSpPr>
         <p:spPr>
           <a:xfrm>
-            <a:off x="8077200" y="1828800"/>
-            <a:ext cx="3444240" cy="1188720"/>
+            <a:off x="6217920" y="1737360"/>
+            <a:ext cx="5303520" cy="3566160"/>
           </a:xfrm>
           <a:prstGeom prst="roundRect">
             <a:avLst>
@@ -8792,7 +8799,7 @@
             </a:avLst>
           </a:prstGeom>
           <a:solidFill>
-            <a:srgbClr val="141828"/>
+            <a:srgbClr val="0D1020"/>
           </a:solidFill>
           <a:ln w="12700">
             <a:solidFill>
@@ -8825,72 +8832,20 @@
       </p:sp>
       <p:sp>
         <p:nvSpPr>
-          <p:cNvPr id="11" name="TextBox 10"/>
-          <p:cNvSpPr txBox="1"/>
-          <p:nvPr/>
-        </p:nvSpPr>
-        <p:spPr>
-          <a:xfrm>
-            <a:off x="8278368" y="1975104"/>
-            <a:ext cx="3041904" cy="914400"/>
-          </a:xfrm>
-          <a:prstGeom prst="rect">
-            <a:avLst/>
-          </a:prstGeom>
-          <a:noFill/>
-        </p:spPr>
-        <p:txBody>
-          <a:bodyPr wrap="square" anchor="t" lIns="0" rIns="0" tIns="0" bIns="0">
-            <a:spAutoFit/>
-          </a:bodyPr>
-          <a:lstStyle/>
-          <a:p>
-            <a:r>
-              <a:rPr sz="1200" b="1" i="0">
-                <a:solidFill>
-                  <a:srgbClr val="38BDF8"/>
-                </a:solidFill>
-                <a:latin typeface="Segoe UI"/>
-              </a:rPr>
-              <a:t>DURABLE TIMERS</a:t>
-            </a:r>
-          </a:p>
-          <a:p>
-            <a:pPr>
-              <a:spcBef>
-                <a:spcPts val="600"/>
-              </a:spcBef>
-            </a:pPr>
-            <a:r>
-              <a:rPr sz="1300" b="0" i="0">
-                <a:solidFill>
-                  <a:srgbClr val="9AA2C0"/>
-                </a:solidFill>
-                <a:latin typeface="Segoe UI"/>
-              </a:rPr>
-              <a:t>settlement hold + reminder loop</a:t>
-            </a:r>
-          </a:p>
-        </p:txBody>
-      </p:sp>
-      <p:sp>
-        <p:nvSpPr>
-          <p:cNvPr id="12" name="Rounded Rectangle 11"/>
+          <p:cNvPr id="11" name="Rounded Rectangle 10"/>
           <p:cNvSpPr/>
           <p:nvPr/>
         </p:nvSpPr>
         <p:spPr>
           <a:xfrm>
-            <a:off x="640080" y="3291840"/>
-            <a:ext cx="3444240" cy="1188720"/>
+            <a:off x="6217920" y="1737360"/>
+            <a:ext cx="5303520" cy="365760"/>
           </a:xfrm>
           <a:prstGeom prst="roundRect">
-            <a:avLst>
-              <a:gd name="adj" fmla="val 6000"/>
-            </a:avLst>
+            <a:avLst/>
           </a:prstGeom>
           <a:solidFill>
-            <a:srgbClr val="141828"/>
+            <a:srgbClr val="151934"/>
           </a:solidFill>
           <a:ln w="12700">
             <a:solidFill>
@@ -8923,14 +8878,14 @@
       </p:sp>
       <p:sp>
         <p:nvSpPr>
-          <p:cNvPr id="13" name="TextBox 12"/>
+          <p:cNvPr id="12" name="TextBox 11"/>
           <p:cNvSpPr txBox="1"/>
           <p:nvPr/>
         </p:nvSpPr>
         <p:spPr>
           <a:xfrm>
-            <a:off x="841248" y="3438144"/>
-            <a:ext cx="3041904" cy="914400"/>
+            <a:off x="6355080" y="1792224"/>
+            <a:ext cx="5029200" cy="274320"/>
           </a:xfrm>
           <a:prstGeom prst="rect">
             <a:avLst/>
@@ -8944,91 +8899,51 @@
           <a:lstStyle/>
           <a:p>
             <a:r>
-              <a:rPr sz="1200" b="1" i="0">
-                <a:solidFill>
-                  <a:srgbClr val="7C5CFF"/>
-                </a:solidFill>
-                <a:latin typeface="Segoe UI"/>
-              </a:rPr>
-              <a:t>CHILD WORKFLOW</a:t>
-            </a:r>
-          </a:p>
-          <a:p>
-            <a:pPr>
-              <a:spcBef>
-                <a:spcPts val="600"/>
-              </a:spcBef>
-            </a:pPr>
-            <a:r>
-              <a:rPr sz="1300" b="0" i="0">
+              <a:rPr sz="1000" b="0" i="0">
                 <a:solidFill>
                   <a:srgbClr val="9AA2C0"/>
                 </a:solidFill>
-                <a:latin typeface="Segoe UI"/>
-              </a:rPr>
-              <a:t>fraud check, own history</a:t>
-            </a:r>
-          </a:p>
-        </p:txBody>
-      </p:sp>
-      <p:sp>
-        <p:nvSpPr>
-          <p:cNvPr id="14" name="Rounded Rectangle 13"/>
-          <p:cNvSpPr/>
-          <p:nvPr/>
-        </p:nvSpPr>
-        <p:spPr>
-          <a:xfrm>
-            <a:off x="4358640" y="3291840"/>
-            <a:ext cx="3444240" cy="1188720"/>
-          </a:xfrm>
-          <a:prstGeom prst="roundRect">
-            <a:avLst>
-              <a:gd name="adj" fmla="val 6000"/>
-            </a:avLst>
-          </a:prstGeom>
-          <a:solidFill>
-            <a:srgbClr val="141828"/>
-          </a:solidFill>
-          <a:ln w="12700">
-            <a:solidFill>
-              <a:srgbClr val="232A41"/>
-            </a:solidFill>
-          </a:ln>
-          <a:effectLst/>
-        </p:spPr>
-        <p:style>
-          <a:lnRef idx="1">
-            <a:schemeClr val="accent1"/>
-          </a:lnRef>
-          <a:fillRef idx="3">
-            <a:schemeClr val="accent1"/>
-          </a:fillRef>
-          <a:effectRef idx="2">
-            <a:schemeClr val="accent1"/>
-          </a:effectRef>
-          <a:fontRef idx="minor">
-            <a:schemeClr val="lt1"/>
-          </a:fontRef>
-        </p:style>
-        <p:txBody>
-          <a:bodyPr rtlCol="0" anchor="ctr"/>
-          <a:lstStyle/>
-          <a:p>
-            <a:pPr algn="ctr"/>
-          </a:p>
-        </p:txBody>
-      </p:sp>
-      <p:sp>
-        <p:nvSpPr>
-          <p:cNvPr id="15" name="TextBox 14"/>
+                <a:latin typeface="Consolas"/>
+              </a:rPr>
+              <a:t>●  ●  ●    Temporal Web UI — Timeline tab</a:t>
+            </a:r>
+          </a:p>
+        </p:txBody>
+      </p:sp>
+      <p:pic>
+        <p:nvPicPr>
+          <p:cNvPr id="13" name="Picture 12" descr="temporal-timeline-example.png"/>
+          <p:cNvPicPr>
+            <a:picLocks noChangeAspect="1"/>
+          </p:cNvPicPr>
+          <p:nvPr/>
+        </p:nvPicPr>
+        <p:blipFill>
+          <a:blip r:embed="rId3"/>
+          <a:stretch>
+            <a:fillRect/>
+          </a:stretch>
+        </p:blipFill>
+        <p:spPr>
+          <a:xfrm>
+            <a:off x="6309360" y="2194560"/>
+            <a:ext cx="5120640" cy="2560320"/>
+          </a:xfrm>
+          <a:prstGeom prst="rect">
+            <a:avLst/>
+          </a:prstGeom>
+        </p:spPr>
+      </p:pic>
+      <p:sp>
+        <p:nvSpPr>
+          <p:cNvPr id="14" name="TextBox 13"/>
           <p:cNvSpPr txBox="1"/>
           <p:nvPr/>
         </p:nvSpPr>
         <p:spPr>
           <a:xfrm>
-            <a:off x="4559808" y="3438144"/>
-            <a:ext cx="3041904" cy="914400"/>
+            <a:off x="640080" y="5532120"/>
+            <a:ext cx="10515600" cy="1097280"/>
           </a:xfrm>
           <a:prstGeom prst="rect">
             <a:avLst/>
@@ -9042,715 +8957,13 @@
           <a:lstStyle/>
           <a:p>
             <a:r>
-              <a:rPr sz="1200" b="1" i="0">
-                <a:solidFill>
-                  <a:srgbClr val="38BDF8"/>
-                </a:solidFill>
-                <a:latin typeface="Segoe UI"/>
-              </a:rPr>
-              <a:t>SIGNALS</a:t>
-            </a:r>
-          </a:p>
-          <a:p>
-            <a:pPr>
-              <a:spcBef>
-                <a:spcPts val="600"/>
-              </a:spcBef>
-            </a:pPr>
-            <a:r>
-              <a:rPr sz="1300" b="0" i="0">
+              <a:rPr sz="1400" b="0" i="0">
                 <a:solidFill>
                   <a:srgbClr val="9AA2C0"/>
                 </a:solidFill>
                 <a:latin typeface="Segoe UI"/>
               </a:rPr>
-              <a:t>approve / deny / info / recover</a:t>
-            </a:r>
-          </a:p>
-        </p:txBody>
-      </p:sp>
-      <p:sp>
-        <p:nvSpPr>
-          <p:cNvPr id="16" name="Rounded Rectangle 15"/>
-          <p:cNvSpPr/>
-          <p:nvPr/>
-        </p:nvSpPr>
-        <p:spPr>
-          <a:xfrm>
-            <a:off x="8077200" y="3291840"/>
-            <a:ext cx="3444240" cy="1188720"/>
-          </a:xfrm>
-          <a:prstGeom prst="roundRect">
-            <a:avLst>
-              <a:gd name="adj" fmla="val 6000"/>
-            </a:avLst>
-          </a:prstGeom>
-          <a:solidFill>
-            <a:srgbClr val="141828"/>
-          </a:solidFill>
-          <a:ln w="12700">
-            <a:solidFill>
-              <a:srgbClr val="232A41"/>
-            </a:solidFill>
-          </a:ln>
-          <a:effectLst/>
-        </p:spPr>
-        <p:style>
-          <a:lnRef idx="1">
-            <a:schemeClr val="accent1"/>
-          </a:lnRef>
-          <a:fillRef idx="3">
-            <a:schemeClr val="accent1"/>
-          </a:fillRef>
-          <a:effectRef idx="2">
-            <a:schemeClr val="accent1"/>
-          </a:effectRef>
-          <a:fontRef idx="minor">
-            <a:schemeClr val="lt1"/>
-          </a:fontRef>
-        </p:style>
-        <p:txBody>
-          <a:bodyPr rtlCol="0" anchor="ctr"/>
-          <a:lstStyle/>
-          <a:p>
-            <a:pPr algn="ctr"/>
-          </a:p>
-        </p:txBody>
-      </p:sp>
-      <p:sp>
-        <p:nvSpPr>
-          <p:cNvPr id="17" name="TextBox 16"/>
-          <p:cNvSpPr txBox="1"/>
-          <p:nvPr/>
-        </p:nvSpPr>
-        <p:spPr>
-          <a:xfrm>
-            <a:off x="8278368" y="3438144"/>
-            <a:ext cx="3041904" cy="914400"/>
-          </a:xfrm>
-          <a:prstGeom prst="rect">
-            <a:avLst/>
-          </a:prstGeom>
-          <a:noFill/>
-        </p:spPr>
-        <p:txBody>
-          <a:bodyPr wrap="square" anchor="t" lIns="0" rIns="0" tIns="0" bIns="0">
-            <a:spAutoFit/>
-          </a:bodyPr>
-          <a:lstStyle/>
-          <a:p>
-            <a:r>
-              <a:rPr sz="1200" b="1" i="0">
-                <a:solidFill>
-                  <a:srgbClr val="4C9FFE"/>
-                </a:solidFill>
-                <a:latin typeface="Segoe UI"/>
-              </a:rPr>
-              <a:t>QUERIES</a:t>
-            </a:r>
-          </a:p>
-          <a:p>
-            <a:pPr>
-              <a:spcBef>
-                <a:spcPts val="600"/>
-              </a:spcBef>
-            </a:pPr>
-            <a:r>
-              <a:rPr sz="1300" b="0" i="0">
-                <a:solidFill>
-                  <a:srgbClr val="9AA2C0"/>
-                </a:solidFill>
-                <a:latin typeface="Segoe UI"/>
-              </a:rPr>
-              <a:t>live state + progress %</a:t>
-            </a:r>
-          </a:p>
-        </p:txBody>
-      </p:sp>
-      <p:sp>
-        <p:nvSpPr>
-          <p:cNvPr id="18" name="Rounded Rectangle 17"/>
-          <p:cNvSpPr/>
-          <p:nvPr/>
-        </p:nvSpPr>
-        <p:spPr>
-          <a:xfrm>
-            <a:off x="640080" y="4754880"/>
-            <a:ext cx="3444240" cy="1188720"/>
-          </a:xfrm>
-          <a:prstGeom prst="roundRect">
-            <a:avLst>
-              <a:gd name="adj" fmla="val 6000"/>
-            </a:avLst>
-          </a:prstGeom>
-          <a:solidFill>
-            <a:srgbClr val="141828"/>
-          </a:solidFill>
-          <a:ln w="12700">
-            <a:solidFill>
-              <a:srgbClr val="232A41"/>
-            </a:solidFill>
-          </a:ln>
-          <a:effectLst/>
-        </p:spPr>
-        <p:style>
-          <a:lnRef idx="1">
-            <a:schemeClr val="accent1"/>
-          </a:lnRef>
-          <a:fillRef idx="3">
-            <a:schemeClr val="accent1"/>
-          </a:fillRef>
-          <a:effectRef idx="2">
-            <a:schemeClr val="accent1"/>
-          </a:effectRef>
-          <a:fontRef idx="minor">
-            <a:schemeClr val="lt1"/>
-          </a:fontRef>
-        </p:style>
-        <p:txBody>
-          <a:bodyPr rtlCol="0" anchor="ctr"/>
-          <a:lstStyle/>
-          <a:p>
-            <a:pPr algn="ctr"/>
-          </a:p>
-        </p:txBody>
-      </p:sp>
-      <p:sp>
-        <p:nvSpPr>
-          <p:cNvPr id="19" name="TextBox 18"/>
-          <p:cNvSpPr txBox="1"/>
-          <p:nvPr/>
-        </p:nvSpPr>
-        <p:spPr>
-          <a:xfrm>
-            <a:off x="841248" y="4901184"/>
-            <a:ext cx="3041904" cy="914400"/>
-          </a:xfrm>
-          <a:prstGeom prst="rect">
-            <a:avLst/>
-          </a:prstGeom>
-          <a:noFill/>
-        </p:spPr>
-        <p:txBody>
-          <a:bodyPr wrap="square" anchor="t" lIns="0" rIns="0" tIns="0" bIns="0">
-            <a:spAutoFit/>
-          </a:bodyPr>
-          <a:lstStyle/>
-          <a:p>
-            <a:r>
-              <a:rPr sz="1200" b="1" i="0">
-                <a:solidFill>
-                  <a:srgbClr val="4C9FFE"/>
-                </a:solidFill>
-                <a:latin typeface="Segoe UI"/>
-              </a:rPr>
-              <a:t>UPDATE + VALIDATOR</a:t>
-            </a:r>
-          </a:p>
-          <a:p>
-            <a:pPr>
-              <a:spcBef>
-                <a:spcPts val="600"/>
-              </a:spcBef>
-            </a:pPr>
-            <a:r>
-              <a:rPr sz="1300" b="0" i="0">
-                <a:solidFill>
-                  <a:srgbClr val="9AA2C0"/>
-                </a:solidFill>
-                <a:latin typeface="Segoe UI"/>
-              </a:rPr>
-              <a:t>adjuster notes, rejected inline</a:t>
-            </a:r>
-          </a:p>
-        </p:txBody>
-      </p:sp>
-      <p:sp>
-        <p:nvSpPr>
-          <p:cNvPr id="20" name="Rounded Rectangle 19"/>
-          <p:cNvSpPr/>
-          <p:nvPr/>
-        </p:nvSpPr>
-        <p:spPr>
-          <a:xfrm>
-            <a:off x="4358640" y="4754880"/>
-            <a:ext cx="3444240" cy="1188720"/>
-          </a:xfrm>
-          <a:prstGeom prst="roundRect">
-            <a:avLst>
-              <a:gd name="adj" fmla="val 6000"/>
-            </a:avLst>
-          </a:prstGeom>
-          <a:solidFill>
-            <a:srgbClr val="141828"/>
-          </a:solidFill>
-          <a:ln w="12700">
-            <a:solidFill>
-              <a:srgbClr val="232A41"/>
-            </a:solidFill>
-          </a:ln>
-          <a:effectLst/>
-        </p:spPr>
-        <p:style>
-          <a:lnRef idx="1">
-            <a:schemeClr val="accent1"/>
-          </a:lnRef>
-          <a:fillRef idx="3">
-            <a:schemeClr val="accent1"/>
-          </a:fillRef>
-          <a:effectRef idx="2">
-            <a:schemeClr val="accent1"/>
-          </a:effectRef>
-          <a:fontRef idx="minor">
-            <a:schemeClr val="lt1"/>
-          </a:fontRef>
-        </p:style>
-        <p:txBody>
-          <a:bodyPr rtlCol="0" anchor="ctr"/>
-          <a:lstStyle/>
-          <a:p>
-            <a:pPr algn="ctr"/>
-          </a:p>
-        </p:txBody>
-      </p:sp>
-      <p:sp>
-        <p:nvSpPr>
-          <p:cNvPr id="21" name="TextBox 20"/>
-          <p:cNvSpPr txBox="1"/>
-          <p:nvPr/>
-        </p:nvSpPr>
-        <p:spPr>
-          <a:xfrm>
-            <a:off x="4559808" y="4901184"/>
-            <a:ext cx="3041904" cy="914400"/>
-          </a:xfrm>
-          <a:prstGeom prst="rect">
-            <a:avLst/>
-          </a:prstGeom>
-          <a:noFill/>
-        </p:spPr>
-        <p:txBody>
-          <a:bodyPr wrap="square" anchor="t" lIns="0" rIns="0" tIns="0" bIns="0">
-            <a:spAutoFit/>
-          </a:bodyPr>
-          <a:lstStyle/>
-          <a:p>
-            <a:r>
-              <a:rPr sz="1200" b="1" i="0">
-                <a:solidFill>
-                  <a:srgbClr val="FBBF24"/>
-                </a:solidFill>
-                <a:latin typeface="Segoe UI"/>
-              </a:rPr>
-              <a:t>CANCELLATION</a:t>
-            </a:r>
-          </a:p>
-          <a:p>
-            <a:pPr>
-              <a:spcBef>
-                <a:spcPts val="600"/>
-              </a:spcBef>
-            </a:pPr>
-            <a:r>
-              <a:rPr sz="1300" b="0" i="0">
-                <a:solidFill>
-                  <a:srgbClr val="9AA2C0"/>
-                </a:solidFill>
-                <a:latin typeface="Segoe UI"/>
-              </a:rPr>
-              <a:t>saga-style compensation</a:t>
-            </a:r>
-          </a:p>
-        </p:txBody>
-      </p:sp>
-      <p:sp>
-        <p:nvSpPr>
-          <p:cNvPr id="22" name="Rounded Rectangle 21"/>
-          <p:cNvSpPr/>
-          <p:nvPr/>
-        </p:nvSpPr>
-        <p:spPr>
-          <a:xfrm>
-            <a:off x="8077200" y="4754880"/>
-            <a:ext cx="3444240" cy="1188720"/>
-          </a:xfrm>
-          <a:prstGeom prst="roundRect">
-            <a:avLst>
-              <a:gd name="adj" fmla="val 6000"/>
-            </a:avLst>
-          </a:prstGeom>
-          <a:solidFill>
-            <a:srgbClr val="141828"/>
-          </a:solidFill>
-          <a:ln w="12700">
-            <a:solidFill>
-              <a:srgbClr val="232A41"/>
-            </a:solidFill>
-          </a:ln>
-          <a:effectLst/>
-        </p:spPr>
-        <p:style>
-          <a:lnRef idx="1">
-            <a:schemeClr val="accent1"/>
-          </a:lnRef>
-          <a:fillRef idx="3">
-            <a:schemeClr val="accent1"/>
-          </a:fillRef>
-          <a:effectRef idx="2">
-            <a:schemeClr val="accent1"/>
-          </a:effectRef>
-          <a:fontRef idx="minor">
-            <a:schemeClr val="lt1"/>
-          </a:fontRef>
-        </p:style>
-        <p:txBody>
-          <a:bodyPr rtlCol="0" anchor="ctr"/>
-          <a:lstStyle/>
-          <a:p>
-            <a:pPr algn="ctr"/>
-          </a:p>
-        </p:txBody>
-      </p:sp>
-      <p:sp>
-        <p:nvSpPr>
-          <p:cNvPr id="23" name="TextBox 22"/>
-          <p:cNvSpPr txBox="1"/>
-          <p:nvPr/>
-        </p:nvSpPr>
-        <p:spPr>
-          <a:xfrm>
-            <a:off x="8278368" y="4901184"/>
-            <a:ext cx="3041904" cy="914400"/>
-          </a:xfrm>
-          <a:prstGeom prst="rect">
-            <a:avLst/>
-          </a:prstGeom>
-          <a:noFill/>
-        </p:spPr>
-        <p:txBody>
-          <a:bodyPr wrap="square" anchor="t" lIns="0" rIns="0" tIns="0" bIns="0">
-            <a:spAutoFit/>
-          </a:bodyPr>
-          <a:lstStyle/>
-          <a:p>
-            <a:r>
-              <a:rPr sz="1200" b="1" i="0">
-                <a:solidFill>
-                  <a:srgbClr val="4C9FFE"/>
-                </a:solidFill>
-                <a:latin typeface="Segoe UI"/>
-              </a:rPr>
-              <a:t>SEARCH ATTRIBUTES</a:t>
-            </a:r>
-          </a:p>
-          <a:p>
-            <a:pPr>
-              <a:spcBef>
-                <a:spcPts val="600"/>
-              </a:spcBef>
-            </a:pPr>
-            <a:r>
-              <a:rPr sz="1300" b="0" i="0">
-                <a:solidFill>
-                  <a:srgbClr val="9AA2C0"/>
-                </a:solidFill>
-                <a:latin typeface="Segoe UI"/>
-              </a:rPr>
-              <a:t>find claims by status/type/score</a:t>
-            </a:r>
-          </a:p>
-        </p:txBody>
-      </p:sp>
-      <p:sp>
-        <p:nvSpPr>
-          <p:cNvPr id="24" name="Rounded Rectangle 23"/>
-          <p:cNvSpPr/>
-          <p:nvPr/>
-        </p:nvSpPr>
-        <p:spPr>
-          <a:xfrm>
-            <a:off x="640080" y="6217920"/>
-            <a:ext cx="3444240" cy="1188720"/>
-          </a:xfrm>
-          <a:prstGeom prst="roundRect">
-            <a:avLst>
-              <a:gd name="adj" fmla="val 6000"/>
-            </a:avLst>
-          </a:prstGeom>
-          <a:solidFill>
-            <a:srgbClr val="141828"/>
-          </a:solidFill>
-          <a:ln w="12700">
-            <a:solidFill>
-              <a:srgbClr val="232A41"/>
-            </a:solidFill>
-          </a:ln>
-          <a:effectLst/>
-        </p:spPr>
-        <p:style>
-          <a:lnRef idx="1">
-            <a:schemeClr val="accent1"/>
-          </a:lnRef>
-          <a:fillRef idx="3">
-            <a:schemeClr val="accent1"/>
-          </a:fillRef>
-          <a:effectRef idx="2">
-            <a:schemeClr val="accent1"/>
-          </a:effectRef>
-          <a:fontRef idx="minor">
-            <a:schemeClr val="lt1"/>
-          </a:fontRef>
-        </p:style>
-        <p:txBody>
-          <a:bodyPr rtlCol="0" anchor="ctr"/>
-          <a:lstStyle/>
-          <a:p>
-            <a:pPr algn="ctr"/>
-          </a:p>
-        </p:txBody>
-      </p:sp>
-      <p:sp>
-        <p:nvSpPr>
-          <p:cNvPr id="25" name="TextBox 24"/>
-          <p:cNvSpPr txBox="1"/>
-          <p:nvPr/>
-        </p:nvSpPr>
-        <p:spPr>
-          <a:xfrm>
-            <a:off x="841248" y="6364224"/>
-            <a:ext cx="3041904" cy="914400"/>
-          </a:xfrm>
-          <a:prstGeom prst="rect">
-            <a:avLst/>
-          </a:prstGeom>
-          <a:noFill/>
-        </p:spPr>
-        <p:txBody>
-          <a:bodyPr wrap="square" anchor="t" lIns="0" rIns="0" tIns="0" bIns="0">
-            <a:spAutoFit/>
-          </a:bodyPr>
-          <a:lstStyle/>
-          <a:p>
-            <a:r>
-              <a:rPr sz="1200" b="1" i="0">
-                <a:solidFill>
-                  <a:srgbClr val="34D399"/>
-                </a:solidFill>
-                <a:latin typeface="Segoe UI"/>
-              </a:rPr>
-              <a:t>WORKER-RESTART DURABILITY</a:t>
-            </a:r>
-          </a:p>
-          <a:p>
-            <a:pPr>
-              <a:spcBef>
-                <a:spcPts val="600"/>
-              </a:spcBef>
-            </a:pPr>
-            <a:r>
-              <a:rPr sz="1300" b="0" i="0">
-                <a:solidFill>
-                  <a:srgbClr val="9AA2C0"/>
-                </a:solidFill>
-                <a:latin typeface="Segoe UI"/>
-              </a:rPr>
-              <a:t>kill it mid-claim, resume</a:t>
-            </a:r>
-          </a:p>
-        </p:txBody>
-      </p:sp>
-      <p:sp>
-        <p:nvSpPr>
-          <p:cNvPr id="26" name="Rounded Rectangle 25"/>
-          <p:cNvSpPr/>
-          <p:nvPr/>
-        </p:nvSpPr>
-        <p:spPr>
-          <a:xfrm>
-            <a:off x="4358640" y="6217920"/>
-            <a:ext cx="3444240" cy="1188720"/>
-          </a:xfrm>
-          <a:prstGeom prst="roundRect">
-            <a:avLst>
-              <a:gd name="adj" fmla="val 6000"/>
-            </a:avLst>
-          </a:prstGeom>
-          <a:solidFill>
-            <a:srgbClr val="141828"/>
-          </a:solidFill>
-          <a:ln w="12700">
-            <a:solidFill>
-              <a:srgbClr val="232A41"/>
-            </a:solidFill>
-          </a:ln>
-          <a:effectLst/>
-        </p:spPr>
-        <p:style>
-          <a:lnRef idx="1">
-            <a:schemeClr val="accent1"/>
-          </a:lnRef>
-          <a:fillRef idx="3">
-            <a:schemeClr val="accent1"/>
-          </a:fillRef>
-          <a:effectRef idx="2">
-            <a:schemeClr val="accent1"/>
-          </a:effectRef>
-          <a:fontRef idx="minor">
-            <a:schemeClr val="lt1"/>
-          </a:fontRef>
-        </p:style>
-        <p:txBody>
-          <a:bodyPr rtlCol="0" anchor="ctr"/>
-          <a:lstStyle/>
-          <a:p>
-            <a:pPr algn="ctr"/>
-          </a:p>
-        </p:txBody>
-      </p:sp>
-      <p:sp>
-        <p:nvSpPr>
-          <p:cNvPr id="27" name="TextBox 26"/>
-          <p:cNvSpPr txBox="1"/>
-          <p:nvPr/>
-        </p:nvSpPr>
-        <p:spPr>
-          <a:xfrm>
-            <a:off x="4559808" y="6364224"/>
-            <a:ext cx="3041904" cy="914400"/>
-          </a:xfrm>
-          <a:prstGeom prst="rect">
-            <a:avLst/>
-          </a:prstGeom>
-          <a:noFill/>
-        </p:spPr>
-        <p:txBody>
-          <a:bodyPr wrap="square" anchor="t" lIns="0" rIns="0" tIns="0" bIns="0">
-            <a:spAutoFit/>
-          </a:bodyPr>
-          <a:lstStyle/>
-          <a:p>
-            <a:r>
-              <a:rPr sz="1200" b="1" i="0">
-                <a:solidFill>
-                  <a:srgbClr val="4C9FFE"/>
-                </a:solidFill>
-                <a:latin typeface="Segoe UI"/>
-              </a:rPr>
-              <a:t>HEARTBEATS</a:t>
-            </a:r>
-          </a:p>
-          <a:p>
-            <a:pPr>
-              <a:spcBef>
-                <a:spcPts val="600"/>
-              </a:spcBef>
-            </a:pPr>
-            <a:r>
-              <a:rPr sz="1300" b="0" i="0">
-                <a:solidFill>
-                  <a:srgbClr val="9AA2C0"/>
-                </a:solidFill>
-                <a:latin typeface="Segoe UI"/>
-              </a:rPr>
-              <a:t>cancellable long-running activity</a:t>
-            </a:r>
-          </a:p>
-        </p:txBody>
-      </p:sp>
-      <p:sp>
-        <p:nvSpPr>
-          <p:cNvPr id="28" name="Rounded Rectangle 27"/>
-          <p:cNvSpPr/>
-          <p:nvPr/>
-        </p:nvSpPr>
-        <p:spPr>
-          <a:xfrm>
-            <a:off x="8077200" y="6217920"/>
-            <a:ext cx="3444240" cy="1188720"/>
-          </a:xfrm>
-          <a:prstGeom prst="roundRect">
-            <a:avLst>
-              <a:gd name="adj" fmla="val 6000"/>
-            </a:avLst>
-          </a:prstGeom>
-          <a:solidFill>
-            <a:srgbClr val="141828"/>
-          </a:solidFill>
-          <a:ln w="12700">
-            <a:solidFill>
-              <a:srgbClr val="232A41"/>
-            </a:solidFill>
-          </a:ln>
-          <a:effectLst/>
-        </p:spPr>
-        <p:style>
-          <a:lnRef idx="1">
-            <a:schemeClr val="accent1"/>
-          </a:lnRef>
-          <a:fillRef idx="3">
-            <a:schemeClr val="accent1"/>
-          </a:fillRef>
-          <a:effectRef idx="2">
-            <a:schemeClr val="accent1"/>
-          </a:effectRef>
-          <a:fontRef idx="minor">
-            <a:schemeClr val="lt1"/>
-          </a:fontRef>
-        </p:style>
-        <p:txBody>
-          <a:bodyPr rtlCol="0" anchor="ctr"/>
-          <a:lstStyle/>
-          <a:p>
-            <a:pPr algn="ctr"/>
-          </a:p>
-        </p:txBody>
-      </p:sp>
-      <p:sp>
-        <p:nvSpPr>
-          <p:cNvPr id="29" name="TextBox 28"/>
-          <p:cNvSpPr txBox="1"/>
-          <p:nvPr/>
-        </p:nvSpPr>
-        <p:spPr>
-          <a:xfrm>
-            <a:off x="8278368" y="6364224"/>
-            <a:ext cx="3041904" cy="914400"/>
-          </a:xfrm>
-          <a:prstGeom prst="rect">
-            <a:avLst/>
-          </a:prstGeom>
-          <a:noFill/>
-        </p:spPr>
-        <p:txBody>
-          <a:bodyPr wrap="square" anchor="t" lIns="0" rIns="0" tIns="0" bIns="0">
-            <a:spAutoFit/>
-          </a:bodyPr>
-          <a:lstStyle/>
-          <a:p>
-            <a:r>
-              <a:rPr sz="1200" b="1" i="0">
-                <a:solidFill>
-                  <a:srgbClr val="F87171"/>
-                </a:solidFill>
-                <a:latin typeface="Segoe UI"/>
-              </a:rPr>
-              <a:t>NO DATABASE</a:t>
-            </a:r>
-          </a:p>
-          <a:p>
-            <a:pPr>
-              <a:spcBef>
-                <a:spcPts val="600"/>
-              </a:spcBef>
-            </a:pPr>
-            <a:r>
-              <a:rPr sz="1300" b="0" i="0">
-                <a:solidFill>
-                  <a:srgbClr val="9AA2C0"/>
-                </a:solidFill>
-                <a:latin typeface="Segoe UI"/>
-              </a:rPr>
-              <a:t>Temporal is the only state store</a:t>
+              <a:t>No custom logging, no tracing setup, no dashboard to build — every activity call on the left shows up as a bar on the right the moment it runs.</a:t>
             </a:r>
           </a:p>
         </p:txBody>
@@ -9825,8 +9038,8 @@
         </p:nvSpPr>
         <p:spPr>
           <a:xfrm>
-            <a:off x="822960" y="2194560"/>
-            <a:ext cx="3657600" cy="1463040"/>
+            <a:off x="640080" y="502920"/>
+            <a:ext cx="10515600" cy="365760"/>
           </a:xfrm>
           <a:prstGeom prst="rect">
             <a:avLst/>
@@ -9839,14 +9052,19 @@
           </a:bodyPr>
           <a:lstStyle/>
           <a:p>
-            <a:r>
-              <a:rPr sz="7200" b="1" i="0">
-                <a:solidFill>
-                  <a:srgbClr val="7C5CFF"/>
-                </a:solidFill>
-                <a:latin typeface="Consolas"/>
-              </a:rPr>
-              <a:t>03</a:t>
+            <a:pPr>
+              <a:defRPr>
+                <a:latin typeface="Segoe UI"/>
+              </a:defRPr>
+            </a:pPr>
+            <a:r>
+              <a:rPr sz="1300" b="1" i="0">
+                <a:solidFill>
+                  <a:srgbClr val="4C9FFE"/>
+                </a:solidFill>
+                <a:latin typeface="Segoe UI"/>
+              </a:rPr>
+              <a:t>THE TEMPORAL BINGO CARD</a:t>
             </a:r>
           </a:p>
         </p:txBody>
@@ -9859,8 +9077,8 @@
         </p:nvSpPr>
         <p:spPr>
           <a:xfrm>
-            <a:off x="822960" y="3383280"/>
-            <a:ext cx="8686800" cy="1005840"/>
+            <a:off x="640080" y="822960"/>
+            <a:ext cx="10881360" cy="1188720"/>
           </a:xfrm>
           <a:prstGeom prst="rect">
             <a:avLst/>
@@ -9874,13 +9092,13 @@
           <a:lstStyle/>
           <a:p>
             <a:r>
-              <a:rPr sz="4000" b="1" i="0">
+              <a:rPr sz="3000" b="1" i="0">
                 <a:solidFill>
                   <a:srgbClr val="E6E9F5"/>
                 </a:solidFill>
                 <a:latin typeface="Segoe UI"/>
               </a:rPr>
-              <a:t>Let's See It Run</a:t>
+              <a:t>What's actually demonstrated</a:t>
             </a:r>
           </a:p>
         </p:txBody>
@@ -9893,8 +9111,8 @@
         </p:nvSpPr>
         <p:spPr>
           <a:xfrm>
-            <a:off x="822960" y="4206240"/>
-            <a:ext cx="6858000" cy="914400"/>
+            <a:off x="640080" y="6446520"/>
+            <a:ext cx="5486400" cy="320040"/>
           </a:xfrm>
           <a:prstGeom prst="rect">
             <a:avLst/>
@@ -9908,13 +9126,1189 @@
           <a:lstStyle/>
           <a:p>
             <a:r>
-              <a:rPr sz="1700" b="0" i="0">
+              <a:rPr sz="1000" b="0" i="0">
                 <a:solidFill>
                   <a:srgbClr val="9AA2C0"/>
                 </a:solidFill>
                 <a:latin typeface="Segoe UI"/>
               </a:rPr>
-              <a:t>Six short cuts. Real failures. Real recovery. No cuts hiding a crash.</a:t>
+              <a:t>◈ Temporal · Lifting the Veil</a:t>
+            </a:r>
+          </a:p>
+        </p:txBody>
+      </p:sp>
+      <p:sp>
+        <p:nvSpPr>
+          <p:cNvPr id="6" name="Rounded Rectangle 5"/>
+          <p:cNvSpPr/>
+          <p:nvPr/>
+        </p:nvSpPr>
+        <p:spPr>
+          <a:xfrm>
+            <a:off x="640080" y="1828800"/>
+            <a:ext cx="3444240" cy="1188720"/>
+          </a:xfrm>
+          <a:prstGeom prst="roundRect">
+            <a:avLst>
+              <a:gd name="adj" fmla="val 6000"/>
+            </a:avLst>
+          </a:prstGeom>
+          <a:solidFill>
+            <a:srgbClr val="141828"/>
+          </a:solidFill>
+          <a:ln w="12700">
+            <a:solidFill>
+              <a:srgbClr val="232A41"/>
+            </a:solidFill>
+          </a:ln>
+          <a:effectLst/>
+        </p:spPr>
+        <p:style>
+          <a:lnRef idx="1">
+            <a:schemeClr val="accent1"/>
+          </a:lnRef>
+          <a:fillRef idx="3">
+            <a:schemeClr val="accent1"/>
+          </a:fillRef>
+          <a:effectRef idx="2">
+            <a:schemeClr val="accent1"/>
+          </a:effectRef>
+          <a:fontRef idx="minor">
+            <a:schemeClr val="lt1"/>
+          </a:fontRef>
+        </p:style>
+        <p:txBody>
+          <a:bodyPr rtlCol="0" anchor="ctr"/>
+          <a:lstStyle/>
+          <a:p>
+            <a:pPr algn="ctr"/>
+          </a:p>
+        </p:txBody>
+      </p:sp>
+      <p:sp>
+        <p:nvSpPr>
+          <p:cNvPr id="7" name="TextBox 6"/>
+          <p:cNvSpPr txBox="1"/>
+          <p:nvPr/>
+        </p:nvSpPr>
+        <p:spPr>
+          <a:xfrm>
+            <a:off x="841248" y="1975104"/>
+            <a:ext cx="3041904" cy="914400"/>
+          </a:xfrm>
+          <a:prstGeom prst="rect">
+            <a:avLst/>
+          </a:prstGeom>
+          <a:noFill/>
+        </p:spPr>
+        <p:txBody>
+          <a:bodyPr wrap="square" anchor="t" lIns="0" rIns="0" tIns="0" bIns="0">
+            <a:spAutoFit/>
+          </a:bodyPr>
+          <a:lstStyle/>
+          <a:p>
+            <a:r>
+              <a:rPr sz="1200" b="1" i="0">
+                <a:solidFill>
+                  <a:srgbClr val="34D399"/>
+                </a:solidFill>
+                <a:latin typeface="Segoe UI"/>
+              </a:rPr>
+              <a:t>RETRY POLICIES</a:t>
+            </a:r>
+          </a:p>
+          <a:p>
+            <a:pPr>
+              <a:spcBef>
+                <a:spcPts val="600"/>
+              </a:spcBef>
+            </a:pPr>
+            <a:r>
+              <a:rPr sz="1300" b="0" i="0">
+                <a:solidFill>
+                  <a:srgbClr val="9AA2C0"/>
+                </a:solidFill>
+                <a:latin typeface="Segoe UI"/>
+              </a:rPr>
+              <a:t>per-stage, configurable backoff</a:t>
+            </a:r>
+          </a:p>
+        </p:txBody>
+      </p:sp>
+      <p:sp>
+        <p:nvSpPr>
+          <p:cNvPr id="8" name="Rounded Rectangle 7"/>
+          <p:cNvSpPr/>
+          <p:nvPr/>
+        </p:nvSpPr>
+        <p:spPr>
+          <a:xfrm>
+            <a:off x="4358640" y="1828800"/>
+            <a:ext cx="3444240" cy="1188720"/>
+          </a:xfrm>
+          <a:prstGeom prst="roundRect">
+            <a:avLst>
+              <a:gd name="adj" fmla="val 6000"/>
+            </a:avLst>
+          </a:prstGeom>
+          <a:solidFill>
+            <a:srgbClr val="141828"/>
+          </a:solidFill>
+          <a:ln w="12700">
+            <a:solidFill>
+              <a:srgbClr val="232A41"/>
+            </a:solidFill>
+          </a:ln>
+          <a:effectLst/>
+        </p:spPr>
+        <p:style>
+          <a:lnRef idx="1">
+            <a:schemeClr val="accent1"/>
+          </a:lnRef>
+          <a:fillRef idx="3">
+            <a:schemeClr val="accent1"/>
+          </a:fillRef>
+          <a:effectRef idx="2">
+            <a:schemeClr val="accent1"/>
+          </a:effectRef>
+          <a:fontRef idx="minor">
+            <a:schemeClr val="lt1"/>
+          </a:fontRef>
+        </p:style>
+        <p:txBody>
+          <a:bodyPr rtlCol="0" anchor="ctr"/>
+          <a:lstStyle/>
+          <a:p>
+            <a:pPr algn="ctr"/>
+          </a:p>
+        </p:txBody>
+      </p:sp>
+      <p:sp>
+        <p:nvSpPr>
+          <p:cNvPr id="9" name="TextBox 8"/>
+          <p:cNvSpPr txBox="1"/>
+          <p:nvPr/>
+        </p:nvSpPr>
+        <p:spPr>
+          <a:xfrm>
+            <a:off x="4559808" y="1975104"/>
+            <a:ext cx="3041904" cy="914400"/>
+          </a:xfrm>
+          <a:prstGeom prst="rect">
+            <a:avLst/>
+          </a:prstGeom>
+          <a:noFill/>
+        </p:spPr>
+        <p:txBody>
+          <a:bodyPr wrap="square" anchor="t" lIns="0" rIns="0" tIns="0" bIns="0">
+            <a:spAutoFit/>
+          </a:bodyPr>
+          <a:lstStyle/>
+          <a:p>
+            <a:r>
+              <a:rPr sz="1200" b="1" i="0">
+                <a:solidFill>
+                  <a:srgbClr val="F87171"/>
+                </a:solidFill>
+                <a:latin typeface="Segoe UI"/>
+              </a:rPr>
+              <a:t>NON-RETRYABLE FAILURES</a:t>
+            </a:r>
+          </a:p>
+          <a:p>
+            <a:pPr>
+              <a:spcBef>
+                <a:spcPts val="600"/>
+              </a:spcBef>
+            </a:pPr>
+            <a:r>
+              <a:rPr sz="1300" b="0" i="0">
+                <a:solidFill>
+                  <a:srgbClr val="9AA2C0"/>
+                </a:solidFill>
+                <a:latin typeface="Segoe UI"/>
+              </a:rPr>
+              <a:t>permanent errors stop cleanly</a:t>
+            </a:r>
+          </a:p>
+        </p:txBody>
+      </p:sp>
+      <p:sp>
+        <p:nvSpPr>
+          <p:cNvPr id="10" name="Rounded Rectangle 9"/>
+          <p:cNvSpPr/>
+          <p:nvPr/>
+        </p:nvSpPr>
+        <p:spPr>
+          <a:xfrm>
+            <a:off x="8077200" y="1828800"/>
+            <a:ext cx="3444240" cy="1188720"/>
+          </a:xfrm>
+          <a:prstGeom prst="roundRect">
+            <a:avLst>
+              <a:gd name="adj" fmla="val 6000"/>
+            </a:avLst>
+          </a:prstGeom>
+          <a:solidFill>
+            <a:srgbClr val="141828"/>
+          </a:solidFill>
+          <a:ln w="12700">
+            <a:solidFill>
+              <a:srgbClr val="232A41"/>
+            </a:solidFill>
+          </a:ln>
+          <a:effectLst/>
+        </p:spPr>
+        <p:style>
+          <a:lnRef idx="1">
+            <a:schemeClr val="accent1"/>
+          </a:lnRef>
+          <a:fillRef idx="3">
+            <a:schemeClr val="accent1"/>
+          </a:fillRef>
+          <a:effectRef idx="2">
+            <a:schemeClr val="accent1"/>
+          </a:effectRef>
+          <a:fontRef idx="minor">
+            <a:schemeClr val="lt1"/>
+          </a:fontRef>
+        </p:style>
+        <p:txBody>
+          <a:bodyPr rtlCol="0" anchor="ctr"/>
+          <a:lstStyle/>
+          <a:p>
+            <a:pPr algn="ctr"/>
+          </a:p>
+        </p:txBody>
+      </p:sp>
+      <p:sp>
+        <p:nvSpPr>
+          <p:cNvPr id="11" name="TextBox 10"/>
+          <p:cNvSpPr txBox="1"/>
+          <p:nvPr/>
+        </p:nvSpPr>
+        <p:spPr>
+          <a:xfrm>
+            <a:off x="8278368" y="1975104"/>
+            <a:ext cx="3041904" cy="914400"/>
+          </a:xfrm>
+          <a:prstGeom prst="rect">
+            <a:avLst/>
+          </a:prstGeom>
+          <a:noFill/>
+        </p:spPr>
+        <p:txBody>
+          <a:bodyPr wrap="square" anchor="t" lIns="0" rIns="0" tIns="0" bIns="0">
+            <a:spAutoFit/>
+          </a:bodyPr>
+          <a:lstStyle/>
+          <a:p>
+            <a:r>
+              <a:rPr sz="1200" b="1" i="0">
+                <a:solidFill>
+                  <a:srgbClr val="38BDF8"/>
+                </a:solidFill>
+                <a:latin typeface="Segoe UI"/>
+              </a:rPr>
+              <a:t>DURABLE TIMERS</a:t>
+            </a:r>
+          </a:p>
+          <a:p>
+            <a:pPr>
+              <a:spcBef>
+                <a:spcPts val="600"/>
+              </a:spcBef>
+            </a:pPr>
+            <a:r>
+              <a:rPr sz="1300" b="0" i="0">
+                <a:solidFill>
+                  <a:srgbClr val="9AA2C0"/>
+                </a:solidFill>
+                <a:latin typeface="Segoe UI"/>
+              </a:rPr>
+              <a:t>settlement hold + reminder loop</a:t>
+            </a:r>
+          </a:p>
+        </p:txBody>
+      </p:sp>
+      <p:sp>
+        <p:nvSpPr>
+          <p:cNvPr id="12" name="Rounded Rectangle 11"/>
+          <p:cNvSpPr/>
+          <p:nvPr/>
+        </p:nvSpPr>
+        <p:spPr>
+          <a:xfrm>
+            <a:off x="640080" y="3291840"/>
+            <a:ext cx="3444240" cy="1188720"/>
+          </a:xfrm>
+          <a:prstGeom prst="roundRect">
+            <a:avLst>
+              <a:gd name="adj" fmla="val 6000"/>
+            </a:avLst>
+          </a:prstGeom>
+          <a:solidFill>
+            <a:srgbClr val="141828"/>
+          </a:solidFill>
+          <a:ln w="12700">
+            <a:solidFill>
+              <a:srgbClr val="232A41"/>
+            </a:solidFill>
+          </a:ln>
+          <a:effectLst/>
+        </p:spPr>
+        <p:style>
+          <a:lnRef idx="1">
+            <a:schemeClr val="accent1"/>
+          </a:lnRef>
+          <a:fillRef idx="3">
+            <a:schemeClr val="accent1"/>
+          </a:fillRef>
+          <a:effectRef idx="2">
+            <a:schemeClr val="accent1"/>
+          </a:effectRef>
+          <a:fontRef idx="minor">
+            <a:schemeClr val="lt1"/>
+          </a:fontRef>
+        </p:style>
+        <p:txBody>
+          <a:bodyPr rtlCol="0" anchor="ctr"/>
+          <a:lstStyle/>
+          <a:p>
+            <a:pPr algn="ctr"/>
+          </a:p>
+        </p:txBody>
+      </p:sp>
+      <p:sp>
+        <p:nvSpPr>
+          <p:cNvPr id="13" name="TextBox 12"/>
+          <p:cNvSpPr txBox="1"/>
+          <p:nvPr/>
+        </p:nvSpPr>
+        <p:spPr>
+          <a:xfrm>
+            <a:off x="841248" y="3438144"/>
+            <a:ext cx="3041904" cy="914400"/>
+          </a:xfrm>
+          <a:prstGeom prst="rect">
+            <a:avLst/>
+          </a:prstGeom>
+          <a:noFill/>
+        </p:spPr>
+        <p:txBody>
+          <a:bodyPr wrap="square" anchor="t" lIns="0" rIns="0" tIns="0" bIns="0">
+            <a:spAutoFit/>
+          </a:bodyPr>
+          <a:lstStyle/>
+          <a:p>
+            <a:r>
+              <a:rPr sz="1200" b="1" i="0">
+                <a:solidFill>
+                  <a:srgbClr val="7C5CFF"/>
+                </a:solidFill>
+                <a:latin typeface="Segoe UI"/>
+              </a:rPr>
+              <a:t>CHILD WORKFLOW</a:t>
+            </a:r>
+          </a:p>
+          <a:p>
+            <a:pPr>
+              <a:spcBef>
+                <a:spcPts val="600"/>
+              </a:spcBef>
+            </a:pPr>
+            <a:r>
+              <a:rPr sz="1300" b="0" i="0">
+                <a:solidFill>
+                  <a:srgbClr val="9AA2C0"/>
+                </a:solidFill>
+                <a:latin typeface="Segoe UI"/>
+              </a:rPr>
+              <a:t>fraud check, own history</a:t>
+            </a:r>
+          </a:p>
+        </p:txBody>
+      </p:sp>
+      <p:sp>
+        <p:nvSpPr>
+          <p:cNvPr id="14" name="Rounded Rectangle 13"/>
+          <p:cNvSpPr/>
+          <p:nvPr/>
+        </p:nvSpPr>
+        <p:spPr>
+          <a:xfrm>
+            <a:off x="4358640" y="3291840"/>
+            <a:ext cx="3444240" cy="1188720"/>
+          </a:xfrm>
+          <a:prstGeom prst="roundRect">
+            <a:avLst>
+              <a:gd name="adj" fmla="val 6000"/>
+            </a:avLst>
+          </a:prstGeom>
+          <a:solidFill>
+            <a:srgbClr val="141828"/>
+          </a:solidFill>
+          <a:ln w="12700">
+            <a:solidFill>
+              <a:srgbClr val="232A41"/>
+            </a:solidFill>
+          </a:ln>
+          <a:effectLst/>
+        </p:spPr>
+        <p:style>
+          <a:lnRef idx="1">
+            <a:schemeClr val="accent1"/>
+          </a:lnRef>
+          <a:fillRef idx="3">
+            <a:schemeClr val="accent1"/>
+          </a:fillRef>
+          <a:effectRef idx="2">
+            <a:schemeClr val="accent1"/>
+          </a:effectRef>
+          <a:fontRef idx="minor">
+            <a:schemeClr val="lt1"/>
+          </a:fontRef>
+        </p:style>
+        <p:txBody>
+          <a:bodyPr rtlCol="0" anchor="ctr"/>
+          <a:lstStyle/>
+          <a:p>
+            <a:pPr algn="ctr"/>
+          </a:p>
+        </p:txBody>
+      </p:sp>
+      <p:sp>
+        <p:nvSpPr>
+          <p:cNvPr id="15" name="TextBox 14"/>
+          <p:cNvSpPr txBox="1"/>
+          <p:nvPr/>
+        </p:nvSpPr>
+        <p:spPr>
+          <a:xfrm>
+            <a:off x="4559808" y="3438144"/>
+            <a:ext cx="3041904" cy="914400"/>
+          </a:xfrm>
+          <a:prstGeom prst="rect">
+            <a:avLst/>
+          </a:prstGeom>
+          <a:noFill/>
+        </p:spPr>
+        <p:txBody>
+          <a:bodyPr wrap="square" anchor="t" lIns="0" rIns="0" tIns="0" bIns="0">
+            <a:spAutoFit/>
+          </a:bodyPr>
+          <a:lstStyle/>
+          <a:p>
+            <a:r>
+              <a:rPr sz="1200" b="1" i="0">
+                <a:solidFill>
+                  <a:srgbClr val="38BDF8"/>
+                </a:solidFill>
+                <a:latin typeface="Segoe UI"/>
+              </a:rPr>
+              <a:t>SIGNALS</a:t>
+            </a:r>
+          </a:p>
+          <a:p>
+            <a:pPr>
+              <a:spcBef>
+                <a:spcPts val="600"/>
+              </a:spcBef>
+            </a:pPr>
+            <a:r>
+              <a:rPr sz="1300" b="0" i="0">
+                <a:solidFill>
+                  <a:srgbClr val="9AA2C0"/>
+                </a:solidFill>
+                <a:latin typeface="Segoe UI"/>
+              </a:rPr>
+              <a:t>approve / deny / info / recover</a:t>
+            </a:r>
+          </a:p>
+        </p:txBody>
+      </p:sp>
+      <p:sp>
+        <p:nvSpPr>
+          <p:cNvPr id="16" name="Rounded Rectangle 15"/>
+          <p:cNvSpPr/>
+          <p:nvPr/>
+        </p:nvSpPr>
+        <p:spPr>
+          <a:xfrm>
+            <a:off x="8077200" y="3291840"/>
+            <a:ext cx="3444240" cy="1188720"/>
+          </a:xfrm>
+          <a:prstGeom prst="roundRect">
+            <a:avLst>
+              <a:gd name="adj" fmla="val 6000"/>
+            </a:avLst>
+          </a:prstGeom>
+          <a:solidFill>
+            <a:srgbClr val="141828"/>
+          </a:solidFill>
+          <a:ln w="12700">
+            <a:solidFill>
+              <a:srgbClr val="232A41"/>
+            </a:solidFill>
+          </a:ln>
+          <a:effectLst/>
+        </p:spPr>
+        <p:style>
+          <a:lnRef idx="1">
+            <a:schemeClr val="accent1"/>
+          </a:lnRef>
+          <a:fillRef idx="3">
+            <a:schemeClr val="accent1"/>
+          </a:fillRef>
+          <a:effectRef idx="2">
+            <a:schemeClr val="accent1"/>
+          </a:effectRef>
+          <a:fontRef idx="minor">
+            <a:schemeClr val="lt1"/>
+          </a:fontRef>
+        </p:style>
+        <p:txBody>
+          <a:bodyPr rtlCol="0" anchor="ctr"/>
+          <a:lstStyle/>
+          <a:p>
+            <a:pPr algn="ctr"/>
+          </a:p>
+        </p:txBody>
+      </p:sp>
+      <p:sp>
+        <p:nvSpPr>
+          <p:cNvPr id="17" name="TextBox 16"/>
+          <p:cNvSpPr txBox="1"/>
+          <p:nvPr/>
+        </p:nvSpPr>
+        <p:spPr>
+          <a:xfrm>
+            <a:off x="8278368" y="3438144"/>
+            <a:ext cx="3041904" cy="914400"/>
+          </a:xfrm>
+          <a:prstGeom prst="rect">
+            <a:avLst/>
+          </a:prstGeom>
+          <a:noFill/>
+        </p:spPr>
+        <p:txBody>
+          <a:bodyPr wrap="square" anchor="t" lIns="0" rIns="0" tIns="0" bIns="0">
+            <a:spAutoFit/>
+          </a:bodyPr>
+          <a:lstStyle/>
+          <a:p>
+            <a:r>
+              <a:rPr sz="1200" b="1" i="0">
+                <a:solidFill>
+                  <a:srgbClr val="4C9FFE"/>
+                </a:solidFill>
+                <a:latin typeface="Segoe UI"/>
+              </a:rPr>
+              <a:t>QUERIES</a:t>
+            </a:r>
+          </a:p>
+          <a:p>
+            <a:pPr>
+              <a:spcBef>
+                <a:spcPts val="600"/>
+              </a:spcBef>
+            </a:pPr>
+            <a:r>
+              <a:rPr sz="1300" b="0" i="0">
+                <a:solidFill>
+                  <a:srgbClr val="9AA2C0"/>
+                </a:solidFill>
+                <a:latin typeface="Segoe UI"/>
+              </a:rPr>
+              <a:t>live state + progress %</a:t>
+            </a:r>
+          </a:p>
+        </p:txBody>
+      </p:sp>
+      <p:sp>
+        <p:nvSpPr>
+          <p:cNvPr id="18" name="Rounded Rectangle 17"/>
+          <p:cNvSpPr/>
+          <p:nvPr/>
+        </p:nvSpPr>
+        <p:spPr>
+          <a:xfrm>
+            <a:off x="640080" y="4754880"/>
+            <a:ext cx="3444240" cy="1188720"/>
+          </a:xfrm>
+          <a:prstGeom prst="roundRect">
+            <a:avLst>
+              <a:gd name="adj" fmla="val 6000"/>
+            </a:avLst>
+          </a:prstGeom>
+          <a:solidFill>
+            <a:srgbClr val="141828"/>
+          </a:solidFill>
+          <a:ln w="12700">
+            <a:solidFill>
+              <a:srgbClr val="232A41"/>
+            </a:solidFill>
+          </a:ln>
+          <a:effectLst/>
+        </p:spPr>
+        <p:style>
+          <a:lnRef idx="1">
+            <a:schemeClr val="accent1"/>
+          </a:lnRef>
+          <a:fillRef idx="3">
+            <a:schemeClr val="accent1"/>
+          </a:fillRef>
+          <a:effectRef idx="2">
+            <a:schemeClr val="accent1"/>
+          </a:effectRef>
+          <a:fontRef idx="minor">
+            <a:schemeClr val="lt1"/>
+          </a:fontRef>
+        </p:style>
+        <p:txBody>
+          <a:bodyPr rtlCol="0" anchor="ctr"/>
+          <a:lstStyle/>
+          <a:p>
+            <a:pPr algn="ctr"/>
+          </a:p>
+        </p:txBody>
+      </p:sp>
+      <p:sp>
+        <p:nvSpPr>
+          <p:cNvPr id="19" name="TextBox 18"/>
+          <p:cNvSpPr txBox="1"/>
+          <p:nvPr/>
+        </p:nvSpPr>
+        <p:spPr>
+          <a:xfrm>
+            <a:off x="841248" y="4901184"/>
+            <a:ext cx="3041904" cy="914400"/>
+          </a:xfrm>
+          <a:prstGeom prst="rect">
+            <a:avLst/>
+          </a:prstGeom>
+          <a:noFill/>
+        </p:spPr>
+        <p:txBody>
+          <a:bodyPr wrap="square" anchor="t" lIns="0" rIns="0" tIns="0" bIns="0">
+            <a:spAutoFit/>
+          </a:bodyPr>
+          <a:lstStyle/>
+          <a:p>
+            <a:r>
+              <a:rPr sz="1200" b="1" i="0">
+                <a:solidFill>
+                  <a:srgbClr val="4C9FFE"/>
+                </a:solidFill>
+                <a:latin typeface="Segoe UI"/>
+              </a:rPr>
+              <a:t>UPDATE + VALIDATOR</a:t>
+            </a:r>
+          </a:p>
+          <a:p>
+            <a:pPr>
+              <a:spcBef>
+                <a:spcPts val="600"/>
+              </a:spcBef>
+            </a:pPr>
+            <a:r>
+              <a:rPr sz="1300" b="0" i="0">
+                <a:solidFill>
+                  <a:srgbClr val="9AA2C0"/>
+                </a:solidFill>
+                <a:latin typeface="Segoe UI"/>
+              </a:rPr>
+              <a:t>adjuster notes, rejected inline</a:t>
+            </a:r>
+          </a:p>
+        </p:txBody>
+      </p:sp>
+      <p:sp>
+        <p:nvSpPr>
+          <p:cNvPr id="20" name="Rounded Rectangle 19"/>
+          <p:cNvSpPr/>
+          <p:nvPr/>
+        </p:nvSpPr>
+        <p:spPr>
+          <a:xfrm>
+            <a:off x="4358640" y="4754880"/>
+            <a:ext cx="3444240" cy="1188720"/>
+          </a:xfrm>
+          <a:prstGeom prst="roundRect">
+            <a:avLst>
+              <a:gd name="adj" fmla="val 6000"/>
+            </a:avLst>
+          </a:prstGeom>
+          <a:solidFill>
+            <a:srgbClr val="141828"/>
+          </a:solidFill>
+          <a:ln w="12700">
+            <a:solidFill>
+              <a:srgbClr val="232A41"/>
+            </a:solidFill>
+          </a:ln>
+          <a:effectLst/>
+        </p:spPr>
+        <p:style>
+          <a:lnRef idx="1">
+            <a:schemeClr val="accent1"/>
+          </a:lnRef>
+          <a:fillRef idx="3">
+            <a:schemeClr val="accent1"/>
+          </a:fillRef>
+          <a:effectRef idx="2">
+            <a:schemeClr val="accent1"/>
+          </a:effectRef>
+          <a:fontRef idx="minor">
+            <a:schemeClr val="lt1"/>
+          </a:fontRef>
+        </p:style>
+        <p:txBody>
+          <a:bodyPr rtlCol="0" anchor="ctr"/>
+          <a:lstStyle/>
+          <a:p>
+            <a:pPr algn="ctr"/>
+          </a:p>
+        </p:txBody>
+      </p:sp>
+      <p:sp>
+        <p:nvSpPr>
+          <p:cNvPr id="21" name="TextBox 20"/>
+          <p:cNvSpPr txBox="1"/>
+          <p:nvPr/>
+        </p:nvSpPr>
+        <p:spPr>
+          <a:xfrm>
+            <a:off x="4559808" y="4901184"/>
+            <a:ext cx="3041904" cy="914400"/>
+          </a:xfrm>
+          <a:prstGeom prst="rect">
+            <a:avLst/>
+          </a:prstGeom>
+          <a:noFill/>
+        </p:spPr>
+        <p:txBody>
+          <a:bodyPr wrap="square" anchor="t" lIns="0" rIns="0" tIns="0" bIns="0">
+            <a:spAutoFit/>
+          </a:bodyPr>
+          <a:lstStyle/>
+          <a:p>
+            <a:r>
+              <a:rPr sz="1200" b="1" i="0">
+                <a:solidFill>
+                  <a:srgbClr val="FBBF24"/>
+                </a:solidFill>
+                <a:latin typeface="Segoe UI"/>
+              </a:rPr>
+              <a:t>CANCELLATION</a:t>
+            </a:r>
+          </a:p>
+          <a:p>
+            <a:pPr>
+              <a:spcBef>
+                <a:spcPts val="600"/>
+              </a:spcBef>
+            </a:pPr>
+            <a:r>
+              <a:rPr sz="1300" b="0" i="0">
+                <a:solidFill>
+                  <a:srgbClr val="9AA2C0"/>
+                </a:solidFill>
+                <a:latin typeface="Segoe UI"/>
+              </a:rPr>
+              <a:t>saga-style compensation</a:t>
+            </a:r>
+          </a:p>
+        </p:txBody>
+      </p:sp>
+      <p:sp>
+        <p:nvSpPr>
+          <p:cNvPr id="22" name="Rounded Rectangle 21"/>
+          <p:cNvSpPr/>
+          <p:nvPr/>
+        </p:nvSpPr>
+        <p:spPr>
+          <a:xfrm>
+            <a:off x="8077200" y="4754880"/>
+            <a:ext cx="3444240" cy="1188720"/>
+          </a:xfrm>
+          <a:prstGeom prst="roundRect">
+            <a:avLst>
+              <a:gd name="adj" fmla="val 6000"/>
+            </a:avLst>
+          </a:prstGeom>
+          <a:solidFill>
+            <a:srgbClr val="141828"/>
+          </a:solidFill>
+          <a:ln w="12700">
+            <a:solidFill>
+              <a:srgbClr val="232A41"/>
+            </a:solidFill>
+          </a:ln>
+          <a:effectLst/>
+        </p:spPr>
+        <p:style>
+          <a:lnRef idx="1">
+            <a:schemeClr val="accent1"/>
+          </a:lnRef>
+          <a:fillRef idx="3">
+            <a:schemeClr val="accent1"/>
+          </a:fillRef>
+          <a:effectRef idx="2">
+            <a:schemeClr val="accent1"/>
+          </a:effectRef>
+          <a:fontRef idx="minor">
+            <a:schemeClr val="lt1"/>
+          </a:fontRef>
+        </p:style>
+        <p:txBody>
+          <a:bodyPr rtlCol="0" anchor="ctr"/>
+          <a:lstStyle/>
+          <a:p>
+            <a:pPr algn="ctr"/>
+          </a:p>
+        </p:txBody>
+      </p:sp>
+      <p:sp>
+        <p:nvSpPr>
+          <p:cNvPr id="23" name="TextBox 22"/>
+          <p:cNvSpPr txBox="1"/>
+          <p:nvPr/>
+        </p:nvSpPr>
+        <p:spPr>
+          <a:xfrm>
+            <a:off x="8278368" y="4901184"/>
+            <a:ext cx="3041904" cy="914400"/>
+          </a:xfrm>
+          <a:prstGeom prst="rect">
+            <a:avLst/>
+          </a:prstGeom>
+          <a:noFill/>
+        </p:spPr>
+        <p:txBody>
+          <a:bodyPr wrap="square" anchor="t" lIns="0" rIns="0" tIns="0" bIns="0">
+            <a:spAutoFit/>
+          </a:bodyPr>
+          <a:lstStyle/>
+          <a:p>
+            <a:r>
+              <a:rPr sz="1200" b="1" i="0">
+                <a:solidFill>
+                  <a:srgbClr val="4C9FFE"/>
+                </a:solidFill>
+                <a:latin typeface="Segoe UI"/>
+              </a:rPr>
+              <a:t>SEARCH ATTRIBUTES</a:t>
+            </a:r>
+          </a:p>
+          <a:p>
+            <a:pPr>
+              <a:spcBef>
+                <a:spcPts val="600"/>
+              </a:spcBef>
+            </a:pPr>
+            <a:r>
+              <a:rPr sz="1300" b="0" i="0">
+                <a:solidFill>
+                  <a:srgbClr val="9AA2C0"/>
+                </a:solidFill>
+                <a:latin typeface="Segoe UI"/>
+              </a:rPr>
+              <a:t>find claims by status/type/score</a:t>
+            </a:r>
+          </a:p>
+        </p:txBody>
+      </p:sp>
+      <p:sp>
+        <p:nvSpPr>
+          <p:cNvPr id="24" name="Rounded Rectangle 23"/>
+          <p:cNvSpPr/>
+          <p:nvPr/>
+        </p:nvSpPr>
+        <p:spPr>
+          <a:xfrm>
+            <a:off x="640080" y="6217920"/>
+            <a:ext cx="3444240" cy="1188720"/>
+          </a:xfrm>
+          <a:prstGeom prst="roundRect">
+            <a:avLst>
+              <a:gd name="adj" fmla="val 6000"/>
+            </a:avLst>
+          </a:prstGeom>
+          <a:solidFill>
+            <a:srgbClr val="141828"/>
+          </a:solidFill>
+          <a:ln w="12700">
+            <a:solidFill>
+              <a:srgbClr val="232A41"/>
+            </a:solidFill>
+          </a:ln>
+          <a:effectLst/>
+        </p:spPr>
+        <p:style>
+          <a:lnRef idx="1">
+            <a:schemeClr val="accent1"/>
+          </a:lnRef>
+          <a:fillRef idx="3">
+            <a:schemeClr val="accent1"/>
+          </a:fillRef>
+          <a:effectRef idx="2">
+            <a:schemeClr val="accent1"/>
+          </a:effectRef>
+          <a:fontRef idx="minor">
+            <a:schemeClr val="lt1"/>
+          </a:fontRef>
+        </p:style>
+        <p:txBody>
+          <a:bodyPr rtlCol="0" anchor="ctr"/>
+          <a:lstStyle/>
+          <a:p>
+            <a:pPr algn="ctr"/>
+          </a:p>
+        </p:txBody>
+      </p:sp>
+      <p:sp>
+        <p:nvSpPr>
+          <p:cNvPr id="25" name="TextBox 24"/>
+          <p:cNvSpPr txBox="1"/>
+          <p:nvPr/>
+        </p:nvSpPr>
+        <p:spPr>
+          <a:xfrm>
+            <a:off x="841248" y="6364224"/>
+            <a:ext cx="3041904" cy="914400"/>
+          </a:xfrm>
+          <a:prstGeom prst="rect">
+            <a:avLst/>
+          </a:prstGeom>
+          <a:noFill/>
+        </p:spPr>
+        <p:txBody>
+          <a:bodyPr wrap="square" anchor="t" lIns="0" rIns="0" tIns="0" bIns="0">
+            <a:spAutoFit/>
+          </a:bodyPr>
+          <a:lstStyle/>
+          <a:p>
+            <a:r>
+              <a:rPr sz="1200" b="1" i="0">
+                <a:solidFill>
+                  <a:srgbClr val="34D399"/>
+                </a:solidFill>
+                <a:latin typeface="Segoe UI"/>
+              </a:rPr>
+              <a:t>WORKER-RESTART DURABILITY</a:t>
+            </a:r>
+          </a:p>
+          <a:p>
+            <a:pPr>
+              <a:spcBef>
+                <a:spcPts val="600"/>
+              </a:spcBef>
+            </a:pPr>
+            <a:r>
+              <a:rPr sz="1300" b="0" i="0">
+                <a:solidFill>
+                  <a:srgbClr val="9AA2C0"/>
+                </a:solidFill>
+                <a:latin typeface="Segoe UI"/>
+              </a:rPr>
+              <a:t>kill it mid-claim, resume</a:t>
+            </a:r>
+          </a:p>
+        </p:txBody>
+      </p:sp>
+      <p:sp>
+        <p:nvSpPr>
+          <p:cNvPr id="26" name="Rounded Rectangle 25"/>
+          <p:cNvSpPr/>
+          <p:nvPr/>
+        </p:nvSpPr>
+        <p:spPr>
+          <a:xfrm>
+            <a:off x="4358640" y="6217920"/>
+            <a:ext cx="3444240" cy="1188720"/>
+          </a:xfrm>
+          <a:prstGeom prst="roundRect">
+            <a:avLst>
+              <a:gd name="adj" fmla="val 6000"/>
+            </a:avLst>
+          </a:prstGeom>
+          <a:solidFill>
+            <a:srgbClr val="141828"/>
+          </a:solidFill>
+          <a:ln w="12700">
+            <a:solidFill>
+              <a:srgbClr val="232A41"/>
+            </a:solidFill>
+          </a:ln>
+          <a:effectLst/>
+        </p:spPr>
+        <p:style>
+          <a:lnRef idx="1">
+            <a:schemeClr val="accent1"/>
+          </a:lnRef>
+          <a:fillRef idx="3">
+            <a:schemeClr val="accent1"/>
+          </a:fillRef>
+          <a:effectRef idx="2">
+            <a:schemeClr val="accent1"/>
+          </a:effectRef>
+          <a:fontRef idx="minor">
+            <a:schemeClr val="lt1"/>
+          </a:fontRef>
+        </p:style>
+        <p:txBody>
+          <a:bodyPr rtlCol="0" anchor="ctr"/>
+          <a:lstStyle/>
+          <a:p>
+            <a:pPr algn="ctr"/>
+          </a:p>
+        </p:txBody>
+      </p:sp>
+      <p:sp>
+        <p:nvSpPr>
+          <p:cNvPr id="27" name="TextBox 26"/>
+          <p:cNvSpPr txBox="1"/>
+          <p:nvPr/>
+        </p:nvSpPr>
+        <p:spPr>
+          <a:xfrm>
+            <a:off x="4559808" y="6364224"/>
+            <a:ext cx="3041904" cy="914400"/>
+          </a:xfrm>
+          <a:prstGeom prst="rect">
+            <a:avLst/>
+          </a:prstGeom>
+          <a:noFill/>
+        </p:spPr>
+        <p:txBody>
+          <a:bodyPr wrap="square" anchor="t" lIns="0" rIns="0" tIns="0" bIns="0">
+            <a:spAutoFit/>
+          </a:bodyPr>
+          <a:lstStyle/>
+          <a:p>
+            <a:r>
+              <a:rPr sz="1200" b="1" i="0">
+                <a:solidFill>
+                  <a:srgbClr val="4C9FFE"/>
+                </a:solidFill>
+                <a:latin typeface="Segoe UI"/>
+              </a:rPr>
+              <a:t>HEARTBEATS</a:t>
+            </a:r>
+          </a:p>
+          <a:p>
+            <a:pPr>
+              <a:spcBef>
+                <a:spcPts val="600"/>
+              </a:spcBef>
+            </a:pPr>
+            <a:r>
+              <a:rPr sz="1300" b="0" i="0">
+                <a:solidFill>
+                  <a:srgbClr val="9AA2C0"/>
+                </a:solidFill>
+                <a:latin typeface="Segoe UI"/>
+              </a:rPr>
+              <a:t>cancellable long-running activity</a:t>
+            </a:r>
+          </a:p>
+        </p:txBody>
+      </p:sp>
+      <p:sp>
+        <p:nvSpPr>
+          <p:cNvPr id="28" name="Rounded Rectangle 27"/>
+          <p:cNvSpPr/>
+          <p:nvPr/>
+        </p:nvSpPr>
+        <p:spPr>
+          <a:xfrm>
+            <a:off x="8077200" y="6217920"/>
+            <a:ext cx="3444240" cy="1188720"/>
+          </a:xfrm>
+          <a:prstGeom prst="roundRect">
+            <a:avLst>
+              <a:gd name="adj" fmla="val 6000"/>
+            </a:avLst>
+          </a:prstGeom>
+          <a:solidFill>
+            <a:srgbClr val="141828"/>
+          </a:solidFill>
+          <a:ln w="12700">
+            <a:solidFill>
+              <a:srgbClr val="232A41"/>
+            </a:solidFill>
+          </a:ln>
+          <a:effectLst/>
+        </p:spPr>
+        <p:style>
+          <a:lnRef idx="1">
+            <a:schemeClr val="accent1"/>
+          </a:lnRef>
+          <a:fillRef idx="3">
+            <a:schemeClr val="accent1"/>
+          </a:fillRef>
+          <a:effectRef idx="2">
+            <a:schemeClr val="accent1"/>
+          </a:effectRef>
+          <a:fontRef idx="minor">
+            <a:schemeClr val="lt1"/>
+          </a:fontRef>
+        </p:style>
+        <p:txBody>
+          <a:bodyPr rtlCol="0" anchor="ctr"/>
+          <a:lstStyle/>
+          <a:p>
+            <a:pPr algn="ctr"/>
+          </a:p>
+        </p:txBody>
+      </p:sp>
+      <p:sp>
+        <p:nvSpPr>
+          <p:cNvPr id="29" name="TextBox 28"/>
+          <p:cNvSpPr txBox="1"/>
+          <p:nvPr/>
+        </p:nvSpPr>
+        <p:spPr>
+          <a:xfrm>
+            <a:off x="8278368" y="6364224"/>
+            <a:ext cx="3041904" cy="914400"/>
+          </a:xfrm>
+          <a:prstGeom prst="rect">
+            <a:avLst/>
+          </a:prstGeom>
+          <a:noFill/>
+        </p:spPr>
+        <p:txBody>
+          <a:bodyPr wrap="square" anchor="t" lIns="0" rIns="0" tIns="0" bIns="0">
+            <a:spAutoFit/>
+          </a:bodyPr>
+          <a:lstStyle/>
+          <a:p>
+            <a:r>
+              <a:rPr sz="1200" b="1" i="0">
+                <a:solidFill>
+                  <a:srgbClr val="F87171"/>
+                </a:solidFill>
+                <a:latin typeface="Segoe UI"/>
+              </a:rPr>
+              <a:t>NO DATABASE</a:t>
+            </a:r>
+          </a:p>
+          <a:p>
+            <a:pPr>
+              <a:spcBef>
+                <a:spcPts val="600"/>
+              </a:spcBef>
+            </a:pPr>
+            <a:r>
+              <a:rPr sz="1300" b="0" i="0">
+                <a:solidFill>
+                  <a:srgbClr val="9AA2C0"/>
+                </a:solidFill>
+                <a:latin typeface="Segoe UI"/>
+              </a:rPr>
+              <a:t>Temporal is the only state store</a:t>
             </a:r>
           </a:p>
         </p:txBody>
@@ -9989,8 +10383,8 @@
         </p:nvSpPr>
         <p:spPr>
           <a:xfrm>
-            <a:off x="640080" y="457200"/>
-            <a:ext cx="2011680" cy="457200"/>
+            <a:off x="822960" y="2194560"/>
+            <a:ext cx="3657600" cy="1463040"/>
           </a:xfrm>
           <a:prstGeom prst="rect">
             <a:avLst/>
@@ -10004,13 +10398,13 @@
           <a:lstStyle/>
           <a:p>
             <a:r>
-              <a:rPr sz="1300" b="1" i="0">
+              <a:rPr sz="7200" b="1" i="0">
                 <a:solidFill>
                   <a:srgbClr val="7C5CFF"/>
                 </a:solidFill>
-                <a:latin typeface="Segoe UI"/>
-              </a:rPr>
-              <a:t>DEMO 1 / 6</a:t>
+                <a:latin typeface="Consolas"/>
+              </a:rPr>
+              <a:t>03</a:t>
             </a:r>
           </a:p>
         </p:txBody>
@@ -10023,8 +10417,8 @@
         </p:nvSpPr>
         <p:spPr>
           <a:xfrm>
-            <a:off x="2743200" y="411480"/>
-            <a:ext cx="8778240" cy="640080"/>
+            <a:off x="822960" y="3383280"/>
+            <a:ext cx="8686800" cy="1005840"/>
           </a:xfrm>
           <a:prstGeom prst="rect">
             <a:avLst/>
@@ -10038,119 +10432,27 @@
           <a:lstStyle/>
           <a:p>
             <a:r>
-              <a:rPr sz="2800" b="1" i="0">
+              <a:rPr sz="4000" b="1" i="0">
                 <a:solidFill>
                   <a:srgbClr val="E6E9F5"/>
                 </a:solidFill>
                 <a:latin typeface="Segoe UI"/>
               </a:rPr>
-              <a:t>Submit a claim, watch it run</a:t>
-            </a:r>
-          </a:p>
-        </p:txBody>
-      </p:sp>
-      <p:sp>
-        <p:nvSpPr>
-          <p:cNvPr id="5" name="Rounded Rectangle 4"/>
-          <p:cNvSpPr/>
-          <p:nvPr/>
-        </p:nvSpPr>
-        <p:spPr>
-          <a:xfrm>
-            <a:off x="640080" y="1188720"/>
-            <a:ext cx="10881360" cy="4206240"/>
-          </a:xfrm>
-          <a:prstGeom prst="roundRect">
-            <a:avLst>
-              <a:gd name="adj" fmla="val 6000"/>
-            </a:avLst>
-          </a:prstGeom>
-          <a:solidFill>
-            <a:srgbClr val="05060C"/>
-          </a:solidFill>
-          <a:ln w="12700">
-            <a:solidFill>
-              <a:srgbClr val="7C5CFF"/>
-            </a:solidFill>
-          </a:ln>
-          <a:effectLst/>
-        </p:spPr>
-        <p:style>
-          <a:lnRef idx="1">
-            <a:schemeClr val="accent1"/>
-          </a:lnRef>
-          <a:fillRef idx="3">
-            <a:schemeClr val="accent1"/>
-          </a:fillRef>
-          <a:effectRef idx="2">
-            <a:schemeClr val="accent1"/>
-          </a:effectRef>
-          <a:fontRef idx="minor">
-            <a:schemeClr val="lt1"/>
-          </a:fontRef>
-        </p:style>
-        <p:txBody>
-          <a:bodyPr rtlCol="0" anchor="ctr"/>
-          <a:lstStyle/>
-          <a:p>
-            <a:pPr algn="ctr"/>
-          </a:p>
-        </p:txBody>
-      </p:sp>
-      <p:sp>
-        <p:nvSpPr>
-          <p:cNvPr id="6" name="Isosceles Triangle 5"/>
-          <p:cNvSpPr/>
-          <p:nvPr/>
-        </p:nvSpPr>
-        <p:spPr>
-          <a:xfrm rot="5400000">
-            <a:off x="5669280" y="2743200"/>
-            <a:ext cx="822960" cy="822960"/>
-          </a:xfrm>
-          <a:prstGeom prst="triangle">
-            <a:avLst/>
-          </a:prstGeom>
-          <a:solidFill>
-            <a:srgbClr val="7C5CFF"/>
-          </a:solidFill>
-          <a:ln>
-            <a:noFill/>
-          </a:ln>
-          <a:effectLst/>
-        </p:spPr>
-        <p:style>
-          <a:lnRef idx="1">
-            <a:schemeClr val="accent1"/>
-          </a:lnRef>
-          <a:fillRef idx="3">
-            <a:schemeClr val="accent1"/>
-          </a:fillRef>
-          <a:effectRef idx="2">
-            <a:schemeClr val="accent1"/>
-          </a:effectRef>
-          <a:fontRef idx="minor">
-            <a:schemeClr val="lt1"/>
-          </a:fontRef>
-        </p:style>
-        <p:txBody>
-          <a:bodyPr rtlCol="0" anchor="ctr"/>
-          <a:lstStyle/>
-          <a:p>
-            <a:pPr algn="ctr"/>
-          </a:p>
-        </p:txBody>
-      </p:sp>
-      <p:sp>
-        <p:nvSpPr>
-          <p:cNvPr id="7" name="TextBox 6"/>
+              <a:t>Let's See It Run</a:t>
+            </a:r>
+          </a:p>
+        </p:txBody>
+      </p:sp>
+      <p:sp>
+        <p:nvSpPr>
+          <p:cNvPr id="5" name="TextBox 4"/>
           <p:cNvSpPr txBox="1"/>
           <p:nvPr/>
         </p:nvSpPr>
         <p:spPr>
           <a:xfrm>
-            <a:off x="3383280" y="3703320"/>
-            <a:ext cx="5394960" cy="457200"/>
+            <a:off x="822960" y="4206240"/>
+            <a:ext cx="6858000" cy="914400"/>
           </a:xfrm>
           <a:prstGeom prst="rect">
             <a:avLst/>
@@ -10163,121 +10465,14 @@
           </a:bodyPr>
           <a:lstStyle/>
           <a:p>
-            <a:pPr algn="ctr"/>
-            <a:r>
-              <a:rPr sz="2000" b="0" i="0">
+            <a:r>
+              <a:rPr sz="1700" b="0" i="0">
                 <a:solidFill>
                   <a:srgbClr val="9AA2C0"/>
                 </a:solidFill>
                 <a:latin typeface="Segoe UI"/>
               </a:rPr>
-              <a:t>submit-and-progress.mp4</a:t>
-            </a:r>
-          </a:p>
-        </p:txBody>
-      </p:sp>
-      <p:sp>
-        <p:nvSpPr>
-          <p:cNvPr id="8" name="TextBox 7"/>
-          <p:cNvSpPr txBox="1"/>
-          <p:nvPr/>
-        </p:nvSpPr>
-        <p:spPr>
-          <a:xfrm>
-            <a:off x="3383280" y="4114800"/>
-            <a:ext cx="5394960" cy="365760"/>
-          </a:xfrm>
-          <a:prstGeom prst="rect">
-            <a:avLst/>
-          </a:prstGeom>
-          <a:noFill/>
-        </p:spPr>
-        <p:txBody>
-          <a:bodyPr wrap="square" anchor="t" lIns="0" rIns="0" tIns="0" bIns="0">
-            <a:spAutoFit/>
-          </a:bodyPr>
-          <a:lstStyle/>
-          <a:p>
-            <a:pPr algn="ctr"/>
-            <a:r>
-              <a:rPr sz="1200" b="0" i="0">
-                <a:solidFill>
-                  <a:srgbClr val="6F7794"/>
-                </a:solidFill>
-                <a:latin typeface="Consolas"/>
-              </a:rPr>
-              <a:t>presentation/recordings/01-submit-and-progress.mp4</a:t>
-            </a:r>
-          </a:p>
-        </p:txBody>
-      </p:sp>
-      <p:sp>
-        <p:nvSpPr>
-          <p:cNvPr id="9" name="TextBox 8"/>
-          <p:cNvSpPr txBox="1"/>
-          <p:nvPr/>
-        </p:nvSpPr>
-        <p:spPr>
-          <a:xfrm>
-            <a:off x="640080" y="5623560"/>
-            <a:ext cx="10881360" cy="914400"/>
-          </a:xfrm>
-          <a:prstGeom prst="rect">
-            <a:avLst/>
-          </a:prstGeom>
-          <a:noFill/>
-        </p:spPr>
-        <p:txBody>
-          <a:bodyPr wrap="square" anchor="t" lIns="0" rIns="0" tIns="0" bIns="0">
-            <a:spAutoFit/>
-          </a:bodyPr>
-          <a:lstStyle/>
-          <a:p>
-            <a:pPr>
-              <a:spcAft>
-                <a:spcPts val="400"/>
-              </a:spcAft>
-            </a:pPr>
-            <a:r>
-              <a:rPr sz="1300" b="0" i="0">
-                <a:solidFill>
-                  <a:srgbClr val="9AA2C0"/>
-                </a:solidFill>
-                <a:latin typeface="Segoe UI"/>
-              </a:rPr>
-              <a:t>▸ Dashboard → Submit claim → live redirect</a:t>
-            </a:r>
-          </a:p>
-          <a:p>
-            <a:pPr>
-              <a:spcAft>
-                <a:spcPts val="400"/>
-              </a:spcAft>
-            </a:pPr>
-            <a:r>
-              <a:rPr sz="1300" b="0" i="0">
-                <a:solidFill>
-                  <a:srgbClr val="9AA2C0"/>
-                </a:solidFill>
-                <a:latin typeface="Segoe UI"/>
-              </a:rPr>
-              <a:t>▸ Stage timeline updates via polling, no refresh</a:t>
-            </a:r>
-          </a:p>
-          <a:p>
-            <a:pPr>
-              <a:spcAft>
-                <a:spcPts val="400"/>
-              </a:spcAft>
-            </a:pPr>
-            <a:r>
-              <a:rPr sz="1300" b="0" i="0">
-                <a:solidFill>
-                  <a:srgbClr val="9AA2C0"/>
-                </a:solidFill>
-                <a:latin typeface="Segoe UI"/>
-              </a:rPr>
-              <a:t>▸ Progress % computed from stage weights, not hardcoded</a:t>
+              <a:t>Real failures. Real recovery. No cuts hiding a crash.</a:t>
             </a:r>
           </a:p>
         </p:txBody>
@@ -10369,11 +10564,11 @@
             <a:r>
               <a:rPr sz="1300" b="1" i="0">
                 <a:solidFill>
-                  <a:srgbClr val="38BDF8"/>
-                </a:solidFill>
-                <a:latin typeface="Segoe UI"/>
-              </a:rPr>
-              <a:t>DEMO 2 / 6</a:t>
+                  <a:srgbClr val="7C5CFF"/>
+                </a:solidFill>
+                <a:latin typeface="Segoe UI"/>
+              </a:rPr>
+              <a:t>DEMO 1 / 6</a:t>
             </a:r>
           </a:p>
         </p:txBody>
@@ -10407,7 +10602,7 @@
                 </a:solidFill>
                 <a:latin typeface="Segoe UI"/>
               </a:rPr>
-              <a:t>The workflow waits — forever — for you</a:t>
+              <a:t>Submit a claim, watch it run</a:t>
             </a:r>
           </a:p>
         </p:txBody>
@@ -10534,7 +10729,7 @@
                 </a:solidFill>
                 <a:latin typeface="Segoe UI"/>
               </a:rPr>
-              <a:t>human-review-signals.mp4</a:t>
+              <a:t>submit-and-progress.mp4</a:t>
             </a:r>
           </a:p>
         </p:txBody>
@@ -10569,7 +10764,7 @@
                 </a:solidFill>
                 <a:latin typeface="Consolas"/>
               </a:rPr>
-              <a:t>presentation/recordings/02-human-review-signals.mp4</a:t>
+              <a:t>presentation/recordings/01-submit-and-progress.mp4</a:t>
             </a:r>
           </a:p>
         </p:txBody>
@@ -10608,7 +10803,7 @@
                 </a:solidFill>
                 <a:latin typeface="Segoe UI"/>
               </a:rPr>
-              <a:t>▸ Claim parks at “Human adjuster review”</a:t>
+              <a:t>▸ Dashboard → Submit claim → live redirect</a:t>
             </a:r>
           </a:p>
           <a:p>
@@ -10624,7 +10819,7 @@
                 </a:solidFill>
                 <a:latin typeface="Segoe UI"/>
               </a:rPr>
-              <a:t>▸ Request more info → provide info → back to review</a:t>
+              <a:t>▸ Stage timeline updates via polling, no refresh</a:t>
             </a:r>
           </a:p>
           <a:p>
@@ -10640,7 +10835,7 @@
                 </a:solidFill>
                 <a:latin typeface="Segoe UI"/>
               </a:rPr>
-              <a:t>▸ Approve → durable settlement timer → paid</a:t>
+              <a:t>▸ Progress % computed from stage weights, not hardcoded</a:t>
             </a:r>
           </a:p>
         </p:txBody>
@@ -10732,11 +10927,11 @@
             <a:r>
               <a:rPr sz="1300" b="1" i="0">
                 <a:solidFill>
-                  <a:srgbClr val="FBBF24"/>
-                </a:solidFill>
-                <a:latin typeface="Segoe UI"/>
-              </a:rPr>
-              <a:t>DEMO 3 / 6</a:t>
+                  <a:srgbClr val="38BDF8"/>
+                </a:solidFill>
+                <a:latin typeface="Segoe UI"/>
+              </a:rPr>
+              <a:t>DEMO 2 / 6</a:t>
             </a:r>
           </a:p>
         </p:txBody>
@@ -10770,7 +10965,7 @@
                 </a:solidFill>
                 <a:latin typeface="Segoe UI"/>
               </a:rPr>
-              <a:t>Break it a little — watch it heal itself</a:t>
+              <a:t>The workflow waits — forever — for you</a:t>
             </a:r>
           </a:p>
         </p:txBody>
@@ -10897,7 +11092,7 @@
                 </a:solidFill>
                 <a:latin typeface="Segoe UI"/>
               </a:rPr>
-              <a:t>transient-retry.mp4</a:t>
+              <a:t>human-review-signals.mp4</a:t>
             </a:r>
           </a:p>
         </p:txBody>
@@ -10932,7 +11127,7 @@
                 </a:solidFill>
                 <a:latin typeface="Consolas"/>
               </a:rPr>
-              <a:t>presentation/recordings/03-transient-retry.mp4</a:t>
+              <a:t>presentation/recordings/02-human-review-signals.mp4</a:t>
             </a:r>
           </a:p>
         </p:txBody>
@@ -10971,7 +11166,7 @@
                 </a:solidFill>
                 <a:latin typeface="Segoe UI"/>
               </a:rPr>
-              <a:t>▸ Arm “transient failure” on damage assessment</a:t>
+              <a:t>▸ Claim parks at “Human adjuster review”</a:t>
             </a:r>
           </a:p>
           <a:p>
@@ -10987,7 +11182,7 @@
                 </a:solidFill>
                 <a:latin typeface="Segoe UI"/>
               </a:rPr>
-              <a:t>▸ Activity panel shows attempt 1, 2, 3 — live</a:t>
+              <a:t>▸ Request more info → provide info → back to review</a:t>
             </a:r>
           </a:p>
           <a:p>
@@ -11003,7 +11198,7 @@
                 </a:solidFill>
                 <a:latin typeface="Segoe UI"/>
               </a:rPr>
-              <a:t>▸ Same code path, zero extra retry logic written</a:t>
+              <a:t>▸ Approve → durable settlement timer → paid</a:t>
             </a:r>
           </a:p>
         </p:txBody>
@@ -11282,11 +11477,11 @@
             <a:r>
               <a:rPr sz="1300" b="1" i="0">
                 <a:solidFill>
-                  <a:srgbClr val="F87171"/>
-                </a:solidFill>
-                <a:latin typeface="Segoe UI"/>
-              </a:rPr>
-              <a:t>DEMO 4 / 6</a:t>
+                  <a:srgbClr val="FBBF24"/>
+                </a:solidFill>
+                <a:latin typeface="Segoe UI"/>
+              </a:rPr>
+              <a:t>DEMO 3 / 6</a:t>
             </a:r>
           </a:p>
         </p:txBody>
@@ -11320,7 +11515,7 @@
                 </a:solidFill>
                 <a:latin typeface="Segoe UI"/>
               </a:rPr>
-              <a:t>Break it for real — recover it from the UI</a:t>
+              <a:t>Break it a little — watch it heal itself</a:t>
             </a:r>
           </a:p>
         </p:txBody>
@@ -11447,7 +11642,7 @@
                 </a:solidFill>
                 <a:latin typeface="Segoe UI"/>
               </a:rPr>
-              <a:t>permanent-failure-recovery.mp4</a:t>
+              <a:t>transient-retry.mp4</a:t>
             </a:r>
           </a:p>
         </p:txBody>
@@ -11482,7 +11677,7 @@
                 </a:solidFill>
                 <a:latin typeface="Consolas"/>
               </a:rPr>
-              <a:t>presentation/recordings/04-permanent-failure-recovery.mp4</a:t>
+              <a:t>presentation/recordings/03-transient-retry.mp4</a:t>
             </a:r>
           </a:p>
         </p:txBody>
@@ -11521,7 +11716,7 @@
                 </a:solidFill>
                 <a:latin typeface="Segoe UI"/>
               </a:rPr>
-              <a:t>▸ “Break payment (permanent)” → non-retryable ApplicationFailure</a:t>
+              <a:t>▸ Arm “transient failure” on damage assessment</a:t>
             </a:r>
           </a:p>
           <a:p>
@@ -11537,7 +11732,7 @@
                 </a:solidFill>
                 <a:latin typeface="Segoe UI"/>
               </a:rPr>
-              <a:t>▸ Claim parks in “blocked on failure” — not crashed, not lost</a:t>
+              <a:t>▸ Activity panel shows attempt 1, 2, 3 — live</a:t>
             </a:r>
           </a:p>
           <a:p>
@@ -11553,7 +11748,7 @@
                 </a:solidFill>
                 <a:latin typeface="Segoe UI"/>
               </a:rPr>
-              <a:t>▸ Operator clicks Retry → clears fault → claim completes</a:t>
+              <a:t>▸ Same code path, zero extra retry logic written</a:t>
             </a:r>
           </a:p>
         </p:txBody>
@@ -11645,11 +11840,11 @@
             <a:r>
               <a:rPr sz="1300" b="1" i="0">
                 <a:solidFill>
-                  <a:srgbClr val="34D399"/>
-                </a:solidFill>
-                <a:latin typeface="Segoe UI"/>
-              </a:rPr>
-              <a:t>DEMO 5 / 6</a:t>
+                  <a:srgbClr val="F87171"/>
+                </a:solidFill>
+                <a:latin typeface="Segoe UI"/>
+              </a:rPr>
+              <a:t>DEMO 4 / 6</a:t>
             </a:r>
           </a:p>
         </p:txBody>
@@ -11683,7 +11878,7 @@
                 </a:solidFill>
                 <a:latin typeface="Segoe UI"/>
               </a:rPr>
-              <a:t>Kill the worker. Mid-claim. On purpose.</a:t>
+              <a:t>Break it for real — recover it from the UI</a:t>
             </a:r>
           </a:p>
         </p:txBody>
@@ -11810,7 +12005,7 @@
                 </a:solidFill>
                 <a:latin typeface="Segoe UI"/>
               </a:rPr>
-              <a:t>worker-restart-durability.mp4</a:t>
+              <a:t>permanent-failure-recovery.mp4</a:t>
             </a:r>
           </a:p>
         </p:txBody>
@@ -11845,7 +12040,7 @@
                 </a:solidFill>
                 <a:latin typeface="Consolas"/>
               </a:rPr>
-              <a:t>presentation/recordings/05-worker-restart-durability.mp4</a:t>
+              <a:t>presentation/recordings/04-permanent-failure-recovery.mp4</a:t>
             </a:r>
           </a:p>
         </p:txBody>
@@ -11884,7 +12079,7 @@
                 </a:solidFill>
                 <a:latin typeface="Segoe UI"/>
               </a:rPr>
-              <a:t>▸ “Kill &amp; restart worker” while a claim is blocked</a:t>
+              <a:t>▸ “Break payment (permanent)” → non-retryable ApplicationFailure</a:t>
             </a:r>
           </a:p>
           <a:p>
@@ -11900,7 +12095,7 @@
                 </a:solidFill>
                 <a:latin typeface="Segoe UI"/>
               </a:rPr>
-              <a:t>▸ worker-…-gen1 dies, worker-…-gen2 comes up</a:t>
+              <a:t>▸ Claim parks in “blocked on failure” — not crashed, not lost</a:t>
             </a:r>
           </a:p>
           <a:p>
@@ -11916,7 +12111,7 @@
                 </a:solidFill>
                 <a:latin typeface="Segoe UI"/>
               </a:rPr>
-              <a:t>▸ Claim resumes exactly where it was — timers included</a:t>
+              <a:t>▸ Operator clicks Retry → clears fault → claim completes</a:t>
             </a:r>
           </a:p>
         </p:txBody>
@@ -12008,11 +12203,11 @@
             <a:r>
               <a:rPr sz="1300" b="1" i="0">
                 <a:solidFill>
-                  <a:srgbClr val="9AA2C0"/>
-                </a:solidFill>
-                <a:latin typeface="Segoe UI"/>
-              </a:rPr>
-              <a:t>DEMO 6 / 6</a:t>
+                  <a:srgbClr val="34D399"/>
+                </a:solidFill>
+                <a:latin typeface="Segoe UI"/>
+              </a:rPr>
+              <a:t>DEMO 5 / 6</a:t>
             </a:r>
           </a:p>
         </p:txBody>
@@ -12046,7 +12241,7 @@
                 </a:solidFill>
                 <a:latin typeface="Segoe UI"/>
               </a:rPr>
-              <a:t>Cancel mid-flight — compensations run</a:t>
+              <a:t>Kill the worker. Mid-claim. On purpose.</a:t>
             </a:r>
           </a:p>
         </p:txBody>
@@ -12173,7 +12368,7 @@
                 </a:solidFill>
                 <a:latin typeface="Segoe UI"/>
               </a:rPr>
-              <a:t>cancellation-saga.mp4</a:t>
+              <a:t>worker-restart-durability.mp4</a:t>
             </a:r>
           </a:p>
         </p:txBody>
@@ -12208,7 +12403,7 @@
                 </a:solidFill>
                 <a:latin typeface="Consolas"/>
               </a:rPr>
-              <a:t>presentation/recordings/06-cancellation-saga.mp4</a:t>
+              <a:t>presentation/recordings/05-worker-restart-durability.mp4</a:t>
             </a:r>
           </a:p>
         </p:txBody>
@@ -12247,7 +12442,7 @@
                 </a:solidFill>
                 <a:latin typeface="Segoe UI"/>
               </a:rPr>
-              <a:t>▸ Cancel a running claim from the dashboard</a:t>
+              <a:t>▸ “Kill &amp; restart worker” while a claim is blocked</a:t>
             </a:r>
           </a:p>
           <a:p>
@@ -12263,7 +12458,7 @@
                 </a:solidFill>
                 <a:latin typeface="Segoe UI"/>
               </a:rPr>
-              <a:t>▸ Reserve released, payment reversed, claimant notified</a:t>
+              <a:t>▸ worker-…-gen1 dies, worker-…-gen2 comes up</a:t>
             </a:r>
           </a:p>
           <a:p>
@@ -12279,7 +12474,7 @@
                 </a:solidFill>
                 <a:latin typeface="Segoe UI"/>
               </a:rPr>
-              <a:t>▸ Workflow closes CANCELED — cleanly, not abruptly</a:t>
+              <a:t>▸ Claim resumes exactly where it was — timers included</a:t>
             </a:r>
           </a:p>
         </p:txBody>
@@ -12371,11 +12566,11 @@
             <a:r>
               <a:rPr sz="1300" b="1" i="0">
                 <a:solidFill>
-                  <a:srgbClr val="7C5CFF"/>
-                </a:solidFill>
-                <a:latin typeface="Segoe UI"/>
-              </a:rPr>
-              <a:t>BONUS</a:t>
+                  <a:srgbClr val="9AA2C0"/>
+                </a:solidFill>
+                <a:latin typeface="Segoe UI"/>
+              </a:rPr>
+              <a:t>DEMO 6 / 6</a:t>
             </a:r>
           </a:p>
         </p:txBody>
@@ -12409,7 +12604,7 @@
                 </a:solidFill>
                 <a:latin typeface="Segoe UI"/>
               </a:rPr>
-              <a:t>The same story, from Temporal's Web UI</a:t>
+              <a:t>Cancel mid-flight — compensations run</a:t>
             </a:r>
           </a:p>
         </p:txBody>
@@ -12536,7 +12731,7 @@
                 </a:solidFill>
                 <a:latin typeface="Segoe UI"/>
               </a:rPr>
-              <a:t>temporal-web-ui-tour.mp4</a:t>
+              <a:t>cancellation-saga.mp4</a:t>
             </a:r>
           </a:p>
         </p:txBody>
@@ -12571,7 +12766,7 @@
                 </a:solidFill>
                 <a:latin typeface="Consolas"/>
               </a:rPr>
-              <a:t>presentation/recordings/07-temporal-web-ui-tour.mp4</a:t>
+              <a:t>presentation/recordings/06-cancellation-saga.mp4</a:t>
             </a:r>
           </a:p>
         </p:txBody>
@@ -12610,7 +12805,7 @@
                 </a:solidFill>
                 <a:latin typeface="Segoe UI"/>
               </a:rPr>
-              <a:t>▸ Event history: every retry, timer, signal, child workflow</a:t>
+              <a:t>▸ Cancel a running claim from the dashboard</a:t>
             </a:r>
           </a:p>
           <a:p>
@@ -12626,7 +12821,7 @@
                 </a:solidFill>
                 <a:latin typeface="Segoe UI"/>
               </a:rPr>
-              <a:t>▸ Search: ClaimStatus = “awaiting-review” AND FraudScore &gt;= 75</a:t>
+              <a:t>▸ Reserve released, payment reversed, claimant notified</a:t>
             </a:r>
           </a:p>
           <a:p>
@@ -12642,7 +12837,7 @@
                 </a:solidFill>
                 <a:latin typeface="Segoe UI"/>
               </a:rPr>
-              <a:t>▸ Run getClaimState as a raw query, no UI involved</a:t>
+              <a:t>▸ Workflow closes CANCELED — cleanly, not abruptly</a:t>
             </a:r>
           </a:p>
         </p:txBody>
@@ -12717,8 +12912,8 @@
         </p:nvSpPr>
         <p:spPr>
           <a:xfrm>
-            <a:off x="822960" y="2194560"/>
-            <a:ext cx="3657600" cy="1463040"/>
+            <a:off x="640080" y="457200"/>
+            <a:ext cx="2011680" cy="457200"/>
           </a:xfrm>
           <a:prstGeom prst="rect">
             <a:avLst/>
@@ -12732,13 +12927,13 @@
           <a:lstStyle/>
           <a:p>
             <a:r>
-              <a:rPr sz="7200" b="1" i="0">
+              <a:rPr sz="1300" b="1" i="0">
                 <a:solidFill>
                   <a:srgbClr val="7C5CFF"/>
                 </a:solidFill>
-                <a:latin typeface="Consolas"/>
-              </a:rPr>
-              <a:t>04</a:t>
+                <a:latin typeface="Segoe UI"/>
+              </a:rPr>
+              <a:t>BONUS</a:t>
             </a:r>
           </a:p>
         </p:txBody>
@@ -12751,8 +12946,8 @@
         </p:nvSpPr>
         <p:spPr>
           <a:xfrm>
-            <a:off x="822960" y="3383280"/>
-            <a:ext cx="8686800" cy="1005840"/>
+            <a:off x="2743200" y="411480"/>
+            <a:ext cx="8778240" cy="640080"/>
           </a:xfrm>
           <a:prstGeom prst="rect">
             <a:avLst/>
@@ -12766,27 +12961,119 @@
           <a:lstStyle/>
           <a:p>
             <a:r>
-              <a:rPr sz="4000" b="1" i="0">
+              <a:rPr sz="2800" b="1" i="0">
                 <a:solidFill>
                   <a:srgbClr val="E6E9F5"/>
                 </a:solidFill>
                 <a:latin typeface="Segoe UI"/>
               </a:rPr>
-              <a:t>Matching Your Use Case</a:t>
-            </a:r>
-          </a:p>
-        </p:txBody>
-      </p:sp>
-      <p:sp>
-        <p:nvSpPr>
-          <p:cNvPr id="5" name="TextBox 4"/>
+              <a:t>The same story, from Temporal's Web UI</a:t>
+            </a:r>
+          </a:p>
+        </p:txBody>
+      </p:sp>
+      <p:sp>
+        <p:nvSpPr>
+          <p:cNvPr id="5" name="Rounded Rectangle 4"/>
+          <p:cNvSpPr/>
+          <p:nvPr/>
+        </p:nvSpPr>
+        <p:spPr>
+          <a:xfrm>
+            <a:off x="640080" y="1188720"/>
+            <a:ext cx="10881360" cy="4206240"/>
+          </a:xfrm>
+          <a:prstGeom prst="roundRect">
+            <a:avLst>
+              <a:gd name="adj" fmla="val 6000"/>
+            </a:avLst>
+          </a:prstGeom>
+          <a:solidFill>
+            <a:srgbClr val="05060C"/>
+          </a:solidFill>
+          <a:ln w="12700">
+            <a:solidFill>
+              <a:srgbClr val="7C5CFF"/>
+            </a:solidFill>
+          </a:ln>
+          <a:effectLst/>
+        </p:spPr>
+        <p:style>
+          <a:lnRef idx="1">
+            <a:schemeClr val="accent1"/>
+          </a:lnRef>
+          <a:fillRef idx="3">
+            <a:schemeClr val="accent1"/>
+          </a:fillRef>
+          <a:effectRef idx="2">
+            <a:schemeClr val="accent1"/>
+          </a:effectRef>
+          <a:fontRef idx="minor">
+            <a:schemeClr val="lt1"/>
+          </a:fontRef>
+        </p:style>
+        <p:txBody>
+          <a:bodyPr rtlCol="0" anchor="ctr"/>
+          <a:lstStyle/>
+          <a:p>
+            <a:pPr algn="ctr"/>
+          </a:p>
+        </p:txBody>
+      </p:sp>
+      <p:sp>
+        <p:nvSpPr>
+          <p:cNvPr id="6" name="Isosceles Triangle 5"/>
+          <p:cNvSpPr/>
+          <p:nvPr/>
+        </p:nvSpPr>
+        <p:spPr>
+          <a:xfrm rot="5400000">
+            <a:off x="5669280" y="2743200"/>
+            <a:ext cx="822960" cy="822960"/>
+          </a:xfrm>
+          <a:prstGeom prst="triangle">
+            <a:avLst/>
+          </a:prstGeom>
+          <a:solidFill>
+            <a:srgbClr val="7C5CFF"/>
+          </a:solidFill>
+          <a:ln>
+            <a:noFill/>
+          </a:ln>
+          <a:effectLst/>
+        </p:spPr>
+        <p:style>
+          <a:lnRef idx="1">
+            <a:schemeClr val="accent1"/>
+          </a:lnRef>
+          <a:fillRef idx="3">
+            <a:schemeClr val="accent1"/>
+          </a:fillRef>
+          <a:effectRef idx="2">
+            <a:schemeClr val="accent1"/>
+          </a:effectRef>
+          <a:fontRef idx="minor">
+            <a:schemeClr val="lt1"/>
+          </a:fontRef>
+        </p:style>
+        <p:txBody>
+          <a:bodyPr rtlCol="0" anchor="ctr"/>
+          <a:lstStyle/>
+          <a:p>
+            <a:pPr algn="ctr"/>
+          </a:p>
+        </p:txBody>
+      </p:sp>
+      <p:sp>
+        <p:nvSpPr>
+          <p:cNvPr id="7" name="TextBox 6"/>
           <p:cNvSpPr txBox="1"/>
           <p:nvPr/>
         </p:nvSpPr>
         <p:spPr>
           <a:xfrm>
-            <a:off x="822960" y="4206240"/>
-            <a:ext cx="6858000" cy="914400"/>
+            <a:off x="3383280" y="3703320"/>
+            <a:ext cx="5394960" cy="457200"/>
           </a:xfrm>
           <a:prstGeom prst="rect">
             <a:avLst/>
@@ -12799,14 +13086,121 @@
           </a:bodyPr>
           <a:lstStyle/>
           <a:p>
-            <a:r>
-              <a:rPr sz="1700" b="0" i="0">
+            <a:pPr algn="ctr"/>
+            <a:r>
+              <a:rPr sz="2000" b="0" i="0">
                 <a:solidFill>
                   <a:srgbClr val="9AA2C0"/>
                 </a:solidFill>
                 <a:latin typeface="Segoe UI"/>
               </a:rPr>
-              <a:t>Turning what we just saw into a checklist you can use on Monday.</a:t>
+              <a:t>temporal-web-ui-tour.mp4</a:t>
+            </a:r>
+          </a:p>
+        </p:txBody>
+      </p:sp>
+      <p:sp>
+        <p:nvSpPr>
+          <p:cNvPr id="8" name="TextBox 7"/>
+          <p:cNvSpPr txBox="1"/>
+          <p:nvPr/>
+        </p:nvSpPr>
+        <p:spPr>
+          <a:xfrm>
+            <a:off x="3383280" y="4114800"/>
+            <a:ext cx="5394960" cy="365760"/>
+          </a:xfrm>
+          <a:prstGeom prst="rect">
+            <a:avLst/>
+          </a:prstGeom>
+          <a:noFill/>
+        </p:spPr>
+        <p:txBody>
+          <a:bodyPr wrap="square" anchor="t" lIns="0" rIns="0" tIns="0" bIns="0">
+            <a:spAutoFit/>
+          </a:bodyPr>
+          <a:lstStyle/>
+          <a:p>
+            <a:pPr algn="ctr"/>
+            <a:r>
+              <a:rPr sz="1200" b="0" i="0">
+                <a:solidFill>
+                  <a:srgbClr val="6F7794"/>
+                </a:solidFill>
+                <a:latin typeface="Consolas"/>
+              </a:rPr>
+              <a:t>presentation/recordings/07-temporal-web-ui-tour.mp4</a:t>
+            </a:r>
+          </a:p>
+        </p:txBody>
+      </p:sp>
+      <p:sp>
+        <p:nvSpPr>
+          <p:cNvPr id="9" name="TextBox 8"/>
+          <p:cNvSpPr txBox="1"/>
+          <p:nvPr/>
+        </p:nvSpPr>
+        <p:spPr>
+          <a:xfrm>
+            <a:off x="640080" y="5623560"/>
+            <a:ext cx="10881360" cy="914400"/>
+          </a:xfrm>
+          <a:prstGeom prst="rect">
+            <a:avLst/>
+          </a:prstGeom>
+          <a:noFill/>
+        </p:spPr>
+        <p:txBody>
+          <a:bodyPr wrap="square" anchor="t" lIns="0" rIns="0" tIns="0" bIns="0">
+            <a:spAutoFit/>
+          </a:bodyPr>
+          <a:lstStyle/>
+          <a:p>
+            <a:pPr>
+              <a:spcAft>
+                <a:spcPts val="400"/>
+              </a:spcAft>
+            </a:pPr>
+            <a:r>
+              <a:rPr sz="1300" b="0" i="0">
+                <a:solidFill>
+                  <a:srgbClr val="9AA2C0"/>
+                </a:solidFill>
+                <a:latin typeface="Segoe UI"/>
+              </a:rPr>
+              <a:t>▸ Event history: every retry, timer, signal, child workflow</a:t>
+            </a:r>
+          </a:p>
+          <a:p>
+            <a:pPr>
+              <a:spcAft>
+                <a:spcPts val="400"/>
+              </a:spcAft>
+            </a:pPr>
+            <a:r>
+              <a:rPr sz="1300" b="0" i="0">
+                <a:solidFill>
+                  <a:srgbClr val="9AA2C0"/>
+                </a:solidFill>
+                <a:latin typeface="Segoe UI"/>
+              </a:rPr>
+              <a:t>▸ Search: ClaimStatus = “awaiting-review” AND FraudScore &gt;= 75</a:t>
+            </a:r>
+          </a:p>
+          <a:p>
+            <a:pPr>
+              <a:spcAft>
+                <a:spcPts val="400"/>
+              </a:spcAft>
+            </a:pPr>
+            <a:r>
+              <a:rPr sz="1300" b="0" i="0">
+                <a:solidFill>
+                  <a:srgbClr val="9AA2C0"/>
+                </a:solidFill>
+                <a:latin typeface="Segoe UI"/>
+              </a:rPr>
+              <a:t>▸ Run getClaimState as a raw query, no UI involved</a:t>
             </a:r>
           </a:p>
         </p:txBody>
@@ -12881,8 +13275,8 @@
         </p:nvSpPr>
         <p:spPr>
           <a:xfrm>
-            <a:off x="640080" y="502920"/>
-            <a:ext cx="10515600" cy="365760"/>
+            <a:off x="822960" y="2194560"/>
+            <a:ext cx="3657600" cy="1463040"/>
           </a:xfrm>
           <a:prstGeom prst="rect">
             <a:avLst/>
@@ -12895,19 +13289,14 @@
           </a:bodyPr>
           <a:lstStyle/>
           <a:p>
-            <a:pPr>
-              <a:defRPr>
-                <a:latin typeface="Segoe UI"/>
-              </a:defRPr>
-            </a:pPr>
-            <a:r>
-              <a:rPr sz="1300" b="1" i="0">
-                <a:solidFill>
-                  <a:srgbClr val="4C9FFE"/>
-                </a:solidFill>
-                <a:latin typeface="Segoe UI"/>
-              </a:rPr>
-              <a:t>PATTERN MATCH</a:t>
+            <a:r>
+              <a:rPr sz="7200" b="1" i="0">
+                <a:solidFill>
+                  <a:srgbClr val="7C5CFF"/>
+                </a:solidFill>
+                <a:latin typeface="Consolas"/>
+              </a:rPr>
+              <a:t>04</a:t>
             </a:r>
           </a:p>
         </p:txBody>
@@ -12920,8 +13309,8 @@
         </p:nvSpPr>
         <p:spPr>
           <a:xfrm>
-            <a:off x="640080" y="822960"/>
-            <a:ext cx="10881360" cy="1188720"/>
+            <a:off x="822960" y="3383280"/>
+            <a:ext cx="8686800" cy="1005840"/>
           </a:xfrm>
           <a:prstGeom prst="rect">
             <a:avLst/>
@@ -12935,13 +13324,13 @@
           <a:lstStyle/>
           <a:p>
             <a:r>
-              <a:rPr sz="3000" b="1" i="0">
+              <a:rPr sz="4000" b="1" i="0">
                 <a:solidFill>
                   <a:srgbClr val="E6E9F5"/>
                 </a:solidFill>
                 <a:latin typeface="Segoe UI"/>
               </a:rPr>
-              <a:t>Signals you have a good Temporal use case</a:t>
+              <a:t>Matching Your Use Case</a:t>
             </a:r>
           </a:p>
         </p:txBody>
@@ -12954,8 +13343,8 @@
         </p:nvSpPr>
         <p:spPr>
           <a:xfrm>
-            <a:off x="640080" y="6446520"/>
-            <a:ext cx="5486400" cy="320040"/>
+            <a:off x="822960" y="4206240"/>
+            <a:ext cx="6858000" cy="914400"/>
           </a:xfrm>
           <a:prstGeom prst="rect">
             <a:avLst/>
@@ -12969,186 +13358,13 @@
           <a:lstStyle/>
           <a:p>
             <a:r>
-              <a:rPr sz="1000" b="0" i="0">
+              <a:rPr sz="1700" b="0" i="0">
                 <a:solidFill>
                   <a:srgbClr val="9AA2C0"/>
                 </a:solidFill>
                 <a:latin typeface="Segoe UI"/>
               </a:rPr>
-              <a:t>◈ Temporal · Lifting the Veil</a:t>
-            </a:r>
-          </a:p>
-        </p:txBody>
-      </p:sp>
-      <p:sp>
-        <p:nvSpPr>
-          <p:cNvPr id="6" name="TextBox 5"/>
-          <p:cNvSpPr txBox="1"/>
-          <p:nvPr/>
-        </p:nvSpPr>
-        <p:spPr>
-          <a:xfrm>
-            <a:off x="640080" y="1828800"/>
-            <a:ext cx="10515600" cy="4114800"/>
-          </a:xfrm>
-          <a:prstGeom prst="rect">
-            <a:avLst/>
-          </a:prstGeom>
-          <a:noFill/>
-        </p:spPr>
-        <p:txBody>
-          <a:bodyPr wrap="square" anchor="t" lIns="0" rIns="0" tIns="0" bIns="0">
-            <a:spAutoFit/>
-          </a:bodyPr>
-          <a:lstStyle/>
-          <a:p>
-            <a:pPr>
-              <a:spcAft>
-                <a:spcPts val="1000"/>
-              </a:spcAft>
-            </a:pPr>
-            <a:r>
-              <a:rPr sz="1700" b="1" i="0">
-                <a:solidFill>
-                  <a:srgbClr val="34D399"/>
-                </a:solidFill>
-                <a:latin typeface="Segoe UI"/>
-              </a:rPr>
-              <a:t>✓  </a:t>
-            </a:r>
-            <a:r>
-              <a:rPr sz="1700" b="0" i="0">
-                <a:solidFill>
-                  <a:srgbClr val="E6E9F5"/>
-                </a:solidFill>
-                <a:latin typeface="Segoe UI"/>
-              </a:rPr>
-              <a:t>A process that spans minutes, days, or months — not one request/response</a:t>
-            </a:r>
-          </a:p>
-          <a:p>
-            <a:pPr>
-              <a:spcAft>
-                <a:spcPts val="1000"/>
-              </a:spcAft>
-            </a:pPr>
-            <a:r>
-              <a:rPr sz="1700" b="1" i="0">
-                <a:solidFill>
-                  <a:srgbClr val="34D399"/>
-                </a:solidFill>
-                <a:latin typeface="Segoe UI"/>
-              </a:rPr>
-              <a:t>✓  </a:t>
-            </a:r>
-            <a:r>
-              <a:rPr sz="1700" b="0" i="0">
-                <a:solidFill>
-                  <a:srgbClr val="E6E9F5"/>
-                </a:solidFill>
-                <a:latin typeface="Segoe UI"/>
-              </a:rPr>
-              <a:t>A human has to approve, deny, or provide info at some unknown point</a:t>
-            </a:r>
-          </a:p>
-          <a:p>
-            <a:pPr>
-              <a:spcAft>
-                <a:spcPts val="1000"/>
-              </a:spcAft>
-            </a:pPr>
-            <a:r>
-              <a:rPr sz="1700" b="1" i="0">
-                <a:solidFill>
-                  <a:srgbClr val="34D399"/>
-                </a:solidFill>
-                <a:latin typeface="Segoe UI"/>
-              </a:rPr>
-              <a:t>✓  </a:t>
-            </a:r>
-            <a:r>
-              <a:rPr sz="1700" b="0" i="0">
-                <a:solidFill>
-                  <a:srgbClr val="E6E9F5"/>
-                </a:solidFill>
-                <a:latin typeface="Segoe UI"/>
-              </a:rPr>
-              <a:t>Steps call flaky external systems that need retries with backoff</a:t>
-            </a:r>
-          </a:p>
-          <a:p>
-            <a:pPr>
-              <a:spcAft>
-                <a:spcPts val="1000"/>
-              </a:spcAft>
-            </a:pPr>
-            <a:r>
-              <a:rPr sz="1700" b="1" i="0">
-                <a:solidFill>
-                  <a:srgbClr val="34D399"/>
-                </a:solidFill>
-                <a:latin typeface="Segoe UI"/>
-              </a:rPr>
-              <a:t>✓  </a:t>
-            </a:r>
-            <a:r>
-              <a:rPr sz="1700" b="0" i="0">
-                <a:solidFill>
-                  <a:srgbClr val="E6E9F5"/>
-                </a:solidFill>
-                <a:latin typeface="Segoe UI"/>
-              </a:rPr>
-              <a:t>A crash mid-process must not lose or double-run anything</a:t>
-            </a:r>
-          </a:p>
-          <a:p>
-            <a:pPr>
-              <a:spcAft>
-                <a:spcPts val="1000"/>
-              </a:spcAft>
-            </a:pPr>
-            <a:r>
-              <a:rPr sz="1700" b="1" i="0">
-                <a:solidFill>
-                  <a:srgbClr val="34D399"/>
-                </a:solidFill>
-                <a:latin typeface="Segoe UI"/>
-              </a:rPr>
-              <a:t>✓  </a:t>
-            </a:r>
-            <a:r>
-              <a:rPr sz="1700" b="0" i="0">
-                <a:solidFill>
-                  <a:srgbClr val="E6E9F5"/>
-                </a:solidFill>
-                <a:latin typeface="Segoe UI"/>
-              </a:rPr>
-              <a:t>You need an audit trail of exactly what happened, in order</a:t>
-            </a:r>
-          </a:p>
-          <a:p>
-            <a:pPr>
-              <a:spcAft>
-                <a:spcPts val="1000"/>
-              </a:spcAft>
-            </a:pPr>
-            <a:r>
-              <a:rPr sz="1700" b="1" i="0">
-                <a:solidFill>
-                  <a:srgbClr val="34D399"/>
-                </a:solidFill>
-                <a:latin typeface="Segoe UI"/>
-              </a:rPr>
-              <a:t>✓  </a:t>
-            </a:r>
-            <a:r>
-              <a:rPr sz="1700" b="0" i="0">
-                <a:solidFill>
-                  <a:srgbClr val="E6E9F5"/>
-                </a:solidFill>
-                <a:latin typeface="Segoe UI"/>
-              </a:rPr>
-              <a:t>Multiple steps must be undone together if a later one fails (saga)</a:t>
+              <a:t>Turning what we just saw into a checklist you can use.</a:t>
             </a:r>
           </a:p>
         </p:txBody>
@@ -13249,7 +13465,7 @@
                 </a:solidFill>
                 <a:latin typeface="Segoe UI"/>
               </a:rPr>
-              <a:t>THE REUSABLE TRICK</a:t>
+              <a:t>PATTERN MATCH</a:t>
             </a:r>
           </a:p>
         </p:txBody>
@@ -13283,7 +13499,7 @@
                 </a:solidFill>
                 <a:latin typeface="Segoe UI"/>
               </a:rPr>
-              <a:t>Before you prompt: name the durability questions</a:t>
+              <a:t>Signals you have a good Temporal use case</a:t>
             </a:r>
           </a:p>
         </p:txBody>
@@ -13324,62 +13540,14 @@
       </p:sp>
       <p:sp>
         <p:nvSpPr>
-          <p:cNvPr id="6" name="Rounded Rectangle 5"/>
-          <p:cNvSpPr/>
+          <p:cNvPr id="6" name="TextBox 5"/>
+          <p:cNvSpPr txBox="1"/>
           <p:nvPr/>
         </p:nvSpPr>
         <p:spPr>
           <a:xfrm>
             <a:off x="640080" y="1828800"/>
-            <a:ext cx="5303520" cy="1828800"/>
-          </a:xfrm>
-          <a:prstGeom prst="roundRect">
-            <a:avLst>
-              <a:gd name="adj" fmla="val 6000"/>
-            </a:avLst>
-          </a:prstGeom>
-          <a:solidFill>
-            <a:srgbClr val="141828"/>
-          </a:solidFill>
-          <a:ln w="12700">
-            <a:solidFill>
-              <a:srgbClr val="232A41"/>
-            </a:solidFill>
-          </a:ln>
-          <a:effectLst/>
-        </p:spPr>
-        <p:style>
-          <a:lnRef idx="1">
-            <a:schemeClr val="accent1"/>
-          </a:lnRef>
-          <a:fillRef idx="3">
-            <a:schemeClr val="accent1"/>
-          </a:fillRef>
-          <a:effectRef idx="2">
-            <a:schemeClr val="accent1"/>
-          </a:effectRef>
-          <a:fontRef idx="minor">
-            <a:schemeClr val="lt1"/>
-          </a:fontRef>
-        </p:style>
-        <p:txBody>
-          <a:bodyPr rtlCol="0" anchor="ctr"/>
-          <a:lstStyle/>
-          <a:p>
-            <a:pPr algn="ctr"/>
-          </a:p>
-        </p:txBody>
-      </p:sp>
-      <p:sp>
-        <p:nvSpPr>
-          <p:cNvPr id="7" name="TextBox 6"/>
-          <p:cNvSpPr txBox="1"/>
-          <p:nvPr/>
-        </p:nvSpPr>
-        <p:spPr>
-          <a:xfrm>
-            <a:off x="841248" y="1975104"/>
-            <a:ext cx="4901184" cy="1554480"/>
+            <a:ext cx="10515600" cy="4114800"/>
           </a:xfrm>
           <a:prstGeom prst="rect">
             <a:avLst/>
@@ -13392,324 +13560,153 @@
           </a:bodyPr>
           <a:lstStyle/>
           <a:p>
-            <a:r>
-              <a:rPr sz="1200" b="1" i="0">
-                <a:solidFill>
-                  <a:srgbClr val="4C9FFE"/>
-                </a:solidFill>
-                <a:latin typeface="Segoe UI"/>
-              </a:rPr>
-              <a:t>ASK ABOUT FAILURE</a:t>
-            </a:r>
-          </a:p>
-          <a:p>
             <a:pPr>
-              <a:spcBef>
-                <a:spcPts val="600"/>
-              </a:spcBef>
+              <a:spcAft>
+                <a:spcPts val="1000"/>
+              </a:spcAft>
             </a:pPr>
             <a:r>
-              <a:rPr sz="1300" b="0" i="0">
-                <a:solidFill>
-                  <a:srgbClr val="9AA2C0"/>
-                </a:solidFill>
-                <a:latin typeface="Segoe UI"/>
-              </a:rPr>
-              <a:t>What activities can fail transiently? What's permanent? What must be non-retryable?</a:t>
-            </a:r>
-          </a:p>
-        </p:txBody>
-      </p:sp>
-      <p:sp>
-        <p:nvSpPr>
-          <p:cNvPr id="8" name="Rounded Rectangle 7"/>
-          <p:cNvSpPr/>
-          <p:nvPr/>
-        </p:nvSpPr>
-        <p:spPr>
-          <a:xfrm>
-            <a:off x="6217920" y="1828800"/>
-            <a:ext cx="5303520" cy="1828800"/>
-          </a:xfrm>
-          <a:prstGeom prst="roundRect">
-            <a:avLst>
-              <a:gd name="adj" fmla="val 6000"/>
-            </a:avLst>
-          </a:prstGeom>
-          <a:solidFill>
-            <a:srgbClr val="141828"/>
-          </a:solidFill>
-          <a:ln w="12700">
-            <a:solidFill>
-              <a:srgbClr val="232A41"/>
-            </a:solidFill>
-          </a:ln>
-          <a:effectLst/>
-        </p:spPr>
-        <p:style>
-          <a:lnRef idx="1">
-            <a:schemeClr val="accent1"/>
-          </a:lnRef>
-          <a:fillRef idx="3">
-            <a:schemeClr val="accent1"/>
-          </a:fillRef>
-          <a:effectRef idx="2">
-            <a:schemeClr val="accent1"/>
-          </a:effectRef>
-          <a:fontRef idx="minor">
-            <a:schemeClr val="lt1"/>
-          </a:fontRef>
-        </p:style>
-        <p:txBody>
-          <a:bodyPr rtlCol="0" anchor="ctr"/>
-          <a:lstStyle/>
-          <a:p>
-            <a:pPr algn="ctr"/>
-          </a:p>
-        </p:txBody>
-      </p:sp>
-      <p:sp>
-        <p:nvSpPr>
-          <p:cNvPr id="9" name="TextBox 8"/>
-          <p:cNvSpPr txBox="1"/>
-          <p:nvPr/>
-        </p:nvSpPr>
-        <p:spPr>
-          <a:xfrm>
-            <a:off x="6419088" y="1975104"/>
-            <a:ext cx="4901184" cy="1554480"/>
-          </a:xfrm>
-          <a:prstGeom prst="rect">
-            <a:avLst/>
-          </a:prstGeom>
-          <a:noFill/>
-        </p:spPr>
-        <p:txBody>
-          <a:bodyPr wrap="square" anchor="t" lIns="0" rIns="0" tIns="0" bIns="0">
-            <a:spAutoFit/>
-          </a:bodyPr>
-          <a:lstStyle/>
-          <a:p>
-            <a:r>
-              <a:rPr sz="1200" b="1" i="0">
-                <a:solidFill>
-                  <a:srgbClr val="4C9FFE"/>
-                </a:solidFill>
-                <a:latin typeface="Segoe UI"/>
-              </a:rPr>
-              <a:t>ASK ABOUT WAITING</a:t>
+              <a:rPr sz="1700" b="1" i="0">
+                <a:solidFill>
+                  <a:srgbClr val="34D399"/>
+                </a:solidFill>
+                <a:latin typeface="Segoe UI"/>
+              </a:rPr>
+              <a:t>✓  </a:t>
+            </a:r>
+            <a:r>
+              <a:rPr sz="1700" b="0" i="0">
+                <a:solidFill>
+                  <a:srgbClr val="E6E9F5"/>
+                </a:solidFill>
+                <a:latin typeface="Segoe UI"/>
+              </a:rPr>
+              <a:t>A process that spans minutes, days, or months — not one request/response</a:t>
             </a:r>
           </a:p>
           <a:p>
             <a:pPr>
-              <a:spcBef>
-                <a:spcPts val="600"/>
-              </a:spcBef>
+              <a:spcAft>
+                <a:spcPts val="1000"/>
+              </a:spcAft>
             </a:pPr>
             <a:r>
-              <a:rPr sz="1300" b="0" i="0">
-                <a:solidFill>
-                  <a:srgbClr val="9AA2C0"/>
-                </a:solidFill>
-                <a:latin typeface="Segoe UI"/>
-              </a:rPr>
-              <a:t>What waits on a human? For how long? What happens if nobody answers?</a:t>
-            </a:r>
-          </a:p>
-        </p:txBody>
-      </p:sp>
-      <p:sp>
-        <p:nvSpPr>
-          <p:cNvPr id="10" name="Rounded Rectangle 9"/>
-          <p:cNvSpPr/>
-          <p:nvPr/>
-        </p:nvSpPr>
-        <p:spPr>
-          <a:xfrm>
-            <a:off x="640080" y="3931920"/>
-            <a:ext cx="5303520" cy="1828800"/>
-          </a:xfrm>
-          <a:prstGeom prst="roundRect">
-            <a:avLst>
-              <a:gd name="adj" fmla="val 6000"/>
-            </a:avLst>
-          </a:prstGeom>
-          <a:solidFill>
-            <a:srgbClr val="141828"/>
-          </a:solidFill>
-          <a:ln w="12700">
-            <a:solidFill>
-              <a:srgbClr val="232A41"/>
-            </a:solidFill>
-          </a:ln>
-          <a:effectLst/>
-        </p:spPr>
-        <p:style>
-          <a:lnRef idx="1">
-            <a:schemeClr val="accent1"/>
-          </a:lnRef>
-          <a:fillRef idx="3">
-            <a:schemeClr val="accent1"/>
-          </a:fillRef>
-          <a:effectRef idx="2">
-            <a:schemeClr val="accent1"/>
-          </a:effectRef>
-          <a:fontRef idx="minor">
-            <a:schemeClr val="lt1"/>
-          </a:fontRef>
-        </p:style>
-        <p:txBody>
-          <a:bodyPr rtlCol="0" anchor="ctr"/>
-          <a:lstStyle/>
-          <a:p>
-            <a:pPr algn="ctr"/>
-          </a:p>
-        </p:txBody>
-      </p:sp>
-      <p:sp>
-        <p:nvSpPr>
-          <p:cNvPr id="11" name="TextBox 10"/>
-          <p:cNvSpPr txBox="1"/>
-          <p:nvPr/>
-        </p:nvSpPr>
-        <p:spPr>
-          <a:xfrm>
-            <a:off x="841248" y="4078224"/>
-            <a:ext cx="4901184" cy="1554480"/>
-          </a:xfrm>
-          <a:prstGeom prst="rect">
-            <a:avLst/>
-          </a:prstGeom>
-          <a:noFill/>
-        </p:spPr>
-        <p:txBody>
-          <a:bodyPr wrap="square" anchor="t" lIns="0" rIns="0" tIns="0" bIns="0">
-            <a:spAutoFit/>
-          </a:bodyPr>
-          <a:lstStyle/>
-          <a:p>
-            <a:r>
-              <a:rPr sz="1200" b="1" i="0">
-                <a:solidFill>
-                  <a:srgbClr val="4C9FFE"/>
-                </a:solidFill>
-                <a:latin typeface="Segoe UI"/>
-              </a:rPr>
-              <a:t>ASK ABOUT STATE</a:t>
+              <a:rPr sz="1700" b="1" i="0">
+                <a:solidFill>
+                  <a:srgbClr val="34D399"/>
+                </a:solidFill>
+                <a:latin typeface="Segoe UI"/>
+              </a:rPr>
+              <a:t>✓  </a:t>
+            </a:r>
+            <a:r>
+              <a:rPr sz="1700" b="0" i="0">
+                <a:solidFill>
+                  <a:srgbClr val="E6E9F5"/>
+                </a:solidFill>
+                <a:latin typeface="Segoe UI"/>
+              </a:rPr>
+              <a:t>A human has to approve, deny, or provide info at some unknown point</a:t>
             </a:r>
           </a:p>
           <a:p>
             <a:pPr>
-              <a:spcBef>
-                <a:spcPts val="600"/>
-              </a:spcBef>
+              <a:spcAft>
+                <a:spcPts val="1000"/>
+              </a:spcAft>
             </a:pPr>
             <a:r>
-              <a:rPr sz="1300" b="0" i="0">
-                <a:solidFill>
-                  <a:srgbClr val="9AA2C0"/>
-                </a:solidFill>
-                <a:latin typeface="Segoe UI"/>
-              </a:rPr>
-              <a:t>What must survive a crash? Who is the source of truth?</a:t>
-            </a:r>
-          </a:p>
-        </p:txBody>
-      </p:sp>
-      <p:sp>
-        <p:nvSpPr>
-          <p:cNvPr id="12" name="Rounded Rectangle 11"/>
-          <p:cNvSpPr/>
-          <p:nvPr/>
-        </p:nvSpPr>
-        <p:spPr>
-          <a:xfrm>
-            <a:off x="6217920" y="3931920"/>
-            <a:ext cx="5303520" cy="1828800"/>
-          </a:xfrm>
-          <a:prstGeom prst="roundRect">
-            <a:avLst>
-              <a:gd name="adj" fmla="val 6000"/>
-            </a:avLst>
-          </a:prstGeom>
-          <a:solidFill>
-            <a:srgbClr val="141828"/>
-          </a:solidFill>
-          <a:ln w="12700">
-            <a:solidFill>
-              <a:srgbClr val="232A41"/>
-            </a:solidFill>
-          </a:ln>
-          <a:effectLst/>
-        </p:spPr>
-        <p:style>
-          <a:lnRef idx="1">
-            <a:schemeClr val="accent1"/>
-          </a:lnRef>
-          <a:fillRef idx="3">
-            <a:schemeClr val="accent1"/>
-          </a:fillRef>
-          <a:effectRef idx="2">
-            <a:schemeClr val="accent1"/>
-          </a:effectRef>
-          <a:fontRef idx="minor">
-            <a:schemeClr val="lt1"/>
-          </a:fontRef>
-        </p:style>
-        <p:txBody>
-          <a:bodyPr rtlCol="0" anchor="ctr"/>
-          <a:lstStyle/>
-          <a:p>
-            <a:pPr algn="ctr"/>
-          </a:p>
-        </p:txBody>
-      </p:sp>
-      <p:sp>
-        <p:nvSpPr>
-          <p:cNvPr id="13" name="TextBox 12"/>
-          <p:cNvSpPr txBox="1"/>
-          <p:nvPr/>
-        </p:nvSpPr>
-        <p:spPr>
-          <a:xfrm>
-            <a:off x="6419088" y="4078224"/>
-            <a:ext cx="4901184" cy="1554480"/>
-          </a:xfrm>
-          <a:prstGeom prst="rect">
-            <a:avLst/>
-          </a:prstGeom>
-          <a:noFill/>
-        </p:spPr>
-        <p:txBody>
-          <a:bodyPr wrap="square" anchor="t" lIns="0" rIns="0" tIns="0" bIns="0">
-            <a:spAutoFit/>
-          </a:bodyPr>
-          <a:lstStyle/>
-          <a:p>
-            <a:r>
-              <a:rPr sz="1200" b="1" i="0">
-                <a:solidFill>
-                  <a:srgbClr val="4C9FFE"/>
-                </a:solidFill>
-                <a:latin typeface="Segoe UI"/>
-              </a:rPr>
-              <a:t>ASK ABOUT BOUNDARIES</a:t>
+              <a:rPr sz="1700" b="1" i="0">
+                <a:solidFill>
+                  <a:srgbClr val="34D399"/>
+                </a:solidFill>
+                <a:latin typeface="Segoe UI"/>
+              </a:rPr>
+              <a:t>✓  </a:t>
+            </a:r>
+            <a:r>
+              <a:rPr sz="1700" b="0" i="0">
+                <a:solidFill>
+                  <a:srgbClr val="E6E9F5"/>
+                </a:solidFill>
+                <a:latin typeface="Segoe UI"/>
+              </a:rPr>
+              <a:t>Steps call flaky external systems that need retries with backoff</a:t>
             </a:r>
           </a:p>
           <a:p>
             <a:pPr>
-              <a:spcBef>
-                <a:spcPts val="600"/>
-              </a:spcBef>
+              <a:spcAft>
+                <a:spcPts val="1000"/>
+              </a:spcAft>
             </a:pPr>
             <a:r>
-              <a:rPr sz="1300" b="0" i="0">
-                <a:solidFill>
-                  <a:srgbClr val="9AA2C0"/>
-                </a:solidFill>
-                <a:latin typeface="Segoe UI"/>
-              </a:rPr>
-              <a:t>Where does UI end and API begin? Where does API end and worker begin?</a:t>
+              <a:rPr sz="1700" b="1" i="0">
+                <a:solidFill>
+                  <a:srgbClr val="34D399"/>
+                </a:solidFill>
+                <a:latin typeface="Segoe UI"/>
+              </a:rPr>
+              <a:t>✓  </a:t>
+            </a:r>
+            <a:r>
+              <a:rPr sz="1700" b="0" i="0">
+                <a:solidFill>
+                  <a:srgbClr val="E6E9F5"/>
+                </a:solidFill>
+                <a:latin typeface="Segoe UI"/>
+              </a:rPr>
+              <a:t>A crash mid-process must not lose or double-run anything</a:t>
+            </a:r>
+          </a:p>
+          <a:p>
+            <a:pPr>
+              <a:spcAft>
+                <a:spcPts val="1000"/>
+              </a:spcAft>
+            </a:pPr>
+            <a:r>
+              <a:rPr sz="1700" b="1" i="0">
+                <a:solidFill>
+                  <a:srgbClr val="34D399"/>
+                </a:solidFill>
+                <a:latin typeface="Segoe UI"/>
+              </a:rPr>
+              <a:t>✓  </a:t>
+            </a:r>
+            <a:r>
+              <a:rPr sz="1700" b="0" i="0">
+                <a:solidFill>
+                  <a:srgbClr val="E6E9F5"/>
+                </a:solidFill>
+                <a:latin typeface="Segoe UI"/>
+              </a:rPr>
+              <a:t>You need an audit trail of exactly what happened, in order</a:t>
+            </a:r>
+          </a:p>
+          <a:p>
+            <a:pPr>
+              <a:spcAft>
+                <a:spcPts val="1000"/>
+              </a:spcAft>
+            </a:pPr>
+            <a:r>
+              <a:rPr sz="1700" b="1" i="0">
+                <a:solidFill>
+                  <a:srgbClr val="34D399"/>
+                </a:solidFill>
+                <a:latin typeface="Segoe UI"/>
+              </a:rPr>
+              <a:t>✓  </a:t>
+            </a:r>
+            <a:r>
+              <a:rPr sz="1700" b="0" i="0">
+                <a:solidFill>
+                  <a:srgbClr val="E6E9F5"/>
+                </a:solidFill>
+                <a:latin typeface="Segoe UI"/>
+              </a:rPr>
+              <a:t>Multiple steps must be undone together if a later one fails (saga)</a:t>
             </a:r>
           </a:p>
         </p:txBody>
@@ -13810,7 +13807,7 @@
                 </a:solidFill>
                 <a:latin typeface="Segoe UI"/>
               </a:rPr>
-              <a:t>HOMEWORK</a:t>
+              <a:t>THE REUSABLE TRICK</a:t>
             </a:r>
           </a:p>
         </p:txBody>
@@ -13844,7 +13841,7 @@
                 </a:solidFill>
                 <a:latin typeface="Segoe UI"/>
               </a:rPr>
-              <a:t>Try this yourself, this week</a:t>
+              <a:t>Before you prompt: name the durability questions</a:t>
             </a:r>
           </a:p>
         </p:txBody>
@@ -13892,7 +13889,7 @@
         <p:spPr>
           <a:xfrm>
             <a:off x="640080" y="1828800"/>
-            <a:ext cx="10881360" cy="2377440"/>
+            <a:ext cx="5303520" cy="1828800"/>
           </a:xfrm>
           <a:prstGeom prst="roundRect">
             <a:avLst>
@@ -13900,7 +13897,7 @@
             </a:avLst>
           </a:prstGeom>
           <a:solidFill>
-            <a:srgbClr val="0D1020"/>
+            <a:srgbClr val="141828"/>
           </a:solidFill>
           <a:ln w="12700">
             <a:solidFill>
@@ -13933,20 +13930,72 @@
       </p:sp>
       <p:sp>
         <p:nvSpPr>
-          <p:cNvPr id="7" name="Rounded Rectangle 6"/>
+          <p:cNvPr id="7" name="TextBox 6"/>
+          <p:cNvSpPr txBox="1"/>
+          <p:nvPr/>
+        </p:nvSpPr>
+        <p:spPr>
+          <a:xfrm>
+            <a:off x="841248" y="1975104"/>
+            <a:ext cx="4901184" cy="1554480"/>
+          </a:xfrm>
+          <a:prstGeom prst="rect">
+            <a:avLst/>
+          </a:prstGeom>
+          <a:noFill/>
+        </p:spPr>
+        <p:txBody>
+          <a:bodyPr wrap="square" anchor="t" lIns="0" rIns="0" tIns="0" bIns="0">
+            <a:spAutoFit/>
+          </a:bodyPr>
+          <a:lstStyle/>
+          <a:p>
+            <a:r>
+              <a:rPr sz="1200" b="1" i="0">
+                <a:solidFill>
+                  <a:srgbClr val="4C9FFE"/>
+                </a:solidFill>
+                <a:latin typeface="Segoe UI"/>
+              </a:rPr>
+              <a:t>ASK ABOUT FAILURE</a:t>
+            </a:r>
+          </a:p>
+          <a:p>
+            <a:pPr>
+              <a:spcBef>
+                <a:spcPts val="600"/>
+              </a:spcBef>
+            </a:pPr>
+            <a:r>
+              <a:rPr sz="1300" b="0" i="0">
+                <a:solidFill>
+                  <a:srgbClr val="9AA2C0"/>
+                </a:solidFill>
+                <a:latin typeface="Segoe UI"/>
+              </a:rPr>
+              <a:t>What activities can fail transiently? What's permanent? What must be non-retryable?</a:t>
+            </a:r>
+          </a:p>
+        </p:txBody>
+      </p:sp>
+      <p:sp>
+        <p:nvSpPr>
+          <p:cNvPr id="8" name="Rounded Rectangle 7"/>
           <p:cNvSpPr/>
           <p:nvPr/>
         </p:nvSpPr>
         <p:spPr>
           <a:xfrm>
-            <a:off x="640080" y="1828800"/>
-            <a:ext cx="10881360" cy="365760"/>
+            <a:off x="6217920" y="1828800"/>
+            <a:ext cx="5303520" cy="1828800"/>
           </a:xfrm>
           <a:prstGeom prst="roundRect">
-            <a:avLst/>
+            <a:avLst>
+              <a:gd name="adj" fmla="val 6000"/>
+            </a:avLst>
           </a:prstGeom>
           <a:solidFill>
-            <a:srgbClr val="151934"/>
+            <a:srgbClr val="141828"/>
           </a:solidFill>
           <a:ln w="12700">
             <a:solidFill>
@@ -13979,14 +14028,14 @@
       </p:sp>
       <p:sp>
         <p:nvSpPr>
-          <p:cNvPr id="8" name="TextBox 7"/>
+          <p:cNvPr id="9" name="TextBox 8"/>
           <p:cNvSpPr txBox="1"/>
           <p:nvPr/>
         </p:nvSpPr>
         <p:spPr>
           <a:xfrm>
-            <a:off x="822960" y="1883664"/>
-            <a:ext cx="10515600" cy="274320"/>
+            <a:off x="6419088" y="1975104"/>
+            <a:ext cx="4901184" cy="1554480"/>
           </a:xfrm>
           <a:prstGeom prst="rect">
             <a:avLst/>
@@ -14000,27 +14049,91 @@
           <a:lstStyle/>
           <a:p>
             <a:r>
-              <a:rPr sz="1100" b="0" i="0">
+              <a:rPr sz="1200" b="1" i="0">
+                <a:solidFill>
+                  <a:srgbClr val="4C9FFE"/>
+                </a:solidFill>
+                <a:latin typeface="Segoe UI"/>
+              </a:rPr>
+              <a:t>ASK ABOUT WAITING</a:t>
+            </a:r>
+          </a:p>
+          <a:p>
+            <a:pPr>
+              <a:spcBef>
+                <a:spcPts val="600"/>
+              </a:spcBef>
+            </a:pPr>
+            <a:r>
+              <a:rPr sz="1300" b="0" i="0">
                 <a:solidFill>
                   <a:srgbClr val="9AA2C0"/>
                 </a:solidFill>
-                <a:latin typeface="Consolas"/>
-              </a:rPr>
-              <a:t>●  ●  ●    prompt-template.txt</a:t>
-            </a:r>
-          </a:p>
-        </p:txBody>
-      </p:sp>
-      <p:sp>
-        <p:nvSpPr>
-          <p:cNvPr id="9" name="TextBox 8"/>
+                <a:latin typeface="Segoe UI"/>
+              </a:rPr>
+              <a:t>What waits on a human? For how long? What happens if nobody answers?</a:t>
+            </a:r>
+          </a:p>
+        </p:txBody>
+      </p:sp>
+      <p:sp>
+        <p:nvSpPr>
+          <p:cNvPr id="10" name="Rounded Rectangle 9"/>
+          <p:cNvSpPr/>
+          <p:nvPr/>
+        </p:nvSpPr>
+        <p:spPr>
+          <a:xfrm>
+            <a:off x="640080" y="3931920"/>
+            <a:ext cx="5303520" cy="1828800"/>
+          </a:xfrm>
+          <a:prstGeom prst="roundRect">
+            <a:avLst>
+              <a:gd name="adj" fmla="val 6000"/>
+            </a:avLst>
+          </a:prstGeom>
+          <a:solidFill>
+            <a:srgbClr val="141828"/>
+          </a:solidFill>
+          <a:ln w="12700">
+            <a:solidFill>
+              <a:srgbClr val="232A41"/>
+            </a:solidFill>
+          </a:ln>
+          <a:effectLst/>
+        </p:spPr>
+        <p:style>
+          <a:lnRef idx="1">
+            <a:schemeClr val="accent1"/>
+          </a:lnRef>
+          <a:fillRef idx="3">
+            <a:schemeClr val="accent1"/>
+          </a:fillRef>
+          <a:effectRef idx="2">
+            <a:schemeClr val="accent1"/>
+          </a:effectRef>
+          <a:fontRef idx="minor">
+            <a:schemeClr val="lt1"/>
+          </a:fontRef>
+        </p:style>
+        <p:txBody>
+          <a:bodyPr rtlCol="0" anchor="ctr"/>
+          <a:lstStyle/>
+          <a:p>
+            <a:pPr algn="ctr"/>
+          </a:p>
+        </p:txBody>
+      </p:sp>
+      <p:sp>
+        <p:nvSpPr>
+          <p:cNvPr id="11" name="TextBox 10"/>
           <p:cNvSpPr txBox="1"/>
           <p:nvPr/>
         </p:nvSpPr>
         <p:spPr>
           <a:xfrm>
-            <a:off x="868680" y="2331720"/>
-            <a:ext cx="10424160" cy="1691640"/>
+            <a:off x="841248" y="4078224"/>
+            <a:ext cx="4901184" cy="1554480"/>
           </a:xfrm>
           <a:prstGeom prst="rect">
             <a:avLst/>
@@ -14033,19 +14146,128 @@
           </a:bodyPr>
           <a:lstStyle/>
           <a:p>
+            <a:r>
+              <a:rPr sz="1200" b="1" i="0">
+                <a:solidFill>
+                  <a:srgbClr val="4C9FFE"/>
+                </a:solidFill>
+                <a:latin typeface="Segoe UI"/>
+              </a:rPr>
+              <a:t>ASK ABOUT STATE</a:t>
+            </a:r>
+          </a:p>
+          <a:p>
             <a:pPr>
-              <a:lnSpc>
-                <a:spcPct val="130000"/>
-              </a:lnSpc>
+              <a:spcBef>
+                <a:spcPts val="600"/>
+              </a:spcBef>
             </a:pPr>
             <a:r>
-              <a:rPr sz="1400" b="0" i="0">
-                <a:solidFill>
-                  <a:srgbClr val="D6DCF5"/>
-                </a:solidFill>
-                <a:latin typeface="Consolas"/>
-              </a:rPr>
-              <a:t>&gt; Here's my rough idea: [describe your process in 2-3 sentences]. Turn this into a spec for a coding agent building it on Temporal. Explicitly call out: which steps need retries and what kind of failures they should tolerate, where a human needs to approve/reject/provide input and how long we should wait, what a crash mid-process must not lose, and how the UI/API/worker boundaries should be drawn. Then build it.</a:t>
+              <a:rPr sz="1300" b="0" i="0">
+                <a:solidFill>
+                  <a:srgbClr val="9AA2C0"/>
+                </a:solidFill>
+                <a:latin typeface="Segoe UI"/>
+              </a:rPr>
+              <a:t>What must survive a crash? Who is the source of truth?</a:t>
+            </a:r>
+          </a:p>
+        </p:txBody>
+      </p:sp>
+      <p:sp>
+        <p:nvSpPr>
+          <p:cNvPr id="12" name="Rounded Rectangle 11"/>
+          <p:cNvSpPr/>
+          <p:nvPr/>
+        </p:nvSpPr>
+        <p:spPr>
+          <a:xfrm>
+            <a:off x="6217920" y="3931920"/>
+            <a:ext cx="5303520" cy="1828800"/>
+          </a:xfrm>
+          <a:prstGeom prst="roundRect">
+            <a:avLst>
+              <a:gd name="adj" fmla="val 6000"/>
+            </a:avLst>
+          </a:prstGeom>
+          <a:solidFill>
+            <a:srgbClr val="141828"/>
+          </a:solidFill>
+          <a:ln w="12700">
+            <a:solidFill>
+              <a:srgbClr val="232A41"/>
+            </a:solidFill>
+          </a:ln>
+          <a:effectLst/>
+        </p:spPr>
+        <p:style>
+          <a:lnRef idx="1">
+            <a:schemeClr val="accent1"/>
+          </a:lnRef>
+          <a:fillRef idx="3">
+            <a:schemeClr val="accent1"/>
+          </a:fillRef>
+          <a:effectRef idx="2">
+            <a:schemeClr val="accent1"/>
+          </a:effectRef>
+          <a:fontRef idx="minor">
+            <a:schemeClr val="lt1"/>
+          </a:fontRef>
+        </p:style>
+        <p:txBody>
+          <a:bodyPr rtlCol="0" anchor="ctr"/>
+          <a:lstStyle/>
+          <a:p>
+            <a:pPr algn="ctr"/>
+          </a:p>
+        </p:txBody>
+      </p:sp>
+      <p:sp>
+        <p:nvSpPr>
+          <p:cNvPr id="13" name="TextBox 12"/>
+          <p:cNvSpPr txBox="1"/>
+          <p:nvPr/>
+        </p:nvSpPr>
+        <p:spPr>
+          <a:xfrm>
+            <a:off x="6419088" y="4078224"/>
+            <a:ext cx="4901184" cy="1554480"/>
+          </a:xfrm>
+          <a:prstGeom prst="rect">
+            <a:avLst/>
+          </a:prstGeom>
+          <a:noFill/>
+        </p:spPr>
+        <p:txBody>
+          <a:bodyPr wrap="square" anchor="t" lIns="0" rIns="0" tIns="0" bIns="0">
+            <a:spAutoFit/>
+          </a:bodyPr>
+          <a:lstStyle/>
+          <a:p>
+            <a:r>
+              <a:rPr sz="1200" b="1" i="0">
+                <a:solidFill>
+                  <a:srgbClr val="4C9FFE"/>
+                </a:solidFill>
+                <a:latin typeface="Segoe UI"/>
+              </a:rPr>
+              <a:t>ASK ABOUT BOUNDARIES</a:t>
+            </a:r>
+          </a:p>
+          <a:p>
+            <a:pPr>
+              <a:spcBef>
+                <a:spcPts val="600"/>
+              </a:spcBef>
+            </a:pPr>
+            <a:r>
+              <a:rPr sz="1300" b="0" i="0">
+                <a:solidFill>
+                  <a:srgbClr val="9AA2C0"/>
+                </a:solidFill>
+                <a:latin typeface="Segoe UI"/>
+              </a:rPr>
+              <a:t>Where does UI end and API begin? Where does API end and worker begin?</a:t>
             </a:r>
           </a:p>
         </p:txBody>
@@ -14120,7 +14342,7 @@
         </p:nvSpPr>
         <p:spPr>
           <a:xfrm>
-            <a:off x="640080" y="1691640"/>
+            <a:off x="640080" y="502920"/>
             <a:ext cx="10515600" cy="365760"/>
           </a:xfrm>
           <a:prstGeom prst="rect">
@@ -14146,7 +14368,7 @@
                 </a:solidFill>
                 <a:latin typeface="Segoe UI"/>
               </a:rPr>
-              <a:t>RECAP</a:t>
+              <a:t>HOMEWORK</a:t>
             </a:r>
           </a:p>
         </p:txBody>
@@ -14159,8 +14381,8 @@
         </p:nvSpPr>
         <p:spPr>
           <a:xfrm>
-            <a:off x="822960" y="2103120"/>
-            <a:ext cx="9875520" cy="2926080"/>
+            <a:off x="640080" y="822960"/>
+            <a:ext cx="10881360" cy="1188720"/>
           </a:xfrm>
           <a:prstGeom prst="rect">
             <a:avLst/>
@@ -14174,32 +14396,13 @@
           <a:lstStyle/>
           <a:p>
             <a:r>
-              <a:rPr sz="3200" b="1" i="0">
+              <a:rPr sz="3000" b="1" i="0">
                 <a:solidFill>
                   <a:srgbClr val="E6E9F5"/>
                 </a:solidFill>
                 <a:latin typeface="Segoe UI"/>
               </a:rPr>
-              <a:t>The veil isn't Temporal.
-</a:t>
-            </a:r>
-            <a:r>
-              <a:rPr sz="3200" b="1" i="0">
-                <a:solidFill>
-                  <a:srgbClr val="E6E9F5"/>
-                </a:solidFill>
-                <a:latin typeface="Segoe UI"/>
-              </a:rPr>
-              <a:t>It's </a:t>
-            </a:r>
-            <a:r>
-              <a:rPr sz="3200" b="1" i="0">
-                <a:solidFill>
-                  <a:srgbClr val="4C9FFE"/>
-                </a:solidFill>
-                <a:latin typeface="Segoe UI"/>
-              </a:rPr>
-              <a:t>under-specified requirements.</a:t>
+              <a:t>Try this yourself, this week</a:t>
             </a:r>
           </a:p>
         </p:txBody>
@@ -14212,8 +14415,8 @@
         </p:nvSpPr>
         <p:spPr>
           <a:xfrm>
-            <a:off x="822960" y="5257800"/>
-            <a:ext cx="8961120" cy="731520"/>
+            <a:off x="640080" y="6446520"/>
+            <a:ext cx="5486400" cy="320040"/>
           </a:xfrm>
           <a:prstGeom prst="rect">
             <a:avLst/>
@@ -14227,13 +14430,180 @@
           <a:lstStyle/>
           <a:p>
             <a:r>
-              <a:rPr sz="1500" b="0" i="0">
+              <a:rPr sz="1000" b="0" i="0">
                 <a:solidFill>
                   <a:srgbClr val="9AA2C0"/>
                 </a:solidFill>
                 <a:latin typeface="Segoe UI"/>
               </a:rPr>
-              <a:t>Name the failures, the waits, and the source of truth — Temporal does the rest.</a:t>
+              <a:t>◈ Temporal · Lifting the Veil</a:t>
+            </a:r>
+          </a:p>
+        </p:txBody>
+      </p:sp>
+      <p:sp>
+        <p:nvSpPr>
+          <p:cNvPr id="6" name="Rounded Rectangle 5"/>
+          <p:cNvSpPr/>
+          <p:nvPr/>
+        </p:nvSpPr>
+        <p:spPr>
+          <a:xfrm>
+            <a:off x="640080" y="1828800"/>
+            <a:ext cx="10881360" cy="2377440"/>
+          </a:xfrm>
+          <a:prstGeom prst="roundRect">
+            <a:avLst>
+              <a:gd name="adj" fmla="val 6000"/>
+            </a:avLst>
+          </a:prstGeom>
+          <a:solidFill>
+            <a:srgbClr val="0D1020"/>
+          </a:solidFill>
+          <a:ln w="12700">
+            <a:solidFill>
+              <a:srgbClr val="232A41"/>
+            </a:solidFill>
+          </a:ln>
+          <a:effectLst/>
+        </p:spPr>
+        <p:style>
+          <a:lnRef idx="1">
+            <a:schemeClr val="accent1"/>
+          </a:lnRef>
+          <a:fillRef idx="3">
+            <a:schemeClr val="accent1"/>
+          </a:fillRef>
+          <a:effectRef idx="2">
+            <a:schemeClr val="accent1"/>
+          </a:effectRef>
+          <a:fontRef idx="minor">
+            <a:schemeClr val="lt1"/>
+          </a:fontRef>
+        </p:style>
+        <p:txBody>
+          <a:bodyPr rtlCol="0" anchor="ctr"/>
+          <a:lstStyle/>
+          <a:p>
+            <a:pPr algn="ctr"/>
+          </a:p>
+        </p:txBody>
+      </p:sp>
+      <p:sp>
+        <p:nvSpPr>
+          <p:cNvPr id="7" name="Rounded Rectangle 6"/>
+          <p:cNvSpPr/>
+          <p:nvPr/>
+        </p:nvSpPr>
+        <p:spPr>
+          <a:xfrm>
+            <a:off x="640080" y="1828800"/>
+            <a:ext cx="10881360" cy="365760"/>
+          </a:xfrm>
+          <a:prstGeom prst="roundRect">
+            <a:avLst/>
+          </a:prstGeom>
+          <a:solidFill>
+            <a:srgbClr val="151934"/>
+          </a:solidFill>
+          <a:ln w="12700">
+            <a:solidFill>
+              <a:srgbClr val="232A41"/>
+            </a:solidFill>
+          </a:ln>
+          <a:effectLst/>
+        </p:spPr>
+        <p:style>
+          <a:lnRef idx="1">
+            <a:schemeClr val="accent1"/>
+          </a:lnRef>
+          <a:fillRef idx="3">
+            <a:schemeClr val="accent1"/>
+          </a:fillRef>
+          <a:effectRef idx="2">
+            <a:schemeClr val="accent1"/>
+          </a:effectRef>
+          <a:fontRef idx="minor">
+            <a:schemeClr val="lt1"/>
+          </a:fontRef>
+        </p:style>
+        <p:txBody>
+          <a:bodyPr rtlCol="0" anchor="ctr"/>
+          <a:lstStyle/>
+          <a:p>
+            <a:pPr algn="ctr"/>
+          </a:p>
+        </p:txBody>
+      </p:sp>
+      <p:sp>
+        <p:nvSpPr>
+          <p:cNvPr id="8" name="TextBox 7"/>
+          <p:cNvSpPr txBox="1"/>
+          <p:nvPr/>
+        </p:nvSpPr>
+        <p:spPr>
+          <a:xfrm>
+            <a:off x="822960" y="1883664"/>
+            <a:ext cx="10515600" cy="274320"/>
+          </a:xfrm>
+          <a:prstGeom prst="rect">
+            <a:avLst/>
+          </a:prstGeom>
+          <a:noFill/>
+        </p:spPr>
+        <p:txBody>
+          <a:bodyPr wrap="square" anchor="t" lIns="0" rIns="0" tIns="0" bIns="0">
+            <a:spAutoFit/>
+          </a:bodyPr>
+          <a:lstStyle/>
+          <a:p>
+            <a:r>
+              <a:rPr sz="1100" b="0" i="0">
+                <a:solidFill>
+                  <a:srgbClr val="9AA2C0"/>
+                </a:solidFill>
+                <a:latin typeface="Consolas"/>
+              </a:rPr>
+              <a:t>●  ●  ●    prompt-template.txt</a:t>
+            </a:r>
+          </a:p>
+        </p:txBody>
+      </p:sp>
+      <p:sp>
+        <p:nvSpPr>
+          <p:cNvPr id="9" name="TextBox 8"/>
+          <p:cNvSpPr txBox="1"/>
+          <p:nvPr/>
+        </p:nvSpPr>
+        <p:spPr>
+          <a:xfrm>
+            <a:off x="868680" y="2331720"/>
+            <a:ext cx="10424160" cy="1691640"/>
+          </a:xfrm>
+          <a:prstGeom prst="rect">
+            <a:avLst/>
+          </a:prstGeom>
+          <a:noFill/>
+        </p:spPr>
+        <p:txBody>
+          <a:bodyPr wrap="square" anchor="t" lIns="0" rIns="0" tIns="0" bIns="0">
+            <a:spAutoFit/>
+          </a:bodyPr>
+          <a:lstStyle/>
+          <a:p>
+            <a:pPr>
+              <a:lnSpc>
+                <a:spcPct val="130000"/>
+              </a:lnSpc>
+            </a:pPr>
+            <a:r>
+              <a:rPr sz="1400" b="0" i="0">
+                <a:solidFill>
+                  <a:srgbClr val="D6DCF5"/>
+                </a:solidFill>
+                <a:latin typeface="Consolas"/>
+              </a:rPr>
+              <a:t>&gt; Here's my rough idea: [describe your process in 2-3 sentences]. Turn this into a spec for a coding agent building it on Temporal. Explicitly call out: which steps need retries and what kind of failures they should tolerate, where a human needs to approve/reject/provide input and how long we should wait, what a crash mid-process must not lose, and how the UI/API/worker boundaries should be drawn. Then build it.</a:t>
             </a:r>
           </a:p>
         </p:txBody>
@@ -14308,7 +14678,7 @@
         </p:nvSpPr>
         <p:spPr>
           <a:xfrm>
-            <a:off x="640080" y="502920"/>
+            <a:off x="640080" y="1691640"/>
             <a:ext cx="10515600" cy="365760"/>
           </a:xfrm>
           <a:prstGeom prst="rect">
@@ -14334,7 +14704,7 @@
                 </a:solidFill>
                 <a:latin typeface="Segoe UI"/>
               </a:rPr>
-              <a:t>GO BUILD SOMETHING</a:t>
+              <a:t>RECAP</a:t>
             </a:r>
           </a:p>
         </p:txBody>
@@ -14347,8 +14717,8 @@
         </p:nvSpPr>
         <p:spPr>
           <a:xfrm>
-            <a:off x="640080" y="822960"/>
-            <a:ext cx="10881360" cy="1188720"/>
+            <a:off x="822960" y="2103120"/>
+            <a:ext cx="9875520" cy="2926080"/>
           </a:xfrm>
           <a:prstGeom prst="rect">
             <a:avLst/>
@@ -14362,13 +14732,32 @@
           <a:lstStyle/>
           <a:p>
             <a:r>
-              <a:rPr sz="3000" b="1" i="0">
+              <a:rPr sz="3200" b="1" i="0">
                 <a:solidFill>
                   <a:srgbClr val="E6E9F5"/>
                 </a:solidFill>
                 <a:latin typeface="Segoe UI"/>
               </a:rPr>
-              <a:t>Resources</a:t>
+              <a:t>The veil isn't Temporal.
+</a:t>
+            </a:r>
+            <a:r>
+              <a:rPr sz="3200" b="1" i="0">
+                <a:solidFill>
+                  <a:srgbClr val="E6E9F5"/>
+                </a:solidFill>
+                <a:latin typeface="Segoe UI"/>
+              </a:rPr>
+              <a:t>It's </a:t>
+            </a:r>
+            <a:r>
+              <a:rPr sz="3200" b="1" i="0">
+                <a:solidFill>
+                  <a:srgbClr val="4C9FFE"/>
+                </a:solidFill>
+                <a:latin typeface="Segoe UI"/>
+              </a:rPr>
+              <a:t>under-specified requirements.</a:t>
             </a:r>
           </a:p>
         </p:txBody>
@@ -14381,8 +14770,8 @@
         </p:nvSpPr>
         <p:spPr>
           <a:xfrm>
-            <a:off x="640080" y="6446520"/>
-            <a:ext cx="5486400" cy="320040"/>
+            <a:off x="822960" y="5257800"/>
+            <a:ext cx="8961120" cy="731520"/>
           </a:xfrm>
           <a:prstGeom prst="rect">
             <a:avLst/>
@@ -14396,405 +14785,13 @@
           <a:lstStyle/>
           <a:p>
             <a:r>
-              <a:rPr sz="1000" b="0" i="0">
+              <a:rPr sz="1500" b="0" i="0">
                 <a:solidFill>
                   <a:srgbClr val="9AA2C0"/>
                 </a:solidFill>
                 <a:latin typeface="Segoe UI"/>
               </a:rPr>
-              <a:t>◈ Temporal · Lifting the Veil</a:t>
-            </a:r>
-          </a:p>
-        </p:txBody>
-      </p:sp>
-      <p:sp>
-        <p:nvSpPr>
-          <p:cNvPr id="6" name="Rounded Rectangle 5"/>
-          <p:cNvSpPr/>
-          <p:nvPr/>
-        </p:nvSpPr>
-        <p:spPr>
-          <a:xfrm>
-            <a:off x="640080" y="1828800"/>
-            <a:ext cx="5303520" cy="1463040"/>
-          </a:xfrm>
-          <a:prstGeom prst="roundRect">
-            <a:avLst>
-              <a:gd name="adj" fmla="val 6000"/>
-            </a:avLst>
-          </a:prstGeom>
-          <a:solidFill>
-            <a:srgbClr val="141828"/>
-          </a:solidFill>
-          <a:ln w="12700">
-            <a:solidFill>
-              <a:srgbClr val="232A41"/>
-            </a:solidFill>
-          </a:ln>
-          <a:effectLst/>
-        </p:spPr>
-        <p:style>
-          <a:lnRef idx="1">
-            <a:schemeClr val="accent1"/>
-          </a:lnRef>
-          <a:fillRef idx="3">
-            <a:schemeClr val="accent1"/>
-          </a:fillRef>
-          <a:effectRef idx="2">
-            <a:schemeClr val="accent1"/>
-          </a:effectRef>
-          <a:fontRef idx="minor">
-            <a:schemeClr val="lt1"/>
-          </a:fontRef>
-        </p:style>
-        <p:txBody>
-          <a:bodyPr rtlCol="0" anchor="ctr"/>
-          <a:lstStyle/>
-          <a:p>
-            <a:pPr algn="ctr"/>
-          </a:p>
-        </p:txBody>
-      </p:sp>
-      <p:sp>
-        <p:nvSpPr>
-          <p:cNvPr id="7" name="TextBox 6"/>
-          <p:cNvSpPr txBox="1"/>
-          <p:nvPr/>
-        </p:nvSpPr>
-        <p:spPr>
-          <a:xfrm>
-            <a:off x="841248" y="1975104"/>
-            <a:ext cx="4901184" cy="1188720"/>
-          </a:xfrm>
-          <a:prstGeom prst="rect">
-            <a:avLst/>
-          </a:prstGeom>
-          <a:noFill/>
-        </p:spPr>
-        <p:txBody>
-          <a:bodyPr wrap="square" anchor="t" lIns="0" rIns="0" tIns="0" bIns="0">
-            <a:spAutoFit/>
-          </a:bodyPr>
-          <a:lstStyle/>
-          <a:p>
-            <a:r>
-              <a:rPr sz="1200" b="1" i="0">
-                <a:solidFill>
-                  <a:srgbClr val="4C9FFE"/>
-                </a:solidFill>
-                <a:latin typeface="Segoe UI"/>
-              </a:rPr>
-              <a:t>THIS DEMO</a:t>
-            </a:r>
-          </a:p>
-          <a:p>
-            <a:pPr>
-              <a:spcBef>
-                <a:spcPts val="600"/>
-              </a:spcBef>
-            </a:pPr>
-            <a:r>
-              <a:rPr sz="1300" b="0" i="0">
-                <a:solidFill>
-                  <a:srgbClr val="9AA2C0"/>
-                </a:solidFill>
-                <a:latin typeface="Segoe UI"/>
-              </a:rPr>
-              <a:t>Full source, README, tests — github.com/&lt;you&gt;/temporal-claims-demo</a:t>
-            </a:r>
-          </a:p>
-        </p:txBody>
-      </p:sp>
-      <p:sp>
-        <p:nvSpPr>
-          <p:cNvPr id="8" name="Rounded Rectangle 7"/>
-          <p:cNvSpPr/>
-          <p:nvPr/>
-        </p:nvSpPr>
-        <p:spPr>
-          <a:xfrm>
-            <a:off x="6217920" y="1828800"/>
-            <a:ext cx="5303520" cy="1463040"/>
-          </a:xfrm>
-          <a:prstGeom prst="roundRect">
-            <a:avLst>
-              <a:gd name="adj" fmla="val 6000"/>
-            </a:avLst>
-          </a:prstGeom>
-          <a:solidFill>
-            <a:srgbClr val="141828"/>
-          </a:solidFill>
-          <a:ln w="12700">
-            <a:solidFill>
-              <a:srgbClr val="232A41"/>
-            </a:solidFill>
-          </a:ln>
-          <a:effectLst/>
-        </p:spPr>
-        <p:style>
-          <a:lnRef idx="1">
-            <a:schemeClr val="accent1"/>
-          </a:lnRef>
-          <a:fillRef idx="3">
-            <a:schemeClr val="accent1"/>
-          </a:fillRef>
-          <a:effectRef idx="2">
-            <a:schemeClr val="accent1"/>
-          </a:effectRef>
-          <a:fontRef idx="minor">
-            <a:schemeClr val="lt1"/>
-          </a:fontRef>
-        </p:style>
-        <p:txBody>
-          <a:bodyPr rtlCol="0" anchor="ctr"/>
-          <a:lstStyle/>
-          <a:p>
-            <a:pPr algn="ctr"/>
-          </a:p>
-        </p:txBody>
-      </p:sp>
-      <p:sp>
-        <p:nvSpPr>
-          <p:cNvPr id="9" name="TextBox 8"/>
-          <p:cNvSpPr txBox="1"/>
-          <p:nvPr/>
-        </p:nvSpPr>
-        <p:spPr>
-          <a:xfrm>
-            <a:off x="6419088" y="1975104"/>
-            <a:ext cx="4901184" cy="1188720"/>
-          </a:xfrm>
-          <a:prstGeom prst="rect">
-            <a:avLst/>
-          </a:prstGeom>
-          <a:noFill/>
-        </p:spPr>
-        <p:txBody>
-          <a:bodyPr wrap="square" anchor="t" lIns="0" rIns="0" tIns="0" bIns="0">
-            <a:spAutoFit/>
-          </a:bodyPr>
-          <a:lstStyle/>
-          <a:p>
-            <a:r>
-              <a:rPr sz="1200" b="1" i="0">
-                <a:solidFill>
-                  <a:srgbClr val="4C9FFE"/>
-                </a:solidFill>
-                <a:latin typeface="Segoe UI"/>
-              </a:rPr>
-              <a:t>TEMPORAL DOCS</a:t>
-            </a:r>
-          </a:p>
-          <a:p>
-            <a:pPr>
-              <a:spcBef>
-                <a:spcPts val="600"/>
-              </a:spcBef>
-            </a:pPr>
-            <a:r>
-              <a:rPr sz="1300" b="0" i="0">
-                <a:solidFill>
-                  <a:srgbClr val="9AA2C0"/>
-                </a:solidFill>
-                <a:latin typeface="Segoe UI"/>
-              </a:rPr>
-              <a:t>docs.temporal.io · TypeScript SDK samples</a:t>
-            </a:r>
-          </a:p>
-        </p:txBody>
-      </p:sp>
-      <p:sp>
-        <p:nvSpPr>
-          <p:cNvPr id="10" name="Rounded Rectangle 9"/>
-          <p:cNvSpPr/>
-          <p:nvPr/>
-        </p:nvSpPr>
-        <p:spPr>
-          <a:xfrm>
-            <a:off x="640080" y="3566160"/>
-            <a:ext cx="5303520" cy="1463040"/>
-          </a:xfrm>
-          <a:prstGeom prst="roundRect">
-            <a:avLst>
-              <a:gd name="adj" fmla="val 6000"/>
-            </a:avLst>
-          </a:prstGeom>
-          <a:solidFill>
-            <a:srgbClr val="141828"/>
-          </a:solidFill>
-          <a:ln w="12700">
-            <a:solidFill>
-              <a:srgbClr val="232A41"/>
-            </a:solidFill>
-          </a:ln>
-          <a:effectLst/>
-        </p:spPr>
-        <p:style>
-          <a:lnRef idx="1">
-            <a:schemeClr val="accent1"/>
-          </a:lnRef>
-          <a:fillRef idx="3">
-            <a:schemeClr val="accent1"/>
-          </a:fillRef>
-          <a:effectRef idx="2">
-            <a:schemeClr val="accent1"/>
-          </a:effectRef>
-          <a:fontRef idx="minor">
-            <a:schemeClr val="lt1"/>
-          </a:fontRef>
-        </p:style>
-        <p:txBody>
-          <a:bodyPr rtlCol="0" anchor="ctr"/>
-          <a:lstStyle/>
-          <a:p>
-            <a:pPr algn="ctr"/>
-          </a:p>
-        </p:txBody>
-      </p:sp>
-      <p:sp>
-        <p:nvSpPr>
-          <p:cNvPr id="11" name="TextBox 10"/>
-          <p:cNvSpPr txBox="1"/>
-          <p:nvPr/>
-        </p:nvSpPr>
-        <p:spPr>
-          <a:xfrm>
-            <a:off x="841248" y="3712464"/>
-            <a:ext cx="4901184" cy="1188720"/>
-          </a:xfrm>
-          <a:prstGeom prst="rect">
-            <a:avLst/>
-          </a:prstGeom>
-          <a:noFill/>
-        </p:spPr>
-        <p:txBody>
-          <a:bodyPr wrap="square" anchor="t" lIns="0" rIns="0" tIns="0" bIns="0">
-            <a:spAutoFit/>
-          </a:bodyPr>
-          <a:lstStyle/>
-          <a:p>
-            <a:r>
-              <a:rPr sz="1200" b="1" i="0">
-                <a:solidFill>
-                  <a:srgbClr val="4C9FFE"/>
-                </a:solidFill>
-                <a:latin typeface="Segoe UI"/>
-              </a:rPr>
-              <a:t>COMMUNITY</a:t>
-            </a:r>
-          </a:p>
-          <a:p>
-            <a:pPr>
-              <a:spcBef>
-                <a:spcPts val="600"/>
-              </a:spcBef>
-            </a:pPr>
-            <a:r>
-              <a:rPr sz="1300" b="0" i="0">
-                <a:solidFill>
-                  <a:srgbClr val="9AA2C0"/>
-                </a:solidFill>
-                <a:latin typeface="Segoe UI"/>
-              </a:rPr>
-              <a:t>Temporal Slack · community forum · local meetups</a:t>
-            </a:r>
-          </a:p>
-        </p:txBody>
-      </p:sp>
-      <p:sp>
-        <p:nvSpPr>
-          <p:cNvPr id="12" name="Rounded Rectangle 11"/>
-          <p:cNvSpPr/>
-          <p:nvPr/>
-        </p:nvSpPr>
-        <p:spPr>
-          <a:xfrm>
-            <a:off x="6217920" y="3566160"/>
-            <a:ext cx="5303520" cy="1463040"/>
-          </a:xfrm>
-          <a:prstGeom prst="roundRect">
-            <a:avLst>
-              <a:gd name="adj" fmla="val 6000"/>
-            </a:avLst>
-          </a:prstGeom>
-          <a:solidFill>
-            <a:srgbClr val="141828"/>
-          </a:solidFill>
-          <a:ln w="12700">
-            <a:solidFill>
-              <a:srgbClr val="232A41"/>
-            </a:solidFill>
-          </a:ln>
-          <a:effectLst/>
-        </p:spPr>
-        <p:style>
-          <a:lnRef idx="1">
-            <a:schemeClr val="accent1"/>
-          </a:lnRef>
-          <a:fillRef idx="3">
-            <a:schemeClr val="accent1"/>
-          </a:fillRef>
-          <a:effectRef idx="2">
-            <a:schemeClr val="accent1"/>
-          </a:effectRef>
-          <a:fontRef idx="minor">
-            <a:schemeClr val="lt1"/>
-          </a:fontRef>
-        </p:style>
-        <p:txBody>
-          <a:bodyPr rtlCol="0" anchor="ctr"/>
-          <a:lstStyle/>
-          <a:p>
-            <a:pPr algn="ctr"/>
-          </a:p>
-        </p:txBody>
-      </p:sp>
-      <p:sp>
-        <p:nvSpPr>
-          <p:cNvPr id="13" name="TextBox 12"/>
-          <p:cNvSpPr txBox="1"/>
-          <p:nvPr/>
-        </p:nvSpPr>
-        <p:spPr>
-          <a:xfrm>
-            <a:off x="6419088" y="3712464"/>
-            <a:ext cx="4901184" cy="1188720"/>
-          </a:xfrm>
-          <a:prstGeom prst="rect">
-            <a:avLst/>
-          </a:prstGeom>
-          <a:noFill/>
-        </p:spPr>
-        <p:txBody>
-          <a:bodyPr wrap="square" anchor="t" lIns="0" rIns="0" tIns="0" bIns="0">
-            <a:spAutoFit/>
-          </a:bodyPr>
-          <a:lstStyle/>
-          <a:p>
-            <a:r>
-              <a:rPr sz="1200" b="1" i="0">
-                <a:solidFill>
-                  <a:srgbClr val="4C9FFE"/>
-                </a:solidFill>
-                <a:latin typeface="Segoe UI"/>
-              </a:rPr>
-              <a:t>THE PROMPT TEMPLATE</a:t>
-            </a:r>
-          </a:p>
-          <a:p>
-            <a:pPr>
-              <a:spcBef>
-                <a:spcPts val="600"/>
-              </a:spcBef>
-            </a:pPr>
-            <a:r>
-              <a:rPr sz="1300" b="0" i="0">
-                <a:solidFill>
-                  <a:srgbClr val="9AA2C0"/>
-                </a:solidFill>
-                <a:latin typeface="Segoe UI"/>
-              </a:rPr>
-              <a:t>Previous slide — steal it, adapt it, use it on your own use case</a:t>
+              <a:t>Name the failures, the waits, and the source of truth — Temporal does the rest.</a:t>
             </a:r>
           </a:p>
         </p:txBody>
@@ -15095,7 +15092,7 @@
                 </a:solidFill>
                 <a:latin typeface="Segoe UI"/>
               </a:rPr>
-              <a:t>Write the rough idea, badly, on purpose</a:t>
+              <a:t>Write the rough idea</a:t>
             </a:r>
           </a:p>
         </p:txBody>
@@ -15366,7 +15363,7 @@
         </p:nvSpPr>
         <p:spPr>
           <a:xfrm>
-            <a:off x="640080" y="2103120"/>
+            <a:off x="640080" y="502920"/>
             <a:ext cx="10515600" cy="365760"/>
           </a:xfrm>
           <a:prstGeom prst="rect">
@@ -15392,7 +15389,7 @@
                 </a:solidFill>
                 <a:latin typeface="Segoe UI"/>
               </a:rPr>
-              <a:t>TEMPORAL · ENGINEERING TALK</a:t>
+              <a:t>GO BUILD SOMETHING</a:t>
             </a:r>
           </a:p>
         </p:txBody>
@@ -15405,8 +15402,8 @@
         </p:nvSpPr>
         <p:spPr>
           <a:xfrm>
-            <a:off x="640080" y="2468880"/>
-            <a:ext cx="9144000" cy="1463040"/>
+            <a:off x="640080" y="822960"/>
+            <a:ext cx="10881360" cy="1188720"/>
           </a:xfrm>
           <a:prstGeom prst="rect">
             <a:avLst/>
@@ -15420,13 +15417,13 @@
           <a:lstStyle/>
           <a:p>
             <a:r>
-              <a:rPr sz="5400" b="1" i="0">
+              <a:rPr sz="3000" b="1" i="0">
                 <a:solidFill>
                   <a:srgbClr val="E6E9F5"/>
                 </a:solidFill>
                 <a:latin typeface="Segoe UI"/>
               </a:rPr>
-              <a:t>Thank you.</a:t>
+              <a:t>Resources</a:t>
             </a:r>
           </a:p>
         </p:txBody>
@@ -15439,8 +15436,8 @@
         </p:nvSpPr>
         <p:spPr>
           <a:xfrm>
-            <a:off x="640080" y="3931920"/>
-            <a:ext cx="7772400" cy="1097280"/>
+            <a:off x="640080" y="6446520"/>
+            <a:ext cx="5486400" cy="320040"/>
           </a:xfrm>
           <a:prstGeom prst="rect">
             <a:avLst/>
@@ -15454,36 +15451,40 @@
           <a:lstStyle/>
           <a:p>
             <a:r>
-              <a:rPr sz="2000" b="0" i="0">
+              <a:rPr sz="1000" b="0" i="0">
                 <a:solidFill>
                   <a:srgbClr val="9AA2C0"/>
                 </a:solidFill>
                 <a:latin typeface="Segoe UI"/>
               </a:rPr>
-              <a:t>Questions, war stories, and “would this work for my use case” conversations welcome.</a:t>
-            </a:r>
-          </a:p>
-        </p:txBody>
-      </p:sp>
-      <p:sp>
-        <p:nvSpPr>
-          <p:cNvPr id="6" name="Rectangle 5"/>
+              <a:t>◈ Temporal · Lifting the Veil</a:t>
+            </a:r>
+          </a:p>
+        </p:txBody>
+      </p:sp>
+      <p:sp>
+        <p:nvSpPr>
+          <p:cNvPr id="6" name="Rounded Rectangle 5"/>
           <p:cNvSpPr/>
           <p:nvPr/>
         </p:nvSpPr>
         <p:spPr>
           <a:xfrm>
-            <a:off x="640080" y="5212080"/>
-            <a:ext cx="10881360" cy="12700"/>
-          </a:xfrm>
-          <a:prstGeom prst="rect">
-            <a:avLst/>
+            <a:off x="640080" y="1828800"/>
+            <a:ext cx="5303520" cy="1463040"/>
+          </a:xfrm>
+          <a:prstGeom prst="roundRect">
+            <a:avLst>
+              <a:gd name="adj" fmla="val 6000"/>
+            </a:avLst>
           </a:prstGeom>
           <a:solidFill>
-            <a:srgbClr val="232A41"/>
+            <a:srgbClr val="141828"/>
           </a:solidFill>
-          <a:ln>
-            <a:noFill/>
+          <a:ln w="12700">
+            <a:solidFill>
+              <a:srgbClr val="232A41"/>
+            </a:solidFill>
           </a:ln>
           <a:effectLst/>
         </p:spPr>
@@ -15506,6 +15507,350 @@
           <a:lstStyle/>
           <a:p>
             <a:pPr algn="ctr"/>
+          </a:p>
+        </p:txBody>
+      </p:sp>
+      <p:sp>
+        <p:nvSpPr>
+          <p:cNvPr id="7" name="TextBox 6"/>
+          <p:cNvSpPr txBox="1"/>
+          <p:nvPr/>
+        </p:nvSpPr>
+        <p:spPr>
+          <a:xfrm>
+            <a:off x="841248" y="1975104"/>
+            <a:ext cx="4901184" cy="1188720"/>
+          </a:xfrm>
+          <a:prstGeom prst="rect">
+            <a:avLst/>
+          </a:prstGeom>
+          <a:noFill/>
+        </p:spPr>
+        <p:txBody>
+          <a:bodyPr wrap="square" anchor="t" lIns="0" rIns="0" tIns="0" bIns="0">
+            <a:spAutoFit/>
+          </a:bodyPr>
+          <a:lstStyle/>
+          <a:p>
+            <a:r>
+              <a:rPr sz="1200" b="1" i="0">
+                <a:solidFill>
+                  <a:srgbClr val="4C9FFE"/>
+                </a:solidFill>
+                <a:latin typeface="Segoe UI"/>
+              </a:rPr>
+              <a:t>THIS DEMO</a:t>
+            </a:r>
+          </a:p>
+          <a:p>
+            <a:pPr>
+              <a:spcBef>
+                <a:spcPts val="600"/>
+              </a:spcBef>
+            </a:pPr>
+            <a:r>
+              <a:rPr sz="1300" b="0" i="0">
+                <a:solidFill>
+                  <a:srgbClr val="9AA2C0"/>
+                </a:solidFill>
+                <a:latin typeface="Segoe UI"/>
+              </a:rPr>
+              <a:t>Full source, README, tests — github.com/&lt;you&gt;/temporal-claims-demo</a:t>
+            </a:r>
+          </a:p>
+        </p:txBody>
+      </p:sp>
+      <p:sp>
+        <p:nvSpPr>
+          <p:cNvPr id="8" name="Rounded Rectangle 7"/>
+          <p:cNvSpPr/>
+          <p:nvPr/>
+        </p:nvSpPr>
+        <p:spPr>
+          <a:xfrm>
+            <a:off x="6217920" y="1828800"/>
+            <a:ext cx="5303520" cy="1463040"/>
+          </a:xfrm>
+          <a:prstGeom prst="roundRect">
+            <a:avLst>
+              <a:gd name="adj" fmla="val 6000"/>
+            </a:avLst>
+          </a:prstGeom>
+          <a:solidFill>
+            <a:srgbClr val="141828"/>
+          </a:solidFill>
+          <a:ln w="12700">
+            <a:solidFill>
+              <a:srgbClr val="232A41"/>
+            </a:solidFill>
+          </a:ln>
+          <a:effectLst/>
+        </p:spPr>
+        <p:style>
+          <a:lnRef idx="1">
+            <a:schemeClr val="accent1"/>
+          </a:lnRef>
+          <a:fillRef idx="3">
+            <a:schemeClr val="accent1"/>
+          </a:fillRef>
+          <a:effectRef idx="2">
+            <a:schemeClr val="accent1"/>
+          </a:effectRef>
+          <a:fontRef idx="minor">
+            <a:schemeClr val="lt1"/>
+          </a:fontRef>
+        </p:style>
+        <p:txBody>
+          <a:bodyPr rtlCol="0" anchor="ctr"/>
+          <a:lstStyle/>
+          <a:p>
+            <a:pPr algn="ctr"/>
+          </a:p>
+        </p:txBody>
+      </p:sp>
+      <p:sp>
+        <p:nvSpPr>
+          <p:cNvPr id="9" name="TextBox 8"/>
+          <p:cNvSpPr txBox="1"/>
+          <p:nvPr/>
+        </p:nvSpPr>
+        <p:spPr>
+          <a:xfrm>
+            <a:off x="6419088" y="1975104"/>
+            <a:ext cx="4901184" cy="1188720"/>
+          </a:xfrm>
+          <a:prstGeom prst="rect">
+            <a:avLst/>
+          </a:prstGeom>
+          <a:noFill/>
+        </p:spPr>
+        <p:txBody>
+          <a:bodyPr wrap="square" anchor="t" lIns="0" rIns="0" tIns="0" bIns="0">
+            <a:spAutoFit/>
+          </a:bodyPr>
+          <a:lstStyle/>
+          <a:p>
+            <a:r>
+              <a:rPr sz="1200" b="1" i="0">
+                <a:solidFill>
+                  <a:srgbClr val="4C9FFE"/>
+                </a:solidFill>
+                <a:latin typeface="Segoe UI"/>
+              </a:rPr>
+              <a:t>TEMPORAL DOCS</a:t>
+            </a:r>
+          </a:p>
+          <a:p>
+            <a:pPr>
+              <a:spcBef>
+                <a:spcPts val="600"/>
+              </a:spcBef>
+            </a:pPr>
+            <a:r>
+              <a:rPr sz="1300" b="0" i="0">
+                <a:solidFill>
+                  <a:srgbClr val="9AA2C0"/>
+                </a:solidFill>
+                <a:latin typeface="Segoe UI"/>
+              </a:rPr>
+              <a:t>docs.temporal.io · TypeScript SDK samples</a:t>
+            </a:r>
+          </a:p>
+        </p:txBody>
+      </p:sp>
+      <p:sp>
+        <p:nvSpPr>
+          <p:cNvPr id="10" name="Rounded Rectangle 9"/>
+          <p:cNvSpPr/>
+          <p:nvPr/>
+        </p:nvSpPr>
+        <p:spPr>
+          <a:xfrm>
+            <a:off x="640080" y="3566160"/>
+            <a:ext cx="5303520" cy="1463040"/>
+          </a:xfrm>
+          <a:prstGeom prst="roundRect">
+            <a:avLst>
+              <a:gd name="adj" fmla="val 6000"/>
+            </a:avLst>
+          </a:prstGeom>
+          <a:solidFill>
+            <a:srgbClr val="141828"/>
+          </a:solidFill>
+          <a:ln w="12700">
+            <a:solidFill>
+              <a:srgbClr val="232A41"/>
+            </a:solidFill>
+          </a:ln>
+          <a:effectLst/>
+        </p:spPr>
+        <p:style>
+          <a:lnRef idx="1">
+            <a:schemeClr val="accent1"/>
+          </a:lnRef>
+          <a:fillRef idx="3">
+            <a:schemeClr val="accent1"/>
+          </a:fillRef>
+          <a:effectRef idx="2">
+            <a:schemeClr val="accent1"/>
+          </a:effectRef>
+          <a:fontRef idx="minor">
+            <a:schemeClr val="lt1"/>
+          </a:fontRef>
+        </p:style>
+        <p:txBody>
+          <a:bodyPr rtlCol="0" anchor="ctr"/>
+          <a:lstStyle/>
+          <a:p>
+            <a:pPr algn="ctr"/>
+          </a:p>
+        </p:txBody>
+      </p:sp>
+      <p:sp>
+        <p:nvSpPr>
+          <p:cNvPr id="11" name="TextBox 10"/>
+          <p:cNvSpPr txBox="1"/>
+          <p:nvPr/>
+        </p:nvSpPr>
+        <p:spPr>
+          <a:xfrm>
+            <a:off x="841248" y="3712464"/>
+            <a:ext cx="4901184" cy="1188720"/>
+          </a:xfrm>
+          <a:prstGeom prst="rect">
+            <a:avLst/>
+          </a:prstGeom>
+          <a:noFill/>
+        </p:spPr>
+        <p:txBody>
+          <a:bodyPr wrap="square" anchor="t" lIns="0" rIns="0" tIns="0" bIns="0">
+            <a:spAutoFit/>
+          </a:bodyPr>
+          <a:lstStyle/>
+          <a:p>
+            <a:r>
+              <a:rPr sz="1200" b="1" i="0">
+                <a:solidFill>
+                  <a:srgbClr val="4C9FFE"/>
+                </a:solidFill>
+                <a:latin typeface="Segoe UI"/>
+              </a:rPr>
+              <a:t>COMMUNITY</a:t>
+            </a:r>
+          </a:p>
+          <a:p>
+            <a:pPr>
+              <a:spcBef>
+                <a:spcPts val="600"/>
+              </a:spcBef>
+            </a:pPr>
+            <a:r>
+              <a:rPr sz="1300" b="0" i="0">
+                <a:solidFill>
+                  <a:srgbClr val="9AA2C0"/>
+                </a:solidFill>
+                <a:latin typeface="Segoe UI"/>
+              </a:rPr>
+              <a:t>Temporal Slack · community forum · local meetups</a:t>
+            </a:r>
+          </a:p>
+        </p:txBody>
+      </p:sp>
+      <p:sp>
+        <p:nvSpPr>
+          <p:cNvPr id="12" name="Rounded Rectangle 11"/>
+          <p:cNvSpPr/>
+          <p:nvPr/>
+        </p:nvSpPr>
+        <p:spPr>
+          <a:xfrm>
+            <a:off x="6217920" y="3566160"/>
+            <a:ext cx="5303520" cy="1463040"/>
+          </a:xfrm>
+          <a:prstGeom prst="roundRect">
+            <a:avLst>
+              <a:gd name="adj" fmla="val 6000"/>
+            </a:avLst>
+          </a:prstGeom>
+          <a:solidFill>
+            <a:srgbClr val="141828"/>
+          </a:solidFill>
+          <a:ln w="12700">
+            <a:solidFill>
+              <a:srgbClr val="232A41"/>
+            </a:solidFill>
+          </a:ln>
+          <a:effectLst/>
+        </p:spPr>
+        <p:style>
+          <a:lnRef idx="1">
+            <a:schemeClr val="accent1"/>
+          </a:lnRef>
+          <a:fillRef idx="3">
+            <a:schemeClr val="accent1"/>
+          </a:fillRef>
+          <a:effectRef idx="2">
+            <a:schemeClr val="accent1"/>
+          </a:effectRef>
+          <a:fontRef idx="minor">
+            <a:schemeClr val="lt1"/>
+          </a:fontRef>
+        </p:style>
+        <p:txBody>
+          <a:bodyPr rtlCol="0" anchor="ctr"/>
+          <a:lstStyle/>
+          <a:p>
+            <a:pPr algn="ctr"/>
+          </a:p>
+        </p:txBody>
+      </p:sp>
+      <p:sp>
+        <p:nvSpPr>
+          <p:cNvPr id="13" name="TextBox 12"/>
+          <p:cNvSpPr txBox="1"/>
+          <p:nvPr/>
+        </p:nvSpPr>
+        <p:spPr>
+          <a:xfrm>
+            <a:off x="6419088" y="3712464"/>
+            <a:ext cx="4901184" cy="1188720"/>
+          </a:xfrm>
+          <a:prstGeom prst="rect">
+            <a:avLst/>
+          </a:prstGeom>
+          <a:noFill/>
+        </p:spPr>
+        <p:txBody>
+          <a:bodyPr wrap="square" anchor="t" lIns="0" rIns="0" tIns="0" bIns="0">
+            <a:spAutoFit/>
+          </a:bodyPr>
+          <a:lstStyle/>
+          <a:p>
+            <a:r>
+              <a:rPr sz="1200" b="1" i="0">
+                <a:solidFill>
+                  <a:srgbClr val="4C9FFE"/>
+                </a:solidFill>
+                <a:latin typeface="Segoe UI"/>
+              </a:rPr>
+              <a:t>THE PROMPT TEMPLATE</a:t>
+            </a:r>
+          </a:p>
+          <a:p>
+            <a:pPr>
+              <a:spcBef>
+                <a:spcPts val="600"/>
+              </a:spcBef>
+            </a:pPr>
+            <a:r>
+              <a:rPr sz="1300" b="0" i="0">
+                <a:solidFill>
+                  <a:srgbClr val="9AA2C0"/>
+                </a:solidFill>
+                <a:latin typeface="Segoe UI"/>
+              </a:rPr>
+              <a:t>Previous slide — steal it, adapt it, use it on your own use case</a:t>
+            </a:r>
           </a:p>
         </p:txBody>
       </p:sp>
@@ -15579,8 +15924,8 @@
         </p:nvSpPr>
         <p:spPr>
           <a:xfrm>
-            <a:off x="822960" y="2194560"/>
-            <a:ext cx="3657600" cy="1463040"/>
+            <a:off x="640080" y="2103120"/>
+            <a:ext cx="10515600" cy="365760"/>
           </a:xfrm>
           <a:prstGeom prst="rect">
             <a:avLst/>
@@ -15593,14 +15938,19 @@
           </a:bodyPr>
           <a:lstStyle/>
           <a:p>
-            <a:r>
-              <a:rPr sz="7200" b="1" i="0">
-                <a:solidFill>
-                  <a:srgbClr val="7C5CFF"/>
-                </a:solidFill>
-                <a:latin typeface="Consolas"/>
-              </a:rPr>
-              <a:t>+</a:t>
+            <a:pPr>
+              <a:defRPr>
+                <a:latin typeface="Segoe UI"/>
+              </a:defRPr>
+            </a:pPr>
+            <a:r>
+              <a:rPr sz="1300" b="1" i="0">
+                <a:solidFill>
+                  <a:srgbClr val="4C9FFE"/>
+                </a:solidFill>
+                <a:latin typeface="Segoe UI"/>
+              </a:rPr>
+              <a:t>TEMPORAL · ENGINEERING TALK</a:t>
             </a:r>
           </a:p>
         </p:txBody>
@@ -15613,8 +15963,8 @@
         </p:nvSpPr>
         <p:spPr>
           <a:xfrm>
-            <a:off x="822960" y="3383280"/>
-            <a:ext cx="8686800" cy="1005840"/>
+            <a:off x="640080" y="2468880"/>
+            <a:ext cx="9144000" cy="1463040"/>
           </a:xfrm>
           <a:prstGeom prst="rect">
             <a:avLst/>
@@ -15628,13 +15978,13 @@
           <a:lstStyle/>
           <a:p>
             <a:r>
-              <a:rPr sz="4000" b="1" i="0">
+              <a:rPr sz="5400" b="1" i="0">
                 <a:solidFill>
                   <a:srgbClr val="E6E9F5"/>
                 </a:solidFill>
                 <a:latin typeface="Segoe UI"/>
               </a:rPr>
-              <a:t>Backup Slides</a:t>
+              <a:t>Thank you.</a:t>
             </a:r>
           </a:p>
         </p:txBody>
@@ -15647,8 +15997,8 @@
         </p:nvSpPr>
         <p:spPr>
           <a:xfrm>
-            <a:off x="822960" y="4206240"/>
-            <a:ext cx="6858000" cy="914400"/>
+            <a:off x="640080" y="3931920"/>
+            <a:ext cx="7772400" cy="1097280"/>
           </a:xfrm>
           <a:prstGeom prst="rect">
             <a:avLst/>
@@ -15662,14 +16012,58 @@
           <a:lstStyle/>
           <a:p>
             <a:r>
-              <a:rPr sz="1700" b="0" i="0">
+              <a:rPr sz="2000" b="0" i="0">
                 <a:solidFill>
                   <a:srgbClr val="9AA2C0"/>
                 </a:solidFill>
                 <a:latin typeface="Segoe UI"/>
               </a:rPr>
-              <a:t>Full prompt text and a code map, for anyone who wants the receipts.</a:t>
-            </a:r>
+              <a:t>Questions, war stories, and “would this work for my use case” conversations welcome.</a:t>
+            </a:r>
+          </a:p>
+        </p:txBody>
+      </p:sp>
+      <p:sp>
+        <p:nvSpPr>
+          <p:cNvPr id="6" name="Rectangle 5"/>
+          <p:cNvSpPr/>
+          <p:nvPr/>
+        </p:nvSpPr>
+        <p:spPr>
+          <a:xfrm>
+            <a:off x="640080" y="5212080"/>
+            <a:ext cx="10881360" cy="12700"/>
+          </a:xfrm>
+          <a:prstGeom prst="rect">
+            <a:avLst/>
+          </a:prstGeom>
+          <a:solidFill>
+            <a:srgbClr val="232A41"/>
+          </a:solidFill>
+          <a:ln>
+            <a:noFill/>
+          </a:ln>
+          <a:effectLst/>
+        </p:spPr>
+        <p:style>
+          <a:lnRef idx="1">
+            <a:schemeClr val="accent1"/>
+          </a:lnRef>
+          <a:fillRef idx="3">
+            <a:schemeClr val="accent1"/>
+          </a:fillRef>
+          <a:effectRef idx="2">
+            <a:schemeClr val="accent1"/>
+          </a:effectRef>
+          <a:fontRef idx="minor">
+            <a:schemeClr val="lt1"/>
+          </a:fontRef>
+        </p:style>
+        <p:txBody>
+          <a:bodyPr rtlCol="0" anchor="ctr"/>
+          <a:lstStyle/>
+          <a:p>
+            <a:pPr algn="ctr"/>
           </a:p>
         </p:txBody>
       </p:sp>
@@ -15743,8 +16137,8 @@
         </p:nvSpPr>
         <p:spPr>
           <a:xfrm>
-            <a:off x="640080" y="502920"/>
-            <a:ext cx="10515600" cy="365760"/>
+            <a:off x="822960" y="2194560"/>
+            <a:ext cx="3657600" cy="1463040"/>
           </a:xfrm>
           <a:prstGeom prst="rect">
             <a:avLst/>
@@ -15757,19 +16151,14 @@
           </a:bodyPr>
           <a:lstStyle/>
           <a:p>
-            <a:pPr>
-              <a:defRPr>
-                <a:latin typeface="Segoe UI"/>
-              </a:defRPr>
-            </a:pPr>
-            <a:r>
-              <a:rPr sz="1300" b="1" i="0">
-                <a:solidFill>
-                  <a:srgbClr val="4C9FFE"/>
-                </a:solidFill>
-                <a:latin typeface="Segoe UI"/>
-              </a:rPr>
-              <a:t>APPENDIX A</a:t>
+            <a:r>
+              <a:rPr sz="7200" b="1" i="0">
+                <a:solidFill>
+                  <a:srgbClr val="7C5CFF"/>
+                </a:solidFill>
+                <a:latin typeface="Consolas"/>
+              </a:rPr>
+              <a:t>+</a:t>
             </a:r>
           </a:p>
         </p:txBody>
@@ -15782,8 +16171,8 @@
         </p:nvSpPr>
         <p:spPr>
           <a:xfrm>
-            <a:off x="640080" y="822960"/>
-            <a:ext cx="10881360" cy="1188720"/>
+            <a:off x="822960" y="3383280"/>
+            <a:ext cx="8686800" cy="1005840"/>
           </a:xfrm>
           <a:prstGeom prst="rect">
             <a:avLst/>
@@ -15797,13 +16186,13 @@
           <a:lstStyle/>
           <a:p>
             <a:r>
-              <a:rPr sz="3000" b="1" i="0">
+              <a:rPr sz="4000" b="1" i="0">
                 <a:solidFill>
                   <a:srgbClr val="E6E9F5"/>
                 </a:solidFill>
                 <a:latin typeface="Segoe UI"/>
               </a:rPr>
-              <a:t>The improved prompt, in full</a:t>
+              <a:t>Backup Slides</a:t>
             </a:r>
           </a:p>
         </p:txBody>
@@ -15816,8 +16205,8 @@
         </p:nvSpPr>
         <p:spPr>
           <a:xfrm>
-            <a:off x="640080" y="6446520"/>
-            <a:ext cx="5486400" cy="320040"/>
+            <a:off x="822960" y="4206240"/>
+            <a:ext cx="6858000" cy="914400"/>
           </a:xfrm>
           <a:prstGeom prst="rect">
             <a:avLst/>
@@ -15831,180 +16220,13 @@
           <a:lstStyle/>
           <a:p>
             <a:r>
-              <a:rPr sz="1000" b="0" i="0">
+              <a:rPr sz="1700" b="0" i="0">
                 <a:solidFill>
                   <a:srgbClr val="9AA2C0"/>
                 </a:solidFill>
                 <a:latin typeface="Segoe UI"/>
               </a:rPr>
-              <a:t>◈ Temporal · Lifting the Veil</a:t>
-            </a:r>
-          </a:p>
-        </p:txBody>
-      </p:sp>
-      <p:sp>
-        <p:nvSpPr>
-          <p:cNvPr id="6" name="Rounded Rectangle 5"/>
-          <p:cNvSpPr/>
-          <p:nvPr/>
-        </p:nvSpPr>
-        <p:spPr>
-          <a:xfrm>
-            <a:off x="640080" y="1828800"/>
-            <a:ext cx="10881360" cy="2377440"/>
-          </a:xfrm>
-          <a:prstGeom prst="roundRect">
-            <a:avLst>
-              <a:gd name="adj" fmla="val 6000"/>
-            </a:avLst>
-          </a:prstGeom>
-          <a:solidFill>
-            <a:srgbClr val="0D1020"/>
-          </a:solidFill>
-          <a:ln w="12700">
-            <a:solidFill>
-              <a:srgbClr val="232A41"/>
-            </a:solidFill>
-          </a:ln>
-          <a:effectLst/>
-        </p:spPr>
-        <p:style>
-          <a:lnRef idx="1">
-            <a:schemeClr val="accent1"/>
-          </a:lnRef>
-          <a:fillRef idx="3">
-            <a:schemeClr val="accent1"/>
-          </a:fillRef>
-          <a:effectRef idx="2">
-            <a:schemeClr val="accent1"/>
-          </a:effectRef>
-          <a:fontRef idx="minor">
-            <a:schemeClr val="lt1"/>
-          </a:fontRef>
-        </p:style>
-        <p:txBody>
-          <a:bodyPr rtlCol="0" anchor="ctr"/>
-          <a:lstStyle/>
-          <a:p>
-            <a:pPr algn="ctr"/>
-          </a:p>
-        </p:txBody>
-      </p:sp>
-      <p:sp>
-        <p:nvSpPr>
-          <p:cNvPr id="7" name="Rounded Rectangle 6"/>
-          <p:cNvSpPr/>
-          <p:nvPr/>
-        </p:nvSpPr>
-        <p:spPr>
-          <a:xfrm>
-            <a:off x="640080" y="1828800"/>
-            <a:ext cx="10881360" cy="365760"/>
-          </a:xfrm>
-          <a:prstGeom prst="roundRect">
-            <a:avLst/>
-          </a:prstGeom>
-          <a:solidFill>
-            <a:srgbClr val="151934"/>
-          </a:solidFill>
-          <a:ln w="12700">
-            <a:solidFill>
-              <a:srgbClr val="232A41"/>
-            </a:solidFill>
-          </a:ln>
-          <a:effectLst/>
-        </p:spPr>
-        <p:style>
-          <a:lnRef idx="1">
-            <a:schemeClr val="accent1"/>
-          </a:lnRef>
-          <a:fillRef idx="3">
-            <a:schemeClr val="accent1"/>
-          </a:fillRef>
-          <a:effectRef idx="2">
-            <a:schemeClr val="accent1"/>
-          </a:effectRef>
-          <a:fontRef idx="minor">
-            <a:schemeClr val="lt1"/>
-          </a:fontRef>
-        </p:style>
-        <p:txBody>
-          <a:bodyPr rtlCol="0" anchor="ctr"/>
-          <a:lstStyle/>
-          <a:p>
-            <a:pPr algn="ctr"/>
-          </a:p>
-        </p:txBody>
-      </p:sp>
-      <p:sp>
-        <p:nvSpPr>
-          <p:cNvPr id="8" name="TextBox 7"/>
-          <p:cNvSpPr txBox="1"/>
-          <p:nvPr/>
-        </p:nvSpPr>
-        <p:spPr>
-          <a:xfrm>
-            <a:off x="822960" y="1883664"/>
-            <a:ext cx="10515600" cy="274320"/>
-          </a:xfrm>
-          <a:prstGeom prst="rect">
-            <a:avLst/>
-          </a:prstGeom>
-          <a:noFill/>
-        </p:spPr>
-        <p:txBody>
-          <a:bodyPr wrap="square" anchor="t" lIns="0" rIns="0" tIns="0" bIns="0">
-            <a:spAutoFit/>
-          </a:bodyPr>
-          <a:lstStyle/>
-          <a:p>
-            <a:r>
-              <a:rPr sz="1100" b="0" i="0">
-                <a:solidFill>
-                  <a:srgbClr val="9AA2C0"/>
-                </a:solidFill>
-                <a:latin typeface="Consolas"/>
-              </a:rPr>
-              <a:t>●  ●  ●    chat — refined spec (1/2)</a:t>
-            </a:r>
-          </a:p>
-        </p:txBody>
-      </p:sp>
-      <p:sp>
-        <p:nvSpPr>
-          <p:cNvPr id="9" name="TextBox 8"/>
-          <p:cNvSpPr txBox="1"/>
-          <p:nvPr/>
-        </p:nvSpPr>
-        <p:spPr>
-          <a:xfrm>
-            <a:off x="868680" y="2331720"/>
-            <a:ext cx="10424160" cy="1691640"/>
-          </a:xfrm>
-          <a:prstGeom prst="rect">
-            <a:avLst/>
-          </a:prstGeom>
-          <a:noFill/>
-        </p:spPr>
-        <p:txBody>
-          <a:bodyPr wrap="square" anchor="t" lIns="0" rIns="0" tIns="0" bIns="0">
-            <a:spAutoFit/>
-          </a:bodyPr>
-          <a:lstStyle/>
-          <a:p>
-            <a:pPr>
-              <a:lnSpc>
-                <a:spcPct val="130000"/>
-              </a:lnSpc>
-            </a:pPr>
-            <a:r>
-              <a:rPr sz="1300" b="0" i="0">
-                <a:solidFill>
-                  <a:srgbClr val="D6DCF5"/>
-                </a:solidFill>
-                <a:latin typeface="Consolas"/>
-              </a:rPr>
-              <a:t>I want to explore Temporal's capabilities by building a complete demonstration application for an insurance claim process. Create a working monorepo using: Temporal TypeScript SDK, a local Temporal development server, NestJS for the backend/API and Temporal worker, React with TypeScript for the UI, Docker Compose where useful. Do not use a database. Temporal must be the source of truth for workflow state and progress. Browser localStorage may be used to preserve UI preferences and recently viewed workflow IDs across refreshes, but it must not be treated as the authoritative workflow state.</a:t>
+              <a:t>Full prompt text and a code map, for anyone who wants the receipts.</a:t>
             </a:r>
           </a:p>
         </p:txBody>
@@ -16105,7 +16327,7 @@
                 </a:solidFill>
                 <a:latin typeface="Segoe UI"/>
               </a:rPr>
-              <a:t>APPENDIX A (CONTINUED)</a:t>
+              <a:t>APPENDIX A</a:t>
             </a:r>
           </a:p>
         </p:txBody>
@@ -16139,7 +16361,7 @@
                 </a:solidFill>
                 <a:latin typeface="Segoe UI"/>
               </a:rPr>
-              <a:t>The improved prompt — capability list</a:t>
+              <a:t>The improved prompt, in full</a:t>
             </a:r>
           </a:p>
         </p:txBody>
@@ -16301,7 +16523,7 @@
                 </a:solidFill>
                 <a:latin typeface="Consolas"/>
               </a:rPr>
-              <a:t>●  ●  ●    chat — refined spec (2/2)</a:t>
+              <a:t>●  ●  ●    chat — refined spec (1/2)</a:t>
             </a:r>
           </a:p>
         </p:txBody>
@@ -16340,7 +16562,7 @@
                 </a:solidFill>
                 <a:latin typeface="Consolas"/>
               </a:rPr>
-              <a:t>Activities with configurable retry policies · at least one timer or durable sleep · at least one child workflow · at least one UI-driven signal where the workflow pauses for human input · workflow queries that expose current state and progress · cancellation handling · activity and workflow failure handling · a way to retry or recover from a simulated failure · meaningful workflow IDs and search attributes · workflow history remaining valid across worker restarts. The human-review step should wait indefinitely for an adjuster to approve, deny, or request more information.</a:t>
+              <a:t>I want to explore Temporal's capabilities by building a complete demonstration application for an insurance claim process. Create a working monorepo using: Temporal TypeScript SDK, a local Temporal development server, NestJS for the backend/API and Temporal worker, React with TypeScript for the UI, Docker Compose where useful. Do not use a database. Temporal must be the source of truth for workflow state and progress. Browser localStorage may be used to preserve UI preferences and recently viewed workflow IDs across refreshes, but it must not be treated as the authoritative workflow state.</a:t>
             </a:r>
           </a:p>
         </p:txBody>
@@ -16441,6 +16663,342 @@
                 </a:solidFill>
                 <a:latin typeface="Segoe UI"/>
               </a:rPr>
+              <a:t>APPENDIX A (CONTINUED)</a:t>
+            </a:r>
+          </a:p>
+        </p:txBody>
+      </p:sp>
+      <p:sp>
+        <p:nvSpPr>
+          <p:cNvPr id="4" name="TextBox 3"/>
+          <p:cNvSpPr txBox="1"/>
+          <p:nvPr/>
+        </p:nvSpPr>
+        <p:spPr>
+          <a:xfrm>
+            <a:off x="640080" y="822960"/>
+            <a:ext cx="10881360" cy="1188720"/>
+          </a:xfrm>
+          <a:prstGeom prst="rect">
+            <a:avLst/>
+          </a:prstGeom>
+          <a:noFill/>
+        </p:spPr>
+        <p:txBody>
+          <a:bodyPr wrap="square" anchor="t" lIns="0" rIns="0" tIns="0" bIns="0">
+            <a:spAutoFit/>
+          </a:bodyPr>
+          <a:lstStyle/>
+          <a:p>
+            <a:r>
+              <a:rPr sz="3000" b="1" i="0">
+                <a:solidFill>
+                  <a:srgbClr val="E6E9F5"/>
+                </a:solidFill>
+                <a:latin typeface="Segoe UI"/>
+              </a:rPr>
+              <a:t>The improved prompt — capability list</a:t>
+            </a:r>
+          </a:p>
+        </p:txBody>
+      </p:sp>
+      <p:sp>
+        <p:nvSpPr>
+          <p:cNvPr id="5" name="TextBox 4"/>
+          <p:cNvSpPr txBox="1"/>
+          <p:nvPr/>
+        </p:nvSpPr>
+        <p:spPr>
+          <a:xfrm>
+            <a:off x="640080" y="6446520"/>
+            <a:ext cx="5486400" cy="320040"/>
+          </a:xfrm>
+          <a:prstGeom prst="rect">
+            <a:avLst/>
+          </a:prstGeom>
+          <a:noFill/>
+        </p:spPr>
+        <p:txBody>
+          <a:bodyPr wrap="square" anchor="t" lIns="0" rIns="0" tIns="0" bIns="0">
+            <a:spAutoFit/>
+          </a:bodyPr>
+          <a:lstStyle/>
+          <a:p>
+            <a:r>
+              <a:rPr sz="1000" b="0" i="0">
+                <a:solidFill>
+                  <a:srgbClr val="9AA2C0"/>
+                </a:solidFill>
+                <a:latin typeface="Segoe UI"/>
+              </a:rPr>
+              <a:t>◈ Temporal · Lifting the Veil</a:t>
+            </a:r>
+          </a:p>
+        </p:txBody>
+      </p:sp>
+      <p:sp>
+        <p:nvSpPr>
+          <p:cNvPr id="6" name="Rounded Rectangle 5"/>
+          <p:cNvSpPr/>
+          <p:nvPr/>
+        </p:nvSpPr>
+        <p:spPr>
+          <a:xfrm>
+            <a:off x="640080" y="1828800"/>
+            <a:ext cx="10881360" cy="2377440"/>
+          </a:xfrm>
+          <a:prstGeom prst="roundRect">
+            <a:avLst>
+              <a:gd name="adj" fmla="val 6000"/>
+            </a:avLst>
+          </a:prstGeom>
+          <a:solidFill>
+            <a:srgbClr val="0D1020"/>
+          </a:solidFill>
+          <a:ln w="12700">
+            <a:solidFill>
+              <a:srgbClr val="232A41"/>
+            </a:solidFill>
+          </a:ln>
+          <a:effectLst/>
+        </p:spPr>
+        <p:style>
+          <a:lnRef idx="1">
+            <a:schemeClr val="accent1"/>
+          </a:lnRef>
+          <a:fillRef idx="3">
+            <a:schemeClr val="accent1"/>
+          </a:fillRef>
+          <a:effectRef idx="2">
+            <a:schemeClr val="accent1"/>
+          </a:effectRef>
+          <a:fontRef idx="minor">
+            <a:schemeClr val="lt1"/>
+          </a:fontRef>
+        </p:style>
+        <p:txBody>
+          <a:bodyPr rtlCol="0" anchor="ctr"/>
+          <a:lstStyle/>
+          <a:p>
+            <a:pPr algn="ctr"/>
+          </a:p>
+        </p:txBody>
+      </p:sp>
+      <p:sp>
+        <p:nvSpPr>
+          <p:cNvPr id="7" name="Rounded Rectangle 6"/>
+          <p:cNvSpPr/>
+          <p:nvPr/>
+        </p:nvSpPr>
+        <p:spPr>
+          <a:xfrm>
+            <a:off x="640080" y="1828800"/>
+            <a:ext cx="10881360" cy="365760"/>
+          </a:xfrm>
+          <a:prstGeom prst="roundRect">
+            <a:avLst/>
+          </a:prstGeom>
+          <a:solidFill>
+            <a:srgbClr val="151934"/>
+          </a:solidFill>
+          <a:ln w="12700">
+            <a:solidFill>
+              <a:srgbClr val="232A41"/>
+            </a:solidFill>
+          </a:ln>
+          <a:effectLst/>
+        </p:spPr>
+        <p:style>
+          <a:lnRef idx="1">
+            <a:schemeClr val="accent1"/>
+          </a:lnRef>
+          <a:fillRef idx="3">
+            <a:schemeClr val="accent1"/>
+          </a:fillRef>
+          <a:effectRef idx="2">
+            <a:schemeClr val="accent1"/>
+          </a:effectRef>
+          <a:fontRef idx="minor">
+            <a:schemeClr val="lt1"/>
+          </a:fontRef>
+        </p:style>
+        <p:txBody>
+          <a:bodyPr rtlCol="0" anchor="ctr"/>
+          <a:lstStyle/>
+          <a:p>
+            <a:pPr algn="ctr"/>
+          </a:p>
+        </p:txBody>
+      </p:sp>
+      <p:sp>
+        <p:nvSpPr>
+          <p:cNvPr id="8" name="TextBox 7"/>
+          <p:cNvSpPr txBox="1"/>
+          <p:nvPr/>
+        </p:nvSpPr>
+        <p:spPr>
+          <a:xfrm>
+            <a:off x="822960" y="1883664"/>
+            <a:ext cx="10515600" cy="274320"/>
+          </a:xfrm>
+          <a:prstGeom prst="rect">
+            <a:avLst/>
+          </a:prstGeom>
+          <a:noFill/>
+        </p:spPr>
+        <p:txBody>
+          <a:bodyPr wrap="square" anchor="t" lIns="0" rIns="0" tIns="0" bIns="0">
+            <a:spAutoFit/>
+          </a:bodyPr>
+          <a:lstStyle/>
+          <a:p>
+            <a:r>
+              <a:rPr sz="1100" b="0" i="0">
+                <a:solidFill>
+                  <a:srgbClr val="9AA2C0"/>
+                </a:solidFill>
+                <a:latin typeface="Consolas"/>
+              </a:rPr>
+              <a:t>●  ●  ●    chat — refined spec (2/2)</a:t>
+            </a:r>
+          </a:p>
+        </p:txBody>
+      </p:sp>
+      <p:sp>
+        <p:nvSpPr>
+          <p:cNvPr id="9" name="TextBox 8"/>
+          <p:cNvSpPr txBox="1"/>
+          <p:nvPr/>
+        </p:nvSpPr>
+        <p:spPr>
+          <a:xfrm>
+            <a:off x="868680" y="2331720"/>
+            <a:ext cx="10424160" cy="1691640"/>
+          </a:xfrm>
+          <a:prstGeom prst="rect">
+            <a:avLst/>
+          </a:prstGeom>
+          <a:noFill/>
+        </p:spPr>
+        <p:txBody>
+          <a:bodyPr wrap="square" anchor="t" lIns="0" rIns="0" tIns="0" bIns="0">
+            <a:spAutoFit/>
+          </a:bodyPr>
+          <a:lstStyle/>
+          <a:p>
+            <a:pPr>
+              <a:lnSpc>
+                <a:spcPct val="130000"/>
+              </a:lnSpc>
+            </a:pPr>
+            <a:r>
+              <a:rPr sz="1300" b="0" i="0">
+                <a:solidFill>
+                  <a:srgbClr val="D6DCF5"/>
+                </a:solidFill>
+                <a:latin typeface="Consolas"/>
+              </a:rPr>
+              <a:t>Activities with configurable retry policies · at least one timer or durable sleep · at least one child workflow · at least one UI-driven signal where the workflow pauses for human input · workflow queries that expose current state and progress · cancellation handling · activity and workflow failure handling · a way to retry or recover from a simulated failure · meaningful workflow IDs and search attributes · workflow history remaining valid across worker restarts. The human-review step should wait indefinitely for an adjuster to approve, deny, or request more information.</a:t>
+            </a:r>
+          </a:p>
+        </p:txBody>
+      </p:sp>
+    </p:spTree>
+  </p:cSld>
+  <p:clrMapOvr>
+    <a:masterClrMapping/>
+  </p:clrMapOvr>
+</p:sld>
+</file>
+
+<file path=ppt/slides/slide35.xml><?xml version="1.0" encoding="utf-8"?>
+<p:sld xmlns:a="http://schemas.openxmlformats.org/drawingml/2006/main" xmlns:p="http://schemas.openxmlformats.org/presentationml/2006/main" xmlns:r="http://schemas.openxmlformats.org/officeDocument/2006/relationships">
+  <p:cSld>
+    <p:spTree>
+      <p:nvGrpSpPr>
+        <p:cNvPr id="1" name=""/>
+        <p:cNvGrpSpPr/>
+        <p:nvPr/>
+      </p:nvGrpSpPr>
+      <p:grpSpPr/>
+      <p:sp>
+        <p:nvSpPr>
+          <p:cNvPr id="2" name="Rectangle 1"/>
+          <p:cNvSpPr/>
+          <p:nvPr/>
+        </p:nvSpPr>
+        <p:spPr>
+          <a:xfrm>
+            <a:off x="0" y="0"/>
+            <a:ext cx="12191695" cy="6858000"/>
+          </a:xfrm>
+          <a:prstGeom prst="rect">
+            <a:avLst/>
+          </a:prstGeom>
+          <a:solidFill>
+            <a:srgbClr val="0A0C16"/>
+          </a:solidFill>
+          <a:ln>
+            <a:noFill/>
+          </a:ln>
+          <a:effectLst/>
+        </p:spPr>
+        <p:style>
+          <a:lnRef idx="1">
+            <a:schemeClr val="accent1"/>
+          </a:lnRef>
+          <a:fillRef idx="3">
+            <a:schemeClr val="accent1"/>
+          </a:fillRef>
+          <a:effectRef idx="2">
+            <a:schemeClr val="accent1"/>
+          </a:effectRef>
+          <a:fontRef idx="minor">
+            <a:schemeClr val="lt1"/>
+          </a:fontRef>
+        </p:style>
+        <p:txBody>
+          <a:bodyPr rtlCol="0" anchor="ctr"/>
+          <a:lstStyle/>
+          <a:p>
+            <a:pPr algn="ctr"/>
+          </a:p>
+        </p:txBody>
+      </p:sp>
+      <p:sp>
+        <p:nvSpPr>
+          <p:cNvPr id="3" name="TextBox 2"/>
+          <p:cNvSpPr txBox="1"/>
+          <p:nvPr/>
+        </p:nvSpPr>
+        <p:spPr>
+          <a:xfrm>
+            <a:off x="640080" y="502920"/>
+            <a:ext cx="10515600" cy="365760"/>
+          </a:xfrm>
+          <a:prstGeom prst="rect">
+            <a:avLst/>
+          </a:prstGeom>
+          <a:noFill/>
+        </p:spPr>
+        <p:txBody>
+          <a:bodyPr wrap="square" anchor="t" lIns="0" rIns="0" tIns="0" bIns="0">
+            <a:spAutoFit/>
+          </a:bodyPr>
+          <a:lstStyle/>
+          <a:p>
+            <a:pPr>
+              <a:defRPr>
+                <a:latin typeface="Segoe UI"/>
+              </a:defRPr>
+            </a:pPr>
+            <a:r>
+              <a:rPr sz="1300" b="1" i="0">
+                <a:solidFill>
+                  <a:srgbClr val="4C9FFE"/>
+                </a:solidFill>
+                <a:latin typeface="Segoe UI"/>
+              </a:rPr>
               <a:t>APPENDIX B</a:t>
             </a:r>
           </a:p>
@@ -16706,7 +17264,7 @@
                 </a:solidFill>
                 <a:latin typeface="Segoe UI"/>
               </a:rPr>
-              <a:t>packages/worker/src/activities/*.ts</a:t>
+              <a:t>packages/worker/src/activities/{claim,fraud}/*.ts</a:t>
             </a:r>
           </a:p>
         </p:txBody>
@@ -17169,7 +17727,7 @@
                 </a:solidFill>
                 <a:latin typeface="Segoe UI"/>
               </a:rPr>
-              <a:t>Live demo — 6 short cuts, real failures, real recovery</a:t>
+              <a:t>Live demo — real failures, real recovery</a:t>
             </a:r>
           </a:p>
           <a:p>
@@ -18371,7 +18929,7 @@
                 </a:solidFill>
                 <a:latin typeface="Segoe UI"/>
               </a:rPr>
-              <a:t>Because “what should a good Temporal spec contain” is itself a question worth delegating.</a:t>
+              <a:t>Because “what should a good Temporal spec contain” is itself a question worth delegating — the model already knows the shape of retries, signals, queries, sagas, especially with a Temporal skill loaded for grounding.</a:t>
             </a:r>
           </a:p>
         </p:txBody>
@@ -18469,7 +19027,7 @@
                 </a:solidFill>
                 <a:latin typeface="Segoe UI"/>
               </a:rPr>
-              <a:t>“Would this be good for a coding-agent prompt?” — then iterated until the answer covered architecture, failure modes, and UI/UX explicitly.</a:t>
+              <a:t>“Would this be good for a coding-agent prompt?” — the answer covered architecture, failure modes, and UI/UX explicitly.</a:t>
             </a:r>
           </a:p>
         </p:txBody>

--- a/presentation/Lifting-the-Veil-Temporal-Talk.pptx
+++ b/presentation/Lifting-the-Veil-Temporal-Talk.pptx
@@ -816,7 +816,7 @@
           <a:lstStyle/>
           <a:p>
             <a:r>
-              <a:t>This is the real Timeline tab from this app's Temporal Web UI, not a mockup. The code is intentionally stripped down to four sequential activity calls — the real claim.workflow.ts adds retries, a child workflow, timers and signals, and all of that shows up on this same timeline with zero extra instrumentation code.</a:t>
+              <a:t>This is the real Timeline tab for this app's fraud-check child workflow, not a mockup. The code on the left is the entire body — just a proxyActivities call and three activity invocations, two of them running in parallel. That parallelism is exactly what you see as two overlapping bars on the right, with zero extra instrumentation code.</a:t>
             </a:r>
           </a:p>
         </p:txBody>
@@ -8570,7 +8570,7 @@
                 </a:solidFill>
                 <a:latin typeface="Segoe UI"/>
               </a:rPr>
-              <a:t>Four activity calls. One real execution timeline.</a:t>
+              <a:t>Three activity calls. One real execution timeline.</a:t>
             </a:r>
           </a:p>
         </p:txBody>
@@ -8732,7 +8732,7 @@
                 </a:solidFill>
                 <a:latin typeface="Consolas"/>
               </a:rPr>
-              <a:t>●  ●  ●    claim.workflow.ts — simplified</a:t>
+              <a:t>●  ●  ●    fraud-check.workflow.ts — simplified</a:t>
             </a:r>
           </a:p>
         </p:txBody>
@@ -8771,13 +8771,13 @@
                 </a:solidFill>
                 <a:latin typeface="Consolas"/>
               </a:rPr>
-              <a:t>export async function claimWorkflow(input: ClaimInput) {
-  const validation = await validateClaim(input);
-  const coverage   = await verifyCoverage(input);
-  const damage     = await assessDamage(input);
-  const payment    = await processPayment(input);
-  return { validation, coverage, damage, payment };
-}</a:t>
+              <a:t>const { checkClaimHistory, checkWatchlists, scoreFraudRisk } =
+  proxyActivities&lt;typeof activities&gt;({ ...retryPolicy });
+const [history, watchlist] = await Promise.all([
+  checkClaimHistory(input),
+  checkWatchlists(input),
+]);
+const assessment = await scoreFraudRisk(input.claimId, [...history, ...watchlist]);</a:t>
             </a:r>
           </a:p>
         </p:txBody>
@@ -8912,7 +8912,7 @@
       </p:sp>
       <p:pic>
         <p:nvPicPr>
-          <p:cNvPr id="13" name="Picture 12" descr="temporal-timeline-example.png"/>
+          <p:cNvPr id="13" name="Picture 12" descr="temporal-timeline-fraud-example.png"/>
           <p:cNvPicPr>
             <a:picLocks noChangeAspect="1"/>
           </p:cNvPicPr>
@@ -8927,7 +8927,7 @@
         <p:spPr>
           <a:xfrm>
             <a:off x="6309360" y="2194560"/>
-            <a:ext cx="5120640" cy="2560320"/>
+            <a:ext cx="5120640" cy="1411765"/>
           </a:xfrm>
           <a:prstGeom prst="rect">
             <a:avLst/>

--- a/presentation/Lifting-the-Veil-Temporal-Talk.pptx
+++ b/presentation/Lifting-the-Veil-Temporal-Talk.pptx
@@ -8773,11 +8773,13 @@
               </a:rPr>
               <a:t>const { checkClaimHistory, checkWatchlists, scoreFraudRisk } =
   proxyActivities&lt;typeof activities&gt;({ ...retryPolicy });
-const [history, watchlist] = await Promise.all([
-  checkClaimHistory(input),
-  checkWatchlists(input),
-]);
-const assessment = await scoreFraudRisk(input.claimId, [...history, ...watchlist]);</a:t>
+export async function fraudCheckWorkflow(input: ClaimInput) {
+  const [history, watchlist] = await Promise.all([
+    checkClaimHistory(input),
+    checkWatchlists(input),
+  ]);
+  return await scoreFraudRisk(input.claimId, [...history, ...watchlist]);
+}</a:t>
             </a:r>
           </a:p>
         </p:txBody>

--- a/presentation/Lifting-the-Veil-Temporal-Talk.pptx
+++ b/presentation/Lifting-the-Veil-Temporal-Talk.pptx
@@ -8617,8 +8617,8 @@
         </p:nvSpPr>
         <p:spPr>
           <a:xfrm>
-            <a:off x="640080" y="1737360"/>
-            <a:ext cx="5303520" cy="3566160"/>
+            <a:off x="640080" y="1600200"/>
+            <a:ext cx="10881360" cy="2331720"/>
           </a:xfrm>
           <a:prstGeom prst="roundRect">
             <a:avLst>
@@ -8665,8 +8665,8 @@
         </p:nvSpPr>
         <p:spPr>
           <a:xfrm>
-            <a:off x="640080" y="1737360"/>
-            <a:ext cx="5303520" cy="365760"/>
+            <a:off x="640080" y="1600200"/>
+            <a:ext cx="10881360" cy="365760"/>
           </a:xfrm>
           <a:prstGeom prst="roundRect">
             <a:avLst/>
@@ -8711,8 +8711,8 @@
         </p:nvSpPr>
         <p:spPr>
           <a:xfrm>
-            <a:off x="777240" y="1792224"/>
-            <a:ext cx="5029200" cy="274320"/>
+            <a:off x="777240" y="1655064"/>
+            <a:ext cx="10607040" cy="274320"/>
           </a:xfrm>
           <a:prstGeom prst="rect">
             <a:avLst/>
@@ -8745,8 +8745,8 @@
         </p:nvSpPr>
         <p:spPr>
           <a:xfrm>
-            <a:off x="822960" y="2240280"/>
-            <a:ext cx="4937760" cy="2880360"/>
+            <a:off x="822960" y="2103120"/>
+            <a:ext cx="10515600" cy="1645920"/>
           </a:xfrm>
           <a:prstGeom prst="rect">
             <a:avLst/>
@@ -8765,20 +8765,28 @@
               </a:lnSpc>
             </a:pPr>
             <a:r>
-              <a:rPr sz="1300" b="0" i="0">
+              <a:rPr sz="1600" b="0" i="0">
                 <a:solidFill>
                   <a:srgbClr val="D6DCF5"/>
                 </a:solidFill>
                 <a:latin typeface="Consolas"/>
               </a:rPr>
-              <a:t>const { checkClaimHistory, checkWatchlists, scoreFraudRisk } =
-  proxyActivities&lt;typeof activities&gt;({ ...retryPolicy });
-export async function fraudCheckWorkflow(input: ClaimInput) {
+              <a:t>const {
+  checkClaimHistory,
+  checkWatchlists,
+  scoreFraudRisk,
+} = proxyActivities&lt;typeof activities&gt;({ ...retryPolicy });
+export async function fraudCheckWorkflow(
+  input: ClaimInput,
+) {
   const [history, watchlist] = await Promise.all([
     checkClaimHistory(input),
     checkWatchlists(input),
   ]);
-  return await scoreFraudRisk(input.claimId, [...history, ...watchlist]);
+  return await scoreFraudRisk(
+    input.claimId,
+    [...history, ...watchlist],
+  );
 }</a:t>
             </a:r>
           </a:p>
@@ -8792,8 +8800,8 @@
         </p:nvSpPr>
         <p:spPr>
           <a:xfrm>
-            <a:off x="6217920" y="1737360"/>
-            <a:ext cx="5303520" cy="3566160"/>
+            <a:off x="640080" y="4160520"/>
+            <a:ext cx="10881360" cy="2331720"/>
           </a:xfrm>
           <a:prstGeom prst="roundRect">
             <a:avLst>
@@ -8840,8 +8848,8 @@
         </p:nvSpPr>
         <p:spPr>
           <a:xfrm>
-            <a:off x="6217920" y="1737360"/>
-            <a:ext cx="5303520" cy="365760"/>
+            <a:off x="640080" y="4160520"/>
+            <a:ext cx="10881360" cy="365760"/>
           </a:xfrm>
           <a:prstGeom prst="roundRect">
             <a:avLst/>
@@ -8886,8 +8894,8 @@
         </p:nvSpPr>
         <p:spPr>
           <a:xfrm>
-            <a:off x="6355080" y="1792224"/>
-            <a:ext cx="5029200" cy="274320"/>
+            <a:off x="777240" y="4215384"/>
+            <a:ext cx="10607040" cy="274320"/>
           </a:xfrm>
           <a:prstGeom prst="rect">
             <a:avLst/>
@@ -8928,8 +8936,8 @@
         </p:blipFill>
         <p:spPr>
           <a:xfrm>
-            <a:off x="6309360" y="2194560"/>
-            <a:ext cx="5120640" cy="1411765"/>
+            <a:off x="2929955" y="4617720"/>
+            <a:ext cx="6301611" cy="1737360"/>
           </a:xfrm>
           <a:prstGeom prst="rect">
             <a:avLst/>
@@ -8944,7 +8952,7 @@
         </p:nvSpPr>
         <p:spPr>
           <a:xfrm>
-            <a:off x="640080" y="5532120"/>
+            <a:off x="640080" y="6675120"/>
             <a:ext cx="10515600" cy="1097280"/>
           </a:xfrm>
           <a:prstGeom prst="rect">

--- a/presentation/Lifting-the-Veil-Temporal-Talk.pptx
+++ b/presentation/Lifting-the-Veil-Temporal-Talk.pptx
@@ -8617,8 +8617,8 @@
         </p:nvSpPr>
         <p:spPr>
           <a:xfrm>
-            <a:off x="640080" y="1600200"/>
-            <a:ext cx="10881360" cy="2331720"/>
+            <a:off x="1979676" y="1600200"/>
+            <a:ext cx="8229600" cy="2148840"/>
           </a:xfrm>
           <a:prstGeom prst="roundRect">
             <a:avLst>
@@ -8665,8 +8665,8 @@
         </p:nvSpPr>
         <p:spPr>
           <a:xfrm>
-            <a:off x="640080" y="1600200"/>
-            <a:ext cx="10881360" cy="365760"/>
+            <a:off x="1979676" y="1600200"/>
+            <a:ext cx="8229600" cy="365760"/>
           </a:xfrm>
           <a:prstGeom prst="roundRect">
             <a:avLst/>
@@ -8711,8 +8711,8 @@
         </p:nvSpPr>
         <p:spPr>
           <a:xfrm>
-            <a:off x="777240" y="1655064"/>
-            <a:ext cx="10607040" cy="274320"/>
+            <a:off x="2116836" y="1655064"/>
+            <a:ext cx="7955280" cy="274320"/>
           </a:xfrm>
           <a:prstGeom prst="rect">
             <a:avLst/>
@@ -8745,8 +8745,8 @@
         </p:nvSpPr>
         <p:spPr>
           <a:xfrm>
-            <a:off x="822960" y="2103120"/>
-            <a:ext cx="10515600" cy="1645920"/>
+            <a:off x="2162556" y="2103120"/>
+            <a:ext cx="7863840" cy="1463040"/>
           </a:xfrm>
           <a:prstGeom prst="rect">
             <a:avLst/>
@@ -8765,7 +8765,7 @@
               </a:lnSpc>
             </a:pPr>
             <a:r>
-              <a:rPr sz="1600" b="0" i="0">
+              <a:rPr sz="1200" b="0" i="0">
                 <a:solidFill>
                   <a:srgbClr val="D6DCF5"/>
                 </a:solidFill>
@@ -8800,8 +8800,8 @@
         </p:nvSpPr>
         <p:spPr>
           <a:xfrm>
-            <a:off x="640080" y="4160520"/>
-            <a:ext cx="10881360" cy="2331720"/>
+            <a:off x="1979676" y="3931920"/>
+            <a:ext cx="8229600" cy="1965960"/>
           </a:xfrm>
           <a:prstGeom prst="roundRect">
             <a:avLst>
@@ -8848,8 +8848,8 @@
         </p:nvSpPr>
         <p:spPr>
           <a:xfrm>
-            <a:off x="640080" y="4160520"/>
-            <a:ext cx="10881360" cy="365760"/>
+            <a:off x="1979676" y="3931920"/>
+            <a:ext cx="8229600" cy="365760"/>
           </a:xfrm>
           <a:prstGeom prst="roundRect">
             <a:avLst/>
@@ -8894,8 +8894,8 @@
         </p:nvSpPr>
         <p:spPr>
           <a:xfrm>
-            <a:off x="777240" y="4215384"/>
-            <a:ext cx="10607040" cy="274320"/>
+            <a:off x="2116836" y="3986784"/>
+            <a:ext cx="7955280" cy="274320"/>
           </a:xfrm>
           <a:prstGeom prst="rect">
             <a:avLst/>
@@ -8936,8 +8936,8 @@
         </p:blipFill>
         <p:spPr>
           <a:xfrm>
-            <a:off x="2929955" y="4617720"/>
-            <a:ext cx="6301611" cy="1737360"/>
+            <a:off x="3606998" y="4389120"/>
+            <a:ext cx="4974956" cy="1371600"/>
           </a:xfrm>
           <a:prstGeom prst="rect">
             <a:avLst/>
@@ -8952,7 +8952,7 @@
         </p:nvSpPr>
         <p:spPr>
           <a:xfrm>
-            <a:off x="640080" y="6675120"/>
+            <a:off x="640080" y="6080760"/>
             <a:ext cx="10515600" cy="1097280"/>
           </a:xfrm>
           <a:prstGeom prst="rect">

--- a/presentation/Lifting-the-Veil-Temporal-Talk.pptx
+++ b/presentation/Lifting-the-Veil-Temporal-Talk.pptx
@@ -8617,8 +8617,8 @@
         </p:nvSpPr>
         <p:spPr>
           <a:xfrm>
-            <a:off x="1979676" y="1600200"/>
-            <a:ext cx="8229600" cy="2148840"/>
+            <a:off x="1979676" y="1463040"/>
+            <a:ext cx="8229600" cy="2788920"/>
           </a:xfrm>
           <a:prstGeom prst="roundRect">
             <a:avLst>
@@ -8665,7 +8665,7 @@
         </p:nvSpPr>
         <p:spPr>
           <a:xfrm>
-            <a:off x="1979676" y="1600200"/>
+            <a:off x="1979676" y="1463040"/>
             <a:ext cx="8229600" cy="365760"/>
           </a:xfrm>
           <a:prstGeom prst="roundRect">
@@ -8711,7 +8711,7 @@
         </p:nvSpPr>
         <p:spPr>
           <a:xfrm>
-            <a:off x="2116836" y="1655064"/>
+            <a:off x="2116836" y="1517904"/>
             <a:ext cx="7955280" cy="274320"/>
           </a:xfrm>
           <a:prstGeom prst="rect">
@@ -8745,8 +8745,8 @@
         </p:nvSpPr>
         <p:spPr>
           <a:xfrm>
-            <a:off x="2162556" y="2103120"/>
-            <a:ext cx="7863840" cy="1463040"/>
+            <a:off x="2162556" y="1965960"/>
+            <a:ext cx="7863840" cy="2103120"/>
           </a:xfrm>
           <a:prstGeom prst="rect">
             <a:avLst/>
@@ -8771,22 +8771,14 @@
                 </a:solidFill>
                 <a:latin typeface="Consolas"/>
               </a:rPr>
-              <a:t>const {
-  checkClaimHistory,
-  checkWatchlists,
-  scoreFraudRisk,
-} = proxyActivities&lt;typeof activities&gt;({ ...retryPolicy });
-export async function fraudCheckWorkflow(
-  input: ClaimInput,
-) {
+              <a:t>const { checkClaimHistory, checkWatchlists, scoreFraudRisk } =
+  proxyActivities&lt;typeof activities&gt;({ ...retryPolicy });
+export async function fraudCheckWorkflow(input: ClaimInput) {
   const [history, watchlist] = await Promise.all([
     checkClaimHistory(input),
     checkWatchlists(input),
   ]);
-  return await scoreFraudRisk(
-    input.claimId,
-    [...history, ...watchlist],
-  );
+  return await scoreFraudRisk(input.claimId, [...history, ...watchlist]);
 }</a:t>
             </a:r>
           </a:p>
@@ -8800,8 +8792,8 @@
         </p:nvSpPr>
         <p:spPr>
           <a:xfrm>
-            <a:off x="1979676" y="3931920"/>
-            <a:ext cx="8229600" cy="1965960"/>
+            <a:off x="1979676" y="4343400"/>
+            <a:ext cx="8229600" cy="1463040"/>
           </a:xfrm>
           <a:prstGeom prst="roundRect">
             <a:avLst>
@@ -8848,7 +8840,7 @@
         </p:nvSpPr>
         <p:spPr>
           <a:xfrm>
-            <a:off x="1979676" y="3931920"/>
+            <a:off x="1979676" y="4343400"/>
             <a:ext cx="8229600" cy="365760"/>
           </a:xfrm>
           <a:prstGeom prst="roundRect">
@@ -8894,7 +8886,7 @@
         </p:nvSpPr>
         <p:spPr>
           <a:xfrm>
-            <a:off x="2116836" y="3986784"/>
+            <a:off x="2116836" y="4398264"/>
             <a:ext cx="7955280" cy="274320"/>
           </a:xfrm>
           <a:prstGeom prst="rect">
@@ -8936,8 +8928,8 @@
         </p:blipFill>
         <p:spPr>
           <a:xfrm>
-            <a:off x="3606998" y="4389120"/>
-            <a:ext cx="4974956" cy="1371600"/>
+            <a:off x="4519073" y="4800600"/>
+            <a:ext cx="3150805" cy="868680"/>
           </a:xfrm>
           <a:prstGeom prst="rect">
             <a:avLst/>
@@ -8952,7 +8944,7 @@
         </p:nvSpPr>
         <p:spPr>
           <a:xfrm>
-            <a:off x="640080" y="6080760"/>
+            <a:off x="640080" y="5989320"/>
             <a:ext cx="10515600" cy="1097280"/>
           </a:xfrm>
           <a:prstGeom prst="rect">
